--- a/docs/handover/KIEN-TRUC-HE-THONG.pptx
+++ b/docs/handover/KIEN-TRUC-HE-THONG.pptx
@@ -3677,7 +3677,7 @@
                           <a:ea typeface="Segoe UI" pitchFamily="34" charset="-122"/>
                           <a:cs typeface="Segoe UI" pitchFamily="34" charset="-120"/>
                         </a:rPr>
-                        <a:t>Chung 1 Supabase project (cxjpgfhqchjoernfmcra) - SCN bảng thường, tvc360 bảng tvc_*</a:t>
+                        <a:t>Chung 1 Supabase project với một app nội bộ khác - tách bằng table naming + RLS</a:t>
                       </a:r>
                       <a:endParaRPr lang="en-US" sz="1050" dirty="0">
                         <a:latin typeface="Segoe UI" charset="0"/>
@@ -3745,7 +3745,7 @@
                           <a:ea typeface="Segoe UI" pitchFamily="34" charset="-122"/>
                           <a:cs typeface="Segoe UI" pitchFamily="34" charset="-120"/>
                         </a:rPr>
-                        <a:t>DB riêng mỗi sản phẩm</a:t>
+                        <a:t>DB riêng cho SCN</a:t>
                       </a:r>
                       <a:endParaRPr lang="en-US" sz="1050" dirty="0">
                         <a:latin typeface="Segoe UI" charset="0"/>
@@ -10731,7 +10731,7 @@
                           <a:ea typeface="Segoe UI" pitchFamily="34" charset="-122"/>
                           <a:cs typeface="Segoe UI" pitchFamily="34" charset="-120"/>
                         </a:rPr>
-                        <a:t>Chung Supabase project với tvc360 - nhiễu resource</a:t>
+                        <a:t>Chung Supabase project với app nội bộ khác - nhiễu resource</a:t>
                       </a:r>
                       <a:endParaRPr lang="en-US" sz="1050" dirty="0">
                         <a:latin typeface="Segoe UI" charset="0"/>
@@ -12567,7 +12567,7 @@
                           <a:ea typeface="Segoe UI" pitchFamily="34" charset="-122"/>
                           <a:cs typeface="Segoe UI" pitchFamily="34" charset="-120"/>
                         </a:rPr>
-                        <a:t>Supabase pooler + partition attendance_records theo academic_year; tách Supabase project theo sản phẩm</a:t>
+                        <a:t>Supabase pooler + partition attendance_records theo academic_year; tách Supabase project riêng cho SCN</a:t>
                       </a:r>
                       <a:endParaRPr lang="en-US" sz="1050" dirty="0">
                         <a:latin typeface="Segoe UI" charset="0"/>
@@ -15309,7 +15309,7 @@
                 <a:ea typeface="Segoe UI" pitchFamily="34" charset="-122"/>
                 <a:cs typeface="Segoe UI" pitchFamily="34" charset="-120"/>
               </a:rPr>
-              <a:t>Polyrepo + shared SDLC harness thay monorepo: sản phẩm độc lập lifecycle, conventions vẫn thống nhất</a:t>
+              <a:t>Repo riêng single-package thay monorepo: SCN là bounded context hoàn chỉnh, deploy boundary = domain boundary</a:t>
             </a:r>
             <a:endParaRPr lang="en-US" sz="1350" dirty="0"/>
           </a:p>
@@ -16352,7 +16352,7 @@
                 <a:ea typeface="Segoe UI" pitchFamily="34" charset="-122"/>
                 <a:cs typeface="Segoe UI" pitchFamily="34" charset="-120"/>
               </a:rPr>
-              <a:t>Async có nhưng không có broker: Vercel cron + ai_jobs table + webhook callback (Resend) + Devin async fallback</a:t>
+              <a:t>Async có nhưng không có broker: Vercel cron + ai_jobs table + webhook callback (Resend) + async fallback</a:t>
             </a:r>
             <a:endParaRPr lang="en-US" sz="1250" dirty="0"/>
           </a:p>
@@ -16373,7 +16373,7 @@
                 <a:ea typeface="Segoe UI" pitchFamily="34" charset="-122"/>
                 <a:cs typeface="Segoe UI" pitchFamily="34" charset="-120"/>
               </a:rPr>
-              <a:t>Supabase project chung với sản phẩm khác (tvc360) - tách biệt bằng RLS, không phải DB riêng</a:t>
+              <a:t>Supabase project chung với một sản phẩm nội bộ khác - tách biệt bằng RLS, không phải DB riêng</a:t>
             </a:r>
             <a:endParaRPr lang="en-US" sz="1250" dirty="0"/>
           </a:p>
@@ -22928,7 +22928,7 @@
                 <a:ea typeface="Segoe UI" pitchFamily="34" charset="-122"/>
                 <a:cs typeface="Segoe UI" pitchFamily="34" charset="-120"/>
               </a:rPr>
-              <a:t>Repo topology: polyrepo + shared harness, không phải monorepo</a:t>
+              <a:t>Repo topology: một repo một sản phẩm, không phải monorepo</a:t>
             </a:r>
             <a:endParaRPr lang="en-US" sz="2600" dirty="0"/>
           </a:p>
@@ -23148,7 +23148,7 @@
                           <a:ea typeface="Segoe UI" pitchFamily="34" charset="-122"/>
                           <a:cs typeface="Segoe UI" pitchFamily="34" charset="-120"/>
                         </a:rPr>
-                        <a:t>Polyrepo hiện tại (đã chọn)</a:t>
+                        <a:t>Repo riêng hiện tại (đã chọn)</a:t>
                       </a:r>
                       <a:endParaRPr lang="en-US" sz="1100" dirty="0">
                         <a:latin typeface="Segoe UI" charset="0"/>
@@ -23354,7 +23354,7 @@
                           <a:ea typeface="Segoe UI" pitchFamily="34" charset="-122"/>
                           <a:cs typeface="Segoe UI" pitchFamily="34" charset="-120"/>
                         </a:rPr>
-                        <a:t>Mỗi sản phẩm 1 repo: scn, tvc360, slideforge, ssp, aal-site... deploy độc lập</a:t>
+                        <a:t>SCN là 1 repo độc lập, single-package (không workspaces), push master - deploy đúng project</a:t>
                       </a:r>
                       <a:endParaRPr lang="en-US" sz="1050" dirty="0">
                         <a:latin typeface="Segoe UI" charset="0"/>
@@ -23422,7 +23422,7 @@
                           <a:ea typeface="Segoe UI" pitchFamily="34" charset="-122"/>
                           <a:cs typeface="Segoe UI" pitchFamily="34" charset="-120"/>
                         </a:rPr>
-                        <a:t>Một repo chứa tất cả apps + packages chung</a:t>
+                        <a:t>Một repo chứa nhiều apps + packages chung</a:t>
                       </a:r>
                       <a:endParaRPr lang="en-US" sz="1050" dirty="0">
                         <a:latin typeface="Segoe UI" charset="0"/>
@@ -23766,7 +23766,7 @@
                           <a:ea typeface="Segoe UI" pitchFamily="34" charset="-122"/>
                           <a:cs typeface="Segoe UI" pitchFamily="34" charset="-120"/>
                         </a:rPr>
-                        <a:t>Chia sẻ qua SDLC harness (scripts/skills vendored vào từng repo) - không phải packages</a:t>
+                        <a:t>Chia sẻ qua harness scripts/skills vendored vào repo - không phải packages</a:t>
                       </a:r>
                       <a:endParaRPr lang="en-US" sz="1050" dirty="0">
                         <a:latin typeface="Segoe UI" charset="0"/>
@@ -24384,7 +24384,7 @@
                           <a:ea typeface="Segoe UI" pitchFamily="34" charset="-122"/>
                           <a:cs typeface="Segoe UI" pitchFamily="34" charset="-120"/>
                         </a:rPr>
-                        <a:t>Các sản phẩm ĐỘC LẬP khách hàng/lifecycle - không share domain model</a:t>
+                        <a:t>SCN độc lập lifecycle/khách hàng - không share domain model với ai</a:t>
                       </a:r>
                       <a:endParaRPr lang="en-US" sz="1050" dirty="0">
                         <a:latin typeface="Segoe UI" charset="0"/>
@@ -24452,7 +24452,7 @@
                           <a:ea typeface="Segoe UI" pitchFamily="34" charset="-122"/>
                           <a:cs typeface="Segoe UI" pitchFamily="34" charset="-120"/>
                         </a:rPr>
-                        <a:t>Chỉ đúng nếu các app chia sẻ domain model chung - SCN không có nhu cầu đó</a:t>
+                        <a:t>Chỉ đúng nếu nhiều app chia sẻ domain model chung - SCN không có nhu cầu đó</a:t>
                       </a:r>
                       <a:endParaRPr lang="en-US" sz="1050" dirty="0">
                         <a:latin typeface="Segoe UI" charset="0"/>
@@ -24541,7 +24541,7 @@
                 <a:ea typeface="Segoe UI" pitchFamily="34" charset="-122"/>
                 <a:cs typeface="Segoe UI" pitchFamily="34" charset="-120"/>
               </a:rPr>
-              <a:t>Thay cho monorepo: SDLC là 'meta-repo' phân phối conventions/gates/skills xuống từng product repo qua bootstrap-harness.sh.</a:t>
+              <a:t>SCN là bounded context hoàn chỉnh - repo riêng phản ánh đúng ranh giới deploy và ranh giới domain.</a:t>
             </a:r>
             <a:endParaRPr lang="en-US" sz="1050" dirty="0"/>
           </a:p>

--- a/docs/handover/KIEN-TRUC-HE-THONG.pptx
+++ b/docs/handover/KIEN-TRUC-HE-THONG.pptx
@@ -26,9 +26,11 @@
     <p:sldId id="274" r:id="rId20"/>
     <p:sldId id="275" r:id="rId21"/>
     <p:sldId id="276" r:id="rId22"/>
+    <p:sldId id="277" r:id="rId23"/>
+    <p:sldId id="278" r:id="rId24"/>
   </p:sldIdLst>
   <p:notesMasterIdLst>
-    <p:notesMasterId r:id="rId23"/>
+    <p:notesMasterId r:id="rId25"/>
   </p:notesMasterIdLst>
   <p:sldSz cx="12188952" cy="6858000"/>
   <p:notesSz cx="6858000" cy="12188952"/>
@@ -1708,6 +1710,182 @@
 </p:notes>
 </file>
 
+<file path=ppt/notesSlides/notesSlide22.xml><?xml version="1.0" encoding="utf-8"?>
+<p:notes xmlns:a="http://schemas.openxmlformats.org/drawingml/2006/main" xmlns:r="http://schemas.openxmlformats.org/officeDocument/2006/relationships" xmlns:p="http://schemas.openxmlformats.org/presentationml/2006/main">
+  <p:cSld>
+    <p:spTree>
+      <p:nvGrpSpPr>
+        <p:cNvPr id="1" name=""/>
+        <p:cNvGrpSpPr/>
+        <p:nvPr/>
+      </p:nvGrpSpPr>
+      <p:grpSpPr>
+        <a:xfrm>
+          <a:off x="0" y="0"/>
+          <a:ext cx="0" cy="0"/>
+          <a:chOff x="0" y="0"/>
+          <a:chExt cx="0" cy="0"/>
+        </a:xfrm>
+      </p:grpSpPr>
+      <p:sp>
+        <p:nvSpPr>
+          <p:cNvPr id="2" name="Slide Image Placeholder 1"/>
+          <p:cNvSpPr>
+            <a:spLocks noGrp="1" noRot="1" noChangeAspect="1"/>
+          </p:cNvSpPr>
+          <p:nvPr>
+            <p:ph type="sldImg"/>
+          </p:nvPr>
+        </p:nvSpPr>
+        <p:spPr/>
+      </p:sp>
+      <p:sp>
+        <p:nvSpPr>
+          <p:cNvPr id="3" name="Notes Placeholder 2"/>
+          <p:cNvSpPr>
+            <a:spLocks noGrp="1"/>
+          </p:cNvSpPr>
+          <p:nvPr>
+            <p:ph type="body" idx="1"/>
+          </p:nvPr>
+        </p:nvSpPr>
+        <p:spPr/>
+        <p:txBody>
+          <a:bodyPr/>
+          <a:lstStyle/>
+          <a:p>
+            <a:r>
+              <a:rPr lang="en-US" dirty="0"/>
+              <a:t/>
+            </a:r>
+            <a:endParaRPr lang="en-US" dirty="0"/>
+          </a:p>
+        </p:txBody>
+      </p:sp>
+      <p:sp>
+        <p:nvSpPr>
+          <p:cNvPr id="4" name="Slide Number Placeholder 3"/>
+          <p:cNvSpPr>
+            <a:spLocks noGrp="1"/>
+          </p:cNvSpPr>
+          <p:nvPr>
+            <p:ph type="sldNum" sz="quarter" idx="10"/>
+          </p:nvPr>
+        </p:nvSpPr>
+        <p:spPr/>
+        <p:txBody>
+          <a:bodyPr/>
+          <a:lstStyle/>
+          <a:p>
+            <a:fld id="{F7021451-1387-4CA6-816F-3879F97B5CBC}" type="slidenum">
+              <a:rPr lang="en-US"/>
+              <a:t>22</a:t>
+            </a:fld>
+            <a:endParaRPr lang="en-US"/>
+          </a:p>
+        </p:txBody>
+      </p:sp>
+    </p:spTree>
+    <p:extLst>
+      <p:ext uri="{BB962C8B-B14F-4D97-AF65-F5344CB8AC3E}">
+        <p14:creationId xmlns:p14="http://schemas.microsoft.com/office/powerpoint/2010/main" val="1024086991"/>
+      </p:ext>
+    </p:extLst>
+  </p:cSld>
+  <p:clrMapOvr>
+    <a:masterClrMapping/>
+  </p:clrMapOvr>
+</p:notes>
+</file>
+
+<file path=ppt/notesSlides/notesSlide23.xml><?xml version="1.0" encoding="utf-8"?>
+<p:notes xmlns:a="http://schemas.openxmlformats.org/drawingml/2006/main" xmlns:r="http://schemas.openxmlformats.org/officeDocument/2006/relationships" xmlns:p="http://schemas.openxmlformats.org/presentationml/2006/main">
+  <p:cSld>
+    <p:spTree>
+      <p:nvGrpSpPr>
+        <p:cNvPr id="1" name=""/>
+        <p:cNvGrpSpPr/>
+        <p:nvPr/>
+      </p:nvGrpSpPr>
+      <p:grpSpPr>
+        <a:xfrm>
+          <a:off x="0" y="0"/>
+          <a:ext cx="0" cy="0"/>
+          <a:chOff x="0" y="0"/>
+          <a:chExt cx="0" cy="0"/>
+        </a:xfrm>
+      </p:grpSpPr>
+      <p:sp>
+        <p:nvSpPr>
+          <p:cNvPr id="2" name="Slide Image Placeholder 1"/>
+          <p:cNvSpPr>
+            <a:spLocks noGrp="1" noRot="1" noChangeAspect="1"/>
+          </p:cNvSpPr>
+          <p:nvPr>
+            <p:ph type="sldImg"/>
+          </p:nvPr>
+        </p:nvSpPr>
+        <p:spPr/>
+      </p:sp>
+      <p:sp>
+        <p:nvSpPr>
+          <p:cNvPr id="3" name="Notes Placeholder 2"/>
+          <p:cNvSpPr>
+            <a:spLocks noGrp="1"/>
+          </p:cNvSpPr>
+          <p:nvPr>
+            <p:ph type="body" idx="1"/>
+          </p:nvPr>
+        </p:nvSpPr>
+        <p:spPr/>
+        <p:txBody>
+          <a:bodyPr/>
+          <a:lstStyle/>
+          <a:p>
+            <a:r>
+              <a:rPr lang="en-US" dirty="0"/>
+              <a:t/>
+            </a:r>
+            <a:endParaRPr lang="en-US" dirty="0"/>
+          </a:p>
+        </p:txBody>
+      </p:sp>
+      <p:sp>
+        <p:nvSpPr>
+          <p:cNvPr id="4" name="Slide Number Placeholder 3"/>
+          <p:cNvSpPr>
+            <a:spLocks noGrp="1"/>
+          </p:cNvSpPr>
+          <p:nvPr>
+            <p:ph type="sldNum" sz="quarter" idx="10"/>
+          </p:nvPr>
+        </p:nvSpPr>
+        <p:spPr/>
+        <p:txBody>
+          <a:bodyPr/>
+          <a:lstStyle/>
+          <a:p>
+            <a:fld id="{F7021451-1387-4CA6-816F-3879F97B5CBC}" type="slidenum">
+              <a:rPr lang="en-US"/>
+              <a:t>23</a:t>
+            </a:fld>
+            <a:endParaRPr lang="en-US"/>
+          </a:p>
+        </p:txBody>
+      </p:sp>
+    </p:spTree>
+    <p:extLst>
+      <p:ext uri="{BB962C8B-B14F-4D97-AF65-F5344CB8AC3E}">
+        <p14:creationId xmlns:p14="http://schemas.microsoft.com/office/powerpoint/2010/main" val="1024086991"/>
+      </p:ext>
+    </p:extLst>
+  </p:cSld>
+  <p:clrMapOvr>
+    <a:masterClrMapping/>
+  </p:clrMapOvr>
+</p:notes>
+</file>
+
 <file path=ppt/notesSlides/notesSlide3.xml><?xml version="1.0" encoding="utf-8"?>
 <p:notes xmlns:a="http://schemas.openxmlformats.org/drawingml/2006/main" xmlns:r="http://schemas.openxmlformats.org/officeDocument/2006/relationships" xmlns:p="http://schemas.openxmlformats.org/presentationml/2006/main">
   <p:cSld>
@@ -2884,6 +3062,1745 @@
 <file path=ppt/slides/slide10.xml><?xml version="1.0" encoding="utf-8"?>
 <p:sld xmlns:a="http://schemas.openxmlformats.org/drawingml/2006/main" xmlns:r="http://schemas.openxmlformats.org/officeDocument/2006/relationships" xmlns:p="http://schemas.openxmlformats.org/presentationml/2006/main">
   <p:cSld name="Slide 10">
+    <p:spTree>
+      <p:nvGrpSpPr>
+        <p:cNvPr id="1" name=""/>
+        <p:cNvGrpSpPr/>
+        <p:nvPr/>
+      </p:nvGrpSpPr>
+      <p:grpSpPr>
+        <a:xfrm>
+          <a:off x="0" y="0"/>
+          <a:ext cx="0" cy="0"/>
+          <a:chOff x="0" y="0"/>
+          <a:chExt cx="0" cy="0"/>
+        </a:xfrm>
+      </p:grpSpPr>
+      <p:sp>
+        <p:nvSpPr>
+          <p:cNvPr id="2" name="Shape 0"/>
+          <p:cNvSpPr/>
+          <p:nvPr/>
+        </p:nvSpPr>
+        <p:spPr>
+          <a:xfrm>
+            <a:off x="0" y="0"/>
+            <a:ext cx="128016" cy="1645920"/>
+          </a:xfrm>
+          <a:prstGeom prst="rect">
+            <a:avLst/>
+          </a:prstGeom>
+          <a:solidFill>
+            <a:srgbClr val="0F766E"/>
+          </a:solidFill>
+          <a:ln/>
+        </p:spPr>
+      </p:sp>
+      <p:sp>
+        <p:nvSpPr>
+          <p:cNvPr id="3" name="Text 1"/>
+          <p:cNvSpPr/>
+          <p:nvPr/>
+        </p:nvSpPr>
+        <p:spPr>
+          <a:xfrm>
+            <a:off x="502920" y="256032"/>
+            <a:ext cx="10972800" cy="274320"/>
+          </a:xfrm>
+          <a:prstGeom prst="rect">
+            <a:avLst/>
+          </a:prstGeom>
+          <a:noFill/>
+          <a:ln/>
+        </p:spPr>
+        <p:txBody>
+          <a:bodyPr wrap="square" rtlCol="0" anchor="ctr"/>
+          <a:lstStyle/>
+          <a:p>
+            <a:pPr indent="0" marL="0">
+              <a:buNone/>
+            </a:pPr>
+            <a:r>
+              <a:rPr lang="en-US" sz="1100" b="1" dirty="0">
+                <a:solidFill>
+                  <a:srgbClr val="0F766E"/>
+                </a:solidFill>
+                <a:latin typeface="Segoe UI" pitchFamily="34" charset="0"/>
+                <a:ea typeface="Segoe UI" pitchFamily="34" charset="-122"/>
+                <a:cs typeface="Segoe UI" pitchFamily="34" charset="-120"/>
+              </a:rPr>
+              <a:t>PHÂN TÍCH</a:t>
+            </a:r>
+            <a:endParaRPr lang="en-US" sz="1100" dirty="0"/>
+          </a:p>
+        </p:txBody>
+      </p:sp>
+      <p:sp>
+        <p:nvSpPr>
+          <p:cNvPr id="4" name="Text 2"/>
+          <p:cNvSpPr/>
+          <p:nvPr/>
+        </p:nvSpPr>
+        <p:spPr>
+          <a:xfrm>
+            <a:off x="502920" y="502920"/>
+            <a:ext cx="11155680" cy="640080"/>
+          </a:xfrm>
+          <a:prstGeom prst="rect">
+            <a:avLst/>
+          </a:prstGeom>
+          <a:noFill/>
+          <a:ln/>
+        </p:spPr>
+        <p:txBody>
+          <a:bodyPr wrap="square" rtlCol="0" anchor="ctr"/>
+          <a:lstStyle/>
+          <a:p>
+            <a:pPr indent="0" marL="0">
+              <a:buNone/>
+            </a:pPr>
+            <a:r>
+              <a:rPr lang="en-US" sz="2600" b="1" dirty="0">
+                <a:solidFill>
+                  <a:srgbClr val="0F172A"/>
+                </a:solidFill>
+                <a:latin typeface="Segoe UI" pitchFamily="34" charset="0"/>
+                <a:ea typeface="Segoe UI" pitchFamily="34" charset="-122"/>
+                <a:cs typeface="Segoe UI" pitchFamily="34" charset="-120"/>
+              </a:rPr>
+              <a:t>Repo topology: một repo một sản phẩm, không phải monorepo</a:t>
+            </a:r>
+            <a:endParaRPr lang="en-US" sz="2600" dirty="0"/>
+          </a:p>
+        </p:txBody>
+      </p:sp>
+      <p:sp>
+        <p:nvSpPr>
+          <p:cNvPr id="5" name="Shape 3"/>
+          <p:cNvSpPr/>
+          <p:nvPr/>
+        </p:nvSpPr>
+        <p:spPr>
+          <a:xfrm>
+            <a:off x="502920" y="1572768"/>
+            <a:ext cx="11155680" cy="0"/>
+          </a:xfrm>
+          <a:prstGeom prst="line">
+            <a:avLst/>
+          </a:prstGeom>
+          <a:noFill/>
+          <a:ln w="12700">
+            <a:solidFill>
+              <a:srgbClr val="E2E8F0"/>
+            </a:solidFill>
+            <a:prstDash val="solid"/>
+          </a:ln>
+        </p:spPr>
+      </p:sp>
+      <p:sp>
+        <p:nvSpPr>
+          <p:cNvPr id="6" name="Text 4"/>
+          <p:cNvSpPr/>
+          <p:nvPr/>
+        </p:nvSpPr>
+        <p:spPr>
+          <a:xfrm>
+            <a:off x="502920" y="6528816"/>
+            <a:ext cx="4572000" cy="274320"/>
+          </a:xfrm>
+          <a:prstGeom prst="rect">
+            <a:avLst/>
+          </a:prstGeom>
+          <a:noFill/>
+          <a:ln/>
+        </p:spPr>
+        <p:txBody>
+          <a:bodyPr wrap="square" rtlCol="0" anchor="ctr"/>
+          <a:lstStyle/>
+          <a:p>
+            <a:pPr indent="0" marL="0">
+              <a:buNone/>
+            </a:pPr>
+            <a:r>
+              <a:rPr lang="en-US" sz="900" dirty="0">
+                <a:solidFill>
+                  <a:srgbClr val="94A3B8"/>
+                </a:solidFill>
+                <a:latin typeface="Segoe UI" pitchFamily="34" charset="0"/>
+                <a:ea typeface="Segoe UI" pitchFamily="34" charset="-122"/>
+                <a:cs typeface="Segoe UI" pitchFamily="34" charset="-120"/>
+              </a:rPr>
+              <a:t>VieSchool - Sổ Chủ Nhiệm Số</a:t>
+            </a:r>
+            <a:endParaRPr lang="en-US" sz="900" dirty="0"/>
+          </a:p>
+        </p:txBody>
+      </p:sp>
+      <p:sp>
+        <p:nvSpPr>
+          <p:cNvPr id="7" name="Text 5"/>
+          <p:cNvSpPr/>
+          <p:nvPr/>
+        </p:nvSpPr>
+        <p:spPr>
+          <a:xfrm>
+            <a:off x="11338560" y="6528816"/>
+            <a:ext cx="457200" cy="274320"/>
+          </a:xfrm>
+          <a:prstGeom prst="rect">
+            <a:avLst/>
+          </a:prstGeom>
+          <a:noFill/>
+          <a:ln/>
+        </p:spPr>
+        <p:txBody>
+          <a:bodyPr wrap="square" rtlCol="0" anchor="ctr"/>
+          <a:lstStyle/>
+          <a:p>
+            <a:pPr algn="r" indent="0" marL="0">
+              <a:buNone/>
+            </a:pPr>
+            <a:r>
+              <a:rPr lang="en-US" sz="900" dirty="0">
+                <a:solidFill>
+                  <a:srgbClr val="94A3B8"/>
+                </a:solidFill>
+                <a:latin typeface="Segoe UI" pitchFamily="34" charset="0"/>
+                <a:ea typeface="Segoe UI" pitchFamily="34" charset="-122"/>
+                <a:cs typeface="Segoe UI" pitchFamily="34" charset="-120"/>
+              </a:rPr>
+              <a:t>8</a:t>
+            </a:r>
+            <a:endParaRPr lang="en-US" sz="900" dirty="0"/>
+          </a:p>
+        </p:txBody>
+      </p:sp>
+      <p:graphicFrame>
+        <p:nvGraphicFramePr>
+          <p:cNvPr id="11" name="Table 0"/>
+          <p:cNvGraphicFramePr>
+            <a:graphicFrameLocks noGrp="1"/>
+          </p:cNvGraphicFramePr>
+          <p:nvPr>
+            <p:extLst>
+              <p:ext uri="{D42A27DB-BD31-4B8C-83A1-F6EECF244321}">
+                <p14:modId xmlns:p14="http://schemas.microsoft.com/office/powerpoint/2010/main" val="1579011935"/>
+              </p:ext>
+            </p:extLst>
+          </p:nvPr>
+        </p:nvGraphicFramePr>
+        <p:xfrm>
+          <a:off x="640080" y="1783080"/>
+          <a:ext cx="10972800" cy="914400"/>
+        </p:xfrm>
+        <a:graphic>
+          <a:graphicData uri="http://schemas.openxmlformats.org/drawingml/2006/table">
+            <a:tbl>
+              <a:tblPr/>
+              <a:tblGrid>
+                <a:gridCol w="3657600"/>
+                <a:gridCol w="3657600"/>
+                <a:gridCol w="3657600"/>
+              </a:tblGrid>
+              <a:tr h="566928">
+                <a:tc>
+                  <a:txBody>
+                    <a:bodyPr/>
+                    <a:lstStyle/>
+                    <a:p>
+                      <a:pPr indent="0" marL="0">
+                        <a:buNone/>
+                      </a:pPr>
+                      <a:r>
+                        <a:rPr lang="en-US" sz="1100" b="1" dirty="0">
+                          <a:solidFill>
+                            <a:srgbClr val="FFFFFF"/>
+                          </a:solidFill>
+                          <a:latin typeface="Segoe UI" pitchFamily="34" charset="0"/>
+                          <a:ea typeface="Segoe UI" pitchFamily="34" charset="-122"/>
+                          <a:cs typeface="Segoe UI" pitchFamily="34" charset="-120"/>
+                        </a:rPr>
+                        <a:t>Tiêu chí</a:t>
+                      </a:r>
+                      <a:endParaRPr lang="en-US" sz="1100" dirty="0">
+                        <a:latin typeface="Segoe UI" charset="0"/>
+                        <a:ea typeface="Segoe UI" charset="0"/>
+                        <a:cs typeface="Segoe UI" charset="0"/>
+                      </a:endParaRPr>
+                    </a:p>
+                  </a:txBody>
+                  <a:tcPr marL="73152" marR="73152" marT="73152" marB="73152" anchor="ctr">
+                    <a:lnL w="9525" cap="flat" cmpd="sng" algn="ctr">
+                      <a:solidFill>
+                        <a:srgbClr val="E2E8F0"/>
+                      </a:solidFill>
+                      <a:prstDash val="solid"/>
+                      <a:round/>
+                      <a:headEnd type="none" w="med" len="med"/>
+                      <a:tailEnd type="none" w="med" len="med"/>
+                    </a:lnL>
+                    <a:lnR w="9525" cap="flat" cmpd="sng" algn="ctr">
+                      <a:solidFill>
+                        <a:srgbClr val="E2E8F0"/>
+                      </a:solidFill>
+                      <a:prstDash val="solid"/>
+                      <a:round/>
+                      <a:headEnd type="none" w="med" len="med"/>
+                      <a:tailEnd type="none" w="med" len="med"/>
+                    </a:lnR>
+                    <a:lnT w="9525" cap="flat" cmpd="sng" algn="ctr">
+                      <a:solidFill>
+                        <a:srgbClr val="E2E8F0"/>
+                      </a:solidFill>
+                      <a:prstDash val="solid"/>
+                      <a:round/>
+                      <a:headEnd type="none" w="med" len="med"/>
+                      <a:tailEnd type="none" w="med" len="med"/>
+                    </a:lnT>
+                    <a:lnB w="9525" cap="flat" cmpd="sng" algn="ctr">
+                      <a:solidFill>
+                        <a:srgbClr val="E2E8F0"/>
+                      </a:solidFill>
+                      <a:prstDash val="solid"/>
+                      <a:round/>
+                      <a:headEnd type="none" w="med" len="med"/>
+                      <a:tailEnd type="none" w="med" len="med"/>
+                    </a:lnB>
+                    <a:solidFill>
+                      <a:srgbClr val="0F766E"/>
+                    </a:solidFill>
+                  </a:tcPr>
+                </a:tc>
+                <a:tc>
+                  <a:txBody>
+                    <a:bodyPr/>
+                    <a:lstStyle/>
+                    <a:p>
+                      <a:pPr indent="0" marL="0">
+                        <a:buNone/>
+                      </a:pPr>
+                      <a:r>
+                        <a:rPr lang="en-US" sz="1100" b="1" dirty="0">
+                          <a:solidFill>
+                            <a:srgbClr val="FFFFFF"/>
+                          </a:solidFill>
+                          <a:latin typeface="Segoe UI" pitchFamily="34" charset="0"/>
+                          <a:ea typeface="Segoe UI" pitchFamily="34" charset="-122"/>
+                          <a:cs typeface="Segoe UI" pitchFamily="34" charset="-120"/>
+                        </a:rPr>
+                        <a:t>Repo riêng hiện tại (đã chọn)</a:t>
+                      </a:r>
+                      <a:endParaRPr lang="en-US" sz="1100" dirty="0">
+                        <a:latin typeface="Segoe UI" charset="0"/>
+                        <a:ea typeface="Segoe UI" charset="0"/>
+                        <a:cs typeface="Segoe UI" charset="0"/>
+                      </a:endParaRPr>
+                    </a:p>
+                  </a:txBody>
+                  <a:tcPr marL="73152" marR="73152" marT="73152" marB="73152" anchor="ctr">
+                    <a:lnL w="9525" cap="flat" cmpd="sng" algn="ctr">
+                      <a:solidFill>
+                        <a:srgbClr val="E2E8F0"/>
+                      </a:solidFill>
+                      <a:prstDash val="solid"/>
+                      <a:round/>
+                      <a:headEnd type="none" w="med" len="med"/>
+                      <a:tailEnd type="none" w="med" len="med"/>
+                    </a:lnL>
+                    <a:lnR w="9525" cap="flat" cmpd="sng" algn="ctr">
+                      <a:solidFill>
+                        <a:srgbClr val="E2E8F0"/>
+                      </a:solidFill>
+                      <a:prstDash val="solid"/>
+                      <a:round/>
+                      <a:headEnd type="none" w="med" len="med"/>
+                      <a:tailEnd type="none" w="med" len="med"/>
+                    </a:lnR>
+                    <a:lnT w="9525" cap="flat" cmpd="sng" algn="ctr">
+                      <a:solidFill>
+                        <a:srgbClr val="E2E8F0"/>
+                      </a:solidFill>
+                      <a:prstDash val="solid"/>
+                      <a:round/>
+                      <a:headEnd type="none" w="med" len="med"/>
+                      <a:tailEnd type="none" w="med" len="med"/>
+                    </a:lnT>
+                    <a:lnB w="9525" cap="flat" cmpd="sng" algn="ctr">
+                      <a:solidFill>
+                        <a:srgbClr val="E2E8F0"/>
+                      </a:solidFill>
+                      <a:prstDash val="solid"/>
+                      <a:round/>
+                      <a:headEnd type="none" w="med" len="med"/>
+                      <a:tailEnd type="none" w="med" len="med"/>
+                    </a:lnB>
+                    <a:solidFill>
+                      <a:srgbClr val="0F766E"/>
+                    </a:solidFill>
+                  </a:tcPr>
+                </a:tc>
+                <a:tc>
+                  <a:txBody>
+                    <a:bodyPr/>
+                    <a:lstStyle/>
+                    <a:p>
+                      <a:pPr indent="0" marL="0">
+                        <a:buNone/>
+                      </a:pPr>
+                      <a:r>
+                        <a:rPr lang="en-US" sz="1100" b="1" dirty="0">
+                          <a:solidFill>
+                            <a:srgbClr val="FFFFFF"/>
+                          </a:solidFill>
+                          <a:latin typeface="Segoe UI" pitchFamily="34" charset="0"/>
+                          <a:ea typeface="Segoe UI" pitchFamily="34" charset="-122"/>
+                          <a:cs typeface="Segoe UI" pitchFamily="34" charset="-120"/>
+                        </a:rPr>
+                        <a:t>Monorepo (turborepo/Nx)</a:t>
+                      </a:r>
+                      <a:endParaRPr lang="en-US" sz="1100" dirty="0">
+                        <a:latin typeface="Segoe UI" charset="0"/>
+                        <a:ea typeface="Segoe UI" charset="0"/>
+                        <a:cs typeface="Segoe UI" charset="0"/>
+                      </a:endParaRPr>
+                    </a:p>
+                  </a:txBody>
+                  <a:tcPr marL="73152" marR="73152" marT="73152" marB="73152" anchor="ctr">
+                    <a:lnL w="9525" cap="flat" cmpd="sng" algn="ctr">
+                      <a:solidFill>
+                        <a:srgbClr val="E2E8F0"/>
+                      </a:solidFill>
+                      <a:prstDash val="solid"/>
+                      <a:round/>
+                      <a:headEnd type="none" w="med" len="med"/>
+                      <a:tailEnd type="none" w="med" len="med"/>
+                    </a:lnL>
+                    <a:lnR w="9525" cap="flat" cmpd="sng" algn="ctr">
+                      <a:solidFill>
+                        <a:srgbClr val="E2E8F0"/>
+                      </a:solidFill>
+                      <a:prstDash val="solid"/>
+                      <a:round/>
+                      <a:headEnd type="none" w="med" len="med"/>
+                      <a:tailEnd type="none" w="med" len="med"/>
+                    </a:lnR>
+                    <a:lnT w="9525" cap="flat" cmpd="sng" algn="ctr">
+                      <a:solidFill>
+                        <a:srgbClr val="E2E8F0"/>
+                      </a:solidFill>
+                      <a:prstDash val="solid"/>
+                      <a:round/>
+                      <a:headEnd type="none" w="med" len="med"/>
+                      <a:tailEnd type="none" w="med" len="med"/>
+                    </a:lnT>
+                    <a:lnB w="9525" cap="flat" cmpd="sng" algn="ctr">
+                      <a:solidFill>
+                        <a:srgbClr val="E2E8F0"/>
+                      </a:solidFill>
+                      <a:prstDash val="solid"/>
+                      <a:round/>
+                      <a:headEnd type="none" w="med" len="med"/>
+                      <a:tailEnd type="none" w="med" len="med"/>
+                    </a:lnB>
+                    <a:solidFill>
+                      <a:srgbClr val="0F766E"/>
+                    </a:solidFill>
+                  </a:tcPr>
+                </a:tc>
+              </a:tr>
+              <a:tr h="566928">
+                <a:tc>
+                  <a:txBody>
+                    <a:bodyPr/>
+                    <a:lstStyle/>
+                    <a:p>
+                      <a:pPr indent="0" marL="0">
+                        <a:buNone/>
+                      </a:pPr>
+                      <a:r>
+                        <a:rPr lang="en-US" sz="1050" dirty="0">
+                          <a:solidFill>
+                            <a:srgbClr val="0F172A"/>
+                          </a:solidFill>
+                          <a:latin typeface="Segoe UI" pitchFamily="34" charset="0"/>
+                          <a:ea typeface="Segoe UI" pitchFamily="34" charset="-122"/>
+                          <a:cs typeface="Segoe UI" pitchFamily="34" charset="-120"/>
+                        </a:rPr>
+                        <a:t>Thực tế</a:t>
+                      </a:r>
+                      <a:endParaRPr lang="en-US" sz="1050" dirty="0">
+                        <a:latin typeface="Segoe UI" charset="0"/>
+                        <a:ea typeface="Segoe UI" charset="0"/>
+                        <a:cs typeface="Segoe UI" charset="0"/>
+                      </a:endParaRPr>
+                    </a:p>
+                  </a:txBody>
+                  <a:tcPr marL="73152" marR="73152" marT="73152" marB="73152" anchor="ctr">
+                    <a:lnL w="9525" cap="flat" cmpd="sng" algn="ctr">
+                      <a:solidFill>
+                        <a:srgbClr val="E2E8F0"/>
+                      </a:solidFill>
+                      <a:prstDash val="solid"/>
+                      <a:round/>
+                      <a:headEnd type="none" w="med" len="med"/>
+                      <a:tailEnd type="none" w="med" len="med"/>
+                    </a:lnL>
+                    <a:lnR w="9525" cap="flat" cmpd="sng" algn="ctr">
+                      <a:solidFill>
+                        <a:srgbClr val="E2E8F0"/>
+                      </a:solidFill>
+                      <a:prstDash val="solid"/>
+                      <a:round/>
+                      <a:headEnd type="none" w="med" len="med"/>
+                      <a:tailEnd type="none" w="med" len="med"/>
+                    </a:lnR>
+                    <a:lnT w="9525" cap="flat" cmpd="sng" algn="ctr">
+                      <a:solidFill>
+                        <a:srgbClr val="E2E8F0"/>
+                      </a:solidFill>
+                      <a:prstDash val="solid"/>
+                      <a:round/>
+                      <a:headEnd type="none" w="med" len="med"/>
+                      <a:tailEnd type="none" w="med" len="med"/>
+                    </a:lnT>
+                    <a:lnB w="9525" cap="flat" cmpd="sng" algn="ctr">
+                      <a:solidFill>
+                        <a:srgbClr val="E2E8F0"/>
+                      </a:solidFill>
+                      <a:prstDash val="solid"/>
+                      <a:round/>
+                      <a:headEnd type="none" w="med" len="med"/>
+                      <a:tailEnd type="none" w="med" len="med"/>
+                    </a:lnB>
+                    <a:solidFill>
+                      <a:srgbClr val="FFFFFF"/>
+                    </a:solidFill>
+                  </a:tcPr>
+                </a:tc>
+                <a:tc>
+                  <a:txBody>
+                    <a:bodyPr/>
+                    <a:lstStyle/>
+                    <a:p>
+                      <a:pPr indent="0" marL="0">
+                        <a:buNone/>
+                      </a:pPr>
+                      <a:r>
+                        <a:rPr lang="en-US" sz="1050" dirty="0">
+                          <a:solidFill>
+                            <a:srgbClr val="0F172A"/>
+                          </a:solidFill>
+                          <a:latin typeface="Segoe UI" pitchFamily="34" charset="0"/>
+                          <a:ea typeface="Segoe UI" pitchFamily="34" charset="-122"/>
+                          <a:cs typeface="Segoe UI" pitchFamily="34" charset="-120"/>
+                        </a:rPr>
+                        <a:t>SCN là 1 repo độc lập, single-package (không workspaces), push master - deploy đúng project</a:t>
+                      </a:r>
+                      <a:endParaRPr lang="en-US" sz="1050" dirty="0">
+                        <a:latin typeface="Segoe UI" charset="0"/>
+                        <a:ea typeface="Segoe UI" charset="0"/>
+                        <a:cs typeface="Segoe UI" charset="0"/>
+                      </a:endParaRPr>
+                    </a:p>
+                  </a:txBody>
+                  <a:tcPr marL="73152" marR="73152" marT="73152" marB="73152" anchor="ctr">
+                    <a:lnL w="9525" cap="flat" cmpd="sng" algn="ctr">
+                      <a:solidFill>
+                        <a:srgbClr val="E2E8F0"/>
+                      </a:solidFill>
+                      <a:prstDash val="solid"/>
+                      <a:round/>
+                      <a:headEnd type="none" w="med" len="med"/>
+                      <a:tailEnd type="none" w="med" len="med"/>
+                    </a:lnL>
+                    <a:lnR w="9525" cap="flat" cmpd="sng" algn="ctr">
+                      <a:solidFill>
+                        <a:srgbClr val="E2E8F0"/>
+                      </a:solidFill>
+                      <a:prstDash val="solid"/>
+                      <a:round/>
+                      <a:headEnd type="none" w="med" len="med"/>
+                      <a:tailEnd type="none" w="med" len="med"/>
+                    </a:lnR>
+                    <a:lnT w="9525" cap="flat" cmpd="sng" algn="ctr">
+                      <a:solidFill>
+                        <a:srgbClr val="E2E8F0"/>
+                      </a:solidFill>
+                      <a:prstDash val="solid"/>
+                      <a:round/>
+                      <a:headEnd type="none" w="med" len="med"/>
+                      <a:tailEnd type="none" w="med" len="med"/>
+                    </a:lnT>
+                    <a:lnB w="9525" cap="flat" cmpd="sng" algn="ctr">
+                      <a:solidFill>
+                        <a:srgbClr val="E2E8F0"/>
+                      </a:solidFill>
+                      <a:prstDash val="solid"/>
+                      <a:round/>
+                      <a:headEnd type="none" w="med" len="med"/>
+                      <a:tailEnd type="none" w="med" len="med"/>
+                    </a:lnB>
+                    <a:solidFill>
+                      <a:srgbClr val="FFFFFF"/>
+                    </a:solidFill>
+                  </a:tcPr>
+                </a:tc>
+                <a:tc>
+                  <a:txBody>
+                    <a:bodyPr/>
+                    <a:lstStyle/>
+                    <a:p>
+                      <a:pPr indent="0" marL="0">
+                        <a:buNone/>
+                      </a:pPr>
+                      <a:r>
+                        <a:rPr lang="en-US" sz="1050" dirty="0">
+                          <a:solidFill>
+                            <a:srgbClr val="0F172A"/>
+                          </a:solidFill>
+                          <a:latin typeface="Segoe UI" pitchFamily="34" charset="0"/>
+                          <a:ea typeface="Segoe UI" pitchFamily="34" charset="-122"/>
+                          <a:cs typeface="Segoe UI" pitchFamily="34" charset="-120"/>
+                        </a:rPr>
+                        <a:t>Một repo chứa nhiều apps + packages chung</a:t>
+                      </a:r>
+                      <a:endParaRPr lang="en-US" sz="1050" dirty="0">
+                        <a:latin typeface="Segoe UI" charset="0"/>
+                        <a:ea typeface="Segoe UI" charset="0"/>
+                        <a:cs typeface="Segoe UI" charset="0"/>
+                      </a:endParaRPr>
+                    </a:p>
+                  </a:txBody>
+                  <a:tcPr marL="73152" marR="73152" marT="73152" marB="73152" anchor="ctr">
+                    <a:lnL w="9525" cap="flat" cmpd="sng" algn="ctr">
+                      <a:solidFill>
+                        <a:srgbClr val="E2E8F0"/>
+                      </a:solidFill>
+                      <a:prstDash val="solid"/>
+                      <a:round/>
+                      <a:headEnd type="none" w="med" len="med"/>
+                      <a:tailEnd type="none" w="med" len="med"/>
+                    </a:lnL>
+                    <a:lnR w="9525" cap="flat" cmpd="sng" algn="ctr">
+                      <a:solidFill>
+                        <a:srgbClr val="E2E8F0"/>
+                      </a:solidFill>
+                      <a:prstDash val="solid"/>
+                      <a:round/>
+                      <a:headEnd type="none" w="med" len="med"/>
+                      <a:tailEnd type="none" w="med" len="med"/>
+                    </a:lnR>
+                    <a:lnT w="9525" cap="flat" cmpd="sng" algn="ctr">
+                      <a:solidFill>
+                        <a:srgbClr val="E2E8F0"/>
+                      </a:solidFill>
+                      <a:prstDash val="solid"/>
+                      <a:round/>
+                      <a:headEnd type="none" w="med" len="med"/>
+                      <a:tailEnd type="none" w="med" len="med"/>
+                    </a:lnT>
+                    <a:lnB w="9525" cap="flat" cmpd="sng" algn="ctr">
+                      <a:solidFill>
+                        <a:srgbClr val="E2E8F0"/>
+                      </a:solidFill>
+                      <a:prstDash val="solid"/>
+                      <a:round/>
+                      <a:headEnd type="none" w="med" len="med"/>
+                      <a:tailEnd type="none" w="med" len="med"/>
+                    </a:lnB>
+                    <a:solidFill>
+                      <a:srgbClr val="FFFFFF"/>
+                    </a:solidFill>
+                  </a:tcPr>
+                </a:tc>
+              </a:tr>
+              <a:tr h="566928">
+                <a:tc>
+                  <a:txBody>
+                    <a:bodyPr/>
+                    <a:lstStyle/>
+                    <a:p>
+                      <a:pPr indent="0" marL="0">
+                        <a:buNone/>
+                      </a:pPr>
+                      <a:r>
+                        <a:rPr lang="en-US" sz="1050" dirty="0">
+                          <a:solidFill>
+                            <a:srgbClr val="0F172A"/>
+                          </a:solidFill>
+                          <a:latin typeface="Segoe UI" pitchFamily="34" charset="0"/>
+                          <a:ea typeface="Segoe UI" pitchFamily="34" charset="-122"/>
+                          <a:cs typeface="Segoe UI" pitchFamily="34" charset="-120"/>
+                        </a:rPr>
+                        <a:t>Deploy boundary</a:t>
+                      </a:r>
+                      <a:endParaRPr lang="en-US" sz="1050" dirty="0">
+                        <a:latin typeface="Segoe UI" charset="0"/>
+                        <a:ea typeface="Segoe UI" charset="0"/>
+                        <a:cs typeface="Segoe UI" charset="0"/>
+                      </a:endParaRPr>
+                    </a:p>
+                  </a:txBody>
+                  <a:tcPr marL="73152" marR="73152" marT="73152" marB="73152" anchor="ctr">
+                    <a:lnL w="9525" cap="flat" cmpd="sng" algn="ctr">
+                      <a:solidFill>
+                        <a:srgbClr val="E2E8F0"/>
+                      </a:solidFill>
+                      <a:prstDash val="solid"/>
+                      <a:round/>
+                      <a:headEnd type="none" w="med" len="med"/>
+                      <a:tailEnd type="none" w="med" len="med"/>
+                    </a:lnL>
+                    <a:lnR w="9525" cap="flat" cmpd="sng" algn="ctr">
+                      <a:solidFill>
+                        <a:srgbClr val="E2E8F0"/>
+                      </a:solidFill>
+                      <a:prstDash val="solid"/>
+                      <a:round/>
+                      <a:headEnd type="none" w="med" len="med"/>
+                      <a:tailEnd type="none" w="med" len="med"/>
+                    </a:lnR>
+                    <a:lnT w="9525" cap="flat" cmpd="sng" algn="ctr">
+                      <a:solidFill>
+                        <a:srgbClr val="E2E8F0"/>
+                      </a:solidFill>
+                      <a:prstDash val="solid"/>
+                      <a:round/>
+                      <a:headEnd type="none" w="med" len="med"/>
+                      <a:tailEnd type="none" w="med" len="med"/>
+                    </a:lnT>
+                    <a:lnB w="9525" cap="flat" cmpd="sng" algn="ctr">
+                      <a:solidFill>
+                        <a:srgbClr val="E2E8F0"/>
+                      </a:solidFill>
+                      <a:prstDash val="solid"/>
+                      <a:round/>
+                      <a:headEnd type="none" w="med" len="med"/>
+                      <a:tailEnd type="none" w="med" len="med"/>
+                    </a:lnB>
+                    <a:solidFill>
+                      <a:srgbClr val="F8FAFC"/>
+                    </a:solidFill>
+                  </a:tcPr>
+                </a:tc>
+                <a:tc>
+                  <a:txBody>
+                    <a:bodyPr/>
+                    <a:lstStyle/>
+                    <a:p>
+                      <a:pPr indent="0" marL="0">
+                        <a:buNone/>
+                      </a:pPr>
+                      <a:r>
+                        <a:rPr lang="en-US" sz="1050" dirty="0">
+                          <a:solidFill>
+                            <a:srgbClr val="0F172A"/>
+                          </a:solidFill>
+                          <a:latin typeface="Segoe UI" pitchFamily="34" charset="0"/>
+                          <a:ea typeface="Segoe UI" pitchFamily="34" charset="-122"/>
+                          <a:cs typeface="Segoe UI" pitchFamily="34" charset="-120"/>
+                        </a:rPr>
+                        <a:t>Push master repo nào - deploy đúng project đó, đơn giản tuyệt đối</a:t>
+                      </a:r>
+                      <a:endParaRPr lang="en-US" sz="1050" dirty="0">
+                        <a:latin typeface="Segoe UI" charset="0"/>
+                        <a:ea typeface="Segoe UI" charset="0"/>
+                        <a:cs typeface="Segoe UI" charset="0"/>
+                      </a:endParaRPr>
+                    </a:p>
+                  </a:txBody>
+                  <a:tcPr marL="73152" marR="73152" marT="73152" marB="73152" anchor="ctr">
+                    <a:lnL w="9525" cap="flat" cmpd="sng" algn="ctr">
+                      <a:solidFill>
+                        <a:srgbClr val="E2E8F0"/>
+                      </a:solidFill>
+                      <a:prstDash val="solid"/>
+                      <a:round/>
+                      <a:headEnd type="none" w="med" len="med"/>
+                      <a:tailEnd type="none" w="med" len="med"/>
+                    </a:lnL>
+                    <a:lnR w="9525" cap="flat" cmpd="sng" algn="ctr">
+                      <a:solidFill>
+                        <a:srgbClr val="E2E8F0"/>
+                      </a:solidFill>
+                      <a:prstDash val="solid"/>
+                      <a:round/>
+                      <a:headEnd type="none" w="med" len="med"/>
+                      <a:tailEnd type="none" w="med" len="med"/>
+                    </a:lnR>
+                    <a:lnT w="9525" cap="flat" cmpd="sng" algn="ctr">
+                      <a:solidFill>
+                        <a:srgbClr val="E2E8F0"/>
+                      </a:solidFill>
+                      <a:prstDash val="solid"/>
+                      <a:round/>
+                      <a:headEnd type="none" w="med" len="med"/>
+                      <a:tailEnd type="none" w="med" len="med"/>
+                    </a:lnT>
+                    <a:lnB w="9525" cap="flat" cmpd="sng" algn="ctr">
+                      <a:solidFill>
+                        <a:srgbClr val="E2E8F0"/>
+                      </a:solidFill>
+                      <a:prstDash val="solid"/>
+                      <a:round/>
+                      <a:headEnd type="none" w="med" len="med"/>
+                      <a:tailEnd type="none" w="med" len="med"/>
+                    </a:lnB>
+                    <a:solidFill>
+                      <a:srgbClr val="F8FAFC"/>
+                    </a:solidFill>
+                  </a:tcPr>
+                </a:tc>
+                <a:tc>
+                  <a:txBody>
+                    <a:bodyPr/>
+                    <a:lstStyle/>
+                    <a:p>
+                      <a:pPr indent="0" marL="0">
+                        <a:buNone/>
+                      </a:pPr>
+                      <a:r>
+                        <a:rPr lang="en-US" sz="1050" dirty="0">
+                          <a:solidFill>
+                            <a:srgbClr val="0F172A"/>
+                          </a:solidFill>
+                          <a:latin typeface="Segoe UI" pitchFamily="34" charset="0"/>
+                          <a:ea typeface="Segoe UI" pitchFamily="34" charset="-122"/>
+                          <a:cs typeface="Segoe UI" pitchFamily="34" charset="-120"/>
+                        </a:rPr>
+                        <a:t>Cần affected-graph để không deploy lại cả ứng dụng khi sửa shared lib</a:t>
+                      </a:r>
+                      <a:endParaRPr lang="en-US" sz="1050" dirty="0">
+                        <a:latin typeface="Segoe UI" charset="0"/>
+                        <a:ea typeface="Segoe UI" charset="0"/>
+                        <a:cs typeface="Segoe UI" charset="0"/>
+                      </a:endParaRPr>
+                    </a:p>
+                  </a:txBody>
+                  <a:tcPr marL="73152" marR="73152" marT="73152" marB="73152" anchor="ctr">
+                    <a:lnL w="9525" cap="flat" cmpd="sng" algn="ctr">
+                      <a:solidFill>
+                        <a:srgbClr val="E2E8F0"/>
+                      </a:solidFill>
+                      <a:prstDash val="solid"/>
+                      <a:round/>
+                      <a:headEnd type="none" w="med" len="med"/>
+                      <a:tailEnd type="none" w="med" len="med"/>
+                    </a:lnL>
+                    <a:lnR w="9525" cap="flat" cmpd="sng" algn="ctr">
+                      <a:solidFill>
+                        <a:srgbClr val="E2E8F0"/>
+                      </a:solidFill>
+                      <a:prstDash val="solid"/>
+                      <a:round/>
+                      <a:headEnd type="none" w="med" len="med"/>
+                      <a:tailEnd type="none" w="med" len="med"/>
+                    </a:lnR>
+                    <a:lnT w="9525" cap="flat" cmpd="sng" algn="ctr">
+                      <a:solidFill>
+                        <a:srgbClr val="E2E8F0"/>
+                      </a:solidFill>
+                      <a:prstDash val="solid"/>
+                      <a:round/>
+                      <a:headEnd type="none" w="med" len="med"/>
+                      <a:tailEnd type="none" w="med" len="med"/>
+                    </a:lnT>
+                    <a:lnB w="9525" cap="flat" cmpd="sng" algn="ctr">
+                      <a:solidFill>
+                        <a:srgbClr val="E2E8F0"/>
+                      </a:solidFill>
+                      <a:prstDash val="solid"/>
+                      <a:round/>
+                      <a:headEnd type="none" w="med" len="med"/>
+                      <a:tailEnd type="none" w="med" len="med"/>
+                    </a:lnB>
+                    <a:solidFill>
+                      <a:srgbClr val="F8FAFC"/>
+                    </a:solidFill>
+                  </a:tcPr>
+                </a:tc>
+              </a:tr>
+              <a:tr h="566928">
+                <a:tc>
+                  <a:txBody>
+                    <a:bodyPr/>
+                    <a:lstStyle/>
+                    <a:p>
+                      <a:pPr indent="0" marL="0">
+                        <a:buNone/>
+                      </a:pPr>
+                      <a:r>
+                        <a:rPr lang="en-US" sz="1050" dirty="0">
+                          <a:solidFill>
+                            <a:srgbClr val="0F172A"/>
+                          </a:solidFill>
+                          <a:latin typeface="Segoe UI" pitchFamily="34" charset="0"/>
+                          <a:ea typeface="Segoe UI" pitchFamily="34" charset="-122"/>
+                          <a:cs typeface="Segoe UI" pitchFamily="34" charset="-120"/>
+                        </a:rPr>
+                        <a:t>Code chia sẻ</a:t>
+                      </a:r>
+                      <a:endParaRPr lang="en-US" sz="1050" dirty="0">
+                        <a:latin typeface="Segoe UI" charset="0"/>
+                        <a:ea typeface="Segoe UI" charset="0"/>
+                        <a:cs typeface="Segoe UI" charset="0"/>
+                      </a:endParaRPr>
+                    </a:p>
+                  </a:txBody>
+                  <a:tcPr marL="73152" marR="73152" marT="73152" marB="73152" anchor="ctr">
+                    <a:lnL w="9525" cap="flat" cmpd="sng" algn="ctr">
+                      <a:solidFill>
+                        <a:srgbClr val="E2E8F0"/>
+                      </a:solidFill>
+                      <a:prstDash val="solid"/>
+                      <a:round/>
+                      <a:headEnd type="none" w="med" len="med"/>
+                      <a:tailEnd type="none" w="med" len="med"/>
+                    </a:lnL>
+                    <a:lnR w="9525" cap="flat" cmpd="sng" algn="ctr">
+                      <a:solidFill>
+                        <a:srgbClr val="E2E8F0"/>
+                      </a:solidFill>
+                      <a:prstDash val="solid"/>
+                      <a:round/>
+                      <a:headEnd type="none" w="med" len="med"/>
+                      <a:tailEnd type="none" w="med" len="med"/>
+                    </a:lnR>
+                    <a:lnT w="9525" cap="flat" cmpd="sng" algn="ctr">
+                      <a:solidFill>
+                        <a:srgbClr val="E2E8F0"/>
+                      </a:solidFill>
+                      <a:prstDash val="solid"/>
+                      <a:round/>
+                      <a:headEnd type="none" w="med" len="med"/>
+                      <a:tailEnd type="none" w="med" len="med"/>
+                    </a:lnT>
+                    <a:lnB w="9525" cap="flat" cmpd="sng" algn="ctr">
+                      <a:solidFill>
+                        <a:srgbClr val="E2E8F0"/>
+                      </a:solidFill>
+                      <a:prstDash val="solid"/>
+                      <a:round/>
+                      <a:headEnd type="none" w="med" len="med"/>
+                      <a:tailEnd type="none" w="med" len="med"/>
+                    </a:lnB>
+                    <a:solidFill>
+                      <a:srgbClr val="FFFFFF"/>
+                    </a:solidFill>
+                  </a:tcPr>
+                </a:tc>
+                <a:tc>
+                  <a:txBody>
+                    <a:bodyPr/>
+                    <a:lstStyle/>
+                    <a:p>
+                      <a:pPr indent="0" marL="0">
+                        <a:buNone/>
+                      </a:pPr>
+                      <a:r>
+                        <a:rPr lang="en-US" sz="1050" dirty="0">
+                          <a:solidFill>
+                            <a:srgbClr val="0F172A"/>
+                          </a:solidFill>
+                          <a:latin typeface="Segoe UI" pitchFamily="34" charset="0"/>
+                          <a:ea typeface="Segoe UI" pitchFamily="34" charset="-122"/>
+                          <a:cs typeface="Segoe UI" pitchFamily="34" charset="-120"/>
+                        </a:rPr>
+                        <a:t>Chia sẻ qua harness scripts/skills vendored vào repo - không phải packages</a:t>
+                      </a:r>
+                      <a:endParaRPr lang="en-US" sz="1050" dirty="0">
+                        <a:latin typeface="Segoe UI" charset="0"/>
+                        <a:ea typeface="Segoe UI" charset="0"/>
+                        <a:cs typeface="Segoe UI" charset="0"/>
+                      </a:endParaRPr>
+                    </a:p>
+                  </a:txBody>
+                  <a:tcPr marL="73152" marR="73152" marT="73152" marB="73152" anchor="ctr">
+                    <a:lnL w="9525" cap="flat" cmpd="sng" algn="ctr">
+                      <a:solidFill>
+                        <a:srgbClr val="E2E8F0"/>
+                      </a:solidFill>
+                      <a:prstDash val="solid"/>
+                      <a:round/>
+                      <a:headEnd type="none" w="med" len="med"/>
+                      <a:tailEnd type="none" w="med" len="med"/>
+                    </a:lnL>
+                    <a:lnR w="9525" cap="flat" cmpd="sng" algn="ctr">
+                      <a:solidFill>
+                        <a:srgbClr val="E2E8F0"/>
+                      </a:solidFill>
+                      <a:prstDash val="solid"/>
+                      <a:round/>
+                      <a:headEnd type="none" w="med" len="med"/>
+                      <a:tailEnd type="none" w="med" len="med"/>
+                    </a:lnR>
+                    <a:lnT w="9525" cap="flat" cmpd="sng" algn="ctr">
+                      <a:solidFill>
+                        <a:srgbClr val="E2E8F0"/>
+                      </a:solidFill>
+                      <a:prstDash val="solid"/>
+                      <a:round/>
+                      <a:headEnd type="none" w="med" len="med"/>
+                      <a:tailEnd type="none" w="med" len="med"/>
+                    </a:lnT>
+                    <a:lnB w="9525" cap="flat" cmpd="sng" algn="ctr">
+                      <a:solidFill>
+                        <a:srgbClr val="E2E8F0"/>
+                      </a:solidFill>
+                      <a:prstDash val="solid"/>
+                      <a:round/>
+                      <a:headEnd type="none" w="med" len="med"/>
+                      <a:tailEnd type="none" w="med" len="med"/>
+                    </a:lnB>
+                    <a:solidFill>
+                      <a:srgbClr val="FFFFFF"/>
+                    </a:solidFill>
+                  </a:tcPr>
+                </a:tc>
+                <a:tc>
+                  <a:txBody>
+                    <a:bodyPr/>
+                    <a:lstStyle/>
+                    <a:p>
+                      <a:pPr indent="0" marL="0">
+                        <a:buNone/>
+                      </a:pPr>
+                      <a:r>
+                        <a:rPr lang="en-US" sz="1050" dirty="0">
+                          <a:solidFill>
+                            <a:srgbClr val="0F172A"/>
+                          </a:solidFill>
+                          <a:latin typeface="Segoe UI" pitchFamily="34" charset="0"/>
+                          <a:ea typeface="Segoe UI" pitchFamily="34" charset="-122"/>
+                          <a:cs typeface="Segoe UI" pitchFamily="34" charset="-120"/>
+                        </a:rPr>
+                        <a:t>Shared packages import trực tiếp - tiện nhưng couple phiên bản</a:t>
+                      </a:r>
+                      <a:endParaRPr lang="en-US" sz="1050" dirty="0">
+                        <a:latin typeface="Segoe UI" charset="0"/>
+                        <a:ea typeface="Segoe UI" charset="0"/>
+                        <a:cs typeface="Segoe UI" charset="0"/>
+                      </a:endParaRPr>
+                    </a:p>
+                  </a:txBody>
+                  <a:tcPr marL="73152" marR="73152" marT="73152" marB="73152" anchor="ctr">
+                    <a:lnL w="9525" cap="flat" cmpd="sng" algn="ctr">
+                      <a:solidFill>
+                        <a:srgbClr val="E2E8F0"/>
+                      </a:solidFill>
+                      <a:prstDash val="solid"/>
+                      <a:round/>
+                      <a:headEnd type="none" w="med" len="med"/>
+                      <a:tailEnd type="none" w="med" len="med"/>
+                    </a:lnL>
+                    <a:lnR w="9525" cap="flat" cmpd="sng" algn="ctr">
+                      <a:solidFill>
+                        <a:srgbClr val="E2E8F0"/>
+                      </a:solidFill>
+                      <a:prstDash val="solid"/>
+                      <a:round/>
+                      <a:headEnd type="none" w="med" len="med"/>
+                      <a:tailEnd type="none" w="med" len="med"/>
+                    </a:lnR>
+                    <a:lnT w="9525" cap="flat" cmpd="sng" algn="ctr">
+                      <a:solidFill>
+                        <a:srgbClr val="E2E8F0"/>
+                      </a:solidFill>
+                      <a:prstDash val="solid"/>
+                      <a:round/>
+                      <a:headEnd type="none" w="med" len="med"/>
+                      <a:tailEnd type="none" w="med" len="med"/>
+                    </a:lnT>
+                    <a:lnB w="9525" cap="flat" cmpd="sng" algn="ctr">
+                      <a:solidFill>
+                        <a:srgbClr val="E2E8F0"/>
+                      </a:solidFill>
+                      <a:prstDash val="solid"/>
+                      <a:round/>
+                      <a:headEnd type="none" w="med" len="med"/>
+                      <a:tailEnd type="none" w="med" len="med"/>
+                    </a:lnB>
+                    <a:solidFill>
+                      <a:srgbClr val="FFFFFF"/>
+                    </a:solidFill>
+                  </a:tcPr>
+                </a:tc>
+              </a:tr>
+              <a:tr h="566928">
+                <a:tc>
+                  <a:txBody>
+                    <a:bodyPr/>
+                    <a:lstStyle/>
+                    <a:p>
+                      <a:pPr indent="0" marL="0">
+                        <a:buNone/>
+                      </a:pPr>
+                      <a:r>
+                        <a:rPr lang="en-US" sz="1050" dirty="0">
+                          <a:solidFill>
+                            <a:srgbClr val="0F172A"/>
+                          </a:solidFill>
+                          <a:latin typeface="Segoe UI" pitchFamily="34" charset="0"/>
+                          <a:ea typeface="Segoe UI" pitchFamily="34" charset="-122"/>
+                          <a:cs typeface="Segoe UI" pitchFamily="34" charset="-120"/>
+                        </a:rPr>
+                        <a:t>Blast radius</a:t>
+                      </a:r>
+                      <a:endParaRPr lang="en-US" sz="1050" dirty="0">
+                        <a:latin typeface="Segoe UI" charset="0"/>
+                        <a:ea typeface="Segoe UI" charset="0"/>
+                        <a:cs typeface="Segoe UI" charset="0"/>
+                      </a:endParaRPr>
+                    </a:p>
+                  </a:txBody>
+                  <a:tcPr marL="73152" marR="73152" marT="73152" marB="73152" anchor="ctr">
+                    <a:lnL w="9525" cap="flat" cmpd="sng" algn="ctr">
+                      <a:solidFill>
+                        <a:srgbClr val="E2E8F0"/>
+                      </a:solidFill>
+                      <a:prstDash val="solid"/>
+                      <a:round/>
+                      <a:headEnd type="none" w="med" len="med"/>
+                      <a:tailEnd type="none" w="med" len="med"/>
+                    </a:lnL>
+                    <a:lnR w="9525" cap="flat" cmpd="sng" algn="ctr">
+                      <a:solidFill>
+                        <a:srgbClr val="E2E8F0"/>
+                      </a:solidFill>
+                      <a:prstDash val="solid"/>
+                      <a:round/>
+                      <a:headEnd type="none" w="med" len="med"/>
+                      <a:tailEnd type="none" w="med" len="med"/>
+                    </a:lnR>
+                    <a:lnT w="9525" cap="flat" cmpd="sng" algn="ctr">
+                      <a:solidFill>
+                        <a:srgbClr val="E2E8F0"/>
+                      </a:solidFill>
+                      <a:prstDash val="solid"/>
+                      <a:round/>
+                      <a:headEnd type="none" w="med" len="med"/>
+                      <a:tailEnd type="none" w="med" len="med"/>
+                    </a:lnT>
+                    <a:lnB w="9525" cap="flat" cmpd="sng" algn="ctr">
+                      <a:solidFill>
+                        <a:srgbClr val="E2E8F0"/>
+                      </a:solidFill>
+                      <a:prstDash val="solid"/>
+                      <a:round/>
+                      <a:headEnd type="none" w="med" len="med"/>
+                      <a:tailEnd type="none" w="med" len="med"/>
+                    </a:lnB>
+                    <a:solidFill>
+                      <a:srgbClr val="F8FAFC"/>
+                    </a:solidFill>
+                  </a:tcPr>
+                </a:tc>
+                <a:tc>
+                  <a:txBody>
+                    <a:bodyPr/>
+                    <a:lstStyle/>
+                    <a:p>
+                      <a:pPr indent="0" marL="0">
+                        <a:buNone/>
+                      </a:pPr>
+                      <a:r>
+                        <a:rPr lang="en-US" sz="1050" dirty="0">
+                          <a:solidFill>
+                            <a:srgbClr val="0F172A"/>
+                          </a:solidFill>
+                          <a:latin typeface="Segoe UI" pitchFamily="34" charset="0"/>
+                          <a:ea typeface="Segoe UI" pitchFamily="34" charset="-122"/>
+                          <a:cs typeface="Segoe UI" pitchFamily="34" charset="-120"/>
+                        </a:rPr>
+                        <a:t>Lỗi/secret/bug giới hạn trong 1 repo</a:t>
+                      </a:r>
+                      <a:endParaRPr lang="en-US" sz="1050" dirty="0">
+                        <a:latin typeface="Segoe UI" charset="0"/>
+                        <a:ea typeface="Segoe UI" charset="0"/>
+                        <a:cs typeface="Segoe UI" charset="0"/>
+                      </a:endParaRPr>
+                    </a:p>
+                  </a:txBody>
+                  <a:tcPr marL="73152" marR="73152" marT="73152" marB="73152" anchor="ctr">
+                    <a:lnL w="9525" cap="flat" cmpd="sng" algn="ctr">
+                      <a:solidFill>
+                        <a:srgbClr val="E2E8F0"/>
+                      </a:solidFill>
+                      <a:prstDash val="solid"/>
+                      <a:round/>
+                      <a:headEnd type="none" w="med" len="med"/>
+                      <a:tailEnd type="none" w="med" len="med"/>
+                    </a:lnL>
+                    <a:lnR w="9525" cap="flat" cmpd="sng" algn="ctr">
+                      <a:solidFill>
+                        <a:srgbClr val="E2E8F0"/>
+                      </a:solidFill>
+                      <a:prstDash val="solid"/>
+                      <a:round/>
+                      <a:headEnd type="none" w="med" len="med"/>
+                      <a:tailEnd type="none" w="med" len="med"/>
+                    </a:lnR>
+                    <a:lnT w="9525" cap="flat" cmpd="sng" algn="ctr">
+                      <a:solidFill>
+                        <a:srgbClr val="E2E8F0"/>
+                      </a:solidFill>
+                      <a:prstDash val="solid"/>
+                      <a:round/>
+                      <a:headEnd type="none" w="med" len="med"/>
+                      <a:tailEnd type="none" w="med" len="med"/>
+                    </a:lnT>
+                    <a:lnB w="9525" cap="flat" cmpd="sng" algn="ctr">
+                      <a:solidFill>
+                        <a:srgbClr val="E2E8F0"/>
+                      </a:solidFill>
+                      <a:prstDash val="solid"/>
+                      <a:round/>
+                      <a:headEnd type="none" w="med" len="med"/>
+                      <a:tailEnd type="none" w="med" len="med"/>
+                    </a:lnB>
+                    <a:solidFill>
+                      <a:srgbClr val="F8FAFC"/>
+                    </a:solidFill>
+                  </a:tcPr>
+                </a:tc>
+                <a:tc>
+                  <a:txBody>
+                    <a:bodyPr/>
+                    <a:lstStyle/>
+                    <a:p>
+                      <a:pPr indent="0" marL="0">
+                        <a:buNone/>
+                      </a:pPr>
+                      <a:r>
+                        <a:rPr lang="en-US" sz="1050" dirty="0">
+                          <a:solidFill>
+                            <a:srgbClr val="0F172A"/>
+                          </a:solidFill>
+                          <a:latin typeface="Segoe UI" pitchFamily="34" charset="0"/>
+                          <a:ea typeface="Segoe UI" pitchFamily="34" charset="-122"/>
+                          <a:cs typeface="Segoe UI" pitchFamily="34" charset="-120"/>
+                        </a:rPr>
+                        <a:t>Một commit xấu có thể phá nhiều app cùng lúc</a:t>
+                      </a:r>
+                      <a:endParaRPr lang="en-US" sz="1050" dirty="0">
+                        <a:latin typeface="Segoe UI" charset="0"/>
+                        <a:ea typeface="Segoe UI" charset="0"/>
+                        <a:cs typeface="Segoe UI" charset="0"/>
+                      </a:endParaRPr>
+                    </a:p>
+                  </a:txBody>
+                  <a:tcPr marL="73152" marR="73152" marT="73152" marB="73152" anchor="ctr">
+                    <a:lnL w="9525" cap="flat" cmpd="sng" algn="ctr">
+                      <a:solidFill>
+                        <a:srgbClr val="E2E8F0"/>
+                      </a:solidFill>
+                      <a:prstDash val="solid"/>
+                      <a:round/>
+                      <a:headEnd type="none" w="med" len="med"/>
+                      <a:tailEnd type="none" w="med" len="med"/>
+                    </a:lnL>
+                    <a:lnR w="9525" cap="flat" cmpd="sng" algn="ctr">
+                      <a:solidFill>
+                        <a:srgbClr val="E2E8F0"/>
+                      </a:solidFill>
+                      <a:prstDash val="solid"/>
+                      <a:round/>
+                      <a:headEnd type="none" w="med" len="med"/>
+                      <a:tailEnd type="none" w="med" len="med"/>
+                    </a:lnR>
+                    <a:lnT w="9525" cap="flat" cmpd="sng" algn="ctr">
+                      <a:solidFill>
+                        <a:srgbClr val="E2E8F0"/>
+                      </a:solidFill>
+                      <a:prstDash val="solid"/>
+                      <a:round/>
+                      <a:headEnd type="none" w="med" len="med"/>
+                      <a:tailEnd type="none" w="med" len="med"/>
+                    </a:lnT>
+                    <a:lnB w="9525" cap="flat" cmpd="sng" algn="ctr">
+                      <a:solidFill>
+                        <a:srgbClr val="E2E8F0"/>
+                      </a:solidFill>
+                      <a:prstDash val="solid"/>
+                      <a:round/>
+                      <a:headEnd type="none" w="med" len="med"/>
+                      <a:tailEnd type="none" w="med" len="med"/>
+                    </a:lnB>
+                    <a:solidFill>
+                      <a:srgbClr val="F8FAFC"/>
+                    </a:solidFill>
+                  </a:tcPr>
+                </a:tc>
+              </a:tr>
+              <a:tr h="566928">
+                <a:tc>
+                  <a:txBody>
+                    <a:bodyPr/>
+                    <a:lstStyle/>
+                    <a:p>
+                      <a:pPr indent="0" marL="0">
+                        <a:buNone/>
+                      </a:pPr>
+                      <a:r>
+                        <a:rPr lang="en-US" sz="1050" dirty="0">
+                          <a:solidFill>
+                            <a:srgbClr val="0F172A"/>
+                          </a:solidFill>
+                          <a:latin typeface="Segoe UI" pitchFamily="34" charset="0"/>
+                          <a:ea typeface="Segoe UI" pitchFamily="34" charset="-122"/>
+                          <a:cs typeface="Segoe UI" pitchFamily="34" charset="-120"/>
+                        </a:rPr>
+                        <a:t>Quyền truy cập</a:t>
+                      </a:r>
+                      <a:endParaRPr lang="en-US" sz="1050" dirty="0">
+                        <a:latin typeface="Segoe UI" charset="0"/>
+                        <a:ea typeface="Segoe UI" charset="0"/>
+                        <a:cs typeface="Segoe UI" charset="0"/>
+                      </a:endParaRPr>
+                    </a:p>
+                  </a:txBody>
+                  <a:tcPr marL="73152" marR="73152" marT="73152" marB="73152" anchor="ctr">
+                    <a:lnL w="9525" cap="flat" cmpd="sng" algn="ctr">
+                      <a:solidFill>
+                        <a:srgbClr val="E2E8F0"/>
+                      </a:solidFill>
+                      <a:prstDash val="solid"/>
+                      <a:round/>
+                      <a:headEnd type="none" w="med" len="med"/>
+                      <a:tailEnd type="none" w="med" len="med"/>
+                    </a:lnL>
+                    <a:lnR w="9525" cap="flat" cmpd="sng" algn="ctr">
+                      <a:solidFill>
+                        <a:srgbClr val="E2E8F0"/>
+                      </a:solidFill>
+                      <a:prstDash val="solid"/>
+                      <a:round/>
+                      <a:headEnd type="none" w="med" len="med"/>
+                      <a:tailEnd type="none" w="med" len="med"/>
+                    </a:lnR>
+                    <a:lnT w="9525" cap="flat" cmpd="sng" algn="ctr">
+                      <a:solidFill>
+                        <a:srgbClr val="E2E8F0"/>
+                      </a:solidFill>
+                      <a:prstDash val="solid"/>
+                      <a:round/>
+                      <a:headEnd type="none" w="med" len="med"/>
+                      <a:tailEnd type="none" w="med" len="med"/>
+                    </a:lnT>
+                    <a:lnB w="9525" cap="flat" cmpd="sng" algn="ctr">
+                      <a:solidFill>
+                        <a:srgbClr val="E2E8F0"/>
+                      </a:solidFill>
+                      <a:prstDash val="solid"/>
+                      <a:round/>
+                      <a:headEnd type="none" w="med" len="med"/>
+                      <a:tailEnd type="none" w="med" len="med"/>
+                    </a:lnB>
+                    <a:solidFill>
+                      <a:srgbClr val="FFFFFF"/>
+                    </a:solidFill>
+                  </a:tcPr>
+                </a:tc>
+                <a:tc>
+                  <a:txBody>
+                    <a:bodyPr/>
+                    <a:lstStyle/>
+                    <a:p>
+                      <a:pPr indent="0" marL="0">
+                        <a:buNone/>
+                      </a:pPr>
+                      <a:r>
+                        <a:rPr lang="en-US" sz="1050" dirty="0">
+                          <a:solidFill>
+                            <a:srgbClr val="0F172A"/>
+                          </a:solidFill>
+                          <a:latin typeface="Segoe UI" pitchFamily="34" charset="0"/>
+                          <a:ea typeface="Segoe UI" pitchFamily="34" charset="-122"/>
+                          <a:cs typeface="Segoe UI" pitchFamily="34" charset="-120"/>
+                        </a:rPr>
+                        <a:t>Repo-level - dễ cấp quyền từng sản phẩm</a:t>
+                      </a:r>
+                      <a:endParaRPr lang="en-US" sz="1050" dirty="0">
+                        <a:latin typeface="Segoe UI" charset="0"/>
+                        <a:ea typeface="Segoe UI" charset="0"/>
+                        <a:cs typeface="Segoe UI" charset="0"/>
+                      </a:endParaRPr>
+                    </a:p>
+                  </a:txBody>
+                  <a:tcPr marL="73152" marR="73152" marT="73152" marB="73152" anchor="ctr">
+                    <a:lnL w="9525" cap="flat" cmpd="sng" algn="ctr">
+                      <a:solidFill>
+                        <a:srgbClr val="E2E8F0"/>
+                      </a:solidFill>
+                      <a:prstDash val="solid"/>
+                      <a:round/>
+                      <a:headEnd type="none" w="med" len="med"/>
+                      <a:tailEnd type="none" w="med" len="med"/>
+                    </a:lnL>
+                    <a:lnR w="9525" cap="flat" cmpd="sng" algn="ctr">
+                      <a:solidFill>
+                        <a:srgbClr val="E2E8F0"/>
+                      </a:solidFill>
+                      <a:prstDash val="solid"/>
+                      <a:round/>
+                      <a:headEnd type="none" w="med" len="med"/>
+                      <a:tailEnd type="none" w="med" len="med"/>
+                    </a:lnR>
+                    <a:lnT w="9525" cap="flat" cmpd="sng" algn="ctr">
+                      <a:solidFill>
+                        <a:srgbClr val="E2E8F0"/>
+                      </a:solidFill>
+                      <a:prstDash val="solid"/>
+                      <a:round/>
+                      <a:headEnd type="none" w="med" len="med"/>
+                      <a:tailEnd type="none" w="med" len="med"/>
+                    </a:lnT>
+                    <a:lnB w="9525" cap="flat" cmpd="sng" algn="ctr">
+                      <a:solidFill>
+                        <a:srgbClr val="E2E8F0"/>
+                      </a:solidFill>
+                      <a:prstDash val="solid"/>
+                      <a:round/>
+                      <a:headEnd type="none" w="med" len="med"/>
+                      <a:tailEnd type="none" w="med" len="med"/>
+                    </a:lnB>
+                    <a:solidFill>
+                      <a:srgbClr val="FFFFFF"/>
+                    </a:solidFill>
+                  </a:tcPr>
+                </a:tc>
+                <a:tc>
+                  <a:txBody>
+                    <a:bodyPr/>
+                    <a:lstStyle/>
+                    <a:p>
+                      <a:pPr indent="0" marL="0">
+                        <a:buNone/>
+                      </a:pPr>
+                      <a:r>
+                        <a:rPr lang="en-US" sz="1050" dirty="0">
+                          <a:solidFill>
+                            <a:srgbClr val="0F172A"/>
+                          </a:solidFill>
+                          <a:latin typeface="Segoe UI" pitchFamily="34" charset="0"/>
+                          <a:ea typeface="Segoe UI" pitchFamily="34" charset="-122"/>
+                          <a:cs typeface="Segoe UI" pitchFamily="34" charset="-120"/>
+                        </a:rPr>
+                        <a:t>Cần CODEOWNERS phức tạp để chặn chéo</a:t>
+                      </a:r>
+                      <a:endParaRPr lang="en-US" sz="1050" dirty="0">
+                        <a:latin typeface="Segoe UI" charset="0"/>
+                        <a:ea typeface="Segoe UI" charset="0"/>
+                        <a:cs typeface="Segoe UI" charset="0"/>
+                      </a:endParaRPr>
+                    </a:p>
+                  </a:txBody>
+                  <a:tcPr marL="73152" marR="73152" marT="73152" marB="73152" anchor="ctr">
+                    <a:lnL w="9525" cap="flat" cmpd="sng" algn="ctr">
+                      <a:solidFill>
+                        <a:srgbClr val="E2E8F0"/>
+                      </a:solidFill>
+                      <a:prstDash val="solid"/>
+                      <a:round/>
+                      <a:headEnd type="none" w="med" len="med"/>
+                      <a:tailEnd type="none" w="med" len="med"/>
+                    </a:lnL>
+                    <a:lnR w="9525" cap="flat" cmpd="sng" algn="ctr">
+                      <a:solidFill>
+                        <a:srgbClr val="E2E8F0"/>
+                      </a:solidFill>
+                      <a:prstDash val="solid"/>
+                      <a:round/>
+                      <a:headEnd type="none" w="med" len="med"/>
+                      <a:tailEnd type="none" w="med" len="med"/>
+                    </a:lnR>
+                    <a:lnT w="9525" cap="flat" cmpd="sng" algn="ctr">
+                      <a:solidFill>
+                        <a:srgbClr val="E2E8F0"/>
+                      </a:solidFill>
+                      <a:prstDash val="solid"/>
+                      <a:round/>
+                      <a:headEnd type="none" w="med" len="med"/>
+                      <a:tailEnd type="none" w="med" len="med"/>
+                    </a:lnT>
+                    <a:lnB w="9525" cap="flat" cmpd="sng" algn="ctr">
+                      <a:solidFill>
+                        <a:srgbClr val="E2E8F0"/>
+                      </a:solidFill>
+                      <a:prstDash val="solid"/>
+                      <a:round/>
+                      <a:headEnd type="none" w="med" len="med"/>
+                      <a:tailEnd type="none" w="med" len="med"/>
+                    </a:lnB>
+                    <a:solidFill>
+                      <a:srgbClr val="FFFFFF"/>
+                    </a:solidFill>
+                  </a:tcPr>
+                </a:tc>
+              </a:tr>
+              <a:tr h="566928">
+                <a:tc>
+                  <a:txBody>
+                    <a:bodyPr/>
+                    <a:lstStyle/>
+                    <a:p>
+                      <a:pPr indent="0" marL="0">
+                        <a:buNone/>
+                      </a:pPr>
+                      <a:r>
+                        <a:rPr lang="en-US" sz="1050" dirty="0">
+                          <a:solidFill>
+                            <a:srgbClr val="0F172A"/>
+                          </a:solidFill>
+                          <a:latin typeface="Segoe UI" pitchFamily="34" charset="0"/>
+                          <a:ea typeface="Segoe UI" pitchFamily="34" charset="-122"/>
+                          <a:cs typeface="Segoe UI" pitchFamily="34" charset="-120"/>
+                        </a:rPr>
+                        <a:t>Phù hợp bài toán</a:t>
+                      </a:r>
+                      <a:endParaRPr lang="en-US" sz="1050" dirty="0">
+                        <a:latin typeface="Segoe UI" charset="0"/>
+                        <a:ea typeface="Segoe UI" charset="0"/>
+                        <a:cs typeface="Segoe UI" charset="0"/>
+                      </a:endParaRPr>
+                    </a:p>
+                  </a:txBody>
+                  <a:tcPr marL="73152" marR="73152" marT="73152" marB="73152" anchor="ctr">
+                    <a:lnL w="9525" cap="flat" cmpd="sng" algn="ctr">
+                      <a:solidFill>
+                        <a:srgbClr val="E2E8F0"/>
+                      </a:solidFill>
+                      <a:prstDash val="solid"/>
+                      <a:round/>
+                      <a:headEnd type="none" w="med" len="med"/>
+                      <a:tailEnd type="none" w="med" len="med"/>
+                    </a:lnL>
+                    <a:lnR w="9525" cap="flat" cmpd="sng" algn="ctr">
+                      <a:solidFill>
+                        <a:srgbClr val="E2E8F0"/>
+                      </a:solidFill>
+                      <a:prstDash val="solid"/>
+                      <a:round/>
+                      <a:headEnd type="none" w="med" len="med"/>
+                      <a:tailEnd type="none" w="med" len="med"/>
+                    </a:lnR>
+                    <a:lnT w="9525" cap="flat" cmpd="sng" algn="ctr">
+                      <a:solidFill>
+                        <a:srgbClr val="E2E8F0"/>
+                      </a:solidFill>
+                      <a:prstDash val="solid"/>
+                      <a:round/>
+                      <a:headEnd type="none" w="med" len="med"/>
+                      <a:tailEnd type="none" w="med" len="med"/>
+                    </a:lnT>
+                    <a:lnB w="9525" cap="flat" cmpd="sng" algn="ctr">
+                      <a:solidFill>
+                        <a:srgbClr val="E2E8F0"/>
+                      </a:solidFill>
+                      <a:prstDash val="solid"/>
+                      <a:round/>
+                      <a:headEnd type="none" w="med" len="med"/>
+                      <a:tailEnd type="none" w="med" len="med"/>
+                    </a:lnB>
+                    <a:solidFill>
+                      <a:srgbClr val="F8FAFC"/>
+                    </a:solidFill>
+                  </a:tcPr>
+                </a:tc>
+                <a:tc>
+                  <a:txBody>
+                    <a:bodyPr/>
+                    <a:lstStyle/>
+                    <a:p>
+                      <a:pPr indent="0" marL="0">
+                        <a:buNone/>
+                      </a:pPr>
+                      <a:r>
+                        <a:rPr lang="en-US" sz="1050" dirty="0">
+                          <a:solidFill>
+                            <a:srgbClr val="0F172A"/>
+                          </a:solidFill>
+                          <a:latin typeface="Segoe UI" pitchFamily="34" charset="0"/>
+                          <a:ea typeface="Segoe UI" pitchFamily="34" charset="-122"/>
+                          <a:cs typeface="Segoe UI" pitchFamily="34" charset="-120"/>
+                        </a:rPr>
+                        <a:t>SCN độc lập lifecycle/khách hàng - không share domain model với ai</a:t>
+                      </a:r>
+                      <a:endParaRPr lang="en-US" sz="1050" dirty="0">
+                        <a:latin typeface="Segoe UI" charset="0"/>
+                        <a:ea typeface="Segoe UI" charset="0"/>
+                        <a:cs typeface="Segoe UI" charset="0"/>
+                      </a:endParaRPr>
+                    </a:p>
+                  </a:txBody>
+                  <a:tcPr marL="73152" marR="73152" marT="73152" marB="73152" anchor="ctr">
+                    <a:lnL w="9525" cap="flat" cmpd="sng" algn="ctr">
+                      <a:solidFill>
+                        <a:srgbClr val="E2E8F0"/>
+                      </a:solidFill>
+                      <a:prstDash val="solid"/>
+                      <a:round/>
+                      <a:headEnd type="none" w="med" len="med"/>
+                      <a:tailEnd type="none" w="med" len="med"/>
+                    </a:lnL>
+                    <a:lnR w="9525" cap="flat" cmpd="sng" algn="ctr">
+                      <a:solidFill>
+                        <a:srgbClr val="E2E8F0"/>
+                      </a:solidFill>
+                      <a:prstDash val="solid"/>
+                      <a:round/>
+                      <a:headEnd type="none" w="med" len="med"/>
+                      <a:tailEnd type="none" w="med" len="med"/>
+                    </a:lnR>
+                    <a:lnT w="9525" cap="flat" cmpd="sng" algn="ctr">
+                      <a:solidFill>
+                        <a:srgbClr val="E2E8F0"/>
+                      </a:solidFill>
+                      <a:prstDash val="solid"/>
+                      <a:round/>
+                      <a:headEnd type="none" w="med" len="med"/>
+                      <a:tailEnd type="none" w="med" len="med"/>
+                    </a:lnT>
+                    <a:lnB w="9525" cap="flat" cmpd="sng" algn="ctr">
+                      <a:solidFill>
+                        <a:srgbClr val="E2E8F0"/>
+                      </a:solidFill>
+                      <a:prstDash val="solid"/>
+                      <a:round/>
+                      <a:headEnd type="none" w="med" len="med"/>
+                      <a:tailEnd type="none" w="med" len="med"/>
+                    </a:lnB>
+                    <a:solidFill>
+                      <a:srgbClr val="F8FAFC"/>
+                    </a:solidFill>
+                  </a:tcPr>
+                </a:tc>
+                <a:tc>
+                  <a:txBody>
+                    <a:bodyPr/>
+                    <a:lstStyle/>
+                    <a:p>
+                      <a:pPr indent="0" marL="0">
+                        <a:buNone/>
+                      </a:pPr>
+                      <a:r>
+                        <a:rPr lang="en-US" sz="1050" dirty="0">
+                          <a:solidFill>
+                            <a:srgbClr val="0F172A"/>
+                          </a:solidFill>
+                          <a:latin typeface="Segoe UI" pitchFamily="34" charset="0"/>
+                          <a:ea typeface="Segoe UI" pitchFamily="34" charset="-122"/>
+                          <a:cs typeface="Segoe UI" pitchFamily="34" charset="-120"/>
+                        </a:rPr>
+                        <a:t>Chỉ đúng nếu nhiều app chia sẻ domain model chung - SCN không có nhu cầu đó</a:t>
+                      </a:r>
+                      <a:endParaRPr lang="en-US" sz="1050" dirty="0">
+                        <a:latin typeface="Segoe UI" charset="0"/>
+                        <a:ea typeface="Segoe UI" charset="0"/>
+                        <a:cs typeface="Segoe UI" charset="0"/>
+                      </a:endParaRPr>
+                    </a:p>
+                  </a:txBody>
+                  <a:tcPr marL="73152" marR="73152" marT="73152" marB="73152" anchor="ctr">
+                    <a:lnL w="9525" cap="flat" cmpd="sng" algn="ctr">
+                      <a:solidFill>
+                        <a:srgbClr val="E2E8F0"/>
+                      </a:solidFill>
+                      <a:prstDash val="solid"/>
+                      <a:round/>
+                      <a:headEnd type="none" w="med" len="med"/>
+                      <a:tailEnd type="none" w="med" len="med"/>
+                    </a:lnL>
+                    <a:lnR w="9525" cap="flat" cmpd="sng" algn="ctr">
+                      <a:solidFill>
+                        <a:srgbClr val="E2E8F0"/>
+                      </a:solidFill>
+                      <a:prstDash val="solid"/>
+                      <a:round/>
+                      <a:headEnd type="none" w="med" len="med"/>
+                      <a:tailEnd type="none" w="med" len="med"/>
+                    </a:lnR>
+                    <a:lnT w="9525" cap="flat" cmpd="sng" algn="ctr">
+                      <a:solidFill>
+                        <a:srgbClr val="E2E8F0"/>
+                      </a:solidFill>
+                      <a:prstDash val="solid"/>
+                      <a:round/>
+                      <a:headEnd type="none" w="med" len="med"/>
+                      <a:tailEnd type="none" w="med" len="med"/>
+                    </a:lnT>
+                    <a:lnB w="9525" cap="flat" cmpd="sng" algn="ctr">
+                      <a:solidFill>
+                        <a:srgbClr val="E2E8F0"/>
+                      </a:solidFill>
+                      <a:prstDash val="solid"/>
+                      <a:round/>
+                      <a:headEnd type="none" w="med" len="med"/>
+                      <a:tailEnd type="none" w="med" len="med"/>
+                    </a:lnB>
+                    <a:solidFill>
+                      <a:srgbClr val="F8FAFC"/>
+                    </a:solidFill>
+                  </a:tcPr>
+                </a:tc>
+              </a:tr>
+            </a:tbl>
+          </a:graphicData>
+        </a:graphic>
+      </p:graphicFrame>
+      <p:sp>
+        <p:nvSpPr>
+          <p:cNvPr id="9" name="Text 6"/>
+          <p:cNvSpPr/>
+          <p:nvPr/>
+        </p:nvSpPr>
+        <p:spPr>
+          <a:xfrm>
+            <a:off x="640080" y="6263640"/>
+            <a:ext cx="10972800" cy="457200"/>
+          </a:xfrm>
+          <a:prstGeom prst="rect">
+            <a:avLst/>
+          </a:prstGeom>
+          <a:noFill/>
+          <a:ln/>
+        </p:spPr>
+        <p:txBody>
+          <a:bodyPr wrap="square" rtlCol="0" anchor="ctr"/>
+          <a:lstStyle/>
+          <a:p>
+            <a:pPr indent="0" marL="0">
+              <a:buNone/>
+            </a:pPr>
+            <a:r>
+              <a:rPr lang="en-US" sz="1050" i="1" dirty="0">
+                <a:solidFill>
+                  <a:srgbClr val="0F766E"/>
+                </a:solidFill>
+                <a:latin typeface="Segoe UI" pitchFamily="34" charset="0"/>
+                <a:ea typeface="Segoe UI" pitchFamily="34" charset="-122"/>
+                <a:cs typeface="Segoe UI" pitchFamily="34" charset="-120"/>
+              </a:rPr>
+              <a:t>SCN là bounded context hoàn chỉnh - repo riêng phản ánh đúng ranh giới deploy và ranh giới domain.</a:t>
+            </a:r>
+            <a:endParaRPr lang="en-US" sz="1050" dirty="0"/>
+          </a:p>
+        </p:txBody>
+      </p:sp>
+    </p:spTree>
+  </p:cSld>
+  <p:clrMapOvr>
+    <a:masterClrMapping/>
+  </p:clrMapOvr>
+  <p:transition xmlns:p="http://schemas.openxmlformats.org/presentationml/2006/main" spd="fast" advClick="1">
+    <p:fade/>
+  </p:transition>
+</p:sld>
+</file>
+
+<file path=ppt/slides/slide11.xml><?xml version="1.0" encoding="utf-8"?>
+<p:sld xmlns:a="http://schemas.openxmlformats.org/drawingml/2006/main" xmlns:r="http://schemas.openxmlformats.org/officeDocument/2006/relationships" xmlns:p="http://schemas.openxmlformats.org/presentationml/2006/main">
+  <p:cSld name="Slide 11">
     <p:bg>
       <p:bgPr>
         <a:solidFill>
@@ -3073,9 +4990,9 @@
 </p:sld>
 </file>
 
-<file path=ppt/slides/slide11.xml><?xml version="1.0" encoding="utf-8"?>
+<file path=ppt/slides/slide12.xml><?xml version="1.0" encoding="utf-8"?>
 <p:sld xmlns:a="http://schemas.openxmlformats.org/drawingml/2006/main" xmlns:r="http://schemas.openxmlformats.org/officeDocument/2006/relationships" xmlns:p="http://schemas.openxmlformats.org/presentationml/2006/main">
-  <p:cSld name="Slide 11">
+  <p:cSld name="Slide 12">
     <p:spTree>
       <p:nvGrpSpPr>
         <p:cNvPr id="1" name=""/>
@@ -3283,7 +5200,7 @@
                 <a:ea typeface="Segoe UI" pitchFamily="34" charset="-122"/>
                 <a:cs typeface="Segoe UI" pitchFamily="34" charset="-120"/>
               </a:rPr>
-              <a:t>8</a:t>
+              <a:t>9</a:t>
             </a:r>
             <a:endParaRPr lang="en-US" sz="900" dirty="0"/>
           </a:p>
@@ -3291,7 +5208,7 @@
       </p:sp>
       <p:graphicFrame>
         <p:nvGraphicFramePr>
-          <p:cNvPr id="12" name="Table 0"/>
+          <p:cNvPr id="13" name="Table 0"/>
           <p:cNvGraphicFramePr>
             <a:graphicFrameLocks noGrp="1"/>
           </p:cNvGraphicFramePr>
@@ -4467,9 +6384,9 @@
 </p:sld>
 </file>
 
-<file path=ppt/slides/slide12.xml><?xml version="1.0" encoding="utf-8"?>
+<file path=ppt/slides/slide13.xml><?xml version="1.0" encoding="utf-8"?>
 <p:sld xmlns:a="http://schemas.openxmlformats.org/drawingml/2006/main" xmlns:r="http://schemas.openxmlformats.org/officeDocument/2006/relationships" xmlns:p="http://schemas.openxmlformats.org/presentationml/2006/main">
-  <p:cSld name="Slide 12">
+  <p:cSld name="Slide 13">
     <p:spTree>
       <p:nvGrpSpPr>
         <p:cNvPr id="1" name=""/>
@@ -4677,7 +6594,7 @@
                 <a:ea typeface="Segoe UI" pitchFamily="34" charset="-122"/>
                 <a:cs typeface="Segoe UI" pitchFamily="34" charset="-120"/>
               </a:rPr>
-              <a:t>9</a:t>
+              <a:t>10</a:t>
             </a:r>
             <a:endParaRPr lang="en-US" sz="900" dirty="0"/>
           </a:p>
@@ -4905,9 +6822,9 @@
 </p:sld>
 </file>
 
-<file path=ppt/slides/slide13.xml><?xml version="1.0" encoding="utf-8"?>
+<file path=ppt/slides/slide14.xml><?xml version="1.0" encoding="utf-8"?>
 <p:sld xmlns:a="http://schemas.openxmlformats.org/drawingml/2006/main" xmlns:r="http://schemas.openxmlformats.org/officeDocument/2006/relationships" xmlns:p="http://schemas.openxmlformats.org/presentationml/2006/main">
-  <p:cSld name="Slide 13">
+  <p:cSld name="Slide 14">
     <p:spTree>
       <p:nvGrpSpPr>
         <p:cNvPr id="1" name=""/>
@@ -5115,7 +7032,7 @@
                 <a:ea typeface="Segoe UI" pitchFamily="34" charset="-122"/>
                 <a:cs typeface="Segoe UI" pitchFamily="34" charset="-120"/>
               </a:rPr>
-              <a:t>10</a:t>
+              <a:t>11</a:t>
             </a:r>
             <a:endParaRPr lang="en-US" sz="900" dirty="0"/>
           </a:p>
@@ -5123,7 +7040,7 @@
       </p:sp>
       <p:graphicFrame>
         <p:nvGraphicFramePr>
-          <p:cNvPr id="14" name="Table 0"/>
+          <p:cNvPr id="15" name="Table 0"/>
           <p:cNvGraphicFramePr>
             <a:graphicFrameLocks noGrp="1"/>
           </p:cNvGraphicFramePr>
@@ -6573,9 +8490,9 @@
 </p:sld>
 </file>
 
-<file path=ppt/slides/slide14.xml><?xml version="1.0" encoding="utf-8"?>
+<file path=ppt/slides/slide15.xml><?xml version="1.0" encoding="utf-8"?>
 <p:sld xmlns:a="http://schemas.openxmlformats.org/drawingml/2006/main" xmlns:r="http://schemas.openxmlformats.org/officeDocument/2006/relationships" xmlns:p="http://schemas.openxmlformats.org/presentationml/2006/main">
-  <p:cSld name="Slide 14">
+  <p:cSld name="Slide 15">
     <p:spTree>
       <p:nvGrpSpPr>
         <p:cNvPr id="1" name=""/>
@@ -6783,7 +8700,7 @@
                 <a:ea typeface="Segoe UI" pitchFamily="34" charset="-122"/>
                 <a:cs typeface="Segoe UI" pitchFamily="34" charset="-120"/>
               </a:rPr>
-              <a:t>11</a:t>
+              <a:t>12</a:t>
             </a:r>
             <a:endParaRPr lang="en-US" sz="900" dirty="0"/>
           </a:p>
@@ -7053,9 +8970,9 @@
 </p:sld>
 </file>
 
-<file path=ppt/slides/slide15.xml><?xml version="1.0" encoding="utf-8"?>
+<file path=ppt/slides/slide16.xml><?xml version="1.0" encoding="utf-8"?>
 <p:sld xmlns:a="http://schemas.openxmlformats.org/drawingml/2006/main" xmlns:r="http://schemas.openxmlformats.org/officeDocument/2006/relationships" xmlns:p="http://schemas.openxmlformats.org/presentationml/2006/main">
-  <p:cSld name="Slide 15">
+  <p:cSld name="Slide 16">
     <p:bg>
       <p:bgPr>
         <a:solidFill>
@@ -7245,9 +9162,9 @@
 </p:sld>
 </file>
 
-<file path=ppt/slides/slide16.xml><?xml version="1.0" encoding="utf-8"?>
+<file path=ppt/slides/slide17.xml><?xml version="1.0" encoding="utf-8"?>
 <p:sld xmlns:a="http://schemas.openxmlformats.org/drawingml/2006/main" xmlns:r="http://schemas.openxmlformats.org/officeDocument/2006/relationships" xmlns:p="http://schemas.openxmlformats.org/presentationml/2006/main">
-  <p:cSld name="Slide 16">
+  <p:cSld name="Slide 17">
     <p:spTree>
       <p:nvGrpSpPr>
         <p:cNvPr id="1" name=""/>
@@ -7455,7 +9372,7 @@
                 <a:ea typeface="Segoe UI" pitchFamily="34" charset="-122"/>
                 <a:cs typeface="Segoe UI" pitchFamily="34" charset="-120"/>
               </a:rPr>
-              <a:t>12</a:t>
+              <a:t>13</a:t>
             </a:r>
             <a:endParaRPr lang="en-US" sz="900" dirty="0"/>
           </a:p>
@@ -7463,7 +9380,7 @@
       </p:sp>
       <p:graphicFrame>
         <p:nvGraphicFramePr>
-          <p:cNvPr id="17" name="Table 0"/>
+          <p:cNvPr id="18" name="Table 0"/>
           <p:cNvGraphicFramePr>
             <a:graphicFrameLocks noGrp="1"/>
           </p:cNvGraphicFramePr>
@@ -9557,9 +11474,9 @@
 </p:sld>
 </file>
 
-<file path=ppt/slides/slide17.xml><?xml version="1.0" encoding="utf-8"?>
+<file path=ppt/slides/slide18.xml><?xml version="1.0" encoding="utf-8"?>
 <p:sld xmlns:a="http://schemas.openxmlformats.org/drawingml/2006/main" xmlns:r="http://schemas.openxmlformats.org/officeDocument/2006/relationships" xmlns:p="http://schemas.openxmlformats.org/presentationml/2006/main">
-  <p:cSld name="Slide 17">
+  <p:cSld name="Slide 18">
     <p:spTree>
       <p:nvGrpSpPr>
         <p:cNvPr id="1" name=""/>
@@ -9767,7 +11684,7 @@
                 <a:ea typeface="Segoe UI" pitchFamily="34" charset="-122"/>
                 <a:cs typeface="Segoe UI" pitchFamily="34" charset="-120"/>
               </a:rPr>
-              <a:t>13</a:t>
+              <a:t>14</a:t>
             </a:r>
             <a:endParaRPr lang="en-US" sz="900" dirty="0"/>
           </a:p>
@@ -10058,9 +11975,9 @@
 </p:sld>
 </file>
 
-<file path=ppt/slides/slide18.xml><?xml version="1.0" encoding="utf-8"?>
+<file path=ppt/slides/slide19.xml><?xml version="1.0" encoding="utf-8"?>
 <p:sld xmlns:a="http://schemas.openxmlformats.org/drawingml/2006/main" xmlns:r="http://schemas.openxmlformats.org/officeDocument/2006/relationships" xmlns:p="http://schemas.openxmlformats.org/presentationml/2006/main">
-  <p:cSld name="Slide 18">
+  <p:cSld name="Slide 19">
     <p:spTree>
       <p:nvGrpSpPr>
         <p:cNvPr id="1" name=""/>
@@ -10268,7 +12185,7 @@
                 <a:ea typeface="Segoe UI" pitchFamily="34" charset="-122"/>
                 <a:cs typeface="Segoe UI" pitchFamily="34" charset="-120"/>
               </a:rPr>
-              <a:t>14</a:t>
+              <a:t>15</a:t>
             </a:r>
             <a:endParaRPr lang="en-US" sz="900" dirty="0"/>
           </a:p>
@@ -10276,7 +12193,7 @@
       </p:sp>
       <p:graphicFrame>
         <p:nvGraphicFramePr>
-          <p:cNvPr id="19" name="Table 0"/>
+          <p:cNvPr id="20" name="Table 0"/>
           <p:cNvGraphicFramePr>
             <a:graphicFrameLocks noGrp="1"/>
           </p:cNvGraphicFramePr>
@@ -11747,1539 +13664,6 @@
           </a:graphicData>
         </a:graphic>
       </p:graphicFrame>
-    </p:spTree>
-  </p:cSld>
-  <p:clrMapOvr>
-    <a:masterClrMapping/>
-  </p:clrMapOvr>
-  <p:transition xmlns:p="http://schemas.openxmlformats.org/presentationml/2006/main" spd="fast" advClick="1">
-    <p:fade/>
-  </p:transition>
-</p:sld>
-</file>
-
-<file path=ppt/slides/slide19.xml><?xml version="1.0" encoding="utf-8"?>
-<p:sld xmlns:a="http://schemas.openxmlformats.org/drawingml/2006/main" xmlns:r="http://schemas.openxmlformats.org/officeDocument/2006/relationships" xmlns:p="http://schemas.openxmlformats.org/presentationml/2006/main">
-  <p:cSld name="Slide 19">
-    <p:spTree>
-      <p:nvGrpSpPr>
-        <p:cNvPr id="1" name=""/>
-        <p:cNvGrpSpPr/>
-        <p:nvPr/>
-      </p:nvGrpSpPr>
-      <p:grpSpPr>
-        <a:xfrm>
-          <a:off x="0" y="0"/>
-          <a:ext cx="0" cy="0"/>
-          <a:chOff x="0" y="0"/>
-          <a:chExt cx="0" cy="0"/>
-        </a:xfrm>
-      </p:grpSpPr>
-      <p:sp>
-        <p:nvSpPr>
-          <p:cNvPr id="2" name="Shape 0"/>
-          <p:cNvSpPr/>
-          <p:nvPr/>
-        </p:nvSpPr>
-        <p:spPr>
-          <a:xfrm>
-            <a:off x="0" y="0"/>
-            <a:ext cx="128016" cy="1645920"/>
-          </a:xfrm>
-          <a:prstGeom prst="rect">
-            <a:avLst/>
-          </a:prstGeom>
-          <a:solidFill>
-            <a:srgbClr val="0F766E"/>
-          </a:solidFill>
-          <a:ln/>
-        </p:spPr>
-      </p:sp>
-      <p:sp>
-        <p:nvSpPr>
-          <p:cNvPr id="3" name="Text 1"/>
-          <p:cNvSpPr/>
-          <p:nvPr/>
-        </p:nvSpPr>
-        <p:spPr>
-          <a:xfrm>
-            <a:off x="502920" y="256032"/>
-            <a:ext cx="10972800" cy="274320"/>
-          </a:xfrm>
-          <a:prstGeom prst="rect">
-            <a:avLst/>
-          </a:prstGeom>
-          <a:noFill/>
-          <a:ln/>
-        </p:spPr>
-        <p:txBody>
-          <a:bodyPr wrap="square" rtlCol="0" anchor="ctr"/>
-          <a:lstStyle/>
-          <a:p>
-            <a:pPr indent="0" marL="0">
-              <a:buNone/>
-            </a:pPr>
-            <a:r>
-              <a:rPr lang="en-US" sz="1100" b="1" dirty="0">
-                <a:solidFill>
-                  <a:srgbClr val="0F766E"/>
-                </a:solidFill>
-                <a:latin typeface="Segoe UI" pitchFamily="34" charset="0"/>
-                <a:ea typeface="Segoe UI" pitchFamily="34" charset="-122"/>
-                <a:cs typeface="Segoe UI" pitchFamily="34" charset="-120"/>
-              </a:rPr>
-              <a:t>ĐÁNH GIÁ</a:t>
-            </a:r>
-            <a:endParaRPr lang="en-US" sz="1100" dirty="0"/>
-          </a:p>
-        </p:txBody>
-      </p:sp>
-      <p:sp>
-        <p:nvSpPr>
-          <p:cNvPr id="4" name="Text 2"/>
-          <p:cNvSpPr/>
-          <p:nvPr/>
-        </p:nvSpPr>
-        <p:spPr>
-          <a:xfrm>
-            <a:off x="502920" y="502920"/>
-            <a:ext cx="11155680" cy="640080"/>
-          </a:xfrm>
-          <a:prstGeom prst="rect">
-            <a:avLst/>
-          </a:prstGeom>
-          <a:noFill/>
-          <a:ln/>
-        </p:spPr>
-        <p:txBody>
-          <a:bodyPr wrap="square" rtlCol="0" anchor="ctr"/>
-          <a:lstStyle/>
-          <a:p>
-            <a:pPr indent="0" marL="0">
-              <a:buNone/>
-            </a:pPr>
-            <a:r>
-              <a:rPr lang="en-US" sz="2600" b="1" dirty="0">
-                <a:solidFill>
-                  <a:srgbClr val="0F172A"/>
-                </a:solidFill>
-                <a:latin typeface="Segoe UI" pitchFamily="34" charset="0"/>
-                <a:ea typeface="Segoe UI" pitchFamily="34" charset="-122"/>
-                <a:cs typeface="Segoe UI" pitchFamily="34" charset="-120"/>
-              </a:rPr>
-              <a:t>Đường scale - gãy ở đâu trước, xử lý thế nào</a:t>
-            </a:r>
-            <a:endParaRPr lang="en-US" sz="2600" dirty="0"/>
-          </a:p>
-        </p:txBody>
-      </p:sp>
-      <p:sp>
-        <p:nvSpPr>
-          <p:cNvPr id="5" name="Shape 3"/>
-          <p:cNvSpPr/>
-          <p:nvPr/>
-        </p:nvSpPr>
-        <p:spPr>
-          <a:xfrm>
-            <a:off x="502920" y="1572768"/>
-            <a:ext cx="11155680" cy="0"/>
-          </a:xfrm>
-          <a:prstGeom prst="line">
-            <a:avLst/>
-          </a:prstGeom>
-          <a:noFill/>
-          <a:ln w="12700">
-            <a:solidFill>
-              <a:srgbClr val="E2E8F0"/>
-            </a:solidFill>
-            <a:prstDash val="solid"/>
-          </a:ln>
-        </p:spPr>
-      </p:sp>
-      <p:sp>
-        <p:nvSpPr>
-          <p:cNvPr id="6" name="Text 4"/>
-          <p:cNvSpPr/>
-          <p:nvPr/>
-        </p:nvSpPr>
-        <p:spPr>
-          <a:xfrm>
-            <a:off x="502920" y="6528816"/>
-            <a:ext cx="4572000" cy="274320"/>
-          </a:xfrm>
-          <a:prstGeom prst="rect">
-            <a:avLst/>
-          </a:prstGeom>
-          <a:noFill/>
-          <a:ln/>
-        </p:spPr>
-        <p:txBody>
-          <a:bodyPr wrap="square" rtlCol="0" anchor="ctr"/>
-          <a:lstStyle/>
-          <a:p>
-            <a:pPr indent="0" marL="0">
-              <a:buNone/>
-            </a:pPr>
-            <a:r>
-              <a:rPr lang="en-US" sz="900" dirty="0">
-                <a:solidFill>
-                  <a:srgbClr val="94A3B8"/>
-                </a:solidFill>
-                <a:latin typeface="Segoe UI" pitchFamily="34" charset="0"/>
-                <a:ea typeface="Segoe UI" pitchFamily="34" charset="-122"/>
-                <a:cs typeface="Segoe UI" pitchFamily="34" charset="-120"/>
-              </a:rPr>
-              <a:t>VieSchool - Sổ Chủ Nhiệm Số</a:t>
-            </a:r>
-            <a:endParaRPr lang="en-US" sz="900" dirty="0"/>
-          </a:p>
-        </p:txBody>
-      </p:sp>
-      <p:sp>
-        <p:nvSpPr>
-          <p:cNvPr id="7" name="Text 5"/>
-          <p:cNvSpPr/>
-          <p:nvPr/>
-        </p:nvSpPr>
-        <p:spPr>
-          <a:xfrm>
-            <a:off x="11338560" y="6528816"/>
-            <a:ext cx="457200" cy="274320"/>
-          </a:xfrm>
-          <a:prstGeom prst="rect">
-            <a:avLst/>
-          </a:prstGeom>
-          <a:noFill/>
-          <a:ln/>
-        </p:spPr>
-        <p:txBody>
-          <a:bodyPr wrap="square" rtlCol="0" anchor="ctr"/>
-          <a:lstStyle/>
-          <a:p>
-            <a:pPr algn="r" indent="0" marL="0">
-              <a:buNone/>
-            </a:pPr>
-            <a:r>
-              <a:rPr lang="en-US" sz="900" dirty="0">
-                <a:solidFill>
-                  <a:srgbClr val="94A3B8"/>
-                </a:solidFill>
-                <a:latin typeface="Segoe UI" pitchFamily="34" charset="0"/>
-                <a:ea typeface="Segoe UI" pitchFamily="34" charset="-122"/>
-                <a:cs typeface="Segoe UI" pitchFamily="34" charset="-120"/>
-              </a:rPr>
-              <a:t>15</a:t>
-            </a:r>
-            <a:endParaRPr lang="en-US" sz="900" dirty="0"/>
-          </a:p>
-        </p:txBody>
-      </p:sp>
-      <p:graphicFrame>
-        <p:nvGraphicFramePr>
-          <p:cNvPr id="20" name="Table 0"/>
-          <p:cNvGraphicFramePr>
-            <a:graphicFrameLocks noGrp="1"/>
-          </p:cNvGraphicFramePr>
-          <p:nvPr>
-            <p:extLst>
-              <p:ext uri="{D42A27DB-BD31-4B8C-83A1-F6EECF244321}">
-                <p14:modId xmlns:p14="http://schemas.microsoft.com/office/powerpoint/2010/main" val="1579011935"/>
-              </p:ext>
-            </p:extLst>
-          </p:nvPr>
-        </p:nvGraphicFramePr>
-        <p:xfrm>
-          <a:off x="640080" y="1783080"/>
-          <a:ext cx="10972800" cy="914400"/>
-        </p:xfrm>
-        <a:graphic>
-          <a:graphicData uri="http://schemas.openxmlformats.org/drawingml/2006/table">
-            <a:tbl>
-              <a:tblPr/>
-              <a:tblGrid>
-                <a:gridCol w="3657600"/>
-                <a:gridCol w="3657600"/>
-                <a:gridCol w="3657600"/>
-              </a:tblGrid>
-              <a:tr h="658368">
-                <a:tc>
-                  <a:txBody>
-                    <a:bodyPr/>
-                    <a:lstStyle/>
-                    <a:p>
-                      <a:pPr indent="0" marL="0">
-                        <a:buNone/>
-                      </a:pPr>
-                      <a:r>
-                        <a:rPr lang="en-US" sz="1100" b="1" dirty="0">
-                          <a:solidFill>
-                            <a:srgbClr val="FFFFFF"/>
-                          </a:solidFill>
-                          <a:latin typeface="Segoe UI" pitchFamily="34" charset="0"/>
-                          <a:ea typeface="Segoe UI" pitchFamily="34" charset="-122"/>
-                          <a:cs typeface="Segoe UI" pitchFamily="34" charset="-120"/>
-                        </a:rPr>
-                        <a:t>Quy mô</a:t>
-                      </a:r>
-                      <a:endParaRPr lang="en-US" sz="1100" dirty="0">
-                        <a:latin typeface="Segoe UI" charset="0"/>
-                        <a:ea typeface="Segoe UI" charset="0"/>
-                        <a:cs typeface="Segoe UI" charset="0"/>
-                      </a:endParaRPr>
-                    </a:p>
-                  </a:txBody>
-                  <a:tcPr marL="73152" marR="73152" marT="73152" marB="73152" anchor="ctr">
-                    <a:lnL w="9525" cap="flat" cmpd="sng" algn="ctr">
-                      <a:solidFill>
-                        <a:srgbClr val="E2E8F0"/>
-                      </a:solidFill>
-                      <a:prstDash val="solid"/>
-                      <a:round/>
-                      <a:headEnd type="none" w="med" len="med"/>
-                      <a:tailEnd type="none" w="med" len="med"/>
-                    </a:lnL>
-                    <a:lnR w="9525" cap="flat" cmpd="sng" algn="ctr">
-                      <a:solidFill>
-                        <a:srgbClr val="E2E8F0"/>
-                      </a:solidFill>
-                      <a:prstDash val="solid"/>
-                      <a:round/>
-                      <a:headEnd type="none" w="med" len="med"/>
-                      <a:tailEnd type="none" w="med" len="med"/>
-                    </a:lnR>
-                    <a:lnT w="9525" cap="flat" cmpd="sng" algn="ctr">
-                      <a:solidFill>
-                        <a:srgbClr val="E2E8F0"/>
-                      </a:solidFill>
-                      <a:prstDash val="solid"/>
-                      <a:round/>
-                      <a:headEnd type="none" w="med" len="med"/>
-                      <a:tailEnd type="none" w="med" len="med"/>
-                    </a:lnT>
-                    <a:lnB w="9525" cap="flat" cmpd="sng" algn="ctr">
-                      <a:solidFill>
-                        <a:srgbClr val="E2E8F0"/>
-                      </a:solidFill>
-                      <a:prstDash val="solid"/>
-                      <a:round/>
-                      <a:headEnd type="none" w="med" len="med"/>
-                      <a:tailEnd type="none" w="med" len="med"/>
-                    </a:lnB>
-                    <a:solidFill>
-                      <a:srgbClr val="0F766E"/>
-                    </a:solidFill>
-                  </a:tcPr>
-                </a:tc>
-                <a:tc>
-                  <a:txBody>
-                    <a:bodyPr/>
-                    <a:lstStyle/>
-                    <a:p>
-                      <a:pPr indent="0" marL="0">
-                        <a:buNone/>
-                      </a:pPr>
-                      <a:r>
-                        <a:rPr lang="en-US" sz="1100" b="1" dirty="0">
-                          <a:solidFill>
-                            <a:srgbClr val="FFFFFF"/>
-                          </a:solidFill>
-                          <a:latin typeface="Segoe UI" pitchFamily="34" charset="0"/>
-                          <a:ea typeface="Segoe UI" pitchFamily="34" charset="-122"/>
-                          <a:cs typeface="Segoe UI" pitchFamily="34" charset="-120"/>
-                        </a:rPr>
-                        <a:t>Điểm gãy đầu tiên</a:t>
-                      </a:r>
-                      <a:endParaRPr lang="en-US" sz="1100" dirty="0">
-                        <a:latin typeface="Segoe UI" charset="0"/>
-                        <a:ea typeface="Segoe UI" charset="0"/>
-                        <a:cs typeface="Segoe UI" charset="0"/>
-                      </a:endParaRPr>
-                    </a:p>
-                  </a:txBody>
-                  <a:tcPr marL="73152" marR="73152" marT="73152" marB="73152" anchor="ctr">
-                    <a:lnL w="9525" cap="flat" cmpd="sng" algn="ctr">
-                      <a:solidFill>
-                        <a:srgbClr val="E2E8F0"/>
-                      </a:solidFill>
-                      <a:prstDash val="solid"/>
-                      <a:round/>
-                      <a:headEnd type="none" w="med" len="med"/>
-                      <a:tailEnd type="none" w="med" len="med"/>
-                    </a:lnL>
-                    <a:lnR w="9525" cap="flat" cmpd="sng" algn="ctr">
-                      <a:solidFill>
-                        <a:srgbClr val="E2E8F0"/>
-                      </a:solidFill>
-                      <a:prstDash val="solid"/>
-                      <a:round/>
-                      <a:headEnd type="none" w="med" len="med"/>
-                      <a:tailEnd type="none" w="med" len="med"/>
-                    </a:lnR>
-                    <a:lnT w="9525" cap="flat" cmpd="sng" algn="ctr">
-                      <a:solidFill>
-                        <a:srgbClr val="E2E8F0"/>
-                      </a:solidFill>
-                      <a:prstDash val="solid"/>
-                      <a:round/>
-                      <a:headEnd type="none" w="med" len="med"/>
-                      <a:tailEnd type="none" w="med" len="med"/>
-                    </a:lnT>
-                    <a:lnB w="9525" cap="flat" cmpd="sng" algn="ctr">
-                      <a:solidFill>
-                        <a:srgbClr val="E2E8F0"/>
-                      </a:solidFill>
-                      <a:prstDash val="solid"/>
-                      <a:round/>
-                      <a:headEnd type="none" w="med" len="med"/>
-                      <a:tailEnd type="none" w="med" len="med"/>
-                    </a:lnB>
-                    <a:solidFill>
-                      <a:srgbClr val="0F766E"/>
-                    </a:solidFill>
-                  </a:tcPr>
-                </a:tc>
-                <a:tc>
-                  <a:txBody>
-                    <a:bodyPr/>
-                    <a:lstStyle/>
-                    <a:p>
-                      <a:pPr indent="0" marL="0">
-                        <a:buNone/>
-                      </a:pPr>
-                      <a:r>
-                        <a:rPr lang="en-US" sz="1100" b="1" dirty="0">
-                          <a:solidFill>
-                            <a:srgbClr val="FFFFFF"/>
-                          </a:solidFill>
-                          <a:latin typeface="Segoe UI" pitchFamily="34" charset="0"/>
-                          <a:ea typeface="Segoe UI" pitchFamily="34" charset="-122"/>
-                          <a:cs typeface="Segoe UI" pitchFamily="34" charset="-120"/>
-                        </a:rPr>
-                        <a:t>Đường xử lý (đã chuẩn bị trong thiết kế)</a:t>
-                      </a:r>
-                      <a:endParaRPr lang="en-US" sz="1100" dirty="0">
-                        <a:latin typeface="Segoe UI" charset="0"/>
-                        <a:ea typeface="Segoe UI" charset="0"/>
-                        <a:cs typeface="Segoe UI" charset="0"/>
-                      </a:endParaRPr>
-                    </a:p>
-                  </a:txBody>
-                  <a:tcPr marL="73152" marR="73152" marT="73152" marB="73152" anchor="ctr">
-                    <a:lnL w="9525" cap="flat" cmpd="sng" algn="ctr">
-                      <a:solidFill>
-                        <a:srgbClr val="E2E8F0"/>
-                      </a:solidFill>
-                      <a:prstDash val="solid"/>
-                      <a:round/>
-                      <a:headEnd type="none" w="med" len="med"/>
-                      <a:tailEnd type="none" w="med" len="med"/>
-                    </a:lnL>
-                    <a:lnR w="9525" cap="flat" cmpd="sng" algn="ctr">
-                      <a:solidFill>
-                        <a:srgbClr val="E2E8F0"/>
-                      </a:solidFill>
-                      <a:prstDash val="solid"/>
-                      <a:round/>
-                      <a:headEnd type="none" w="med" len="med"/>
-                      <a:tailEnd type="none" w="med" len="med"/>
-                    </a:lnR>
-                    <a:lnT w="9525" cap="flat" cmpd="sng" algn="ctr">
-                      <a:solidFill>
-                        <a:srgbClr val="E2E8F0"/>
-                      </a:solidFill>
-                      <a:prstDash val="solid"/>
-                      <a:round/>
-                      <a:headEnd type="none" w="med" len="med"/>
-                      <a:tailEnd type="none" w="med" len="med"/>
-                    </a:lnT>
-                    <a:lnB w="9525" cap="flat" cmpd="sng" algn="ctr">
-                      <a:solidFill>
-                        <a:srgbClr val="E2E8F0"/>
-                      </a:solidFill>
-                      <a:prstDash val="solid"/>
-                      <a:round/>
-                      <a:headEnd type="none" w="med" len="med"/>
-                      <a:tailEnd type="none" w="med" len="med"/>
-                    </a:lnB>
-                    <a:solidFill>
-                      <a:srgbClr val="0F766E"/>
-                    </a:solidFill>
-                  </a:tcPr>
-                </a:tc>
-              </a:tr>
-              <a:tr h="658368">
-                <a:tc>
-                  <a:txBody>
-                    <a:bodyPr/>
-                    <a:lstStyle/>
-                    <a:p>
-                      <a:pPr indent="0" marL="0">
-                        <a:buNone/>
-                      </a:pPr>
-                      <a:r>
-                        <a:rPr lang="en-US" sz="1050" dirty="0">
-                          <a:solidFill>
-                            <a:srgbClr val="0F172A"/>
-                          </a:solidFill>
-                          <a:latin typeface="Segoe UI" pitchFamily="34" charset="0"/>
-                          <a:ea typeface="Segoe UI" pitchFamily="34" charset="-122"/>
-                          <a:cs typeface="Segoe UI" pitchFamily="34" charset="-120"/>
-                        </a:rPr>
-                        <a:t>100-500 trường</a:t>
-                      </a:r>
-                      <a:endParaRPr lang="en-US" sz="1050" dirty="0">
-                        <a:latin typeface="Segoe UI" charset="0"/>
-                        <a:ea typeface="Segoe UI" charset="0"/>
-                        <a:cs typeface="Segoe UI" charset="0"/>
-                      </a:endParaRPr>
-                    </a:p>
-                  </a:txBody>
-                  <a:tcPr marL="73152" marR="73152" marT="73152" marB="73152" anchor="ctr">
-                    <a:lnL w="9525" cap="flat" cmpd="sng" algn="ctr">
-                      <a:solidFill>
-                        <a:srgbClr val="E2E8F0"/>
-                      </a:solidFill>
-                      <a:prstDash val="solid"/>
-                      <a:round/>
-                      <a:headEnd type="none" w="med" len="med"/>
-                      <a:tailEnd type="none" w="med" len="med"/>
-                    </a:lnL>
-                    <a:lnR w="9525" cap="flat" cmpd="sng" algn="ctr">
-                      <a:solidFill>
-                        <a:srgbClr val="E2E8F0"/>
-                      </a:solidFill>
-                      <a:prstDash val="solid"/>
-                      <a:round/>
-                      <a:headEnd type="none" w="med" len="med"/>
-                      <a:tailEnd type="none" w="med" len="med"/>
-                    </a:lnR>
-                    <a:lnT w="9525" cap="flat" cmpd="sng" algn="ctr">
-                      <a:solidFill>
-                        <a:srgbClr val="E2E8F0"/>
-                      </a:solidFill>
-                      <a:prstDash val="solid"/>
-                      <a:round/>
-                      <a:headEnd type="none" w="med" len="med"/>
-                      <a:tailEnd type="none" w="med" len="med"/>
-                    </a:lnT>
-                    <a:lnB w="9525" cap="flat" cmpd="sng" algn="ctr">
-                      <a:solidFill>
-                        <a:srgbClr val="E2E8F0"/>
-                      </a:solidFill>
-                      <a:prstDash val="solid"/>
-                      <a:round/>
-                      <a:headEnd type="none" w="med" len="med"/>
-                      <a:tailEnd type="none" w="med" len="med"/>
-                    </a:lnB>
-                    <a:solidFill>
-                      <a:srgbClr val="FFFFFF"/>
-                    </a:solidFill>
-                  </a:tcPr>
-                </a:tc>
-                <a:tc>
-                  <a:txBody>
-                    <a:bodyPr/>
-                    <a:lstStyle/>
-                    <a:p>
-                      <a:pPr indent="0" marL="0">
-                        <a:buNone/>
-                      </a:pPr>
-                      <a:r>
-                        <a:rPr lang="en-US" sz="1050" dirty="0">
-                          <a:solidFill>
-                            <a:srgbClr val="0F172A"/>
-                          </a:solidFill>
-                          <a:latin typeface="Segoe UI" pitchFamily="34" charset="0"/>
-                          <a:ea typeface="Segoe UI" pitchFamily="34" charset="-122"/>
-                          <a:cs typeface="Segoe UI" pitchFamily="34" charset="-120"/>
-                        </a:rPr>
-                        <a:t>Dashboard aggregate chậm</a:t>
-                      </a:r>
-                      <a:endParaRPr lang="en-US" sz="1050" dirty="0">
-                        <a:latin typeface="Segoe UI" charset="0"/>
-                        <a:ea typeface="Segoe UI" charset="0"/>
-                        <a:cs typeface="Segoe UI" charset="0"/>
-                      </a:endParaRPr>
-                    </a:p>
-                  </a:txBody>
-                  <a:tcPr marL="73152" marR="73152" marT="73152" marB="73152" anchor="ctr">
-                    <a:lnL w="9525" cap="flat" cmpd="sng" algn="ctr">
-                      <a:solidFill>
-                        <a:srgbClr val="E2E8F0"/>
-                      </a:solidFill>
-                      <a:prstDash val="solid"/>
-                      <a:round/>
-                      <a:headEnd type="none" w="med" len="med"/>
-                      <a:tailEnd type="none" w="med" len="med"/>
-                    </a:lnL>
-                    <a:lnR w="9525" cap="flat" cmpd="sng" algn="ctr">
-                      <a:solidFill>
-                        <a:srgbClr val="E2E8F0"/>
-                      </a:solidFill>
-                      <a:prstDash val="solid"/>
-                      <a:round/>
-                      <a:headEnd type="none" w="med" len="med"/>
-                      <a:tailEnd type="none" w="med" len="med"/>
-                    </a:lnR>
-                    <a:lnT w="9525" cap="flat" cmpd="sng" algn="ctr">
-                      <a:solidFill>
-                        <a:srgbClr val="E2E8F0"/>
-                      </a:solidFill>
-                      <a:prstDash val="solid"/>
-                      <a:round/>
-                      <a:headEnd type="none" w="med" len="med"/>
-                      <a:tailEnd type="none" w="med" len="med"/>
-                    </a:lnT>
-                    <a:lnB w="9525" cap="flat" cmpd="sng" algn="ctr">
-                      <a:solidFill>
-                        <a:srgbClr val="E2E8F0"/>
-                      </a:solidFill>
-                      <a:prstDash val="solid"/>
-                      <a:round/>
-                      <a:headEnd type="none" w="med" len="med"/>
-                      <a:tailEnd type="none" w="med" len="med"/>
-                    </a:lnB>
-                    <a:solidFill>
-                      <a:srgbClr val="FFFFFF"/>
-                    </a:solidFill>
-                  </a:tcPr>
-                </a:tc>
-                <a:tc>
-                  <a:txBody>
-                    <a:bodyPr/>
-                    <a:lstStyle/>
-                    <a:p>
-                      <a:pPr indent="0" marL="0">
-                        <a:buNone/>
-                      </a:pPr>
-                      <a:r>
-                        <a:rPr lang="en-US" sz="1050" dirty="0">
-                          <a:solidFill>
-                            <a:srgbClr val="0F172A"/>
-                          </a:solidFill>
-                          <a:latin typeface="Segoe UI" pitchFamily="34" charset="0"/>
-                          <a:ea typeface="Segoe UI" pitchFamily="34" charset="-122"/>
-                          <a:cs typeface="Segoe UI" pitchFamily="34" charset="-120"/>
-                        </a:rPr>
-                        <a:t>Materialized views + index; pattern sẵn - đổi cách đọc không đổi kiến trúc</a:t>
-                      </a:r>
-                      <a:endParaRPr lang="en-US" sz="1050" dirty="0">
-                        <a:latin typeface="Segoe UI" charset="0"/>
-                        <a:ea typeface="Segoe UI" charset="0"/>
-                        <a:cs typeface="Segoe UI" charset="0"/>
-                      </a:endParaRPr>
-                    </a:p>
-                  </a:txBody>
-                  <a:tcPr marL="73152" marR="73152" marT="73152" marB="73152" anchor="ctr">
-                    <a:lnL w="9525" cap="flat" cmpd="sng" algn="ctr">
-                      <a:solidFill>
-                        <a:srgbClr val="E2E8F0"/>
-                      </a:solidFill>
-                      <a:prstDash val="solid"/>
-                      <a:round/>
-                      <a:headEnd type="none" w="med" len="med"/>
-                      <a:tailEnd type="none" w="med" len="med"/>
-                    </a:lnL>
-                    <a:lnR w="9525" cap="flat" cmpd="sng" algn="ctr">
-                      <a:solidFill>
-                        <a:srgbClr val="E2E8F0"/>
-                      </a:solidFill>
-                      <a:prstDash val="solid"/>
-                      <a:round/>
-                      <a:headEnd type="none" w="med" len="med"/>
-                      <a:tailEnd type="none" w="med" len="med"/>
-                    </a:lnR>
-                    <a:lnT w="9525" cap="flat" cmpd="sng" algn="ctr">
-                      <a:solidFill>
-                        <a:srgbClr val="E2E8F0"/>
-                      </a:solidFill>
-                      <a:prstDash val="solid"/>
-                      <a:round/>
-                      <a:headEnd type="none" w="med" len="med"/>
-                      <a:tailEnd type="none" w="med" len="med"/>
-                    </a:lnT>
-                    <a:lnB w="9525" cap="flat" cmpd="sng" algn="ctr">
-                      <a:solidFill>
-                        <a:srgbClr val="E2E8F0"/>
-                      </a:solidFill>
-                      <a:prstDash val="solid"/>
-                      <a:round/>
-                      <a:headEnd type="none" w="med" len="med"/>
-                      <a:tailEnd type="none" w="med" len="med"/>
-                    </a:lnB>
-                    <a:solidFill>
-                      <a:srgbClr val="FFFFFF"/>
-                    </a:solidFill>
-                  </a:tcPr>
-                </a:tc>
-              </a:tr>
-              <a:tr h="658368">
-                <a:tc>
-                  <a:txBody>
-                    <a:bodyPr/>
-                    <a:lstStyle/>
-                    <a:p>
-                      <a:pPr indent="0" marL="0">
-                        <a:buNone/>
-                      </a:pPr>
-                      <a:r>
-                        <a:rPr lang="en-US" sz="1050" dirty="0">
-                          <a:solidFill>
-                            <a:srgbClr val="0F172A"/>
-                          </a:solidFill>
-                          <a:latin typeface="Segoe UI" pitchFamily="34" charset="0"/>
-                          <a:ea typeface="Segoe UI" pitchFamily="34" charset="-122"/>
-                          <a:cs typeface="Segoe UI" pitchFamily="34" charset="-120"/>
-                        </a:rPr>
-                        <a:t>1.000-5.000 trường</a:t>
-                      </a:r>
-                      <a:endParaRPr lang="en-US" sz="1050" dirty="0">
-                        <a:latin typeface="Segoe UI" charset="0"/>
-                        <a:ea typeface="Segoe UI" charset="0"/>
-                        <a:cs typeface="Segoe UI" charset="0"/>
-                      </a:endParaRPr>
-                    </a:p>
-                  </a:txBody>
-                  <a:tcPr marL="73152" marR="73152" marT="73152" marB="73152" anchor="ctr">
-                    <a:lnL w="9525" cap="flat" cmpd="sng" algn="ctr">
-                      <a:solidFill>
-                        <a:srgbClr val="E2E8F0"/>
-                      </a:solidFill>
-                      <a:prstDash val="solid"/>
-                      <a:round/>
-                      <a:headEnd type="none" w="med" len="med"/>
-                      <a:tailEnd type="none" w="med" len="med"/>
-                    </a:lnL>
-                    <a:lnR w="9525" cap="flat" cmpd="sng" algn="ctr">
-                      <a:solidFill>
-                        <a:srgbClr val="E2E8F0"/>
-                      </a:solidFill>
-                      <a:prstDash val="solid"/>
-                      <a:round/>
-                      <a:headEnd type="none" w="med" len="med"/>
-                      <a:tailEnd type="none" w="med" len="med"/>
-                    </a:lnR>
-                    <a:lnT w="9525" cap="flat" cmpd="sng" algn="ctr">
-                      <a:solidFill>
-                        <a:srgbClr val="E2E8F0"/>
-                      </a:solidFill>
-                      <a:prstDash val="solid"/>
-                      <a:round/>
-                      <a:headEnd type="none" w="med" len="med"/>
-                      <a:tailEnd type="none" w="med" len="med"/>
-                    </a:lnT>
-                    <a:lnB w="9525" cap="flat" cmpd="sng" algn="ctr">
-                      <a:solidFill>
-                        <a:srgbClr val="E2E8F0"/>
-                      </a:solidFill>
-                      <a:prstDash val="solid"/>
-                      <a:round/>
-                      <a:headEnd type="none" w="med" len="med"/>
-                      <a:tailEnd type="none" w="med" len="med"/>
-                    </a:lnB>
-                    <a:solidFill>
-                      <a:srgbClr val="F8FAFC"/>
-                    </a:solidFill>
-                  </a:tcPr>
-                </a:tc>
-                <a:tc>
-                  <a:txBody>
-                    <a:bodyPr/>
-                    <a:lstStyle/>
-                    <a:p>
-                      <a:pPr indent="0" marL="0">
-                        <a:buNone/>
-                      </a:pPr>
-                      <a:r>
-                        <a:rPr lang="en-US" sz="1050" dirty="0">
-                          <a:solidFill>
-                            <a:srgbClr val="0F172A"/>
-                          </a:solidFill>
-                          <a:latin typeface="Segoe UI" pitchFamily="34" charset="0"/>
-                          <a:ea typeface="Segoe UI" pitchFamily="34" charset="-122"/>
-                          <a:cs typeface="Segoe UI" pitchFamily="34" charset="-120"/>
-                        </a:rPr>
-                        <a:t>Connection pool + write hotspot attendance</a:t>
-                      </a:r>
-                      <a:endParaRPr lang="en-US" sz="1050" dirty="0">
-                        <a:latin typeface="Segoe UI" charset="0"/>
-                        <a:ea typeface="Segoe UI" charset="0"/>
-                        <a:cs typeface="Segoe UI" charset="0"/>
-                      </a:endParaRPr>
-                    </a:p>
-                  </a:txBody>
-                  <a:tcPr marL="73152" marR="73152" marT="73152" marB="73152" anchor="ctr">
-                    <a:lnL w="9525" cap="flat" cmpd="sng" algn="ctr">
-                      <a:solidFill>
-                        <a:srgbClr val="E2E8F0"/>
-                      </a:solidFill>
-                      <a:prstDash val="solid"/>
-                      <a:round/>
-                      <a:headEnd type="none" w="med" len="med"/>
-                      <a:tailEnd type="none" w="med" len="med"/>
-                    </a:lnL>
-                    <a:lnR w="9525" cap="flat" cmpd="sng" algn="ctr">
-                      <a:solidFill>
-                        <a:srgbClr val="E2E8F0"/>
-                      </a:solidFill>
-                      <a:prstDash val="solid"/>
-                      <a:round/>
-                      <a:headEnd type="none" w="med" len="med"/>
-                      <a:tailEnd type="none" w="med" len="med"/>
-                    </a:lnR>
-                    <a:lnT w="9525" cap="flat" cmpd="sng" algn="ctr">
-                      <a:solidFill>
-                        <a:srgbClr val="E2E8F0"/>
-                      </a:solidFill>
-                      <a:prstDash val="solid"/>
-                      <a:round/>
-                      <a:headEnd type="none" w="med" len="med"/>
-                      <a:tailEnd type="none" w="med" len="med"/>
-                    </a:lnT>
-                    <a:lnB w="9525" cap="flat" cmpd="sng" algn="ctr">
-                      <a:solidFill>
-                        <a:srgbClr val="E2E8F0"/>
-                      </a:solidFill>
-                      <a:prstDash val="solid"/>
-                      <a:round/>
-                      <a:headEnd type="none" w="med" len="med"/>
-                      <a:tailEnd type="none" w="med" len="med"/>
-                    </a:lnB>
-                    <a:solidFill>
-                      <a:srgbClr val="F8FAFC"/>
-                    </a:solidFill>
-                  </a:tcPr>
-                </a:tc>
-                <a:tc>
-                  <a:txBody>
-                    <a:bodyPr/>
-                    <a:lstStyle/>
-                    <a:p>
-                      <a:pPr indent="0" marL="0">
-                        <a:buNone/>
-                      </a:pPr>
-                      <a:r>
-                        <a:rPr lang="en-US" sz="1050" dirty="0">
-                          <a:solidFill>
-                            <a:srgbClr val="0F172A"/>
-                          </a:solidFill>
-                          <a:latin typeface="Segoe UI" pitchFamily="34" charset="0"/>
-                          <a:ea typeface="Segoe UI" pitchFamily="34" charset="-122"/>
-                          <a:cs typeface="Segoe UI" pitchFamily="34" charset="-120"/>
-                        </a:rPr>
-                        <a:t>Supabase pooler + partition attendance_records theo academic_year; tách Supabase project riêng cho SCN</a:t>
-                      </a:r>
-                      <a:endParaRPr lang="en-US" sz="1050" dirty="0">
-                        <a:latin typeface="Segoe UI" charset="0"/>
-                        <a:ea typeface="Segoe UI" charset="0"/>
-                        <a:cs typeface="Segoe UI" charset="0"/>
-                      </a:endParaRPr>
-                    </a:p>
-                  </a:txBody>
-                  <a:tcPr marL="73152" marR="73152" marT="73152" marB="73152" anchor="ctr">
-                    <a:lnL w="9525" cap="flat" cmpd="sng" algn="ctr">
-                      <a:solidFill>
-                        <a:srgbClr val="E2E8F0"/>
-                      </a:solidFill>
-                      <a:prstDash val="solid"/>
-                      <a:round/>
-                      <a:headEnd type="none" w="med" len="med"/>
-                      <a:tailEnd type="none" w="med" len="med"/>
-                    </a:lnL>
-                    <a:lnR w="9525" cap="flat" cmpd="sng" algn="ctr">
-                      <a:solidFill>
-                        <a:srgbClr val="E2E8F0"/>
-                      </a:solidFill>
-                      <a:prstDash val="solid"/>
-                      <a:round/>
-                      <a:headEnd type="none" w="med" len="med"/>
-                      <a:tailEnd type="none" w="med" len="med"/>
-                    </a:lnR>
-                    <a:lnT w="9525" cap="flat" cmpd="sng" algn="ctr">
-                      <a:solidFill>
-                        <a:srgbClr val="E2E8F0"/>
-                      </a:solidFill>
-                      <a:prstDash val="solid"/>
-                      <a:round/>
-                      <a:headEnd type="none" w="med" len="med"/>
-                      <a:tailEnd type="none" w="med" len="med"/>
-                    </a:lnT>
-                    <a:lnB w="9525" cap="flat" cmpd="sng" algn="ctr">
-                      <a:solidFill>
-                        <a:srgbClr val="E2E8F0"/>
-                      </a:solidFill>
-                      <a:prstDash val="solid"/>
-                      <a:round/>
-                      <a:headEnd type="none" w="med" len="med"/>
-                      <a:tailEnd type="none" w="med" len="med"/>
-                    </a:lnB>
-                    <a:solidFill>
-                      <a:srgbClr val="F8FAFC"/>
-                    </a:solidFill>
-                  </a:tcPr>
-                </a:tc>
-              </a:tr>
-              <a:tr h="658368">
-                <a:tc>
-                  <a:txBody>
-                    <a:bodyPr/>
-                    <a:lstStyle/>
-                    <a:p>
-                      <a:pPr indent="0" marL="0">
-                        <a:buNone/>
-                      </a:pPr>
-                      <a:r>
-                        <a:rPr lang="en-US" sz="1050" dirty="0">
-                          <a:solidFill>
-                            <a:srgbClr val="0F172A"/>
-                          </a:solidFill>
-                          <a:latin typeface="Segoe UI" pitchFamily="34" charset="0"/>
-                          <a:ea typeface="Segoe UI" pitchFamily="34" charset="-122"/>
-                          <a:cs typeface="Segoe UI" pitchFamily="34" charset="-120"/>
-                        </a:rPr>
-                        <a:t>AI throughput cao</a:t>
-                      </a:r>
-                      <a:endParaRPr lang="en-US" sz="1050" dirty="0">
-                        <a:latin typeface="Segoe UI" charset="0"/>
-                        <a:ea typeface="Segoe UI" charset="0"/>
-                        <a:cs typeface="Segoe UI" charset="0"/>
-                      </a:endParaRPr>
-                    </a:p>
-                  </a:txBody>
-                  <a:tcPr marL="73152" marR="73152" marT="73152" marB="73152" anchor="ctr">
-                    <a:lnL w="9525" cap="flat" cmpd="sng" algn="ctr">
-                      <a:solidFill>
-                        <a:srgbClr val="E2E8F0"/>
-                      </a:solidFill>
-                      <a:prstDash val="solid"/>
-                      <a:round/>
-                      <a:headEnd type="none" w="med" len="med"/>
-                      <a:tailEnd type="none" w="med" len="med"/>
-                    </a:lnL>
-                    <a:lnR w="9525" cap="flat" cmpd="sng" algn="ctr">
-                      <a:solidFill>
-                        <a:srgbClr val="E2E8F0"/>
-                      </a:solidFill>
-                      <a:prstDash val="solid"/>
-                      <a:round/>
-                      <a:headEnd type="none" w="med" len="med"/>
-                      <a:tailEnd type="none" w="med" len="med"/>
-                    </a:lnR>
-                    <a:lnT w="9525" cap="flat" cmpd="sng" algn="ctr">
-                      <a:solidFill>
-                        <a:srgbClr val="E2E8F0"/>
-                      </a:solidFill>
-                      <a:prstDash val="solid"/>
-                      <a:round/>
-                      <a:headEnd type="none" w="med" len="med"/>
-                      <a:tailEnd type="none" w="med" len="med"/>
-                    </a:lnT>
-                    <a:lnB w="9525" cap="flat" cmpd="sng" algn="ctr">
-                      <a:solidFill>
-                        <a:srgbClr val="E2E8F0"/>
-                      </a:solidFill>
-                      <a:prstDash val="solid"/>
-                      <a:round/>
-                      <a:headEnd type="none" w="med" len="med"/>
-                      <a:tailEnd type="none" w="med" len="med"/>
-                    </a:lnB>
-                    <a:solidFill>
-                      <a:srgbClr val="FFFFFF"/>
-                    </a:solidFill>
-                  </a:tcPr>
-                </a:tc>
-                <a:tc>
-                  <a:txBody>
-                    <a:bodyPr/>
-                    <a:lstStyle/>
-                    <a:p>
-                      <a:pPr indent="0" marL="0">
-                        <a:buNone/>
-                      </a:pPr>
-                      <a:r>
-                        <a:rPr lang="en-US" sz="1050" dirty="0">
-                          <a:solidFill>
-                            <a:srgbClr val="0F172A"/>
-                          </a:solidFill>
-                          <a:latin typeface="Segoe UI" pitchFamily="34" charset="0"/>
-                          <a:ea typeface="Segoe UI" pitchFamily="34" charset="-122"/>
-                          <a:cs typeface="Segoe UI" pitchFamily="34" charset="-120"/>
-                        </a:rPr>
-                        <a:t>ai_jobs poll-based kẹt</a:t>
-                      </a:r>
-                      <a:endParaRPr lang="en-US" sz="1050" dirty="0">
-                        <a:latin typeface="Segoe UI" charset="0"/>
-                        <a:ea typeface="Segoe UI" charset="0"/>
-                        <a:cs typeface="Segoe UI" charset="0"/>
-                      </a:endParaRPr>
-                    </a:p>
-                  </a:txBody>
-                  <a:tcPr marL="73152" marR="73152" marT="73152" marB="73152" anchor="ctr">
-                    <a:lnL w="9525" cap="flat" cmpd="sng" algn="ctr">
-                      <a:solidFill>
-                        <a:srgbClr val="E2E8F0"/>
-                      </a:solidFill>
-                      <a:prstDash val="solid"/>
-                      <a:round/>
-                      <a:headEnd type="none" w="med" len="med"/>
-                      <a:tailEnd type="none" w="med" len="med"/>
-                    </a:lnL>
-                    <a:lnR w="9525" cap="flat" cmpd="sng" algn="ctr">
-                      <a:solidFill>
-                        <a:srgbClr val="E2E8F0"/>
-                      </a:solidFill>
-                      <a:prstDash val="solid"/>
-                      <a:round/>
-                      <a:headEnd type="none" w="med" len="med"/>
-                      <a:tailEnd type="none" w="med" len="med"/>
-                    </a:lnR>
-                    <a:lnT w="9525" cap="flat" cmpd="sng" algn="ctr">
-                      <a:solidFill>
-                        <a:srgbClr val="E2E8F0"/>
-                      </a:solidFill>
-                      <a:prstDash val="solid"/>
-                      <a:round/>
-                      <a:headEnd type="none" w="med" len="med"/>
-                      <a:tailEnd type="none" w="med" len="med"/>
-                    </a:lnT>
-                    <a:lnB w="9525" cap="flat" cmpd="sng" algn="ctr">
-                      <a:solidFill>
-                        <a:srgbClr val="E2E8F0"/>
-                      </a:solidFill>
-                      <a:prstDash val="solid"/>
-                      <a:round/>
-                      <a:headEnd type="none" w="med" len="med"/>
-                      <a:tailEnd type="none" w="med" len="med"/>
-                    </a:lnB>
-                    <a:solidFill>
-                      <a:srgbClr val="FFFFFF"/>
-                    </a:solidFill>
-                  </a:tcPr>
-                </a:tc>
-                <a:tc>
-                  <a:txBody>
-                    <a:bodyPr/>
-                    <a:lstStyle/>
-                    <a:p>
-                      <a:pPr indent="0" marL="0">
-                        <a:buNone/>
-                      </a:pPr>
-                      <a:r>
-                        <a:rPr lang="en-US" sz="1050" dirty="0">
-                          <a:solidFill>
-                            <a:srgbClr val="0F172A"/>
-                          </a:solidFill>
-                          <a:latin typeface="Segoe UI" pitchFamily="34" charset="0"/>
-                          <a:ea typeface="Segoe UI" pitchFamily="34" charset="-122"/>
-                          <a:cs typeface="Segoe UI" pitchFamily="34" charset="-120"/>
-                        </a:rPr>
-                        <a:t>Thay bằng queue thật (Supabase pgmq / SQS) - seam đã có sẵn ở useAiJob + callback</a:t>
-                      </a:r>
-                      <a:endParaRPr lang="en-US" sz="1050" dirty="0">
-                        <a:latin typeface="Segoe UI" charset="0"/>
-                        <a:ea typeface="Segoe UI" charset="0"/>
-                        <a:cs typeface="Segoe UI" charset="0"/>
-                      </a:endParaRPr>
-                    </a:p>
-                  </a:txBody>
-                  <a:tcPr marL="73152" marR="73152" marT="73152" marB="73152" anchor="ctr">
-                    <a:lnL w="9525" cap="flat" cmpd="sng" algn="ctr">
-                      <a:solidFill>
-                        <a:srgbClr val="E2E8F0"/>
-                      </a:solidFill>
-                      <a:prstDash val="solid"/>
-                      <a:round/>
-                      <a:headEnd type="none" w="med" len="med"/>
-                      <a:tailEnd type="none" w="med" len="med"/>
-                    </a:lnL>
-                    <a:lnR w="9525" cap="flat" cmpd="sng" algn="ctr">
-                      <a:solidFill>
-                        <a:srgbClr val="E2E8F0"/>
-                      </a:solidFill>
-                      <a:prstDash val="solid"/>
-                      <a:round/>
-                      <a:headEnd type="none" w="med" len="med"/>
-                      <a:tailEnd type="none" w="med" len="med"/>
-                    </a:lnR>
-                    <a:lnT w="9525" cap="flat" cmpd="sng" algn="ctr">
-                      <a:solidFill>
-                        <a:srgbClr val="E2E8F0"/>
-                      </a:solidFill>
-                      <a:prstDash val="solid"/>
-                      <a:round/>
-                      <a:headEnd type="none" w="med" len="med"/>
-                      <a:tailEnd type="none" w="med" len="med"/>
-                    </a:lnT>
-                    <a:lnB w="9525" cap="flat" cmpd="sng" algn="ctr">
-                      <a:solidFill>
-                        <a:srgbClr val="E2E8F0"/>
-                      </a:solidFill>
-                      <a:prstDash val="solid"/>
-                      <a:round/>
-                      <a:headEnd type="none" w="med" len="med"/>
-                      <a:tailEnd type="none" w="med" len="med"/>
-                    </a:lnB>
-                    <a:solidFill>
-                      <a:srgbClr val="FFFFFF"/>
-                    </a:solidFill>
-                  </a:tcPr>
-                </a:tc>
-              </a:tr>
-              <a:tr h="658368">
-                <a:tc>
-                  <a:txBody>
-                    <a:bodyPr/>
-                    <a:lstStyle/>
-                    <a:p>
-                      <a:pPr indent="0" marL="0">
-                        <a:buNone/>
-                      </a:pPr>
-                      <a:r>
-                        <a:rPr lang="en-US" sz="1050" dirty="0">
-                          <a:solidFill>
-                            <a:srgbClr val="0F172A"/>
-                          </a:solidFill>
-                          <a:latin typeface="Segoe UI" pitchFamily="34" charset="0"/>
-                          <a:ea typeface="Segoe UI" pitchFamily="34" charset="-122"/>
-                          <a:cs typeface="Segoe UI" pitchFamily="34" charset="-120"/>
-                        </a:rPr>
-                        <a:t>Nhiều tenant lớn (Sở toàn tỉnh)</a:t>
-                      </a:r>
-                      <a:endParaRPr lang="en-US" sz="1050" dirty="0">
-                        <a:latin typeface="Segoe UI" charset="0"/>
-                        <a:ea typeface="Segoe UI" charset="0"/>
-                        <a:cs typeface="Segoe UI" charset="0"/>
-                      </a:endParaRPr>
-                    </a:p>
-                  </a:txBody>
-                  <a:tcPr marL="73152" marR="73152" marT="73152" marB="73152" anchor="ctr">
-                    <a:lnL w="9525" cap="flat" cmpd="sng" algn="ctr">
-                      <a:solidFill>
-                        <a:srgbClr val="E2E8F0"/>
-                      </a:solidFill>
-                      <a:prstDash val="solid"/>
-                      <a:round/>
-                      <a:headEnd type="none" w="med" len="med"/>
-                      <a:tailEnd type="none" w="med" len="med"/>
-                    </a:lnL>
-                    <a:lnR w="9525" cap="flat" cmpd="sng" algn="ctr">
-                      <a:solidFill>
-                        <a:srgbClr val="E2E8F0"/>
-                      </a:solidFill>
-                      <a:prstDash val="solid"/>
-                      <a:round/>
-                      <a:headEnd type="none" w="med" len="med"/>
-                      <a:tailEnd type="none" w="med" len="med"/>
-                    </a:lnR>
-                    <a:lnT w="9525" cap="flat" cmpd="sng" algn="ctr">
-                      <a:solidFill>
-                        <a:srgbClr val="E2E8F0"/>
-                      </a:solidFill>
-                      <a:prstDash val="solid"/>
-                      <a:round/>
-                      <a:headEnd type="none" w="med" len="med"/>
-                      <a:tailEnd type="none" w="med" len="med"/>
-                    </a:lnT>
-                    <a:lnB w="9525" cap="flat" cmpd="sng" algn="ctr">
-                      <a:solidFill>
-                        <a:srgbClr val="E2E8F0"/>
-                      </a:solidFill>
-                      <a:prstDash val="solid"/>
-                      <a:round/>
-                      <a:headEnd type="none" w="med" len="med"/>
-                      <a:tailEnd type="none" w="med" len="med"/>
-                    </a:lnB>
-                    <a:solidFill>
-                      <a:srgbClr val="F8FAFC"/>
-                    </a:solidFill>
-                  </a:tcPr>
-                </a:tc>
-                <a:tc>
-                  <a:txBody>
-                    <a:bodyPr/>
-                    <a:lstStyle/>
-                    <a:p>
-                      <a:pPr indent="0" marL="0">
-                        <a:buNone/>
-                      </a:pPr>
-                      <a:r>
-                        <a:rPr lang="en-US" sz="1050" dirty="0">
-                          <a:solidFill>
-                            <a:srgbClr val="0F172A"/>
-                          </a:solidFill>
-                          <a:latin typeface="Segoe UI" pitchFamily="34" charset="0"/>
-                          <a:ea typeface="Segoe UI" pitchFamily="34" charset="-122"/>
-                          <a:cs typeface="Segoe UI" pitchFamily="34" charset="-120"/>
-                        </a:rPr>
-                        <a:t>RLS evaluation cost trên bảng lớn</a:t>
-                      </a:r>
-                      <a:endParaRPr lang="en-US" sz="1050" dirty="0">
-                        <a:latin typeface="Segoe UI" charset="0"/>
-                        <a:ea typeface="Segoe UI" charset="0"/>
-                        <a:cs typeface="Segoe UI" charset="0"/>
-                      </a:endParaRPr>
-                    </a:p>
-                  </a:txBody>
-                  <a:tcPr marL="73152" marR="73152" marT="73152" marB="73152" anchor="ctr">
-                    <a:lnL w="9525" cap="flat" cmpd="sng" algn="ctr">
-                      <a:solidFill>
-                        <a:srgbClr val="E2E8F0"/>
-                      </a:solidFill>
-                      <a:prstDash val="solid"/>
-                      <a:round/>
-                      <a:headEnd type="none" w="med" len="med"/>
-                      <a:tailEnd type="none" w="med" len="med"/>
-                    </a:lnL>
-                    <a:lnR w="9525" cap="flat" cmpd="sng" algn="ctr">
-                      <a:solidFill>
-                        <a:srgbClr val="E2E8F0"/>
-                      </a:solidFill>
-                      <a:prstDash val="solid"/>
-                      <a:round/>
-                      <a:headEnd type="none" w="med" len="med"/>
-                      <a:tailEnd type="none" w="med" len="med"/>
-                    </a:lnR>
-                    <a:lnT w="9525" cap="flat" cmpd="sng" algn="ctr">
-                      <a:solidFill>
-                        <a:srgbClr val="E2E8F0"/>
-                      </a:solidFill>
-                      <a:prstDash val="solid"/>
-                      <a:round/>
-                      <a:headEnd type="none" w="med" len="med"/>
-                      <a:tailEnd type="none" w="med" len="med"/>
-                    </a:lnT>
-                    <a:lnB w="9525" cap="flat" cmpd="sng" algn="ctr">
-                      <a:solidFill>
-                        <a:srgbClr val="E2E8F0"/>
-                      </a:solidFill>
-                      <a:prstDash val="solid"/>
-                      <a:round/>
-                      <a:headEnd type="none" w="med" len="med"/>
-                      <a:tailEnd type="none" w="med" len="med"/>
-                    </a:lnB>
-                    <a:solidFill>
-                      <a:srgbClr val="F8FAFC"/>
-                    </a:solidFill>
-                  </a:tcPr>
-                </a:tc>
-                <a:tc>
-                  <a:txBody>
-                    <a:bodyPr/>
-                    <a:lstStyle/>
-                    <a:p>
-                      <a:pPr indent="0" marL="0">
-                        <a:buNone/>
-                      </a:pPr>
-                      <a:r>
-                        <a:rPr lang="en-US" sz="1050" dirty="0">
-                          <a:solidFill>
-                            <a:srgbClr val="0F172A"/>
-                          </a:solidFill>
-                          <a:latin typeface="Segoe UI" pitchFamily="34" charset="0"/>
-                          <a:ea typeface="Segoe UI" pitchFamily="34" charset="-122"/>
-                          <a:cs typeface="Segoe UI" pitchFamily="34" charset="-120"/>
-                        </a:rPr>
-                        <a:t>Partition theo school_id hoặc schema-per-dept - RLS đã có school_id sẵn</a:t>
-                      </a:r>
-                      <a:endParaRPr lang="en-US" sz="1050" dirty="0">
-                        <a:latin typeface="Segoe UI" charset="0"/>
-                        <a:ea typeface="Segoe UI" charset="0"/>
-                        <a:cs typeface="Segoe UI" charset="0"/>
-                      </a:endParaRPr>
-                    </a:p>
-                  </a:txBody>
-                  <a:tcPr marL="73152" marR="73152" marT="73152" marB="73152" anchor="ctr">
-                    <a:lnL w="9525" cap="flat" cmpd="sng" algn="ctr">
-                      <a:solidFill>
-                        <a:srgbClr val="E2E8F0"/>
-                      </a:solidFill>
-                      <a:prstDash val="solid"/>
-                      <a:round/>
-                      <a:headEnd type="none" w="med" len="med"/>
-                      <a:tailEnd type="none" w="med" len="med"/>
-                    </a:lnL>
-                    <a:lnR w="9525" cap="flat" cmpd="sng" algn="ctr">
-                      <a:solidFill>
-                        <a:srgbClr val="E2E8F0"/>
-                      </a:solidFill>
-                      <a:prstDash val="solid"/>
-                      <a:round/>
-                      <a:headEnd type="none" w="med" len="med"/>
-                      <a:tailEnd type="none" w="med" len="med"/>
-                    </a:lnR>
-                    <a:lnT w="9525" cap="flat" cmpd="sng" algn="ctr">
-                      <a:solidFill>
-                        <a:srgbClr val="E2E8F0"/>
-                      </a:solidFill>
-                      <a:prstDash val="solid"/>
-                      <a:round/>
-                      <a:headEnd type="none" w="med" len="med"/>
-                      <a:tailEnd type="none" w="med" len="med"/>
-                    </a:lnT>
-                    <a:lnB w="9525" cap="flat" cmpd="sng" algn="ctr">
-                      <a:solidFill>
-                        <a:srgbClr val="E2E8F0"/>
-                      </a:solidFill>
-                      <a:prstDash val="solid"/>
-                      <a:round/>
-                      <a:headEnd type="none" w="med" len="med"/>
-                      <a:tailEnd type="none" w="med" len="med"/>
-                    </a:lnB>
-                    <a:solidFill>
-                      <a:srgbClr val="F8FAFC"/>
-                    </a:solidFill>
-                  </a:tcPr>
-                </a:tc>
-              </a:tr>
-              <a:tr h="658368">
-                <a:tc>
-                  <a:txBody>
-                    <a:bodyPr/>
-                    <a:lstStyle/>
-                    <a:p>
-                      <a:pPr indent="0" marL="0">
-                        <a:buNone/>
-                      </a:pPr>
-                      <a:r>
-                        <a:rPr lang="en-US" sz="1050" dirty="0">
-                          <a:solidFill>
-                            <a:srgbClr val="0F172A"/>
-                          </a:solidFill>
-                          <a:latin typeface="Segoe UI" pitchFamily="34" charset="0"/>
-                          <a:ea typeface="Segoe UI" pitchFamily="34" charset="-122"/>
-                          <a:cs typeface="Segoe UI" pitchFamily="34" charset="-120"/>
-                        </a:rPr>
-                        <a:t>Team lớn hơn</a:t>
-                      </a:r>
-                      <a:endParaRPr lang="en-US" sz="1050" dirty="0">
-                        <a:latin typeface="Segoe UI" charset="0"/>
-                        <a:ea typeface="Segoe UI" charset="0"/>
-                        <a:cs typeface="Segoe UI" charset="0"/>
-                      </a:endParaRPr>
-                    </a:p>
-                  </a:txBody>
-                  <a:tcPr marL="73152" marR="73152" marT="73152" marB="73152" anchor="ctr">
-                    <a:lnL w="9525" cap="flat" cmpd="sng" algn="ctr">
-                      <a:solidFill>
-                        <a:srgbClr val="E2E8F0"/>
-                      </a:solidFill>
-                      <a:prstDash val="solid"/>
-                      <a:round/>
-                      <a:headEnd type="none" w="med" len="med"/>
-                      <a:tailEnd type="none" w="med" len="med"/>
-                    </a:lnL>
-                    <a:lnR w="9525" cap="flat" cmpd="sng" algn="ctr">
-                      <a:solidFill>
-                        <a:srgbClr val="E2E8F0"/>
-                      </a:solidFill>
-                      <a:prstDash val="solid"/>
-                      <a:round/>
-                      <a:headEnd type="none" w="med" len="med"/>
-                      <a:tailEnd type="none" w="med" len="med"/>
-                    </a:lnR>
-                    <a:lnT w="9525" cap="flat" cmpd="sng" algn="ctr">
-                      <a:solidFill>
-                        <a:srgbClr val="E2E8F0"/>
-                      </a:solidFill>
-                      <a:prstDash val="solid"/>
-                      <a:round/>
-                      <a:headEnd type="none" w="med" len="med"/>
-                      <a:tailEnd type="none" w="med" len="med"/>
-                    </a:lnT>
-                    <a:lnB w="9525" cap="flat" cmpd="sng" algn="ctr">
-                      <a:solidFill>
-                        <a:srgbClr val="E2E8F0"/>
-                      </a:solidFill>
-                      <a:prstDash val="solid"/>
-                      <a:round/>
-                      <a:headEnd type="none" w="med" len="med"/>
-                      <a:tailEnd type="none" w="med" len="med"/>
-                    </a:lnB>
-                    <a:solidFill>
-                      <a:srgbClr val="FFFFFF"/>
-                    </a:solidFill>
-                  </a:tcPr>
-                </a:tc>
-                <a:tc>
-                  <a:txBody>
-                    <a:bodyPr/>
-                    <a:lstStyle/>
-                    <a:p>
-                      <a:pPr indent="0" marL="0">
-                        <a:buNone/>
-                      </a:pPr>
-                      <a:r>
-                        <a:rPr lang="en-US" sz="1050" dirty="0">
-                          <a:solidFill>
-                            <a:srgbClr val="0F172A"/>
-                          </a:solidFill>
-                          <a:latin typeface="Segoe UI" pitchFamily="34" charset="0"/>
-                          <a:ea typeface="Segoe UI" pitchFamily="34" charset="-122"/>
-                          <a:cs typeface="Segoe UI" pitchFamily="34" charset="-120"/>
-                        </a:rPr>
-                        <a:t>Monolith conflict</a:t>
-                      </a:r>
-                      <a:endParaRPr lang="en-US" sz="1050" dirty="0">
-                        <a:latin typeface="Segoe UI" charset="0"/>
-                        <a:ea typeface="Segoe UI" charset="0"/>
-                        <a:cs typeface="Segoe UI" charset="0"/>
-                      </a:endParaRPr>
-                    </a:p>
-                  </a:txBody>
-                  <a:tcPr marL="73152" marR="73152" marT="73152" marB="73152" anchor="ctr">
-                    <a:lnL w="9525" cap="flat" cmpd="sng" algn="ctr">
-                      <a:solidFill>
-                        <a:srgbClr val="E2E8F0"/>
-                      </a:solidFill>
-                      <a:prstDash val="solid"/>
-                      <a:round/>
-                      <a:headEnd type="none" w="med" len="med"/>
-                      <a:tailEnd type="none" w="med" len="med"/>
-                    </a:lnL>
-                    <a:lnR w="9525" cap="flat" cmpd="sng" algn="ctr">
-                      <a:solidFill>
-                        <a:srgbClr val="E2E8F0"/>
-                      </a:solidFill>
-                      <a:prstDash val="solid"/>
-                      <a:round/>
-                      <a:headEnd type="none" w="med" len="med"/>
-                      <a:tailEnd type="none" w="med" len="med"/>
-                    </a:lnR>
-                    <a:lnT w="9525" cap="flat" cmpd="sng" algn="ctr">
-                      <a:solidFill>
-                        <a:srgbClr val="E2E8F0"/>
-                      </a:solidFill>
-                      <a:prstDash val="solid"/>
-                      <a:round/>
-                      <a:headEnd type="none" w="med" len="med"/>
-                      <a:tailEnd type="none" w="med" len="med"/>
-                    </a:lnT>
-                    <a:lnB w="9525" cap="flat" cmpd="sng" algn="ctr">
-                      <a:solidFill>
-                        <a:srgbClr val="E2E8F0"/>
-                      </a:solidFill>
-                      <a:prstDash val="solid"/>
-                      <a:round/>
-                      <a:headEnd type="none" w="med" len="med"/>
-                      <a:tailEnd type="none" w="med" len="med"/>
-                    </a:lnB>
-                    <a:solidFill>
-                      <a:srgbClr val="FFFFFF"/>
-                    </a:solidFill>
-                  </a:tcPr>
-                </a:tc>
-                <a:tc>
-                  <a:txBody>
-                    <a:bodyPr/>
-                    <a:lstStyle/>
-                    <a:p>
-                      <a:pPr indent="0" marL="0">
-                        <a:buNone/>
-                      </a:pPr>
-                      <a:r>
-                        <a:rPr lang="en-US" sz="1050" dirty="0">
-                          <a:solidFill>
-                            <a:srgbClr val="0F172A"/>
-                          </a:solidFill>
-                          <a:latin typeface="Segoe UI" pitchFamily="34" charset="0"/>
-                          <a:ea typeface="Segoe UI" pitchFamily="34" charset="-122"/>
-                          <a:cs typeface="Segoe UI" pitchFamily="34" charset="-120"/>
-                        </a:rPr>
-                        <a:t>Tách module nóng ra service - route group boundaries đã là bounded context sẵn</a:t>
-                      </a:r>
-                      <a:endParaRPr lang="en-US" sz="1050" dirty="0">
-                        <a:latin typeface="Segoe UI" charset="0"/>
-                        <a:ea typeface="Segoe UI" charset="0"/>
-                        <a:cs typeface="Segoe UI" charset="0"/>
-                      </a:endParaRPr>
-                    </a:p>
-                  </a:txBody>
-                  <a:tcPr marL="73152" marR="73152" marT="73152" marB="73152" anchor="ctr">
-                    <a:lnL w="9525" cap="flat" cmpd="sng" algn="ctr">
-                      <a:solidFill>
-                        <a:srgbClr val="E2E8F0"/>
-                      </a:solidFill>
-                      <a:prstDash val="solid"/>
-                      <a:round/>
-                      <a:headEnd type="none" w="med" len="med"/>
-                      <a:tailEnd type="none" w="med" len="med"/>
-                    </a:lnL>
-                    <a:lnR w="9525" cap="flat" cmpd="sng" algn="ctr">
-                      <a:solidFill>
-                        <a:srgbClr val="E2E8F0"/>
-                      </a:solidFill>
-                      <a:prstDash val="solid"/>
-                      <a:round/>
-                      <a:headEnd type="none" w="med" len="med"/>
-                      <a:tailEnd type="none" w="med" len="med"/>
-                    </a:lnR>
-                    <a:lnT w="9525" cap="flat" cmpd="sng" algn="ctr">
-                      <a:solidFill>
-                        <a:srgbClr val="E2E8F0"/>
-                      </a:solidFill>
-                      <a:prstDash val="solid"/>
-                      <a:round/>
-                      <a:headEnd type="none" w="med" len="med"/>
-                      <a:tailEnd type="none" w="med" len="med"/>
-                    </a:lnT>
-                    <a:lnB w="9525" cap="flat" cmpd="sng" algn="ctr">
-                      <a:solidFill>
-                        <a:srgbClr val="E2E8F0"/>
-                      </a:solidFill>
-                      <a:prstDash val="solid"/>
-                      <a:round/>
-                      <a:headEnd type="none" w="med" len="med"/>
-                      <a:tailEnd type="none" w="med" len="med"/>
-                    </a:lnB>
-                    <a:solidFill>
-                      <a:srgbClr val="FFFFFF"/>
-                    </a:solidFill>
-                  </a:tcPr>
-                </a:tc>
-              </a:tr>
-            </a:tbl>
-          </a:graphicData>
-        </a:graphic>
-      </p:graphicFrame>
-      <p:sp>
-        <p:nvSpPr>
-          <p:cNvPr id="9" name="Text 6"/>
-          <p:cNvSpPr/>
-          <p:nvPr/>
-        </p:nvSpPr>
-        <p:spPr>
-          <a:xfrm>
-            <a:off x="640080" y="6263640"/>
-            <a:ext cx="10972800" cy="457200"/>
-          </a:xfrm>
-          <a:prstGeom prst="rect">
-            <a:avLst/>
-          </a:prstGeom>
-          <a:noFill/>
-          <a:ln/>
-        </p:spPr>
-        <p:txBody>
-          <a:bodyPr wrap="square" rtlCol="0" anchor="ctr"/>
-          <a:lstStyle/>
-          <a:p>
-            <a:pPr indent="0" marL="0">
-              <a:buNone/>
-            </a:pPr>
-            <a:r>
-              <a:rPr lang="en-US" sz="1050" i="1" dirty="0">
-                <a:solidFill>
-                  <a:srgbClr val="0F766E"/>
-                </a:solidFill>
-                <a:latin typeface="Segoe UI" pitchFamily="34" charset="0"/>
-                <a:ea typeface="Segoe UI" pitchFamily="34" charset="-122"/>
-                <a:cs typeface="Segoe UI" pitchFamily="34" charset="-120"/>
-              </a:rPr>
-              <a:t>Nguyên tắc kiến trúc: mọi seam tách (ai_jobs, RLS school_id, route groups) đã được đặt sẵn - scale = đổi bên trong seam, không phải viết lại.</a:t>
-            </a:r>
-            <a:endParaRPr lang="en-US" sz="1050" dirty="0"/>
-          </a:p>
-        </p:txBody>
-      </p:sp>
     </p:spTree>
   </p:cSld>
   <p:clrMapOvr>
@@ -13877,7 +14261,7 @@
                 <a:ea typeface="Segoe UI" pitchFamily="34" charset="-122"/>
                 <a:cs typeface="Segoe UI" pitchFamily="34" charset="-120"/>
               </a:rPr>
-              <a:t>Mức độ phù hợp với bài toán - bảng đối chứng</a:t>
+              <a:t>Đường scale - gãy ở đâu trước, xử lý thế nào</a:t>
             </a:r>
             <a:endParaRPr lang="en-US" sz="2600" dirty="0"/>
           </a:p>
@@ -14007,6 +14391,3239 @@
             <a:tbl>
               <a:tblPr/>
               <a:tblGrid>
+                <a:gridCol w="3657600"/>
+                <a:gridCol w="3657600"/>
+                <a:gridCol w="3657600"/>
+              </a:tblGrid>
+              <a:tr h="658368">
+                <a:tc>
+                  <a:txBody>
+                    <a:bodyPr/>
+                    <a:lstStyle/>
+                    <a:p>
+                      <a:pPr indent="0" marL="0">
+                        <a:buNone/>
+                      </a:pPr>
+                      <a:r>
+                        <a:rPr lang="en-US" sz="1100" b="1" dirty="0">
+                          <a:solidFill>
+                            <a:srgbClr val="FFFFFF"/>
+                          </a:solidFill>
+                          <a:latin typeface="Segoe UI" pitchFamily="34" charset="0"/>
+                          <a:ea typeface="Segoe UI" pitchFamily="34" charset="-122"/>
+                          <a:cs typeface="Segoe UI" pitchFamily="34" charset="-120"/>
+                        </a:rPr>
+                        <a:t>Quy mô</a:t>
+                      </a:r>
+                      <a:endParaRPr lang="en-US" sz="1100" dirty="0">
+                        <a:latin typeface="Segoe UI" charset="0"/>
+                        <a:ea typeface="Segoe UI" charset="0"/>
+                        <a:cs typeface="Segoe UI" charset="0"/>
+                      </a:endParaRPr>
+                    </a:p>
+                  </a:txBody>
+                  <a:tcPr marL="73152" marR="73152" marT="73152" marB="73152" anchor="ctr">
+                    <a:lnL w="9525" cap="flat" cmpd="sng" algn="ctr">
+                      <a:solidFill>
+                        <a:srgbClr val="E2E8F0"/>
+                      </a:solidFill>
+                      <a:prstDash val="solid"/>
+                      <a:round/>
+                      <a:headEnd type="none" w="med" len="med"/>
+                      <a:tailEnd type="none" w="med" len="med"/>
+                    </a:lnL>
+                    <a:lnR w="9525" cap="flat" cmpd="sng" algn="ctr">
+                      <a:solidFill>
+                        <a:srgbClr val="E2E8F0"/>
+                      </a:solidFill>
+                      <a:prstDash val="solid"/>
+                      <a:round/>
+                      <a:headEnd type="none" w="med" len="med"/>
+                      <a:tailEnd type="none" w="med" len="med"/>
+                    </a:lnR>
+                    <a:lnT w="9525" cap="flat" cmpd="sng" algn="ctr">
+                      <a:solidFill>
+                        <a:srgbClr val="E2E8F0"/>
+                      </a:solidFill>
+                      <a:prstDash val="solid"/>
+                      <a:round/>
+                      <a:headEnd type="none" w="med" len="med"/>
+                      <a:tailEnd type="none" w="med" len="med"/>
+                    </a:lnT>
+                    <a:lnB w="9525" cap="flat" cmpd="sng" algn="ctr">
+                      <a:solidFill>
+                        <a:srgbClr val="E2E8F0"/>
+                      </a:solidFill>
+                      <a:prstDash val="solid"/>
+                      <a:round/>
+                      <a:headEnd type="none" w="med" len="med"/>
+                      <a:tailEnd type="none" w="med" len="med"/>
+                    </a:lnB>
+                    <a:solidFill>
+                      <a:srgbClr val="0F766E"/>
+                    </a:solidFill>
+                  </a:tcPr>
+                </a:tc>
+                <a:tc>
+                  <a:txBody>
+                    <a:bodyPr/>
+                    <a:lstStyle/>
+                    <a:p>
+                      <a:pPr indent="0" marL="0">
+                        <a:buNone/>
+                      </a:pPr>
+                      <a:r>
+                        <a:rPr lang="en-US" sz="1100" b="1" dirty="0">
+                          <a:solidFill>
+                            <a:srgbClr val="FFFFFF"/>
+                          </a:solidFill>
+                          <a:latin typeface="Segoe UI" pitchFamily="34" charset="0"/>
+                          <a:ea typeface="Segoe UI" pitchFamily="34" charset="-122"/>
+                          <a:cs typeface="Segoe UI" pitchFamily="34" charset="-120"/>
+                        </a:rPr>
+                        <a:t>Điểm gãy đầu tiên</a:t>
+                      </a:r>
+                      <a:endParaRPr lang="en-US" sz="1100" dirty="0">
+                        <a:latin typeface="Segoe UI" charset="0"/>
+                        <a:ea typeface="Segoe UI" charset="0"/>
+                        <a:cs typeface="Segoe UI" charset="0"/>
+                      </a:endParaRPr>
+                    </a:p>
+                  </a:txBody>
+                  <a:tcPr marL="73152" marR="73152" marT="73152" marB="73152" anchor="ctr">
+                    <a:lnL w="9525" cap="flat" cmpd="sng" algn="ctr">
+                      <a:solidFill>
+                        <a:srgbClr val="E2E8F0"/>
+                      </a:solidFill>
+                      <a:prstDash val="solid"/>
+                      <a:round/>
+                      <a:headEnd type="none" w="med" len="med"/>
+                      <a:tailEnd type="none" w="med" len="med"/>
+                    </a:lnL>
+                    <a:lnR w="9525" cap="flat" cmpd="sng" algn="ctr">
+                      <a:solidFill>
+                        <a:srgbClr val="E2E8F0"/>
+                      </a:solidFill>
+                      <a:prstDash val="solid"/>
+                      <a:round/>
+                      <a:headEnd type="none" w="med" len="med"/>
+                      <a:tailEnd type="none" w="med" len="med"/>
+                    </a:lnR>
+                    <a:lnT w="9525" cap="flat" cmpd="sng" algn="ctr">
+                      <a:solidFill>
+                        <a:srgbClr val="E2E8F0"/>
+                      </a:solidFill>
+                      <a:prstDash val="solid"/>
+                      <a:round/>
+                      <a:headEnd type="none" w="med" len="med"/>
+                      <a:tailEnd type="none" w="med" len="med"/>
+                    </a:lnT>
+                    <a:lnB w="9525" cap="flat" cmpd="sng" algn="ctr">
+                      <a:solidFill>
+                        <a:srgbClr val="E2E8F0"/>
+                      </a:solidFill>
+                      <a:prstDash val="solid"/>
+                      <a:round/>
+                      <a:headEnd type="none" w="med" len="med"/>
+                      <a:tailEnd type="none" w="med" len="med"/>
+                    </a:lnB>
+                    <a:solidFill>
+                      <a:srgbClr val="0F766E"/>
+                    </a:solidFill>
+                  </a:tcPr>
+                </a:tc>
+                <a:tc>
+                  <a:txBody>
+                    <a:bodyPr/>
+                    <a:lstStyle/>
+                    <a:p>
+                      <a:pPr indent="0" marL="0">
+                        <a:buNone/>
+                      </a:pPr>
+                      <a:r>
+                        <a:rPr lang="en-US" sz="1100" b="1" dirty="0">
+                          <a:solidFill>
+                            <a:srgbClr val="FFFFFF"/>
+                          </a:solidFill>
+                          <a:latin typeface="Segoe UI" pitchFamily="34" charset="0"/>
+                          <a:ea typeface="Segoe UI" pitchFamily="34" charset="-122"/>
+                          <a:cs typeface="Segoe UI" pitchFamily="34" charset="-120"/>
+                        </a:rPr>
+                        <a:t>Đường xử lý (đã chuẩn bị trong thiết kế)</a:t>
+                      </a:r>
+                      <a:endParaRPr lang="en-US" sz="1100" dirty="0">
+                        <a:latin typeface="Segoe UI" charset="0"/>
+                        <a:ea typeface="Segoe UI" charset="0"/>
+                        <a:cs typeface="Segoe UI" charset="0"/>
+                      </a:endParaRPr>
+                    </a:p>
+                  </a:txBody>
+                  <a:tcPr marL="73152" marR="73152" marT="73152" marB="73152" anchor="ctr">
+                    <a:lnL w="9525" cap="flat" cmpd="sng" algn="ctr">
+                      <a:solidFill>
+                        <a:srgbClr val="E2E8F0"/>
+                      </a:solidFill>
+                      <a:prstDash val="solid"/>
+                      <a:round/>
+                      <a:headEnd type="none" w="med" len="med"/>
+                      <a:tailEnd type="none" w="med" len="med"/>
+                    </a:lnL>
+                    <a:lnR w="9525" cap="flat" cmpd="sng" algn="ctr">
+                      <a:solidFill>
+                        <a:srgbClr val="E2E8F0"/>
+                      </a:solidFill>
+                      <a:prstDash val="solid"/>
+                      <a:round/>
+                      <a:headEnd type="none" w="med" len="med"/>
+                      <a:tailEnd type="none" w="med" len="med"/>
+                    </a:lnR>
+                    <a:lnT w="9525" cap="flat" cmpd="sng" algn="ctr">
+                      <a:solidFill>
+                        <a:srgbClr val="E2E8F0"/>
+                      </a:solidFill>
+                      <a:prstDash val="solid"/>
+                      <a:round/>
+                      <a:headEnd type="none" w="med" len="med"/>
+                      <a:tailEnd type="none" w="med" len="med"/>
+                    </a:lnT>
+                    <a:lnB w="9525" cap="flat" cmpd="sng" algn="ctr">
+                      <a:solidFill>
+                        <a:srgbClr val="E2E8F0"/>
+                      </a:solidFill>
+                      <a:prstDash val="solid"/>
+                      <a:round/>
+                      <a:headEnd type="none" w="med" len="med"/>
+                      <a:tailEnd type="none" w="med" len="med"/>
+                    </a:lnB>
+                    <a:solidFill>
+                      <a:srgbClr val="0F766E"/>
+                    </a:solidFill>
+                  </a:tcPr>
+                </a:tc>
+              </a:tr>
+              <a:tr h="658368">
+                <a:tc>
+                  <a:txBody>
+                    <a:bodyPr/>
+                    <a:lstStyle/>
+                    <a:p>
+                      <a:pPr indent="0" marL="0">
+                        <a:buNone/>
+                      </a:pPr>
+                      <a:r>
+                        <a:rPr lang="en-US" sz="1050" dirty="0">
+                          <a:solidFill>
+                            <a:srgbClr val="0F172A"/>
+                          </a:solidFill>
+                          <a:latin typeface="Segoe UI" pitchFamily="34" charset="0"/>
+                          <a:ea typeface="Segoe UI" pitchFamily="34" charset="-122"/>
+                          <a:cs typeface="Segoe UI" pitchFamily="34" charset="-120"/>
+                        </a:rPr>
+                        <a:t>100-500 trường</a:t>
+                      </a:r>
+                      <a:endParaRPr lang="en-US" sz="1050" dirty="0">
+                        <a:latin typeface="Segoe UI" charset="0"/>
+                        <a:ea typeface="Segoe UI" charset="0"/>
+                        <a:cs typeface="Segoe UI" charset="0"/>
+                      </a:endParaRPr>
+                    </a:p>
+                  </a:txBody>
+                  <a:tcPr marL="73152" marR="73152" marT="73152" marB="73152" anchor="ctr">
+                    <a:lnL w="9525" cap="flat" cmpd="sng" algn="ctr">
+                      <a:solidFill>
+                        <a:srgbClr val="E2E8F0"/>
+                      </a:solidFill>
+                      <a:prstDash val="solid"/>
+                      <a:round/>
+                      <a:headEnd type="none" w="med" len="med"/>
+                      <a:tailEnd type="none" w="med" len="med"/>
+                    </a:lnL>
+                    <a:lnR w="9525" cap="flat" cmpd="sng" algn="ctr">
+                      <a:solidFill>
+                        <a:srgbClr val="E2E8F0"/>
+                      </a:solidFill>
+                      <a:prstDash val="solid"/>
+                      <a:round/>
+                      <a:headEnd type="none" w="med" len="med"/>
+                      <a:tailEnd type="none" w="med" len="med"/>
+                    </a:lnR>
+                    <a:lnT w="9525" cap="flat" cmpd="sng" algn="ctr">
+                      <a:solidFill>
+                        <a:srgbClr val="E2E8F0"/>
+                      </a:solidFill>
+                      <a:prstDash val="solid"/>
+                      <a:round/>
+                      <a:headEnd type="none" w="med" len="med"/>
+                      <a:tailEnd type="none" w="med" len="med"/>
+                    </a:lnT>
+                    <a:lnB w="9525" cap="flat" cmpd="sng" algn="ctr">
+                      <a:solidFill>
+                        <a:srgbClr val="E2E8F0"/>
+                      </a:solidFill>
+                      <a:prstDash val="solid"/>
+                      <a:round/>
+                      <a:headEnd type="none" w="med" len="med"/>
+                      <a:tailEnd type="none" w="med" len="med"/>
+                    </a:lnB>
+                    <a:solidFill>
+                      <a:srgbClr val="FFFFFF"/>
+                    </a:solidFill>
+                  </a:tcPr>
+                </a:tc>
+                <a:tc>
+                  <a:txBody>
+                    <a:bodyPr/>
+                    <a:lstStyle/>
+                    <a:p>
+                      <a:pPr indent="0" marL="0">
+                        <a:buNone/>
+                      </a:pPr>
+                      <a:r>
+                        <a:rPr lang="en-US" sz="1050" dirty="0">
+                          <a:solidFill>
+                            <a:srgbClr val="0F172A"/>
+                          </a:solidFill>
+                          <a:latin typeface="Segoe UI" pitchFamily="34" charset="0"/>
+                          <a:ea typeface="Segoe UI" pitchFamily="34" charset="-122"/>
+                          <a:cs typeface="Segoe UI" pitchFamily="34" charset="-120"/>
+                        </a:rPr>
+                        <a:t>Dashboard aggregate chậm</a:t>
+                      </a:r>
+                      <a:endParaRPr lang="en-US" sz="1050" dirty="0">
+                        <a:latin typeface="Segoe UI" charset="0"/>
+                        <a:ea typeface="Segoe UI" charset="0"/>
+                        <a:cs typeface="Segoe UI" charset="0"/>
+                      </a:endParaRPr>
+                    </a:p>
+                  </a:txBody>
+                  <a:tcPr marL="73152" marR="73152" marT="73152" marB="73152" anchor="ctr">
+                    <a:lnL w="9525" cap="flat" cmpd="sng" algn="ctr">
+                      <a:solidFill>
+                        <a:srgbClr val="E2E8F0"/>
+                      </a:solidFill>
+                      <a:prstDash val="solid"/>
+                      <a:round/>
+                      <a:headEnd type="none" w="med" len="med"/>
+                      <a:tailEnd type="none" w="med" len="med"/>
+                    </a:lnL>
+                    <a:lnR w="9525" cap="flat" cmpd="sng" algn="ctr">
+                      <a:solidFill>
+                        <a:srgbClr val="E2E8F0"/>
+                      </a:solidFill>
+                      <a:prstDash val="solid"/>
+                      <a:round/>
+                      <a:headEnd type="none" w="med" len="med"/>
+                      <a:tailEnd type="none" w="med" len="med"/>
+                    </a:lnR>
+                    <a:lnT w="9525" cap="flat" cmpd="sng" algn="ctr">
+                      <a:solidFill>
+                        <a:srgbClr val="E2E8F0"/>
+                      </a:solidFill>
+                      <a:prstDash val="solid"/>
+                      <a:round/>
+                      <a:headEnd type="none" w="med" len="med"/>
+                      <a:tailEnd type="none" w="med" len="med"/>
+                    </a:lnT>
+                    <a:lnB w="9525" cap="flat" cmpd="sng" algn="ctr">
+                      <a:solidFill>
+                        <a:srgbClr val="E2E8F0"/>
+                      </a:solidFill>
+                      <a:prstDash val="solid"/>
+                      <a:round/>
+                      <a:headEnd type="none" w="med" len="med"/>
+                      <a:tailEnd type="none" w="med" len="med"/>
+                    </a:lnB>
+                    <a:solidFill>
+                      <a:srgbClr val="FFFFFF"/>
+                    </a:solidFill>
+                  </a:tcPr>
+                </a:tc>
+                <a:tc>
+                  <a:txBody>
+                    <a:bodyPr/>
+                    <a:lstStyle/>
+                    <a:p>
+                      <a:pPr indent="0" marL="0">
+                        <a:buNone/>
+                      </a:pPr>
+                      <a:r>
+                        <a:rPr lang="en-US" sz="1050" dirty="0">
+                          <a:solidFill>
+                            <a:srgbClr val="0F172A"/>
+                          </a:solidFill>
+                          <a:latin typeface="Segoe UI" pitchFamily="34" charset="0"/>
+                          <a:ea typeface="Segoe UI" pitchFamily="34" charset="-122"/>
+                          <a:cs typeface="Segoe UI" pitchFamily="34" charset="-120"/>
+                        </a:rPr>
+                        <a:t>Materialized views + index; pattern sẵn - đổi cách đọc không đổi kiến trúc</a:t>
+                      </a:r>
+                      <a:endParaRPr lang="en-US" sz="1050" dirty="0">
+                        <a:latin typeface="Segoe UI" charset="0"/>
+                        <a:ea typeface="Segoe UI" charset="0"/>
+                        <a:cs typeface="Segoe UI" charset="0"/>
+                      </a:endParaRPr>
+                    </a:p>
+                  </a:txBody>
+                  <a:tcPr marL="73152" marR="73152" marT="73152" marB="73152" anchor="ctr">
+                    <a:lnL w="9525" cap="flat" cmpd="sng" algn="ctr">
+                      <a:solidFill>
+                        <a:srgbClr val="E2E8F0"/>
+                      </a:solidFill>
+                      <a:prstDash val="solid"/>
+                      <a:round/>
+                      <a:headEnd type="none" w="med" len="med"/>
+                      <a:tailEnd type="none" w="med" len="med"/>
+                    </a:lnL>
+                    <a:lnR w="9525" cap="flat" cmpd="sng" algn="ctr">
+                      <a:solidFill>
+                        <a:srgbClr val="E2E8F0"/>
+                      </a:solidFill>
+                      <a:prstDash val="solid"/>
+                      <a:round/>
+                      <a:headEnd type="none" w="med" len="med"/>
+                      <a:tailEnd type="none" w="med" len="med"/>
+                    </a:lnR>
+                    <a:lnT w="9525" cap="flat" cmpd="sng" algn="ctr">
+                      <a:solidFill>
+                        <a:srgbClr val="E2E8F0"/>
+                      </a:solidFill>
+                      <a:prstDash val="solid"/>
+                      <a:round/>
+                      <a:headEnd type="none" w="med" len="med"/>
+                      <a:tailEnd type="none" w="med" len="med"/>
+                    </a:lnT>
+                    <a:lnB w="9525" cap="flat" cmpd="sng" algn="ctr">
+                      <a:solidFill>
+                        <a:srgbClr val="E2E8F0"/>
+                      </a:solidFill>
+                      <a:prstDash val="solid"/>
+                      <a:round/>
+                      <a:headEnd type="none" w="med" len="med"/>
+                      <a:tailEnd type="none" w="med" len="med"/>
+                    </a:lnB>
+                    <a:solidFill>
+                      <a:srgbClr val="FFFFFF"/>
+                    </a:solidFill>
+                  </a:tcPr>
+                </a:tc>
+              </a:tr>
+              <a:tr h="658368">
+                <a:tc>
+                  <a:txBody>
+                    <a:bodyPr/>
+                    <a:lstStyle/>
+                    <a:p>
+                      <a:pPr indent="0" marL="0">
+                        <a:buNone/>
+                      </a:pPr>
+                      <a:r>
+                        <a:rPr lang="en-US" sz="1050" dirty="0">
+                          <a:solidFill>
+                            <a:srgbClr val="0F172A"/>
+                          </a:solidFill>
+                          <a:latin typeface="Segoe UI" pitchFamily="34" charset="0"/>
+                          <a:ea typeface="Segoe UI" pitchFamily="34" charset="-122"/>
+                          <a:cs typeface="Segoe UI" pitchFamily="34" charset="-120"/>
+                        </a:rPr>
+                        <a:t>1.000-5.000 trường</a:t>
+                      </a:r>
+                      <a:endParaRPr lang="en-US" sz="1050" dirty="0">
+                        <a:latin typeface="Segoe UI" charset="0"/>
+                        <a:ea typeface="Segoe UI" charset="0"/>
+                        <a:cs typeface="Segoe UI" charset="0"/>
+                      </a:endParaRPr>
+                    </a:p>
+                  </a:txBody>
+                  <a:tcPr marL="73152" marR="73152" marT="73152" marB="73152" anchor="ctr">
+                    <a:lnL w="9525" cap="flat" cmpd="sng" algn="ctr">
+                      <a:solidFill>
+                        <a:srgbClr val="E2E8F0"/>
+                      </a:solidFill>
+                      <a:prstDash val="solid"/>
+                      <a:round/>
+                      <a:headEnd type="none" w="med" len="med"/>
+                      <a:tailEnd type="none" w="med" len="med"/>
+                    </a:lnL>
+                    <a:lnR w="9525" cap="flat" cmpd="sng" algn="ctr">
+                      <a:solidFill>
+                        <a:srgbClr val="E2E8F0"/>
+                      </a:solidFill>
+                      <a:prstDash val="solid"/>
+                      <a:round/>
+                      <a:headEnd type="none" w="med" len="med"/>
+                      <a:tailEnd type="none" w="med" len="med"/>
+                    </a:lnR>
+                    <a:lnT w="9525" cap="flat" cmpd="sng" algn="ctr">
+                      <a:solidFill>
+                        <a:srgbClr val="E2E8F0"/>
+                      </a:solidFill>
+                      <a:prstDash val="solid"/>
+                      <a:round/>
+                      <a:headEnd type="none" w="med" len="med"/>
+                      <a:tailEnd type="none" w="med" len="med"/>
+                    </a:lnT>
+                    <a:lnB w="9525" cap="flat" cmpd="sng" algn="ctr">
+                      <a:solidFill>
+                        <a:srgbClr val="E2E8F0"/>
+                      </a:solidFill>
+                      <a:prstDash val="solid"/>
+                      <a:round/>
+                      <a:headEnd type="none" w="med" len="med"/>
+                      <a:tailEnd type="none" w="med" len="med"/>
+                    </a:lnB>
+                    <a:solidFill>
+                      <a:srgbClr val="F8FAFC"/>
+                    </a:solidFill>
+                  </a:tcPr>
+                </a:tc>
+                <a:tc>
+                  <a:txBody>
+                    <a:bodyPr/>
+                    <a:lstStyle/>
+                    <a:p>
+                      <a:pPr indent="0" marL="0">
+                        <a:buNone/>
+                      </a:pPr>
+                      <a:r>
+                        <a:rPr lang="en-US" sz="1050" dirty="0">
+                          <a:solidFill>
+                            <a:srgbClr val="0F172A"/>
+                          </a:solidFill>
+                          <a:latin typeface="Segoe UI" pitchFamily="34" charset="0"/>
+                          <a:ea typeface="Segoe UI" pitchFamily="34" charset="-122"/>
+                          <a:cs typeface="Segoe UI" pitchFamily="34" charset="-120"/>
+                        </a:rPr>
+                        <a:t>Connection pool + write hotspot attendance</a:t>
+                      </a:r>
+                      <a:endParaRPr lang="en-US" sz="1050" dirty="0">
+                        <a:latin typeface="Segoe UI" charset="0"/>
+                        <a:ea typeface="Segoe UI" charset="0"/>
+                        <a:cs typeface="Segoe UI" charset="0"/>
+                      </a:endParaRPr>
+                    </a:p>
+                  </a:txBody>
+                  <a:tcPr marL="73152" marR="73152" marT="73152" marB="73152" anchor="ctr">
+                    <a:lnL w="9525" cap="flat" cmpd="sng" algn="ctr">
+                      <a:solidFill>
+                        <a:srgbClr val="E2E8F0"/>
+                      </a:solidFill>
+                      <a:prstDash val="solid"/>
+                      <a:round/>
+                      <a:headEnd type="none" w="med" len="med"/>
+                      <a:tailEnd type="none" w="med" len="med"/>
+                    </a:lnL>
+                    <a:lnR w="9525" cap="flat" cmpd="sng" algn="ctr">
+                      <a:solidFill>
+                        <a:srgbClr val="E2E8F0"/>
+                      </a:solidFill>
+                      <a:prstDash val="solid"/>
+                      <a:round/>
+                      <a:headEnd type="none" w="med" len="med"/>
+                      <a:tailEnd type="none" w="med" len="med"/>
+                    </a:lnR>
+                    <a:lnT w="9525" cap="flat" cmpd="sng" algn="ctr">
+                      <a:solidFill>
+                        <a:srgbClr val="E2E8F0"/>
+                      </a:solidFill>
+                      <a:prstDash val="solid"/>
+                      <a:round/>
+                      <a:headEnd type="none" w="med" len="med"/>
+                      <a:tailEnd type="none" w="med" len="med"/>
+                    </a:lnT>
+                    <a:lnB w="9525" cap="flat" cmpd="sng" algn="ctr">
+                      <a:solidFill>
+                        <a:srgbClr val="E2E8F0"/>
+                      </a:solidFill>
+                      <a:prstDash val="solid"/>
+                      <a:round/>
+                      <a:headEnd type="none" w="med" len="med"/>
+                      <a:tailEnd type="none" w="med" len="med"/>
+                    </a:lnB>
+                    <a:solidFill>
+                      <a:srgbClr val="F8FAFC"/>
+                    </a:solidFill>
+                  </a:tcPr>
+                </a:tc>
+                <a:tc>
+                  <a:txBody>
+                    <a:bodyPr/>
+                    <a:lstStyle/>
+                    <a:p>
+                      <a:pPr indent="0" marL="0">
+                        <a:buNone/>
+                      </a:pPr>
+                      <a:r>
+                        <a:rPr lang="en-US" sz="1050" dirty="0">
+                          <a:solidFill>
+                            <a:srgbClr val="0F172A"/>
+                          </a:solidFill>
+                          <a:latin typeface="Segoe UI" pitchFamily="34" charset="0"/>
+                          <a:ea typeface="Segoe UI" pitchFamily="34" charset="-122"/>
+                          <a:cs typeface="Segoe UI" pitchFamily="34" charset="-120"/>
+                        </a:rPr>
+                        <a:t>Supabase pooler + partition attendance_records theo academic_year; tách Supabase project riêng cho SCN</a:t>
+                      </a:r>
+                      <a:endParaRPr lang="en-US" sz="1050" dirty="0">
+                        <a:latin typeface="Segoe UI" charset="0"/>
+                        <a:ea typeface="Segoe UI" charset="0"/>
+                        <a:cs typeface="Segoe UI" charset="0"/>
+                      </a:endParaRPr>
+                    </a:p>
+                  </a:txBody>
+                  <a:tcPr marL="73152" marR="73152" marT="73152" marB="73152" anchor="ctr">
+                    <a:lnL w="9525" cap="flat" cmpd="sng" algn="ctr">
+                      <a:solidFill>
+                        <a:srgbClr val="E2E8F0"/>
+                      </a:solidFill>
+                      <a:prstDash val="solid"/>
+                      <a:round/>
+                      <a:headEnd type="none" w="med" len="med"/>
+                      <a:tailEnd type="none" w="med" len="med"/>
+                    </a:lnL>
+                    <a:lnR w="9525" cap="flat" cmpd="sng" algn="ctr">
+                      <a:solidFill>
+                        <a:srgbClr val="E2E8F0"/>
+                      </a:solidFill>
+                      <a:prstDash val="solid"/>
+                      <a:round/>
+                      <a:headEnd type="none" w="med" len="med"/>
+                      <a:tailEnd type="none" w="med" len="med"/>
+                    </a:lnR>
+                    <a:lnT w="9525" cap="flat" cmpd="sng" algn="ctr">
+                      <a:solidFill>
+                        <a:srgbClr val="E2E8F0"/>
+                      </a:solidFill>
+                      <a:prstDash val="solid"/>
+                      <a:round/>
+                      <a:headEnd type="none" w="med" len="med"/>
+                      <a:tailEnd type="none" w="med" len="med"/>
+                    </a:lnT>
+                    <a:lnB w="9525" cap="flat" cmpd="sng" algn="ctr">
+                      <a:solidFill>
+                        <a:srgbClr val="E2E8F0"/>
+                      </a:solidFill>
+                      <a:prstDash val="solid"/>
+                      <a:round/>
+                      <a:headEnd type="none" w="med" len="med"/>
+                      <a:tailEnd type="none" w="med" len="med"/>
+                    </a:lnB>
+                    <a:solidFill>
+                      <a:srgbClr val="F8FAFC"/>
+                    </a:solidFill>
+                  </a:tcPr>
+                </a:tc>
+              </a:tr>
+              <a:tr h="658368">
+                <a:tc>
+                  <a:txBody>
+                    <a:bodyPr/>
+                    <a:lstStyle/>
+                    <a:p>
+                      <a:pPr indent="0" marL="0">
+                        <a:buNone/>
+                      </a:pPr>
+                      <a:r>
+                        <a:rPr lang="en-US" sz="1050" dirty="0">
+                          <a:solidFill>
+                            <a:srgbClr val="0F172A"/>
+                          </a:solidFill>
+                          <a:latin typeface="Segoe UI" pitchFamily="34" charset="0"/>
+                          <a:ea typeface="Segoe UI" pitchFamily="34" charset="-122"/>
+                          <a:cs typeface="Segoe UI" pitchFamily="34" charset="-120"/>
+                        </a:rPr>
+                        <a:t>AI throughput cao</a:t>
+                      </a:r>
+                      <a:endParaRPr lang="en-US" sz="1050" dirty="0">
+                        <a:latin typeface="Segoe UI" charset="0"/>
+                        <a:ea typeface="Segoe UI" charset="0"/>
+                        <a:cs typeface="Segoe UI" charset="0"/>
+                      </a:endParaRPr>
+                    </a:p>
+                  </a:txBody>
+                  <a:tcPr marL="73152" marR="73152" marT="73152" marB="73152" anchor="ctr">
+                    <a:lnL w="9525" cap="flat" cmpd="sng" algn="ctr">
+                      <a:solidFill>
+                        <a:srgbClr val="E2E8F0"/>
+                      </a:solidFill>
+                      <a:prstDash val="solid"/>
+                      <a:round/>
+                      <a:headEnd type="none" w="med" len="med"/>
+                      <a:tailEnd type="none" w="med" len="med"/>
+                    </a:lnL>
+                    <a:lnR w="9525" cap="flat" cmpd="sng" algn="ctr">
+                      <a:solidFill>
+                        <a:srgbClr val="E2E8F0"/>
+                      </a:solidFill>
+                      <a:prstDash val="solid"/>
+                      <a:round/>
+                      <a:headEnd type="none" w="med" len="med"/>
+                      <a:tailEnd type="none" w="med" len="med"/>
+                    </a:lnR>
+                    <a:lnT w="9525" cap="flat" cmpd="sng" algn="ctr">
+                      <a:solidFill>
+                        <a:srgbClr val="E2E8F0"/>
+                      </a:solidFill>
+                      <a:prstDash val="solid"/>
+                      <a:round/>
+                      <a:headEnd type="none" w="med" len="med"/>
+                      <a:tailEnd type="none" w="med" len="med"/>
+                    </a:lnT>
+                    <a:lnB w="9525" cap="flat" cmpd="sng" algn="ctr">
+                      <a:solidFill>
+                        <a:srgbClr val="E2E8F0"/>
+                      </a:solidFill>
+                      <a:prstDash val="solid"/>
+                      <a:round/>
+                      <a:headEnd type="none" w="med" len="med"/>
+                      <a:tailEnd type="none" w="med" len="med"/>
+                    </a:lnB>
+                    <a:solidFill>
+                      <a:srgbClr val="FFFFFF"/>
+                    </a:solidFill>
+                  </a:tcPr>
+                </a:tc>
+                <a:tc>
+                  <a:txBody>
+                    <a:bodyPr/>
+                    <a:lstStyle/>
+                    <a:p>
+                      <a:pPr indent="0" marL="0">
+                        <a:buNone/>
+                      </a:pPr>
+                      <a:r>
+                        <a:rPr lang="en-US" sz="1050" dirty="0">
+                          <a:solidFill>
+                            <a:srgbClr val="0F172A"/>
+                          </a:solidFill>
+                          <a:latin typeface="Segoe UI" pitchFamily="34" charset="0"/>
+                          <a:ea typeface="Segoe UI" pitchFamily="34" charset="-122"/>
+                          <a:cs typeface="Segoe UI" pitchFamily="34" charset="-120"/>
+                        </a:rPr>
+                        <a:t>ai_jobs poll-based kẹt</a:t>
+                      </a:r>
+                      <a:endParaRPr lang="en-US" sz="1050" dirty="0">
+                        <a:latin typeface="Segoe UI" charset="0"/>
+                        <a:ea typeface="Segoe UI" charset="0"/>
+                        <a:cs typeface="Segoe UI" charset="0"/>
+                      </a:endParaRPr>
+                    </a:p>
+                  </a:txBody>
+                  <a:tcPr marL="73152" marR="73152" marT="73152" marB="73152" anchor="ctr">
+                    <a:lnL w="9525" cap="flat" cmpd="sng" algn="ctr">
+                      <a:solidFill>
+                        <a:srgbClr val="E2E8F0"/>
+                      </a:solidFill>
+                      <a:prstDash val="solid"/>
+                      <a:round/>
+                      <a:headEnd type="none" w="med" len="med"/>
+                      <a:tailEnd type="none" w="med" len="med"/>
+                    </a:lnL>
+                    <a:lnR w="9525" cap="flat" cmpd="sng" algn="ctr">
+                      <a:solidFill>
+                        <a:srgbClr val="E2E8F0"/>
+                      </a:solidFill>
+                      <a:prstDash val="solid"/>
+                      <a:round/>
+                      <a:headEnd type="none" w="med" len="med"/>
+                      <a:tailEnd type="none" w="med" len="med"/>
+                    </a:lnR>
+                    <a:lnT w="9525" cap="flat" cmpd="sng" algn="ctr">
+                      <a:solidFill>
+                        <a:srgbClr val="E2E8F0"/>
+                      </a:solidFill>
+                      <a:prstDash val="solid"/>
+                      <a:round/>
+                      <a:headEnd type="none" w="med" len="med"/>
+                      <a:tailEnd type="none" w="med" len="med"/>
+                    </a:lnT>
+                    <a:lnB w="9525" cap="flat" cmpd="sng" algn="ctr">
+                      <a:solidFill>
+                        <a:srgbClr val="E2E8F0"/>
+                      </a:solidFill>
+                      <a:prstDash val="solid"/>
+                      <a:round/>
+                      <a:headEnd type="none" w="med" len="med"/>
+                      <a:tailEnd type="none" w="med" len="med"/>
+                    </a:lnB>
+                    <a:solidFill>
+                      <a:srgbClr val="FFFFFF"/>
+                    </a:solidFill>
+                  </a:tcPr>
+                </a:tc>
+                <a:tc>
+                  <a:txBody>
+                    <a:bodyPr/>
+                    <a:lstStyle/>
+                    <a:p>
+                      <a:pPr indent="0" marL="0">
+                        <a:buNone/>
+                      </a:pPr>
+                      <a:r>
+                        <a:rPr lang="en-US" sz="1050" dirty="0">
+                          <a:solidFill>
+                            <a:srgbClr val="0F172A"/>
+                          </a:solidFill>
+                          <a:latin typeface="Segoe UI" pitchFamily="34" charset="0"/>
+                          <a:ea typeface="Segoe UI" pitchFamily="34" charset="-122"/>
+                          <a:cs typeface="Segoe UI" pitchFamily="34" charset="-120"/>
+                        </a:rPr>
+                        <a:t>Thay bằng queue thật (Supabase pgmq / SQS) - seam đã có sẵn ở useAiJob + callback</a:t>
+                      </a:r>
+                      <a:endParaRPr lang="en-US" sz="1050" dirty="0">
+                        <a:latin typeface="Segoe UI" charset="0"/>
+                        <a:ea typeface="Segoe UI" charset="0"/>
+                        <a:cs typeface="Segoe UI" charset="0"/>
+                      </a:endParaRPr>
+                    </a:p>
+                  </a:txBody>
+                  <a:tcPr marL="73152" marR="73152" marT="73152" marB="73152" anchor="ctr">
+                    <a:lnL w="9525" cap="flat" cmpd="sng" algn="ctr">
+                      <a:solidFill>
+                        <a:srgbClr val="E2E8F0"/>
+                      </a:solidFill>
+                      <a:prstDash val="solid"/>
+                      <a:round/>
+                      <a:headEnd type="none" w="med" len="med"/>
+                      <a:tailEnd type="none" w="med" len="med"/>
+                    </a:lnL>
+                    <a:lnR w="9525" cap="flat" cmpd="sng" algn="ctr">
+                      <a:solidFill>
+                        <a:srgbClr val="E2E8F0"/>
+                      </a:solidFill>
+                      <a:prstDash val="solid"/>
+                      <a:round/>
+                      <a:headEnd type="none" w="med" len="med"/>
+                      <a:tailEnd type="none" w="med" len="med"/>
+                    </a:lnR>
+                    <a:lnT w="9525" cap="flat" cmpd="sng" algn="ctr">
+                      <a:solidFill>
+                        <a:srgbClr val="E2E8F0"/>
+                      </a:solidFill>
+                      <a:prstDash val="solid"/>
+                      <a:round/>
+                      <a:headEnd type="none" w="med" len="med"/>
+                      <a:tailEnd type="none" w="med" len="med"/>
+                    </a:lnT>
+                    <a:lnB w="9525" cap="flat" cmpd="sng" algn="ctr">
+                      <a:solidFill>
+                        <a:srgbClr val="E2E8F0"/>
+                      </a:solidFill>
+                      <a:prstDash val="solid"/>
+                      <a:round/>
+                      <a:headEnd type="none" w="med" len="med"/>
+                      <a:tailEnd type="none" w="med" len="med"/>
+                    </a:lnB>
+                    <a:solidFill>
+                      <a:srgbClr val="FFFFFF"/>
+                    </a:solidFill>
+                  </a:tcPr>
+                </a:tc>
+              </a:tr>
+              <a:tr h="658368">
+                <a:tc>
+                  <a:txBody>
+                    <a:bodyPr/>
+                    <a:lstStyle/>
+                    <a:p>
+                      <a:pPr indent="0" marL="0">
+                        <a:buNone/>
+                      </a:pPr>
+                      <a:r>
+                        <a:rPr lang="en-US" sz="1050" dirty="0">
+                          <a:solidFill>
+                            <a:srgbClr val="0F172A"/>
+                          </a:solidFill>
+                          <a:latin typeface="Segoe UI" pitchFamily="34" charset="0"/>
+                          <a:ea typeface="Segoe UI" pitchFamily="34" charset="-122"/>
+                          <a:cs typeface="Segoe UI" pitchFamily="34" charset="-120"/>
+                        </a:rPr>
+                        <a:t>Nhiều tenant lớn (Sở toàn tỉnh)</a:t>
+                      </a:r>
+                      <a:endParaRPr lang="en-US" sz="1050" dirty="0">
+                        <a:latin typeface="Segoe UI" charset="0"/>
+                        <a:ea typeface="Segoe UI" charset="0"/>
+                        <a:cs typeface="Segoe UI" charset="0"/>
+                      </a:endParaRPr>
+                    </a:p>
+                  </a:txBody>
+                  <a:tcPr marL="73152" marR="73152" marT="73152" marB="73152" anchor="ctr">
+                    <a:lnL w="9525" cap="flat" cmpd="sng" algn="ctr">
+                      <a:solidFill>
+                        <a:srgbClr val="E2E8F0"/>
+                      </a:solidFill>
+                      <a:prstDash val="solid"/>
+                      <a:round/>
+                      <a:headEnd type="none" w="med" len="med"/>
+                      <a:tailEnd type="none" w="med" len="med"/>
+                    </a:lnL>
+                    <a:lnR w="9525" cap="flat" cmpd="sng" algn="ctr">
+                      <a:solidFill>
+                        <a:srgbClr val="E2E8F0"/>
+                      </a:solidFill>
+                      <a:prstDash val="solid"/>
+                      <a:round/>
+                      <a:headEnd type="none" w="med" len="med"/>
+                      <a:tailEnd type="none" w="med" len="med"/>
+                    </a:lnR>
+                    <a:lnT w="9525" cap="flat" cmpd="sng" algn="ctr">
+                      <a:solidFill>
+                        <a:srgbClr val="E2E8F0"/>
+                      </a:solidFill>
+                      <a:prstDash val="solid"/>
+                      <a:round/>
+                      <a:headEnd type="none" w="med" len="med"/>
+                      <a:tailEnd type="none" w="med" len="med"/>
+                    </a:lnT>
+                    <a:lnB w="9525" cap="flat" cmpd="sng" algn="ctr">
+                      <a:solidFill>
+                        <a:srgbClr val="E2E8F0"/>
+                      </a:solidFill>
+                      <a:prstDash val="solid"/>
+                      <a:round/>
+                      <a:headEnd type="none" w="med" len="med"/>
+                      <a:tailEnd type="none" w="med" len="med"/>
+                    </a:lnB>
+                    <a:solidFill>
+                      <a:srgbClr val="F8FAFC"/>
+                    </a:solidFill>
+                  </a:tcPr>
+                </a:tc>
+                <a:tc>
+                  <a:txBody>
+                    <a:bodyPr/>
+                    <a:lstStyle/>
+                    <a:p>
+                      <a:pPr indent="0" marL="0">
+                        <a:buNone/>
+                      </a:pPr>
+                      <a:r>
+                        <a:rPr lang="en-US" sz="1050" dirty="0">
+                          <a:solidFill>
+                            <a:srgbClr val="0F172A"/>
+                          </a:solidFill>
+                          <a:latin typeface="Segoe UI" pitchFamily="34" charset="0"/>
+                          <a:ea typeface="Segoe UI" pitchFamily="34" charset="-122"/>
+                          <a:cs typeface="Segoe UI" pitchFamily="34" charset="-120"/>
+                        </a:rPr>
+                        <a:t>RLS evaluation cost trên bảng lớn</a:t>
+                      </a:r>
+                      <a:endParaRPr lang="en-US" sz="1050" dirty="0">
+                        <a:latin typeface="Segoe UI" charset="0"/>
+                        <a:ea typeface="Segoe UI" charset="0"/>
+                        <a:cs typeface="Segoe UI" charset="0"/>
+                      </a:endParaRPr>
+                    </a:p>
+                  </a:txBody>
+                  <a:tcPr marL="73152" marR="73152" marT="73152" marB="73152" anchor="ctr">
+                    <a:lnL w="9525" cap="flat" cmpd="sng" algn="ctr">
+                      <a:solidFill>
+                        <a:srgbClr val="E2E8F0"/>
+                      </a:solidFill>
+                      <a:prstDash val="solid"/>
+                      <a:round/>
+                      <a:headEnd type="none" w="med" len="med"/>
+                      <a:tailEnd type="none" w="med" len="med"/>
+                    </a:lnL>
+                    <a:lnR w="9525" cap="flat" cmpd="sng" algn="ctr">
+                      <a:solidFill>
+                        <a:srgbClr val="E2E8F0"/>
+                      </a:solidFill>
+                      <a:prstDash val="solid"/>
+                      <a:round/>
+                      <a:headEnd type="none" w="med" len="med"/>
+                      <a:tailEnd type="none" w="med" len="med"/>
+                    </a:lnR>
+                    <a:lnT w="9525" cap="flat" cmpd="sng" algn="ctr">
+                      <a:solidFill>
+                        <a:srgbClr val="E2E8F0"/>
+                      </a:solidFill>
+                      <a:prstDash val="solid"/>
+                      <a:round/>
+                      <a:headEnd type="none" w="med" len="med"/>
+                      <a:tailEnd type="none" w="med" len="med"/>
+                    </a:lnT>
+                    <a:lnB w="9525" cap="flat" cmpd="sng" algn="ctr">
+                      <a:solidFill>
+                        <a:srgbClr val="E2E8F0"/>
+                      </a:solidFill>
+                      <a:prstDash val="solid"/>
+                      <a:round/>
+                      <a:headEnd type="none" w="med" len="med"/>
+                      <a:tailEnd type="none" w="med" len="med"/>
+                    </a:lnB>
+                    <a:solidFill>
+                      <a:srgbClr val="F8FAFC"/>
+                    </a:solidFill>
+                  </a:tcPr>
+                </a:tc>
+                <a:tc>
+                  <a:txBody>
+                    <a:bodyPr/>
+                    <a:lstStyle/>
+                    <a:p>
+                      <a:pPr indent="0" marL="0">
+                        <a:buNone/>
+                      </a:pPr>
+                      <a:r>
+                        <a:rPr lang="en-US" sz="1050" dirty="0">
+                          <a:solidFill>
+                            <a:srgbClr val="0F172A"/>
+                          </a:solidFill>
+                          <a:latin typeface="Segoe UI" pitchFamily="34" charset="0"/>
+                          <a:ea typeface="Segoe UI" pitchFamily="34" charset="-122"/>
+                          <a:cs typeface="Segoe UI" pitchFamily="34" charset="-120"/>
+                        </a:rPr>
+                        <a:t>Partition theo school_id hoặc schema-per-dept - RLS đã có school_id sẵn</a:t>
+                      </a:r>
+                      <a:endParaRPr lang="en-US" sz="1050" dirty="0">
+                        <a:latin typeface="Segoe UI" charset="0"/>
+                        <a:ea typeface="Segoe UI" charset="0"/>
+                        <a:cs typeface="Segoe UI" charset="0"/>
+                      </a:endParaRPr>
+                    </a:p>
+                  </a:txBody>
+                  <a:tcPr marL="73152" marR="73152" marT="73152" marB="73152" anchor="ctr">
+                    <a:lnL w="9525" cap="flat" cmpd="sng" algn="ctr">
+                      <a:solidFill>
+                        <a:srgbClr val="E2E8F0"/>
+                      </a:solidFill>
+                      <a:prstDash val="solid"/>
+                      <a:round/>
+                      <a:headEnd type="none" w="med" len="med"/>
+                      <a:tailEnd type="none" w="med" len="med"/>
+                    </a:lnL>
+                    <a:lnR w="9525" cap="flat" cmpd="sng" algn="ctr">
+                      <a:solidFill>
+                        <a:srgbClr val="E2E8F0"/>
+                      </a:solidFill>
+                      <a:prstDash val="solid"/>
+                      <a:round/>
+                      <a:headEnd type="none" w="med" len="med"/>
+                      <a:tailEnd type="none" w="med" len="med"/>
+                    </a:lnR>
+                    <a:lnT w="9525" cap="flat" cmpd="sng" algn="ctr">
+                      <a:solidFill>
+                        <a:srgbClr val="E2E8F0"/>
+                      </a:solidFill>
+                      <a:prstDash val="solid"/>
+                      <a:round/>
+                      <a:headEnd type="none" w="med" len="med"/>
+                      <a:tailEnd type="none" w="med" len="med"/>
+                    </a:lnT>
+                    <a:lnB w="9525" cap="flat" cmpd="sng" algn="ctr">
+                      <a:solidFill>
+                        <a:srgbClr val="E2E8F0"/>
+                      </a:solidFill>
+                      <a:prstDash val="solid"/>
+                      <a:round/>
+                      <a:headEnd type="none" w="med" len="med"/>
+                      <a:tailEnd type="none" w="med" len="med"/>
+                    </a:lnB>
+                    <a:solidFill>
+                      <a:srgbClr val="F8FAFC"/>
+                    </a:solidFill>
+                  </a:tcPr>
+                </a:tc>
+              </a:tr>
+              <a:tr h="658368">
+                <a:tc>
+                  <a:txBody>
+                    <a:bodyPr/>
+                    <a:lstStyle/>
+                    <a:p>
+                      <a:pPr indent="0" marL="0">
+                        <a:buNone/>
+                      </a:pPr>
+                      <a:r>
+                        <a:rPr lang="en-US" sz="1050" dirty="0">
+                          <a:solidFill>
+                            <a:srgbClr val="0F172A"/>
+                          </a:solidFill>
+                          <a:latin typeface="Segoe UI" pitchFamily="34" charset="0"/>
+                          <a:ea typeface="Segoe UI" pitchFamily="34" charset="-122"/>
+                          <a:cs typeface="Segoe UI" pitchFamily="34" charset="-120"/>
+                        </a:rPr>
+                        <a:t>Team lớn hơn</a:t>
+                      </a:r>
+                      <a:endParaRPr lang="en-US" sz="1050" dirty="0">
+                        <a:latin typeface="Segoe UI" charset="0"/>
+                        <a:ea typeface="Segoe UI" charset="0"/>
+                        <a:cs typeface="Segoe UI" charset="0"/>
+                      </a:endParaRPr>
+                    </a:p>
+                  </a:txBody>
+                  <a:tcPr marL="73152" marR="73152" marT="73152" marB="73152" anchor="ctr">
+                    <a:lnL w="9525" cap="flat" cmpd="sng" algn="ctr">
+                      <a:solidFill>
+                        <a:srgbClr val="E2E8F0"/>
+                      </a:solidFill>
+                      <a:prstDash val="solid"/>
+                      <a:round/>
+                      <a:headEnd type="none" w="med" len="med"/>
+                      <a:tailEnd type="none" w="med" len="med"/>
+                    </a:lnL>
+                    <a:lnR w="9525" cap="flat" cmpd="sng" algn="ctr">
+                      <a:solidFill>
+                        <a:srgbClr val="E2E8F0"/>
+                      </a:solidFill>
+                      <a:prstDash val="solid"/>
+                      <a:round/>
+                      <a:headEnd type="none" w="med" len="med"/>
+                      <a:tailEnd type="none" w="med" len="med"/>
+                    </a:lnR>
+                    <a:lnT w="9525" cap="flat" cmpd="sng" algn="ctr">
+                      <a:solidFill>
+                        <a:srgbClr val="E2E8F0"/>
+                      </a:solidFill>
+                      <a:prstDash val="solid"/>
+                      <a:round/>
+                      <a:headEnd type="none" w="med" len="med"/>
+                      <a:tailEnd type="none" w="med" len="med"/>
+                    </a:lnT>
+                    <a:lnB w="9525" cap="flat" cmpd="sng" algn="ctr">
+                      <a:solidFill>
+                        <a:srgbClr val="E2E8F0"/>
+                      </a:solidFill>
+                      <a:prstDash val="solid"/>
+                      <a:round/>
+                      <a:headEnd type="none" w="med" len="med"/>
+                      <a:tailEnd type="none" w="med" len="med"/>
+                    </a:lnB>
+                    <a:solidFill>
+                      <a:srgbClr val="FFFFFF"/>
+                    </a:solidFill>
+                  </a:tcPr>
+                </a:tc>
+                <a:tc>
+                  <a:txBody>
+                    <a:bodyPr/>
+                    <a:lstStyle/>
+                    <a:p>
+                      <a:pPr indent="0" marL="0">
+                        <a:buNone/>
+                      </a:pPr>
+                      <a:r>
+                        <a:rPr lang="en-US" sz="1050" dirty="0">
+                          <a:solidFill>
+                            <a:srgbClr val="0F172A"/>
+                          </a:solidFill>
+                          <a:latin typeface="Segoe UI" pitchFamily="34" charset="0"/>
+                          <a:ea typeface="Segoe UI" pitchFamily="34" charset="-122"/>
+                          <a:cs typeface="Segoe UI" pitchFamily="34" charset="-120"/>
+                        </a:rPr>
+                        <a:t>Monolith conflict</a:t>
+                      </a:r>
+                      <a:endParaRPr lang="en-US" sz="1050" dirty="0">
+                        <a:latin typeface="Segoe UI" charset="0"/>
+                        <a:ea typeface="Segoe UI" charset="0"/>
+                        <a:cs typeface="Segoe UI" charset="0"/>
+                      </a:endParaRPr>
+                    </a:p>
+                  </a:txBody>
+                  <a:tcPr marL="73152" marR="73152" marT="73152" marB="73152" anchor="ctr">
+                    <a:lnL w="9525" cap="flat" cmpd="sng" algn="ctr">
+                      <a:solidFill>
+                        <a:srgbClr val="E2E8F0"/>
+                      </a:solidFill>
+                      <a:prstDash val="solid"/>
+                      <a:round/>
+                      <a:headEnd type="none" w="med" len="med"/>
+                      <a:tailEnd type="none" w="med" len="med"/>
+                    </a:lnL>
+                    <a:lnR w="9525" cap="flat" cmpd="sng" algn="ctr">
+                      <a:solidFill>
+                        <a:srgbClr val="E2E8F0"/>
+                      </a:solidFill>
+                      <a:prstDash val="solid"/>
+                      <a:round/>
+                      <a:headEnd type="none" w="med" len="med"/>
+                      <a:tailEnd type="none" w="med" len="med"/>
+                    </a:lnR>
+                    <a:lnT w="9525" cap="flat" cmpd="sng" algn="ctr">
+                      <a:solidFill>
+                        <a:srgbClr val="E2E8F0"/>
+                      </a:solidFill>
+                      <a:prstDash val="solid"/>
+                      <a:round/>
+                      <a:headEnd type="none" w="med" len="med"/>
+                      <a:tailEnd type="none" w="med" len="med"/>
+                    </a:lnT>
+                    <a:lnB w="9525" cap="flat" cmpd="sng" algn="ctr">
+                      <a:solidFill>
+                        <a:srgbClr val="E2E8F0"/>
+                      </a:solidFill>
+                      <a:prstDash val="solid"/>
+                      <a:round/>
+                      <a:headEnd type="none" w="med" len="med"/>
+                      <a:tailEnd type="none" w="med" len="med"/>
+                    </a:lnB>
+                    <a:solidFill>
+                      <a:srgbClr val="FFFFFF"/>
+                    </a:solidFill>
+                  </a:tcPr>
+                </a:tc>
+                <a:tc>
+                  <a:txBody>
+                    <a:bodyPr/>
+                    <a:lstStyle/>
+                    <a:p>
+                      <a:pPr indent="0" marL="0">
+                        <a:buNone/>
+                      </a:pPr>
+                      <a:r>
+                        <a:rPr lang="en-US" sz="1050" dirty="0">
+                          <a:solidFill>
+                            <a:srgbClr val="0F172A"/>
+                          </a:solidFill>
+                          <a:latin typeface="Segoe UI" pitchFamily="34" charset="0"/>
+                          <a:ea typeface="Segoe UI" pitchFamily="34" charset="-122"/>
+                          <a:cs typeface="Segoe UI" pitchFamily="34" charset="-120"/>
+                        </a:rPr>
+                        <a:t>Tách module nóng ra service - route group boundaries đã là bounded context sẵn</a:t>
+                      </a:r>
+                      <a:endParaRPr lang="en-US" sz="1050" dirty="0">
+                        <a:latin typeface="Segoe UI" charset="0"/>
+                        <a:ea typeface="Segoe UI" charset="0"/>
+                        <a:cs typeface="Segoe UI" charset="0"/>
+                      </a:endParaRPr>
+                    </a:p>
+                  </a:txBody>
+                  <a:tcPr marL="73152" marR="73152" marT="73152" marB="73152" anchor="ctr">
+                    <a:lnL w="9525" cap="flat" cmpd="sng" algn="ctr">
+                      <a:solidFill>
+                        <a:srgbClr val="E2E8F0"/>
+                      </a:solidFill>
+                      <a:prstDash val="solid"/>
+                      <a:round/>
+                      <a:headEnd type="none" w="med" len="med"/>
+                      <a:tailEnd type="none" w="med" len="med"/>
+                    </a:lnL>
+                    <a:lnR w="9525" cap="flat" cmpd="sng" algn="ctr">
+                      <a:solidFill>
+                        <a:srgbClr val="E2E8F0"/>
+                      </a:solidFill>
+                      <a:prstDash val="solid"/>
+                      <a:round/>
+                      <a:headEnd type="none" w="med" len="med"/>
+                      <a:tailEnd type="none" w="med" len="med"/>
+                    </a:lnR>
+                    <a:lnT w="9525" cap="flat" cmpd="sng" algn="ctr">
+                      <a:solidFill>
+                        <a:srgbClr val="E2E8F0"/>
+                      </a:solidFill>
+                      <a:prstDash val="solid"/>
+                      <a:round/>
+                      <a:headEnd type="none" w="med" len="med"/>
+                      <a:tailEnd type="none" w="med" len="med"/>
+                    </a:lnT>
+                    <a:lnB w="9525" cap="flat" cmpd="sng" algn="ctr">
+                      <a:solidFill>
+                        <a:srgbClr val="E2E8F0"/>
+                      </a:solidFill>
+                      <a:prstDash val="solid"/>
+                      <a:round/>
+                      <a:headEnd type="none" w="med" len="med"/>
+                      <a:tailEnd type="none" w="med" len="med"/>
+                    </a:lnB>
+                    <a:solidFill>
+                      <a:srgbClr val="FFFFFF"/>
+                    </a:solidFill>
+                  </a:tcPr>
+                </a:tc>
+              </a:tr>
+            </a:tbl>
+          </a:graphicData>
+        </a:graphic>
+      </p:graphicFrame>
+      <p:sp>
+        <p:nvSpPr>
+          <p:cNvPr id="9" name="Text 6"/>
+          <p:cNvSpPr/>
+          <p:nvPr/>
+        </p:nvSpPr>
+        <p:spPr>
+          <a:xfrm>
+            <a:off x="640080" y="6263640"/>
+            <a:ext cx="10972800" cy="457200"/>
+          </a:xfrm>
+          <a:prstGeom prst="rect">
+            <a:avLst/>
+          </a:prstGeom>
+          <a:noFill/>
+          <a:ln/>
+        </p:spPr>
+        <p:txBody>
+          <a:bodyPr wrap="square" rtlCol="0" anchor="ctr"/>
+          <a:lstStyle/>
+          <a:p>
+            <a:pPr indent="0" marL="0">
+              <a:buNone/>
+            </a:pPr>
+            <a:r>
+              <a:rPr lang="en-US" sz="1050" i="1" dirty="0">
+                <a:solidFill>
+                  <a:srgbClr val="0F766E"/>
+                </a:solidFill>
+                <a:latin typeface="Segoe UI" pitchFamily="34" charset="0"/>
+                <a:ea typeface="Segoe UI" pitchFamily="34" charset="-122"/>
+                <a:cs typeface="Segoe UI" pitchFamily="34" charset="-120"/>
+              </a:rPr>
+              <a:t>Nguyên tắc kiến trúc: mọi seam tách (ai_jobs, RLS school_id, route groups) đã được đặt sẵn - scale = đổi bên trong seam, không phải viết lại.</a:t>
+            </a:r>
+            <a:endParaRPr lang="en-US" sz="1050" dirty="0"/>
+          </a:p>
+        </p:txBody>
+      </p:sp>
+    </p:spTree>
+  </p:cSld>
+  <p:clrMapOvr>
+    <a:masterClrMapping/>
+  </p:clrMapOvr>
+  <p:transition xmlns:p="http://schemas.openxmlformats.org/presentationml/2006/main" spd="fast" advClick="1">
+    <p:fade/>
+  </p:transition>
+</p:sld>
+</file>
+
+<file path=ppt/slides/slide21.xml><?xml version="1.0" encoding="utf-8"?>
+<p:sld xmlns:a="http://schemas.openxmlformats.org/drawingml/2006/main" xmlns:r="http://schemas.openxmlformats.org/officeDocument/2006/relationships" xmlns:p="http://schemas.openxmlformats.org/presentationml/2006/main">
+  <p:cSld name="Slide 21">
+    <p:spTree>
+      <p:nvGrpSpPr>
+        <p:cNvPr id="1" name=""/>
+        <p:cNvGrpSpPr/>
+        <p:nvPr/>
+      </p:nvGrpSpPr>
+      <p:grpSpPr>
+        <a:xfrm>
+          <a:off x="0" y="0"/>
+          <a:ext cx="0" cy="0"/>
+          <a:chOff x="0" y="0"/>
+          <a:chExt cx="0" cy="0"/>
+        </a:xfrm>
+      </p:grpSpPr>
+      <p:sp>
+        <p:nvSpPr>
+          <p:cNvPr id="2" name="Shape 0"/>
+          <p:cNvSpPr/>
+          <p:nvPr/>
+        </p:nvSpPr>
+        <p:spPr>
+          <a:xfrm>
+            <a:off x="0" y="0"/>
+            <a:ext cx="128016" cy="1645920"/>
+          </a:xfrm>
+          <a:prstGeom prst="rect">
+            <a:avLst/>
+          </a:prstGeom>
+          <a:solidFill>
+            <a:srgbClr val="0F766E"/>
+          </a:solidFill>
+          <a:ln/>
+        </p:spPr>
+      </p:sp>
+      <p:sp>
+        <p:nvSpPr>
+          <p:cNvPr id="3" name="Text 1"/>
+          <p:cNvSpPr/>
+          <p:nvPr/>
+        </p:nvSpPr>
+        <p:spPr>
+          <a:xfrm>
+            <a:off x="502920" y="256032"/>
+            <a:ext cx="10972800" cy="274320"/>
+          </a:xfrm>
+          <a:prstGeom prst="rect">
+            <a:avLst/>
+          </a:prstGeom>
+          <a:noFill/>
+          <a:ln/>
+        </p:spPr>
+        <p:txBody>
+          <a:bodyPr wrap="square" rtlCol="0" anchor="ctr"/>
+          <a:lstStyle/>
+          <a:p>
+            <a:pPr indent="0" marL="0">
+              <a:buNone/>
+            </a:pPr>
+            <a:r>
+              <a:rPr lang="en-US" sz="1100" b="1" dirty="0">
+                <a:solidFill>
+                  <a:srgbClr val="0F766E"/>
+                </a:solidFill>
+                <a:latin typeface="Segoe UI" pitchFamily="34" charset="0"/>
+                <a:ea typeface="Segoe UI" pitchFamily="34" charset="-122"/>
+                <a:cs typeface="Segoe UI" pitchFamily="34" charset="-120"/>
+              </a:rPr>
+              <a:t>ĐÁNH GIÁ</a:t>
+            </a:r>
+            <a:endParaRPr lang="en-US" sz="1100" dirty="0"/>
+          </a:p>
+        </p:txBody>
+      </p:sp>
+      <p:sp>
+        <p:nvSpPr>
+          <p:cNvPr id="4" name="Text 2"/>
+          <p:cNvSpPr/>
+          <p:nvPr/>
+        </p:nvSpPr>
+        <p:spPr>
+          <a:xfrm>
+            <a:off x="502920" y="502920"/>
+            <a:ext cx="11155680" cy="640080"/>
+          </a:xfrm>
+          <a:prstGeom prst="rect">
+            <a:avLst/>
+          </a:prstGeom>
+          <a:noFill/>
+          <a:ln/>
+        </p:spPr>
+        <p:txBody>
+          <a:bodyPr wrap="square" rtlCol="0" anchor="ctr"/>
+          <a:lstStyle/>
+          <a:p>
+            <a:pPr indent="0" marL="0">
+              <a:buNone/>
+            </a:pPr>
+            <a:r>
+              <a:rPr lang="en-US" sz="2600" b="1" dirty="0">
+                <a:solidFill>
+                  <a:srgbClr val="0F172A"/>
+                </a:solidFill>
+                <a:latin typeface="Segoe UI" pitchFamily="34" charset="0"/>
+                <a:ea typeface="Segoe UI" pitchFamily="34" charset="-122"/>
+                <a:cs typeface="Segoe UI" pitchFamily="34" charset="-120"/>
+              </a:rPr>
+              <a:t>Limitation đang có - xử lý ra sao, dễ hay khó</a:t>
+            </a:r>
+            <a:endParaRPr lang="en-US" sz="2600" dirty="0"/>
+          </a:p>
+        </p:txBody>
+      </p:sp>
+      <p:sp>
+        <p:nvSpPr>
+          <p:cNvPr id="5" name="Shape 3"/>
+          <p:cNvSpPr/>
+          <p:nvPr/>
+        </p:nvSpPr>
+        <p:spPr>
+          <a:xfrm>
+            <a:off x="502920" y="1572768"/>
+            <a:ext cx="11155680" cy="0"/>
+          </a:xfrm>
+          <a:prstGeom prst="line">
+            <a:avLst/>
+          </a:prstGeom>
+          <a:noFill/>
+          <a:ln w="12700">
+            <a:solidFill>
+              <a:srgbClr val="E2E8F0"/>
+            </a:solidFill>
+            <a:prstDash val="solid"/>
+          </a:ln>
+        </p:spPr>
+      </p:sp>
+      <p:sp>
+        <p:nvSpPr>
+          <p:cNvPr id="6" name="Text 4"/>
+          <p:cNvSpPr/>
+          <p:nvPr/>
+        </p:nvSpPr>
+        <p:spPr>
+          <a:xfrm>
+            <a:off x="502920" y="6528816"/>
+            <a:ext cx="4572000" cy="274320"/>
+          </a:xfrm>
+          <a:prstGeom prst="rect">
+            <a:avLst/>
+          </a:prstGeom>
+          <a:noFill/>
+          <a:ln/>
+        </p:spPr>
+        <p:txBody>
+          <a:bodyPr wrap="square" rtlCol="0" anchor="ctr"/>
+          <a:lstStyle/>
+          <a:p>
+            <a:pPr indent="0" marL="0">
+              <a:buNone/>
+            </a:pPr>
+            <a:r>
+              <a:rPr lang="en-US" sz="900" dirty="0">
+                <a:solidFill>
+                  <a:srgbClr val="94A3B8"/>
+                </a:solidFill>
+                <a:latin typeface="Segoe UI" pitchFamily="34" charset="0"/>
+                <a:ea typeface="Segoe UI" pitchFamily="34" charset="-122"/>
+                <a:cs typeface="Segoe UI" pitchFamily="34" charset="-120"/>
+              </a:rPr>
+              <a:t>VieSchool - Sổ Chủ Nhiệm Số</a:t>
+            </a:r>
+            <a:endParaRPr lang="en-US" sz="900" dirty="0"/>
+          </a:p>
+        </p:txBody>
+      </p:sp>
+      <p:sp>
+        <p:nvSpPr>
+          <p:cNvPr id="7" name="Text 5"/>
+          <p:cNvSpPr/>
+          <p:nvPr/>
+        </p:nvSpPr>
+        <p:spPr>
+          <a:xfrm>
+            <a:off x="11338560" y="6528816"/>
+            <a:ext cx="457200" cy="274320"/>
+          </a:xfrm>
+          <a:prstGeom prst="rect">
+            <a:avLst/>
+          </a:prstGeom>
+          <a:noFill/>
+          <a:ln/>
+        </p:spPr>
+        <p:txBody>
+          <a:bodyPr wrap="square" rtlCol="0" anchor="ctr"/>
+          <a:lstStyle/>
+          <a:p>
+            <a:pPr algn="r" indent="0" marL="0">
+              <a:buNone/>
+            </a:pPr>
+            <a:r>
+              <a:rPr lang="en-US" sz="900" dirty="0">
+                <a:solidFill>
+                  <a:srgbClr val="94A3B8"/>
+                </a:solidFill>
+                <a:latin typeface="Segoe UI" pitchFamily="34" charset="0"/>
+                <a:ea typeface="Segoe UI" pitchFamily="34" charset="-122"/>
+                <a:cs typeface="Segoe UI" pitchFamily="34" charset="-120"/>
+              </a:rPr>
+              <a:t>17</a:t>
+            </a:r>
+            <a:endParaRPr lang="en-US" sz="900" dirty="0"/>
+          </a:p>
+        </p:txBody>
+      </p:sp>
+      <p:graphicFrame>
+        <p:nvGraphicFramePr>
+          <p:cNvPr id="22" name="Table 0"/>
+          <p:cNvGraphicFramePr>
+            <a:graphicFrameLocks noGrp="1"/>
+          </p:cNvGraphicFramePr>
+          <p:nvPr>
+            <p:extLst>
+              <p:ext uri="{D42A27DB-BD31-4B8C-83A1-F6EECF244321}">
+                <p14:modId xmlns:p14="http://schemas.microsoft.com/office/powerpoint/2010/main" val="1579011935"/>
+              </p:ext>
+            </p:extLst>
+          </p:nvPr>
+        </p:nvGraphicFramePr>
+        <p:xfrm>
+          <a:off x="640080" y="1783080"/>
+          <a:ext cx="10972800" cy="914400"/>
+        </p:xfrm>
+        <a:graphic>
+          <a:graphicData uri="http://schemas.openxmlformats.org/drawingml/2006/table">
+            <a:tbl>
+              <a:tblPr/>
+              <a:tblGrid>
+                <a:gridCol w="3657600"/>
+                <a:gridCol w="3657600"/>
+                <a:gridCol w="3657600"/>
+              </a:tblGrid>
+              <a:tr h="658368">
+                <a:tc>
+                  <a:txBody>
+                    <a:bodyPr/>
+                    <a:lstStyle/>
+                    <a:p>
+                      <a:pPr indent="0" marL="0">
+                        <a:buNone/>
+                      </a:pPr>
+                      <a:r>
+                        <a:rPr lang="en-US" sz="1100" b="1" dirty="0">
+                          <a:solidFill>
+                            <a:srgbClr val="FFFFFF"/>
+                          </a:solidFill>
+                          <a:latin typeface="Segoe UI" pitchFamily="34" charset="0"/>
+                          <a:ea typeface="Segoe UI" pitchFamily="34" charset="-122"/>
+                          <a:cs typeface="Segoe UI" pitchFamily="34" charset="-120"/>
+                        </a:rPr>
+                        <a:t>Limitation</a:t>
+                      </a:r>
+                      <a:endParaRPr lang="en-US" sz="1100" dirty="0">
+                        <a:latin typeface="Segoe UI" charset="0"/>
+                        <a:ea typeface="Segoe UI" charset="0"/>
+                        <a:cs typeface="Segoe UI" charset="0"/>
+                      </a:endParaRPr>
+                    </a:p>
+                  </a:txBody>
+                  <a:tcPr marL="73152" marR="73152" marT="73152" marB="73152" anchor="ctr">
+                    <a:lnL w="9525" cap="flat" cmpd="sng" algn="ctr">
+                      <a:solidFill>
+                        <a:srgbClr val="E2E8F0"/>
+                      </a:solidFill>
+                      <a:prstDash val="solid"/>
+                      <a:round/>
+                      <a:headEnd type="none" w="med" len="med"/>
+                      <a:tailEnd type="none" w="med" len="med"/>
+                    </a:lnL>
+                    <a:lnR w="9525" cap="flat" cmpd="sng" algn="ctr">
+                      <a:solidFill>
+                        <a:srgbClr val="E2E8F0"/>
+                      </a:solidFill>
+                      <a:prstDash val="solid"/>
+                      <a:round/>
+                      <a:headEnd type="none" w="med" len="med"/>
+                      <a:tailEnd type="none" w="med" len="med"/>
+                    </a:lnR>
+                    <a:lnT w="9525" cap="flat" cmpd="sng" algn="ctr">
+                      <a:solidFill>
+                        <a:srgbClr val="E2E8F0"/>
+                      </a:solidFill>
+                      <a:prstDash val="solid"/>
+                      <a:round/>
+                      <a:headEnd type="none" w="med" len="med"/>
+                      <a:tailEnd type="none" w="med" len="med"/>
+                    </a:lnT>
+                    <a:lnB w="9525" cap="flat" cmpd="sng" algn="ctr">
+                      <a:solidFill>
+                        <a:srgbClr val="E2E8F0"/>
+                      </a:solidFill>
+                      <a:prstDash val="solid"/>
+                      <a:round/>
+                      <a:headEnd type="none" w="med" len="med"/>
+                      <a:tailEnd type="none" w="med" len="med"/>
+                    </a:lnB>
+                    <a:solidFill>
+                      <a:srgbClr val="0F766E"/>
+                    </a:solidFill>
+                  </a:tcPr>
+                </a:tc>
+                <a:tc>
+                  <a:txBody>
+                    <a:bodyPr/>
+                    <a:lstStyle/>
+                    <a:p>
+                      <a:pPr indent="0" marL="0">
+                        <a:buNone/>
+                      </a:pPr>
+                      <a:r>
+                        <a:rPr lang="en-US" sz="1100" b="1" dirty="0">
+                          <a:solidFill>
+                            <a:srgbClr val="FFFFFF"/>
+                          </a:solidFill>
+                          <a:latin typeface="Segoe UI" pitchFamily="34" charset="0"/>
+                          <a:ea typeface="Segoe UI" pitchFamily="34" charset="-122"/>
+                          <a:cs typeface="Segoe UI" pitchFamily="34" charset="-120"/>
+                        </a:rPr>
+                        <a:t>Cách xử lý</a:t>
+                      </a:r>
+                      <a:endParaRPr lang="en-US" sz="1100" dirty="0">
+                        <a:latin typeface="Segoe UI" charset="0"/>
+                        <a:ea typeface="Segoe UI" charset="0"/>
+                        <a:cs typeface="Segoe UI" charset="0"/>
+                      </a:endParaRPr>
+                    </a:p>
+                  </a:txBody>
+                  <a:tcPr marL="73152" marR="73152" marT="73152" marB="73152" anchor="ctr">
+                    <a:lnL w="9525" cap="flat" cmpd="sng" algn="ctr">
+                      <a:solidFill>
+                        <a:srgbClr val="E2E8F0"/>
+                      </a:solidFill>
+                      <a:prstDash val="solid"/>
+                      <a:round/>
+                      <a:headEnd type="none" w="med" len="med"/>
+                      <a:tailEnd type="none" w="med" len="med"/>
+                    </a:lnL>
+                    <a:lnR w="9525" cap="flat" cmpd="sng" algn="ctr">
+                      <a:solidFill>
+                        <a:srgbClr val="E2E8F0"/>
+                      </a:solidFill>
+                      <a:prstDash val="solid"/>
+                      <a:round/>
+                      <a:headEnd type="none" w="med" len="med"/>
+                      <a:tailEnd type="none" w="med" len="med"/>
+                    </a:lnR>
+                    <a:lnT w="9525" cap="flat" cmpd="sng" algn="ctr">
+                      <a:solidFill>
+                        <a:srgbClr val="E2E8F0"/>
+                      </a:solidFill>
+                      <a:prstDash val="solid"/>
+                      <a:round/>
+                      <a:headEnd type="none" w="med" len="med"/>
+                      <a:tailEnd type="none" w="med" len="med"/>
+                    </a:lnT>
+                    <a:lnB w="9525" cap="flat" cmpd="sng" algn="ctr">
+                      <a:solidFill>
+                        <a:srgbClr val="E2E8F0"/>
+                      </a:solidFill>
+                      <a:prstDash val="solid"/>
+                      <a:round/>
+                      <a:headEnd type="none" w="med" len="med"/>
+                      <a:tailEnd type="none" w="med" len="med"/>
+                    </a:lnB>
+                    <a:solidFill>
+                      <a:srgbClr val="0F766E"/>
+                    </a:solidFill>
+                  </a:tcPr>
+                </a:tc>
+                <a:tc>
+                  <a:txBody>
+                    <a:bodyPr/>
+                    <a:lstStyle/>
+                    <a:p>
+                      <a:pPr indent="0" marL="0">
+                        <a:buNone/>
+                      </a:pPr>
+                      <a:r>
+                        <a:rPr lang="en-US" sz="1100" b="1" dirty="0">
+                          <a:solidFill>
+                            <a:srgbClr val="FFFFFF"/>
+                          </a:solidFill>
+                          <a:latin typeface="Segoe UI" pitchFamily="34" charset="0"/>
+                          <a:ea typeface="Segoe UI" pitchFamily="34" charset="-122"/>
+                          <a:cs typeface="Segoe UI" pitchFamily="34" charset="-120"/>
+                        </a:rPr>
+                        <a:t>Độ khó / Trạng thái</a:t>
+                      </a:r>
+                      <a:endParaRPr lang="en-US" sz="1100" dirty="0">
+                        <a:latin typeface="Segoe UI" charset="0"/>
+                        <a:ea typeface="Segoe UI" charset="0"/>
+                        <a:cs typeface="Segoe UI" charset="0"/>
+                      </a:endParaRPr>
+                    </a:p>
+                  </a:txBody>
+                  <a:tcPr marL="73152" marR="73152" marT="73152" marB="73152" anchor="ctr">
+                    <a:lnL w="9525" cap="flat" cmpd="sng" algn="ctr">
+                      <a:solidFill>
+                        <a:srgbClr val="E2E8F0"/>
+                      </a:solidFill>
+                      <a:prstDash val="solid"/>
+                      <a:round/>
+                      <a:headEnd type="none" w="med" len="med"/>
+                      <a:tailEnd type="none" w="med" len="med"/>
+                    </a:lnL>
+                    <a:lnR w="9525" cap="flat" cmpd="sng" algn="ctr">
+                      <a:solidFill>
+                        <a:srgbClr val="E2E8F0"/>
+                      </a:solidFill>
+                      <a:prstDash val="solid"/>
+                      <a:round/>
+                      <a:headEnd type="none" w="med" len="med"/>
+                      <a:tailEnd type="none" w="med" len="med"/>
+                    </a:lnR>
+                    <a:lnT w="9525" cap="flat" cmpd="sng" algn="ctr">
+                      <a:solidFill>
+                        <a:srgbClr val="E2E8F0"/>
+                      </a:solidFill>
+                      <a:prstDash val="solid"/>
+                      <a:round/>
+                      <a:headEnd type="none" w="med" len="med"/>
+                      <a:tailEnd type="none" w="med" len="med"/>
+                    </a:lnT>
+                    <a:lnB w="9525" cap="flat" cmpd="sng" algn="ctr">
+                      <a:solidFill>
+                        <a:srgbClr val="E2E8F0"/>
+                      </a:solidFill>
+                      <a:prstDash val="solid"/>
+                      <a:round/>
+                      <a:headEnd type="none" w="med" len="med"/>
+                      <a:tailEnd type="none" w="med" len="med"/>
+                    </a:lnB>
+                    <a:solidFill>
+                      <a:srgbClr val="0F766E"/>
+                    </a:solidFill>
+                  </a:tcPr>
+                </a:tc>
+              </a:tr>
+              <a:tr h="658368">
+                <a:tc>
+                  <a:txBody>
+                    <a:bodyPr/>
+                    <a:lstStyle/>
+                    <a:p>
+                      <a:pPr indent="0" marL="0">
+                        <a:buNone/>
+                      </a:pPr>
+                      <a:r>
+                        <a:rPr lang="en-US" sz="1050" dirty="0">
+                          <a:solidFill>
+                            <a:srgbClr val="0F172A"/>
+                          </a:solidFill>
+                          <a:latin typeface="Segoe UI" pitchFamily="34" charset="0"/>
+                          <a:ea typeface="Segoe UI" pitchFamily="34" charset="-122"/>
+                          <a:cs typeface="Segoe UI" pitchFamily="34" charset="-120"/>
+                        </a:rPr>
+                        <a:t>Edge-TTS bị MS chặn IP datacenter Vercel - audio TTS lỗi trên prod</a:t>
+                      </a:r>
+                      <a:endParaRPr lang="en-US" sz="1050" dirty="0">
+                        <a:latin typeface="Segoe UI" charset="0"/>
+                        <a:ea typeface="Segoe UI" charset="0"/>
+                        <a:cs typeface="Segoe UI" charset="0"/>
+                      </a:endParaRPr>
+                    </a:p>
+                  </a:txBody>
+                  <a:tcPr marL="73152" marR="73152" marT="73152" marB="73152" anchor="ctr">
+                    <a:lnL w="9525" cap="flat" cmpd="sng" algn="ctr">
+                      <a:solidFill>
+                        <a:srgbClr val="E2E8F0"/>
+                      </a:solidFill>
+                      <a:prstDash val="solid"/>
+                      <a:round/>
+                      <a:headEnd type="none" w="med" len="med"/>
+                      <a:tailEnd type="none" w="med" len="med"/>
+                    </a:lnL>
+                    <a:lnR w="9525" cap="flat" cmpd="sng" algn="ctr">
+                      <a:solidFill>
+                        <a:srgbClr val="E2E8F0"/>
+                      </a:solidFill>
+                      <a:prstDash val="solid"/>
+                      <a:round/>
+                      <a:headEnd type="none" w="med" len="med"/>
+                      <a:tailEnd type="none" w="med" len="med"/>
+                    </a:lnR>
+                    <a:lnT w="9525" cap="flat" cmpd="sng" algn="ctr">
+                      <a:solidFill>
+                        <a:srgbClr val="E2E8F0"/>
+                      </a:solidFill>
+                      <a:prstDash val="solid"/>
+                      <a:round/>
+                      <a:headEnd type="none" w="med" len="med"/>
+                      <a:tailEnd type="none" w="med" len="med"/>
+                    </a:lnT>
+                    <a:lnB w="9525" cap="flat" cmpd="sng" algn="ctr">
+                      <a:solidFill>
+                        <a:srgbClr val="E2E8F0"/>
+                      </a:solidFill>
+                      <a:prstDash val="solid"/>
+                      <a:round/>
+                      <a:headEnd type="none" w="med" len="med"/>
+                      <a:tailEnd type="none" w="med" len="med"/>
+                    </a:lnB>
+                    <a:solidFill>
+                      <a:srgbClr val="FFFFFF"/>
+                    </a:solidFill>
+                  </a:tcPr>
+                </a:tc>
+                <a:tc>
+                  <a:txBody>
+                    <a:bodyPr/>
+                    <a:lstStyle/>
+                    <a:p>
+                      <a:pPr indent="0" marL="0">
+                        <a:buNone/>
+                      </a:pPr>
+                      <a:r>
+                        <a:rPr lang="en-US" sz="1050" dirty="0">
+                          <a:solidFill>
+                            <a:srgbClr val="0F172A"/>
+                          </a:solidFill>
+                          <a:latin typeface="Segoe UI" pitchFamily="34" charset="0"/>
+                          <a:ea typeface="Segoe UI" pitchFamily="34" charset="-122"/>
+                          <a:cs typeface="Segoe UI" pitchFamily="34" charset="-120"/>
+                        </a:rPr>
+                        <a:t>Fork @andresaya/edge-tts (Sec-MS-GEC v2) + Gemini TTS provider fallback (CR-056)</a:t>
+                      </a:r>
+                      <a:endParaRPr lang="en-US" sz="1050" dirty="0">
+                        <a:latin typeface="Segoe UI" charset="0"/>
+                        <a:ea typeface="Segoe UI" charset="0"/>
+                        <a:cs typeface="Segoe UI" charset="0"/>
+                      </a:endParaRPr>
+                    </a:p>
+                  </a:txBody>
+                  <a:tcPr marL="73152" marR="73152" marT="73152" marB="73152" anchor="ctr">
+                    <a:lnL w="9525" cap="flat" cmpd="sng" algn="ctr">
+                      <a:solidFill>
+                        <a:srgbClr val="E2E8F0"/>
+                      </a:solidFill>
+                      <a:prstDash val="solid"/>
+                      <a:round/>
+                      <a:headEnd type="none" w="med" len="med"/>
+                      <a:tailEnd type="none" w="med" len="med"/>
+                    </a:lnL>
+                    <a:lnR w="9525" cap="flat" cmpd="sng" algn="ctr">
+                      <a:solidFill>
+                        <a:srgbClr val="E2E8F0"/>
+                      </a:solidFill>
+                      <a:prstDash val="solid"/>
+                      <a:round/>
+                      <a:headEnd type="none" w="med" len="med"/>
+                      <a:tailEnd type="none" w="med" len="med"/>
+                    </a:lnR>
+                    <a:lnT w="9525" cap="flat" cmpd="sng" algn="ctr">
+                      <a:solidFill>
+                        <a:srgbClr val="E2E8F0"/>
+                      </a:solidFill>
+                      <a:prstDash val="solid"/>
+                      <a:round/>
+                      <a:headEnd type="none" w="med" len="med"/>
+                      <a:tailEnd type="none" w="med" len="med"/>
+                    </a:lnT>
+                    <a:lnB w="9525" cap="flat" cmpd="sng" algn="ctr">
+                      <a:solidFill>
+                        <a:srgbClr val="E2E8F0"/>
+                      </a:solidFill>
+                      <a:prstDash val="solid"/>
+                      <a:round/>
+                      <a:headEnd type="none" w="med" len="med"/>
+                      <a:tailEnd type="none" w="med" len="med"/>
+                    </a:lnB>
+                    <a:solidFill>
+                      <a:srgbClr val="FFFFFF"/>
+                    </a:solidFill>
+                  </a:tcPr>
+                </a:tc>
+                <a:tc>
+                  <a:txBody>
+                    <a:bodyPr/>
+                    <a:lstStyle/>
+                    <a:p>
+                      <a:pPr indent="0" marL="0">
+                        <a:buNone/>
+                      </a:pPr>
+                      <a:r>
+                        <a:rPr lang="en-US" sz="1050" dirty="0">
+                          <a:solidFill>
+                            <a:srgbClr val="0F172A"/>
+                          </a:solidFill>
+                          <a:latin typeface="Segoe UI" pitchFamily="34" charset="0"/>
+                          <a:ea typeface="Segoe UI" pitchFamily="34" charset="-122"/>
+                          <a:cs typeface="Segoe UI" pitchFamily="34" charset="-120"/>
+                        </a:rPr>
+                        <a:t>Xong - độ khó trung bình; chuỗi fallback provider đã có sẵn</a:t>
+                      </a:r>
+                      <a:endParaRPr lang="en-US" sz="1050" dirty="0">
+                        <a:latin typeface="Segoe UI" charset="0"/>
+                        <a:ea typeface="Segoe UI" charset="0"/>
+                        <a:cs typeface="Segoe UI" charset="0"/>
+                      </a:endParaRPr>
+                    </a:p>
+                  </a:txBody>
+                  <a:tcPr marL="73152" marR="73152" marT="73152" marB="73152" anchor="ctr">
+                    <a:lnL w="9525" cap="flat" cmpd="sng" algn="ctr">
+                      <a:solidFill>
+                        <a:srgbClr val="E2E8F0"/>
+                      </a:solidFill>
+                      <a:prstDash val="solid"/>
+                      <a:round/>
+                      <a:headEnd type="none" w="med" len="med"/>
+                      <a:tailEnd type="none" w="med" len="med"/>
+                    </a:lnL>
+                    <a:lnR w="9525" cap="flat" cmpd="sng" algn="ctr">
+                      <a:solidFill>
+                        <a:srgbClr val="E2E8F0"/>
+                      </a:solidFill>
+                      <a:prstDash val="solid"/>
+                      <a:round/>
+                      <a:headEnd type="none" w="med" len="med"/>
+                      <a:tailEnd type="none" w="med" len="med"/>
+                    </a:lnR>
+                    <a:lnT w="9525" cap="flat" cmpd="sng" algn="ctr">
+                      <a:solidFill>
+                        <a:srgbClr val="E2E8F0"/>
+                      </a:solidFill>
+                      <a:prstDash val="solid"/>
+                      <a:round/>
+                      <a:headEnd type="none" w="med" len="med"/>
+                      <a:tailEnd type="none" w="med" len="med"/>
+                    </a:lnT>
+                    <a:lnB w="9525" cap="flat" cmpd="sng" algn="ctr">
+                      <a:solidFill>
+                        <a:srgbClr val="E2E8F0"/>
+                      </a:solidFill>
+                      <a:prstDash val="solid"/>
+                      <a:round/>
+                      <a:headEnd type="none" w="med" len="med"/>
+                      <a:tailEnd type="none" w="med" len="med"/>
+                    </a:lnB>
+                    <a:solidFill>
+                      <a:srgbClr val="FFFFFF"/>
+                    </a:solidFill>
+                  </a:tcPr>
+                </a:tc>
+              </a:tr>
+              <a:tr h="658368">
+                <a:tc>
+                  <a:txBody>
+                    <a:bodyPr/>
+                    <a:lstStyle/>
+                    <a:p>
+                      <a:pPr indent="0" marL="0">
+                        <a:buNone/>
+                      </a:pPr>
+                      <a:r>
+                        <a:rPr lang="en-US" sz="1050" dirty="0">
+                          <a:solidFill>
+                            <a:srgbClr val="0F172A"/>
+                          </a:solidFill>
+                          <a:latin typeface="Segoe UI" pitchFamily="34" charset="0"/>
+                          <a:ea typeface="Segoe UI" pitchFamily="34" charset="-122"/>
+                          <a:cs typeface="Segoe UI" pitchFamily="34" charset="-120"/>
+                        </a:rPr>
+                        <a:t>Chung Supabase project với app nội bộ - noisy neighbor đụng IO budget</a:t>
+                      </a:r>
+                      <a:endParaRPr lang="en-US" sz="1050" dirty="0">
+                        <a:latin typeface="Segoe UI" charset="0"/>
+                        <a:ea typeface="Segoe UI" charset="0"/>
+                        <a:cs typeface="Segoe UI" charset="0"/>
+                      </a:endParaRPr>
+                    </a:p>
+                  </a:txBody>
+                  <a:tcPr marL="73152" marR="73152" marT="73152" marB="73152" anchor="ctr">
+                    <a:lnL w="9525" cap="flat" cmpd="sng" algn="ctr">
+                      <a:solidFill>
+                        <a:srgbClr val="E2E8F0"/>
+                      </a:solidFill>
+                      <a:prstDash val="solid"/>
+                      <a:round/>
+                      <a:headEnd type="none" w="med" len="med"/>
+                      <a:tailEnd type="none" w="med" len="med"/>
+                    </a:lnL>
+                    <a:lnR w="9525" cap="flat" cmpd="sng" algn="ctr">
+                      <a:solidFill>
+                        <a:srgbClr val="E2E8F0"/>
+                      </a:solidFill>
+                      <a:prstDash val="solid"/>
+                      <a:round/>
+                      <a:headEnd type="none" w="med" len="med"/>
+                      <a:tailEnd type="none" w="med" len="med"/>
+                    </a:lnR>
+                    <a:lnT w="9525" cap="flat" cmpd="sng" algn="ctr">
+                      <a:solidFill>
+                        <a:srgbClr val="E2E8F0"/>
+                      </a:solidFill>
+                      <a:prstDash val="solid"/>
+                      <a:round/>
+                      <a:headEnd type="none" w="med" len="med"/>
+                      <a:tailEnd type="none" w="med" len="med"/>
+                    </a:lnT>
+                    <a:lnB w="9525" cap="flat" cmpd="sng" algn="ctr">
+                      <a:solidFill>
+                        <a:srgbClr val="E2E8F0"/>
+                      </a:solidFill>
+                      <a:prstDash val="solid"/>
+                      <a:round/>
+                      <a:headEnd type="none" w="med" len="med"/>
+                      <a:tailEnd type="none" w="med" len="med"/>
+                    </a:lnB>
+                    <a:solidFill>
+                      <a:srgbClr val="F8FAFC"/>
+                    </a:solidFill>
+                  </a:tcPr>
+                </a:tc>
+                <a:tc>
+                  <a:txBody>
+                    <a:bodyPr/>
+                    <a:lstStyle/>
+                    <a:p>
+                      <a:pPr indent="0" marL="0">
+                        <a:buNone/>
+                      </a:pPr>
+                      <a:r>
+                        <a:rPr lang="en-US" sz="1050" dirty="0">
+                          <a:solidFill>
+                            <a:srgbClr val="0F172A"/>
+                          </a:solidFill>
+                          <a:latin typeface="Segoe UI" pitchFamily="34" charset="0"/>
+                          <a:ea typeface="Segoe UI" pitchFamily="34" charset="-122"/>
+                          <a:cs typeface="Segoe UI" pitchFamily="34" charset="-120"/>
+                        </a:rPr>
+                        <a:t>CR-058: tách schema app kia sang project riêng; phase 0 inventory xong, không downtime</a:t>
+                      </a:r>
+                      <a:endParaRPr lang="en-US" sz="1050" dirty="0">
+                        <a:latin typeface="Segoe UI" charset="0"/>
+                        <a:ea typeface="Segoe UI" charset="0"/>
+                        <a:cs typeface="Segoe UI" charset="0"/>
+                      </a:endParaRPr>
+                    </a:p>
+                  </a:txBody>
+                  <a:tcPr marL="73152" marR="73152" marT="73152" marB="73152" anchor="ctr">
+                    <a:lnL w="9525" cap="flat" cmpd="sng" algn="ctr">
+                      <a:solidFill>
+                        <a:srgbClr val="E2E8F0"/>
+                      </a:solidFill>
+                      <a:prstDash val="solid"/>
+                      <a:round/>
+                      <a:headEnd type="none" w="med" len="med"/>
+                      <a:tailEnd type="none" w="med" len="med"/>
+                    </a:lnL>
+                    <a:lnR w="9525" cap="flat" cmpd="sng" algn="ctr">
+                      <a:solidFill>
+                        <a:srgbClr val="E2E8F0"/>
+                      </a:solidFill>
+                      <a:prstDash val="solid"/>
+                      <a:round/>
+                      <a:headEnd type="none" w="med" len="med"/>
+                      <a:tailEnd type="none" w="med" len="med"/>
+                    </a:lnR>
+                    <a:lnT w="9525" cap="flat" cmpd="sng" algn="ctr">
+                      <a:solidFill>
+                        <a:srgbClr val="E2E8F0"/>
+                      </a:solidFill>
+                      <a:prstDash val="solid"/>
+                      <a:round/>
+                      <a:headEnd type="none" w="med" len="med"/>
+                      <a:tailEnd type="none" w="med" len="med"/>
+                    </a:lnT>
+                    <a:lnB w="9525" cap="flat" cmpd="sng" algn="ctr">
+                      <a:solidFill>
+                        <a:srgbClr val="E2E8F0"/>
+                      </a:solidFill>
+                      <a:prstDash val="solid"/>
+                      <a:round/>
+                      <a:headEnd type="none" w="med" len="med"/>
+                      <a:tailEnd type="none" w="med" len="med"/>
+                    </a:lnB>
+                    <a:solidFill>
+                      <a:srgbClr val="F8FAFC"/>
+                    </a:solidFill>
+                  </a:tcPr>
+                </a:tc>
+                <a:tc>
+                  <a:txBody>
+                    <a:bodyPr/>
+                    <a:lstStyle/>
+                    <a:p>
+                      <a:pPr indent="0" marL="0">
+                        <a:buNone/>
+                      </a:pPr>
+                      <a:r>
+                        <a:rPr lang="en-US" sz="1050" dirty="0">
+                          <a:solidFill>
+                            <a:srgbClr val="0F172A"/>
+                          </a:solidFill>
+                          <a:latin typeface="Segoe UI" pitchFamily="34" charset="0"/>
+                          <a:ea typeface="Segoe UI" pitchFamily="34" charset="-122"/>
+                          <a:cs typeface="Segoe UI" pitchFamily="34" charset="-120"/>
+                        </a:rPr>
+                        <a:t>Trung bình - cần Pro project mới + cutover; không phải viết lại code</a:t>
+                      </a:r>
+                      <a:endParaRPr lang="en-US" sz="1050" dirty="0">
+                        <a:latin typeface="Segoe UI" charset="0"/>
+                        <a:ea typeface="Segoe UI" charset="0"/>
+                        <a:cs typeface="Segoe UI" charset="0"/>
+                      </a:endParaRPr>
+                    </a:p>
+                  </a:txBody>
+                  <a:tcPr marL="73152" marR="73152" marT="73152" marB="73152" anchor="ctr">
+                    <a:lnL w="9525" cap="flat" cmpd="sng" algn="ctr">
+                      <a:solidFill>
+                        <a:srgbClr val="E2E8F0"/>
+                      </a:solidFill>
+                      <a:prstDash val="solid"/>
+                      <a:round/>
+                      <a:headEnd type="none" w="med" len="med"/>
+                      <a:tailEnd type="none" w="med" len="med"/>
+                    </a:lnL>
+                    <a:lnR w="9525" cap="flat" cmpd="sng" algn="ctr">
+                      <a:solidFill>
+                        <a:srgbClr val="E2E8F0"/>
+                      </a:solidFill>
+                      <a:prstDash val="solid"/>
+                      <a:round/>
+                      <a:headEnd type="none" w="med" len="med"/>
+                      <a:tailEnd type="none" w="med" len="med"/>
+                    </a:lnR>
+                    <a:lnT w="9525" cap="flat" cmpd="sng" algn="ctr">
+                      <a:solidFill>
+                        <a:srgbClr val="E2E8F0"/>
+                      </a:solidFill>
+                      <a:prstDash val="solid"/>
+                      <a:round/>
+                      <a:headEnd type="none" w="med" len="med"/>
+                      <a:tailEnd type="none" w="med" len="med"/>
+                    </a:lnT>
+                    <a:lnB w="9525" cap="flat" cmpd="sng" algn="ctr">
+                      <a:solidFill>
+                        <a:srgbClr val="E2E8F0"/>
+                      </a:solidFill>
+                      <a:prstDash val="solid"/>
+                      <a:round/>
+                      <a:headEnd type="none" w="med" len="med"/>
+                      <a:tailEnd type="none" w="med" len="med"/>
+                    </a:lnB>
+                    <a:solidFill>
+                      <a:srgbClr val="F8FAFC"/>
+                    </a:solidFill>
+                  </a:tcPr>
+                </a:tc>
+              </a:tr>
+              <a:tr h="658368">
+                <a:tc>
+                  <a:txBody>
+                    <a:bodyPr/>
+                    <a:lstStyle/>
+                    <a:p>
+                      <a:pPr indent="0" marL="0">
+                        <a:buNone/>
+                      </a:pPr>
+                      <a:r>
+                        <a:rPr lang="en-US" sz="1050" dirty="0">
+                          <a:solidFill>
+                            <a:srgbClr val="0F172A"/>
+                          </a:solidFill>
+                          <a:latin typeface="Segoe UI" pitchFamily="34" charset="0"/>
+                          <a:ea typeface="Segoe UI" pitchFamily="34" charset="-122"/>
+                          <a:cs typeface="Segoe UI" pitchFamily="34" charset="-120"/>
+                        </a:rPr>
+                        <a:t>252 RLS policy bare auth.uid() - evaluate lại mỗi row</a:t>
+                      </a:r>
+                      <a:endParaRPr lang="en-US" sz="1050" dirty="0">
+                        <a:latin typeface="Segoe UI" charset="0"/>
+                        <a:ea typeface="Segoe UI" charset="0"/>
+                        <a:cs typeface="Segoe UI" charset="0"/>
+                      </a:endParaRPr>
+                    </a:p>
+                  </a:txBody>
+                  <a:tcPr marL="73152" marR="73152" marT="73152" marB="73152" anchor="ctr">
+                    <a:lnL w="9525" cap="flat" cmpd="sng" algn="ctr">
+                      <a:solidFill>
+                        <a:srgbClr val="E2E8F0"/>
+                      </a:solidFill>
+                      <a:prstDash val="solid"/>
+                      <a:round/>
+                      <a:headEnd type="none" w="med" len="med"/>
+                      <a:tailEnd type="none" w="med" len="med"/>
+                    </a:lnL>
+                    <a:lnR w="9525" cap="flat" cmpd="sng" algn="ctr">
+                      <a:solidFill>
+                        <a:srgbClr val="E2E8F0"/>
+                      </a:solidFill>
+                      <a:prstDash val="solid"/>
+                      <a:round/>
+                      <a:headEnd type="none" w="med" len="med"/>
+                      <a:tailEnd type="none" w="med" len="med"/>
+                    </a:lnR>
+                    <a:lnT w="9525" cap="flat" cmpd="sng" algn="ctr">
+                      <a:solidFill>
+                        <a:srgbClr val="E2E8F0"/>
+                      </a:solidFill>
+                      <a:prstDash val="solid"/>
+                      <a:round/>
+                      <a:headEnd type="none" w="med" len="med"/>
+                      <a:tailEnd type="none" w="med" len="med"/>
+                    </a:lnT>
+                    <a:lnB w="9525" cap="flat" cmpd="sng" algn="ctr">
+                      <a:solidFill>
+                        <a:srgbClr val="E2E8F0"/>
+                      </a:solidFill>
+                      <a:prstDash val="solid"/>
+                      <a:round/>
+                      <a:headEnd type="none" w="med" len="med"/>
+                      <a:tailEnd type="none" w="med" len="med"/>
+                    </a:lnB>
+                    <a:solidFill>
+                      <a:srgbClr val="FFFFFF"/>
+                    </a:solidFill>
+                  </a:tcPr>
+                </a:tc>
+                <a:tc>
+                  <a:txBody>
+                    <a:bodyPr/>
+                    <a:lstStyle/>
+                    <a:p>
+                      <a:pPr indent="0" marL="0">
+                        <a:buNone/>
+                      </a:pPr>
+                      <a:r>
+                        <a:rPr lang="en-US" sz="1050" dirty="0">
+                          <a:solidFill>
+                            <a:srgbClr val="0F172A"/>
+                          </a:solidFill>
+                          <a:latin typeface="Segoe UI" pitchFamily="34" charset="0"/>
+                          <a:ea typeface="Segoe UI" pitchFamily="34" charset="-122"/>
+                          <a:cs typeface="Segoe UI" pitchFamily="34" charset="-120"/>
+                        </a:rPr>
+                        <a:t>CR-057: wrap (select auth.uid()) toàn bộ - 1 lần/statement; advisors sạch</a:t>
+                      </a:r>
+                      <a:endParaRPr lang="en-US" sz="1050" dirty="0">
+                        <a:latin typeface="Segoe UI" charset="0"/>
+                        <a:ea typeface="Segoe UI" charset="0"/>
+                        <a:cs typeface="Segoe UI" charset="0"/>
+                      </a:endParaRPr>
+                    </a:p>
+                  </a:txBody>
+                  <a:tcPr marL="73152" marR="73152" marT="73152" marB="73152" anchor="ctr">
+                    <a:lnL w="9525" cap="flat" cmpd="sng" algn="ctr">
+                      <a:solidFill>
+                        <a:srgbClr val="E2E8F0"/>
+                      </a:solidFill>
+                      <a:prstDash val="solid"/>
+                      <a:round/>
+                      <a:headEnd type="none" w="med" len="med"/>
+                      <a:tailEnd type="none" w="med" len="med"/>
+                    </a:lnL>
+                    <a:lnR w="9525" cap="flat" cmpd="sng" algn="ctr">
+                      <a:solidFill>
+                        <a:srgbClr val="E2E8F0"/>
+                      </a:solidFill>
+                      <a:prstDash val="solid"/>
+                      <a:round/>
+                      <a:headEnd type="none" w="med" len="med"/>
+                      <a:tailEnd type="none" w="med" len="med"/>
+                    </a:lnR>
+                    <a:lnT w="9525" cap="flat" cmpd="sng" algn="ctr">
+                      <a:solidFill>
+                        <a:srgbClr val="E2E8F0"/>
+                      </a:solidFill>
+                      <a:prstDash val="solid"/>
+                      <a:round/>
+                      <a:headEnd type="none" w="med" len="med"/>
+                      <a:tailEnd type="none" w="med" len="med"/>
+                    </a:lnT>
+                    <a:lnB w="9525" cap="flat" cmpd="sng" algn="ctr">
+                      <a:solidFill>
+                        <a:srgbClr val="E2E8F0"/>
+                      </a:solidFill>
+                      <a:prstDash val="solid"/>
+                      <a:round/>
+                      <a:headEnd type="none" w="med" len="med"/>
+                      <a:tailEnd type="none" w="med" len="med"/>
+                    </a:lnB>
+                    <a:solidFill>
+                      <a:srgbClr val="FFFFFF"/>
+                    </a:solidFill>
+                  </a:tcPr>
+                </a:tc>
+                <a:tc>
+                  <a:txBody>
+                    <a:bodyPr/>
+                    <a:lstStyle/>
+                    <a:p>
+                      <a:pPr indent="0" marL="0">
+                        <a:buNone/>
+                      </a:pPr>
+                      <a:r>
+                        <a:rPr lang="en-US" sz="1050" dirty="0">
+                          <a:solidFill>
+                            <a:srgbClr val="0F172A"/>
+                          </a:solidFill>
+                          <a:latin typeface="Segoe UI" pitchFamily="34" charset="0"/>
+                          <a:ea typeface="Segoe UI" pitchFamily="34" charset="-122"/>
+                          <a:cs typeface="Segoe UI" pitchFamily="34" charset="-120"/>
+                        </a:rPr>
+                        <a:t>Xong - dễ về kỹ thuật, rườm về khối lượng</a:t>
+                      </a:r>
+                      <a:endParaRPr lang="en-US" sz="1050" dirty="0">
+                        <a:latin typeface="Segoe UI" charset="0"/>
+                        <a:ea typeface="Segoe UI" charset="0"/>
+                        <a:cs typeface="Segoe UI" charset="0"/>
+                      </a:endParaRPr>
+                    </a:p>
+                  </a:txBody>
+                  <a:tcPr marL="73152" marR="73152" marT="73152" marB="73152" anchor="ctr">
+                    <a:lnL w="9525" cap="flat" cmpd="sng" algn="ctr">
+                      <a:solidFill>
+                        <a:srgbClr val="E2E8F0"/>
+                      </a:solidFill>
+                      <a:prstDash val="solid"/>
+                      <a:round/>
+                      <a:headEnd type="none" w="med" len="med"/>
+                      <a:tailEnd type="none" w="med" len="med"/>
+                    </a:lnL>
+                    <a:lnR w="9525" cap="flat" cmpd="sng" algn="ctr">
+                      <a:solidFill>
+                        <a:srgbClr val="E2E8F0"/>
+                      </a:solidFill>
+                      <a:prstDash val="solid"/>
+                      <a:round/>
+                      <a:headEnd type="none" w="med" len="med"/>
+                      <a:tailEnd type="none" w="med" len="med"/>
+                    </a:lnR>
+                    <a:lnT w="9525" cap="flat" cmpd="sng" algn="ctr">
+                      <a:solidFill>
+                        <a:srgbClr val="E2E8F0"/>
+                      </a:solidFill>
+                      <a:prstDash val="solid"/>
+                      <a:round/>
+                      <a:headEnd type="none" w="med" len="med"/>
+                      <a:tailEnd type="none" w="med" len="med"/>
+                    </a:lnT>
+                    <a:lnB w="9525" cap="flat" cmpd="sng" algn="ctr">
+                      <a:solidFill>
+                        <a:srgbClr val="E2E8F0"/>
+                      </a:solidFill>
+                      <a:prstDash val="solid"/>
+                      <a:round/>
+                      <a:headEnd type="none" w="med" len="med"/>
+                      <a:tailEnd type="none" w="med" len="med"/>
+                    </a:lnB>
+                    <a:solidFill>
+                      <a:srgbClr val="FFFFFF"/>
+                    </a:solidFill>
+                  </a:tcPr>
+                </a:tc>
+              </a:tr>
+              <a:tr h="658368">
+                <a:tc>
+                  <a:txBody>
+                    <a:bodyPr/>
+                    <a:lstStyle/>
+                    <a:p>
+                      <a:pPr indent="0" marL="0">
+                        <a:buNone/>
+                      </a:pPr>
+                      <a:r>
+                        <a:rPr lang="en-US" sz="1050" dirty="0">
+                          <a:solidFill>
+                            <a:srgbClr val="0F172A"/>
+                          </a:solidFill>
+                          <a:latin typeface="Segoe UI" pitchFamily="34" charset="0"/>
+                          <a:ea typeface="Segoe UI" pitchFamily="34" charset="-122"/>
+                          <a:cs typeface="Segoe UI" pitchFamily="34" charset="-120"/>
+                        </a:rPr>
+                        <a:t>Authed bulk scrape (user hợp lệ script cào)</a:t>
+                      </a:r>
+                      <a:endParaRPr lang="en-US" sz="1050" dirty="0">
+                        <a:latin typeface="Segoe UI" charset="0"/>
+                        <a:ea typeface="Segoe UI" charset="0"/>
+                        <a:cs typeface="Segoe UI" charset="0"/>
+                      </a:endParaRPr>
+                    </a:p>
+                  </a:txBody>
+                  <a:tcPr marL="73152" marR="73152" marT="73152" marB="73152" anchor="ctr">
+                    <a:lnL w="9525" cap="flat" cmpd="sng" algn="ctr">
+                      <a:solidFill>
+                        <a:srgbClr val="E2E8F0"/>
+                      </a:solidFill>
+                      <a:prstDash val="solid"/>
+                      <a:round/>
+                      <a:headEnd type="none" w="med" len="med"/>
+                      <a:tailEnd type="none" w="med" len="med"/>
+                    </a:lnL>
+                    <a:lnR w="9525" cap="flat" cmpd="sng" algn="ctr">
+                      <a:solidFill>
+                        <a:srgbClr val="E2E8F0"/>
+                      </a:solidFill>
+                      <a:prstDash val="solid"/>
+                      <a:round/>
+                      <a:headEnd type="none" w="med" len="med"/>
+                      <a:tailEnd type="none" w="med" len="med"/>
+                    </a:lnR>
+                    <a:lnT w="9525" cap="flat" cmpd="sng" algn="ctr">
+                      <a:solidFill>
+                        <a:srgbClr val="E2E8F0"/>
+                      </a:solidFill>
+                      <a:prstDash val="solid"/>
+                      <a:round/>
+                      <a:headEnd type="none" w="med" len="med"/>
+                      <a:tailEnd type="none" w="med" len="med"/>
+                    </a:lnT>
+                    <a:lnB w="9525" cap="flat" cmpd="sng" algn="ctr">
+                      <a:solidFill>
+                        <a:srgbClr val="E2E8F0"/>
+                      </a:solidFill>
+                      <a:prstDash val="solid"/>
+                      <a:round/>
+                      <a:headEnd type="none" w="med" len="med"/>
+                      <a:tailEnd type="none" w="med" len="med"/>
+                    </a:lnB>
+                    <a:solidFill>
+                      <a:srgbClr val="F8FAFC"/>
+                    </a:solidFill>
+                  </a:tcPr>
+                </a:tc>
+                <a:tc>
+                  <a:txBody>
+                    <a:bodyPr/>
+                    <a:lstStyle/>
+                    <a:p>
+                      <a:pPr indent="0" marL="0">
+                        <a:buNone/>
+                      </a:pPr>
+                      <a:r>
+                        <a:rPr lang="en-US" sz="1050" dirty="0">
+                          <a:solidFill>
+                            <a:srgbClr val="0F172A"/>
+                          </a:solidFill>
+                          <a:latin typeface="Segoe UI" pitchFamily="34" charset="0"/>
+                          <a:ea typeface="Segoe UI" pitchFamily="34" charset="-122"/>
+                          <a:cs typeface="Segoe UI" pitchFamily="34" charset="-120"/>
+                        </a:rPr>
+                        <a:t>Lớp 1 đã deploy (export cap 20/h + captcha); lớp 2: port check_rate_limit per-uid sang public schema</a:t>
+                      </a:r>
+                      <a:endParaRPr lang="en-US" sz="1050" dirty="0">
+                        <a:latin typeface="Segoe UI" charset="0"/>
+                        <a:ea typeface="Segoe UI" charset="0"/>
+                        <a:cs typeface="Segoe UI" charset="0"/>
+                      </a:endParaRPr>
+                    </a:p>
+                  </a:txBody>
+                  <a:tcPr marL="73152" marR="73152" marT="73152" marB="73152" anchor="ctr">
+                    <a:lnL w="9525" cap="flat" cmpd="sng" algn="ctr">
+                      <a:solidFill>
+                        <a:srgbClr val="E2E8F0"/>
+                      </a:solidFill>
+                      <a:prstDash val="solid"/>
+                      <a:round/>
+                      <a:headEnd type="none" w="med" len="med"/>
+                      <a:tailEnd type="none" w="med" len="med"/>
+                    </a:lnL>
+                    <a:lnR w="9525" cap="flat" cmpd="sng" algn="ctr">
+                      <a:solidFill>
+                        <a:srgbClr val="E2E8F0"/>
+                      </a:solidFill>
+                      <a:prstDash val="solid"/>
+                      <a:round/>
+                      <a:headEnd type="none" w="med" len="med"/>
+                      <a:tailEnd type="none" w="med" len="med"/>
+                    </a:lnR>
+                    <a:lnT w="9525" cap="flat" cmpd="sng" algn="ctr">
+                      <a:solidFill>
+                        <a:srgbClr val="E2E8F0"/>
+                      </a:solidFill>
+                      <a:prstDash val="solid"/>
+                      <a:round/>
+                      <a:headEnd type="none" w="med" len="med"/>
+                      <a:tailEnd type="none" w="med" len="med"/>
+                    </a:lnT>
+                    <a:lnB w="9525" cap="flat" cmpd="sng" algn="ctr">
+                      <a:solidFill>
+                        <a:srgbClr val="E2E8F0"/>
+                      </a:solidFill>
+                      <a:prstDash val="solid"/>
+                      <a:round/>
+                      <a:headEnd type="none" w="med" len="med"/>
+                      <a:tailEnd type="none" w="med" len="med"/>
+                    </a:lnB>
+                    <a:solidFill>
+                      <a:srgbClr val="F8FAFC"/>
+                    </a:solidFill>
+                  </a:tcPr>
+                </a:tc>
+                <a:tc>
+                  <a:txBody>
+                    <a:bodyPr/>
+                    <a:lstStyle/>
+                    <a:p>
+                      <a:pPr indent="0" marL="0">
+                        <a:buNone/>
+                      </a:pPr>
+                      <a:r>
+                        <a:rPr lang="en-US" sz="1050" dirty="0">
+                          <a:solidFill>
+                            <a:srgbClr val="0F172A"/>
+                          </a:solidFill>
+                          <a:latin typeface="Segoe UI" pitchFamily="34" charset="0"/>
+                          <a:ea typeface="Segoe UI" pitchFamily="34" charset="-122"/>
+                          <a:cs typeface="Segoe UI" pitchFamily="34" charset="-120"/>
+                        </a:rPr>
+                        <a:t>Dễ-trung bình - pattern có sẵn, migration nhỏ</a:t>
+                      </a:r>
+                      <a:endParaRPr lang="en-US" sz="1050" dirty="0">
+                        <a:latin typeface="Segoe UI" charset="0"/>
+                        <a:ea typeface="Segoe UI" charset="0"/>
+                        <a:cs typeface="Segoe UI" charset="0"/>
+                      </a:endParaRPr>
+                    </a:p>
+                  </a:txBody>
+                  <a:tcPr marL="73152" marR="73152" marT="73152" marB="73152" anchor="ctr">
+                    <a:lnL w="9525" cap="flat" cmpd="sng" algn="ctr">
+                      <a:solidFill>
+                        <a:srgbClr val="E2E8F0"/>
+                      </a:solidFill>
+                      <a:prstDash val="solid"/>
+                      <a:round/>
+                      <a:headEnd type="none" w="med" len="med"/>
+                      <a:tailEnd type="none" w="med" len="med"/>
+                    </a:lnL>
+                    <a:lnR w="9525" cap="flat" cmpd="sng" algn="ctr">
+                      <a:solidFill>
+                        <a:srgbClr val="E2E8F0"/>
+                      </a:solidFill>
+                      <a:prstDash val="solid"/>
+                      <a:round/>
+                      <a:headEnd type="none" w="med" len="med"/>
+                      <a:tailEnd type="none" w="med" len="med"/>
+                    </a:lnR>
+                    <a:lnT w="9525" cap="flat" cmpd="sng" algn="ctr">
+                      <a:solidFill>
+                        <a:srgbClr val="E2E8F0"/>
+                      </a:solidFill>
+                      <a:prstDash val="solid"/>
+                      <a:round/>
+                      <a:headEnd type="none" w="med" len="med"/>
+                      <a:tailEnd type="none" w="med" len="med"/>
+                    </a:lnT>
+                    <a:lnB w="9525" cap="flat" cmpd="sng" algn="ctr">
+                      <a:solidFill>
+                        <a:srgbClr val="E2E8F0"/>
+                      </a:solidFill>
+                      <a:prstDash val="solid"/>
+                      <a:round/>
+                      <a:headEnd type="none" w="med" len="med"/>
+                      <a:tailEnd type="none" w="med" len="med"/>
+                    </a:lnB>
+                    <a:solidFill>
+                      <a:srgbClr val="F8FAFC"/>
+                    </a:solidFill>
+                  </a:tcPr>
+                </a:tc>
+              </a:tr>
+              <a:tr h="658368">
+                <a:tc>
+                  <a:txBody>
+                    <a:bodyPr/>
+                    <a:lstStyle/>
+                    <a:p>
+                      <a:pPr indent="0" marL="0">
+                        <a:buNone/>
+                      </a:pPr>
+                      <a:r>
+                        <a:rPr lang="en-US" sz="1050" dirty="0">
+                          <a:solidFill>
+                            <a:srgbClr val="0F172A"/>
+                          </a:solidFill>
+                          <a:latin typeface="Segoe UI" pitchFamily="34" charset="0"/>
+                          <a:ea typeface="Segoe UI" pitchFamily="34" charset="-122"/>
+                          <a:cs typeface="Segoe UI" pitchFamily="34" charset="-120"/>
+                        </a:rPr>
+                        <a:t>AI jobs poll-based (không queue thật)</a:t>
+                      </a:r>
+                      <a:endParaRPr lang="en-US" sz="1050" dirty="0">
+                        <a:latin typeface="Segoe UI" charset="0"/>
+                        <a:ea typeface="Segoe UI" charset="0"/>
+                        <a:cs typeface="Segoe UI" charset="0"/>
+                      </a:endParaRPr>
+                    </a:p>
+                  </a:txBody>
+                  <a:tcPr marL="73152" marR="73152" marT="73152" marB="73152" anchor="ctr">
+                    <a:lnL w="9525" cap="flat" cmpd="sng" algn="ctr">
+                      <a:solidFill>
+                        <a:srgbClr val="E2E8F0"/>
+                      </a:solidFill>
+                      <a:prstDash val="solid"/>
+                      <a:round/>
+                      <a:headEnd type="none" w="med" len="med"/>
+                      <a:tailEnd type="none" w="med" len="med"/>
+                    </a:lnL>
+                    <a:lnR w="9525" cap="flat" cmpd="sng" algn="ctr">
+                      <a:solidFill>
+                        <a:srgbClr val="E2E8F0"/>
+                      </a:solidFill>
+                      <a:prstDash val="solid"/>
+                      <a:round/>
+                      <a:headEnd type="none" w="med" len="med"/>
+                      <a:tailEnd type="none" w="med" len="med"/>
+                    </a:lnR>
+                    <a:lnT w="9525" cap="flat" cmpd="sng" algn="ctr">
+                      <a:solidFill>
+                        <a:srgbClr val="E2E8F0"/>
+                      </a:solidFill>
+                      <a:prstDash val="solid"/>
+                      <a:round/>
+                      <a:headEnd type="none" w="med" len="med"/>
+                      <a:tailEnd type="none" w="med" len="med"/>
+                    </a:lnT>
+                    <a:lnB w="9525" cap="flat" cmpd="sng" algn="ctr">
+                      <a:solidFill>
+                        <a:srgbClr val="E2E8F0"/>
+                      </a:solidFill>
+                      <a:prstDash val="solid"/>
+                      <a:round/>
+                      <a:headEnd type="none" w="med" len="med"/>
+                      <a:tailEnd type="none" w="med" len="med"/>
+                    </a:lnB>
+                    <a:solidFill>
+                      <a:srgbClr val="FFFFFF"/>
+                    </a:solidFill>
+                  </a:tcPr>
+                </a:tc>
+                <a:tc>
+                  <a:txBody>
+                    <a:bodyPr/>
+                    <a:lstStyle/>
+                    <a:p>
+                      <a:pPr indent="0" marL="0">
+                        <a:buNone/>
+                      </a:pPr>
+                      <a:r>
+                        <a:rPr lang="en-US" sz="1050" dirty="0">
+                          <a:solidFill>
+                            <a:srgbClr val="0F172A"/>
+                          </a:solidFill>
+                          <a:latin typeface="Segoe UI" pitchFamily="34" charset="0"/>
+                          <a:ea typeface="Segoe UI" pitchFamily="34" charset="-122"/>
+                          <a:cs typeface="Segoe UI" pitchFamily="34" charset="-120"/>
+                        </a:rPr>
+                        <a:t>Thêm pgmq/SQS khi throughput đòi hỏi - seam ai_jobs + callback đã đặt</a:t>
+                      </a:r>
+                      <a:endParaRPr lang="en-US" sz="1050" dirty="0">
+                        <a:latin typeface="Segoe UI" charset="0"/>
+                        <a:ea typeface="Segoe UI" charset="0"/>
+                        <a:cs typeface="Segoe UI" charset="0"/>
+                      </a:endParaRPr>
+                    </a:p>
+                  </a:txBody>
+                  <a:tcPr marL="73152" marR="73152" marT="73152" marB="73152" anchor="ctr">
+                    <a:lnL w="9525" cap="flat" cmpd="sng" algn="ctr">
+                      <a:solidFill>
+                        <a:srgbClr val="E2E8F0"/>
+                      </a:solidFill>
+                      <a:prstDash val="solid"/>
+                      <a:round/>
+                      <a:headEnd type="none" w="med" len="med"/>
+                      <a:tailEnd type="none" w="med" len="med"/>
+                    </a:lnL>
+                    <a:lnR w="9525" cap="flat" cmpd="sng" algn="ctr">
+                      <a:solidFill>
+                        <a:srgbClr val="E2E8F0"/>
+                      </a:solidFill>
+                      <a:prstDash val="solid"/>
+                      <a:round/>
+                      <a:headEnd type="none" w="med" len="med"/>
+                      <a:tailEnd type="none" w="med" len="med"/>
+                    </a:lnR>
+                    <a:lnT w="9525" cap="flat" cmpd="sng" algn="ctr">
+                      <a:solidFill>
+                        <a:srgbClr val="E2E8F0"/>
+                      </a:solidFill>
+                      <a:prstDash val="solid"/>
+                      <a:round/>
+                      <a:headEnd type="none" w="med" len="med"/>
+                      <a:tailEnd type="none" w="med" len="med"/>
+                    </a:lnT>
+                    <a:lnB w="9525" cap="flat" cmpd="sng" algn="ctr">
+                      <a:solidFill>
+                        <a:srgbClr val="E2E8F0"/>
+                      </a:solidFill>
+                      <a:prstDash val="solid"/>
+                      <a:round/>
+                      <a:headEnd type="none" w="med" len="med"/>
+                      <a:tailEnd type="none" w="med" len="med"/>
+                    </a:lnB>
+                    <a:solidFill>
+                      <a:srgbClr val="FFFFFF"/>
+                    </a:solidFill>
+                  </a:tcPr>
+                </a:tc>
+                <a:tc>
+                  <a:txBody>
+                    <a:bodyPr/>
+                    <a:lstStyle/>
+                    <a:p>
+                      <a:pPr indent="0" marL="0">
+                        <a:buNone/>
+                      </a:pPr>
+                      <a:r>
+                        <a:rPr lang="en-US" sz="1050" dirty="0">
+                          <a:solidFill>
+                            <a:srgbClr val="0F172A"/>
+                          </a:solidFill>
+                          <a:latin typeface="Segoe UI" pitchFamily="34" charset="0"/>
+                          <a:ea typeface="Segoe UI" pitchFamily="34" charset="-122"/>
+                          <a:cs typeface="Segoe UI" pitchFamily="34" charset="-120"/>
+                        </a:rPr>
+                        <a:t>Trung bình - đổi bên trong seam, giữ API</a:t>
+                      </a:r>
+                      <a:endParaRPr lang="en-US" sz="1050" dirty="0">
+                        <a:latin typeface="Segoe UI" charset="0"/>
+                        <a:ea typeface="Segoe UI" charset="0"/>
+                        <a:cs typeface="Segoe UI" charset="0"/>
+                      </a:endParaRPr>
+                    </a:p>
+                  </a:txBody>
+                  <a:tcPr marL="73152" marR="73152" marT="73152" marB="73152" anchor="ctr">
+                    <a:lnL w="9525" cap="flat" cmpd="sng" algn="ctr">
+                      <a:solidFill>
+                        <a:srgbClr val="E2E8F0"/>
+                      </a:solidFill>
+                      <a:prstDash val="solid"/>
+                      <a:round/>
+                      <a:headEnd type="none" w="med" len="med"/>
+                      <a:tailEnd type="none" w="med" len="med"/>
+                    </a:lnL>
+                    <a:lnR w="9525" cap="flat" cmpd="sng" algn="ctr">
+                      <a:solidFill>
+                        <a:srgbClr val="E2E8F0"/>
+                      </a:solidFill>
+                      <a:prstDash val="solid"/>
+                      <a:round/>
+                      <a:headEnd type="none" w="med" len="med"/>
+                      <a:tailEnd type="none" w="med" len="med"/>
+                    </a:lnR>
+                    <a:lnT w="9525" cap="flat" cmpd="sng" algn="ctr">
+                      <a:solidFill>
+                        <a:srgbClr val="E2E8F0"/>
+                      </a:solidFill>
+                      <a:prstDash val="solid"/>
+                      <a:round/>
+                      <a:headEnd type="none" w="med" len="med"/>
+                      <a:tailEnd type="none" w="med" len="med"/>
+                    </a:lnT>
+                    <a:lnB w="9525" cap="flat" cmpd="sng" algn="ctr">
+                      <a:solidFill>
+                        <a:srgbClr val="E2E8F0"/>
+                      </a:solidFill>
+                      <a:prstDash val="solid"/>
+                      <a:round/>
+                      <a:headEnd type="none" w="med" len="med"/>
+                      <a:tailEnd type="none" w="med" len="med"/>
+                    </a:lnB>
+                    <a:solidFill>
+                      <a:srgbClr val="FFFFFF"/>
+                    </a:solidFill>
+                  </a:tcPr>
+                </a:tc>
+              </a:tr>
+              <a:tr h="658368">
+                <a:tc>
+                  <a:txBody>
+                    <a:bodyPr/>
+                    <a:lstStyle/>
+                    <a:p>
+                      <a:pPr indent="0" marL="0">
+                        <a:buNone/>
+                      </a:pPr>
+                      <a:r>
+                        <a:rPr lang="en-US" sz="1050" dirty="0">
+                          <a:solidFill>
+                            <a:srgbClr val="0F172A"/>
+                          </a:solidFill>
+                          <a:latin typeface="Segoe UI" pitchFamily="34" charset="0"/>
+                          <a:ea typeface="Segoe UI" pitchFamily="34" charset="-122"/>
+                          <a:cs typeface="Segoe UI" pitchFamily="34" charset="-120"/>
+                        </a:rPr>
+                        <a:t>SPOF: 1 deployable + 1 Supabase project</a:t>
+                      </a:r>
+                      <a:endParaRPr lang="en-US" sz="1050" dirty="0">
+                        <a:latin typeface="Segoe UI" charset="0"/>
+                        <a:ea typeface="Segoe UI" charset="0"/>
+                        <a:cs typeface="Segoe UI" charset="0"/>
+                      </a:endParaRPr>
+                    </a:p>
+                  </a:txBody>
+                  <a:tcPr marL="73152" marR="73152" marT="73152" marB="73152" anchor="ctr">
+                    <a:lnL w="9525" cap="flat" cmpd="sng" algn="ctr">
+                      <a:solidFill>
+                        <a:srgbClr val="E2E8F0"/>
+                      </a:solidFill>
+                      <a:prstDash val="solid"/>
+                      <a:round/>
+                      <a:headEnd type="none" w="med" len="med"/>
+                      <a:tailEnd type="none" w="med" len="med"/>
+                    </a:lnL>
+                    <a:lnR w="9525" cap="flat" cmpd="sng" algn="ctr">
+                      <a:solidFill>
+                        <a:srgbClr val="E2E8F0"/>
+                      </a:solidFill>
+                      <a:prstDash val="solid"/>
+                      <a:round/>
+                      <a:headEnd type="none" w="med" len="med"/>
+                      <a:tailEnd type="none" w="med" len="med"/>
+                    </a:lnR>
+                    <a:lnT w="9525" cap="flat" cmpd="sng" algn="ctr">
+                      <a:solidFill>
+                        <a:srgbClr val="E2E8F0"/>
+                      </a:solidFill>
+                      <a:prstDash val="solid"/>
+                      <a:round/>
+                      <a:headEnd type="none" w="med" len="med"/>
+                      <a:tailEnd type="none" w="med" len="med"/>
+                    </a:lnT>
+                    <a:lnB w="9525" cap="flat" cmpd="sng" algn="ctr">
+                      <a:solidFill>
+                        <a:srgbClr val="E2E8F0"/>
+                      </a:solidFill>
+                      <a:prstDash val="solid"/>
+                      <a:round/>
+                      <a:headEnd type="none" w="med" len="med"/>
+                      <a:tailEnd type="none" w="med" len="med"/>
+                    </a:lnB>
+                    <a:solidFill>
+                      <a:srgbClr val="F8FAFC"/>
+                    </a:solidFill>
+                  </a:tcPr>
+                </a:tc>
+                <a:tc>
+                  <a:txBody>
+                    <a:bodyPr/>
+                    <a:lstStyle/>
+                    <a:p>
+                      <a:pPr indent="0" marL="0">
+                        <a:buNone/>
+                      </a:pPr>
+                      <a:r>
+                        <a:rPr lang="en-US" sz="1050" dirty="0">
+                          <a:solidFill>
+                            <a:srgbClr val="0F172A"/>
+                          </a:solidFill>
+                          <a:latin typeface="Segoe UI" pitchFamily="34" charset="0"/>
+                          <a:ea typeface="Segoe UI" pitchFamily="34" charset="-122"/>
+                          <a:cs typeface="Segoe UI" pitchFamily="34" charset="-120"/>
+                        </a:rPr>
+                        <a:t>Chấp nhận một phần: Vercel sin1 + static shell; Supabase backup managed</a:t>
+                      </a:r>
+                      <a:endParaRPr lang="en-US" sz="1050" dirty="0">
+                        <a:latin typeface="Segoe UI" charset="0"/>
+                        <a:ea typeface="Segoe UI" charset="0"/>
+                        <a:cs typeface="Segoe UI" charset="0"/>
+                      </a:endParaRPr>
+                    </a:p>
+                  </a:txBody>
+                  <a:tcPr marL="73152" marR="73152" marT="73152" marB="73152" anchor="ctr">
+                    <a:lnL w="9525" cap="flat" cmpd="sng" algn="ctr">
+                      <a:solidFill>
+                        <a:srgbClr val="E2E8F0"/>
+                      </a:solidFill>
+                      <a:prstDash val="solid"/>
+                      <a:round/>
+                      <a:headEnd type="none" w="med" len="med"/>
+                      <a:tailEnd type="none" w="med" len="med"/>
+                    </a:lnL>
+                    <a:lnR w="9525" cap="flat" cmpd="sng" algn="ctr">
+                      <a:solidFill>
+                        <a:srgbClr val="E2E8F0"/>
+                      </a:solidFill>
+                      <a:prstDash val="solid"/>
+                      <a:round/>
+                      <a:headEnd type="none" w="med" len="med"/>
+                      <a:tailEnd type="none" w="med" len="med"/>
+                    </a:lnR>
+                    <a:lnT w="9525" cap="flat" cmpd="sng" algn="ctr">
+                      <a:solidFill>
+                        <a:srgbClr val="E2E8F0"/>
+                      </a:solidFill>
+                      <a:prstDash val="solid"/>
+                      <a:round/>
+                      <a:headEnd type="none" w="med" len="med"/>
+                      <a:tailEnd type="none" w="med" len="med"/>
+                    </a:lnT>
+                    <a:lnB w="9525" cap="flat" cmpd="sng" algn="ctr">
+                      <a:solidFill>
+                        <a:srgbClr val="E2E8F0"/>
+                      </a:solidFill>
+                      <a:prstDash val="solid"/>
+                      <a:round/>
+                      <a:headEnd type="none" w="med" len="med"/>
+                      <a:tailEnd type="none" w="med" len="med"/>
+                    </a:lnB>
+                    <a:solidFill>
+                      <a:srgbClr val="F8FAFC"/>
+                    </a:solidFill>
+                  </a:tcPr>
+                </a:tc>
+                <a:tc>
+                  <a:txBody>
+                    <a:bodyPr/>
+                    <a:lstStyle/>
+                    <a:p>
+                      <a:pPr indent="0" marL="0">
+                        <a:buNone/>
+                      </a:pPr>
+                      <a:r>
+                        <a:rPr lang="en-US" sz="1050" dirty="0">
+                          <a:solidFill>
+                            <a:srgbClr val="0F172A"/>
+                          </a:solidFill>
+                          <a:latin typeface="Segoe UI" pitchFamily="34" charset="0"/>
+                          <a:ea typeface="Segoe UI" pitchFamily="34" charset="-122"/>
+                          <a:cs typeface="Segoe UI" pitchFamily="34" charset="-120"/>
+                        </a:rPr>
+                        <a:t>Khó khắc phục hoàn toàn ở budget này - multi-region là quyết định chi phí</a:t>
+                      </a:r>
+                      <a:endParaRPr lang="en-US" sz="1050" dirty="0">
+                        <a:latin typeface="Segoe UI" charset="0"/>
+                        <a:ea typeface="Segoe UI" charset="0"/>
+                        <a:cs typeface="Segoe UI" charset="0"/>
+                      </a:endParaRPr>
+                    </a:p>
+                  </a:txBody>
+                  <a:tcPr marL="73152" marR="73152" marT="73152" marB="73152" anchor="ctr">
+                    <a:lnL w="9525" cap="flat" cmpd="sng" algn="ctr">
+                      <a:solidFill>
+                        <a:srgbClr val="E2E8F0"/>
+                      </a:solidFill>
+                      <a:prstDash val="solid"/>
+                      <a:round/>
+                      <a:headEnd type="none" w="med" len="med"/>
+                      <a:tailEnd type="none" w="med" len="med"/>
+                    </a:lnL>
+                    <a:lnR w="9525" cap="flat" cmpd="sng" algn="ctr">
+                      <a:solidFill>
+                        <a:srgbClr val="E2E8F0"/>
+                      </a:solidFill>
+                      <a:prstDash val="solid"/>
+                      <a:round/>
+                      <a:headEnd type="none" w="med" len="med"/>
+                      <a:tailEnd type="none" w="med" len="med"/>
+                    </a:lnR>
+                    <a:lnT w="9525" cap="flat" cmpd="sng" algn="ctr">
+                      <a:solidFill>
+                        <a:srgbClr val="E2E8F0"/>
+                      </a:solidFill>
+                      <a:prstDash val="solid"/>
+                      <a:round/>
+                      <a:headEnd type="none" w="med" len="med"/>
+                      <a:tailEnd type="none" w="med" len="med"/>
+                    </a:lnT>
+                    <a:lnB w="9525" cap="flat" cmpd="sng" algn="ctr">
+                      <a:solidFill>
+                        <a:srgbClr val="E2E8F0"/>
+                      </a:solidFill>
+                      <a:prstDash val="solid"/>
+                      <a:round/>
+                      <a:headEnd type="none" w="med" len="med"/>
+                      <a:tailEnd type="none" w="med" len="med"/>
+                    </a:lnB>
+                    <a:solidFill>
+                      <a:srgbClr val="F8FAFC"/>
+                    </a:solidFill>
+                  </a:tcPr>
+                </a:tc>
+              </a:tr>
+            </a:tbl>
+          </a:graphicData>
+        </a:graphic>
+      </p:graphicFrame>
+    </p:spTree>
+  </p:cSld>
+  <p:clrMapOvr>
+    <a:masterClrMapping/>
+  </p:clrMapOvr>
+  <p:transition xmlns:p="http://schemas.openxmlformats.org/presentationml/2006/main" spd="fast" advClick="1">
+    <p:fade/>
+  </p:transition>
+</p:sld>
+</file>
+
+<file path=ppt/slides/slide22.xml><?xml version="1.0" encoding="utf-8"?>
+<p:sld xmlns:a="http://schemas.openxmlformats.org/drawingml/2006/main" xmlns:r="http://schemas.openxmlformats.org/officeDocument/2006/relationships" xmlns:p="http://schemas.openxmlformats.org/presentationml/2006/main">
+  <p:cSld name="Slide 22">
+    <p:spTree>
+      <p:nvGrpSpPr>
+        <p:cNvPr id="1" name=""/>
+        <p:cNvGrpSpPr/>
+        <p:nvPr/>
+      </p:nvGrpSpPr>
+      <p:grpSpPr>
+        <a:xfrm>
+          <a:off x="0" y="0"/>
+          <a:ext cx="0" cy="0"/>
+          <a:chOff x="0" y="0"/>
+          <a:chExt cx="0" cy="0"/>
+        </a:xfrm>
+      </p:grpSpPr>
+      <p:sp>
+        <p:nvSpPr>
+          <p:cNvPr id="2" name="Shape 0"/>
+          <p:cNvSpPr/>
+          <p:nvPr/>
+        </p:nvSpPr>
+        <p:spPr>
+          <a:xfrm>
+            <a:off x="0" y="0"/>
+            <a:ext cx="128016" cy="1645920"/>
+          </a:xfrm>
+          <a:prstGeom prst="rect">
+            <a:avLst/>
+          </a:prstGeom>
+          <a:solidFill>
+            <a:srgbClr val="0F766E"/>
+          </a:solidFill>
+          <a:ln/>
+        </p:spPr>
+      </p:sp>
+      <p:sp>
+        <p:nvSpPr>
+          <p:cNvPr id="3" name="Text 1"/>
+          <p:cNvSpPr/>
+          <p:nvPr/>
+        </p:nvSpPr>
+        <p:spPr>
+          <a:xfrm>
+            <a:off x="502920" y="256032"/>
+            <a:ext cx="10972800" cy="274320"/>
+          </a:xfrm>
+          <a:prstGeom prst="rect">
+            <a:avLst/>
+          </a:prstGeom>
+          <a:noFill/>
+          <a:ln/>
+        </p:spPr>
+        <p:txBody>
+          <a:bodyPr wrap="square" rtlCol="0" anchor="ctr"/>
+          <a:lstStyle/>
+          <a:p>
+            <a:pPr indent="0" marL="0">
+              <a:buNone/>
+            </a:pPr>
+            <a:r>
+              <a:rPr lang="en-US" sz="1100" b="1" dirty="0">
+                <a:solidFill>
+                  <a:srgbClr val="0F766E"/>
+                </a:solidFill>
+                <a:latin typeface="Segoe UI" pitchFamily="34" charset="0"/>
+                <a:ea typeface="Segoe UI" pitchFamily="34" charset="-122"/>
+                <a:cs typeface="Segoe UI" pitchFamily="34" charset="-120"/>
+              </a:rPr>
+              <a:t>ĐÁNH GIÁ</a:t>
+            </a:r>
+            <a:endParaRPr lang="en-US" sz="1100" dirty="0"/>
+          </a:p>
+        </p:txBody>
+      </p:sp>
+      <p:sp>
+        <p:nvSpPr>
+          <p:cNvPr id="4" name="Text 2"/>
+          <p:cNvSpPr/>
+          <p:nvPr/>
+        </p:nvSpPr>
+        <p:spPr>
+          <a:xfrm>
+            <a:off x="502920" y="502920"/>
+            <a:ext cx="11155680" cy="640080"/>
+          </a:xfrm>
+          <a:prstGeom prst="rect">
+            <a:avLst/>
+          </a:prstGeom>
+          <a:noFill/>
+          <a:ln/>
+        </p:spPr>
+        <p:txBody>
+          <a:bodyPr wrap="square" rtlCol="0" anchor="ctr"/>
+          <a:lstStyle/>
+          <a:p>
+            <a:pPr indent="0" marL="0">
+              <a:buNone/>
+            </a:pPr>
+            <a:r>
+              <a:rPr lang="en-US" sz="2600" b="1" dirty="0">
+                <a:solidFill>
+                  <a:srgbClr val="0F172A"/>
+                </a:solidFill>
+                <a:latin typeface="Segoe UI" pitchFamily="34" charset="0"/>
+                <a:ea typeface="Segoe UI" pitchFamily="34" charset="-122"/>
+                <a:cs typeface="Segoe UI" pitchFamily="34" charset="-120"/>
+              </a:rPr>
+              <a:t>Mức độ phù hợp với bài toán - bảng đối chứng</a:t>
+            </a:r>
+            <a:endParaRPr lang="en-US" sz="2600" dirty="0"/>
+          </a:p>
+        </p:txBody>
+      </p:sp>
+      <p:sp>
+        <p:nvSpPr>
+          <p:cNvPr id="5" name="Shape 3"/>
+          <p:cNvSpPr/>
+          <p:nvPr/>
+        </p:nvSpPr>
+        <p:spPr>
+          <a:xfrm>
+            <a:off x="502920" y="1572768"/>
+            <a:ext cx="11155680" cy="0"/>
+          </a:xfrm>
+          <a:prstGeom prst="line">
+            <a:avLst/>
+          </a:prstGeom>
+          <a:noFill/>
+          <a:ln w="12700">
+            <a:solidFill>
+              <a:srgbClr val="E2E8F0"/>
+            </a:solidFill>
+            <a:prstDash val="solid"/>
+          </a:ln>
+        </p:spPr>
+      </p:sp>
+      <p:sp>
+        <p:nvSpPr>
+          <p:cNvPr id="6" name="Text 4"/>
+          <p:cNvSpPr/>
+          <p:nvPr/>
+        </p:nvSpPr>
+        <p:spPr>
+          <a:xfrm>
+            <a:off x="502920" y="6528816"/>
+            <a:ext cx="4572000" cy="274320"/>
+          </a:xfrm>
+          <a:prstGeom prst="rect">
+            <a:avLst/>
+          </a:prstGeom>
+          <a:noFill/>
+          <a:ln/>
+        </p:spPr>
+        <p:txBody>
+          <a:bodyPr wrap="square" rtlCol="0" anchor="ctr"/>
+          <a:lstStyle/>
+          <a:p>
+            <a:pPr indent="0" marL="0">
+              <a:buNone/>
+            </a:pPr>
+            <a:r>
+              <a:rPr lang="en-US" sz="900" dirty="0">
+                <a:solidFill>
+                  <a:srgbClr val="94A3B8"/>
+                </a:solidFill>
+                <a:latin typeface="Segoe UI" pitchFamily="34" charset="0"/>
+                <a:ea typeface="Segoe UI" pitchFamily="34" charset="-122"/>
+                <a:cs typeface="Segoe UI" pitchFamily="34" charset="-120"/>
+              </a:rPr>
+              <a:t>VieSchool - Sổ Chủ Nhiệm Số</a:t>
+            </a:r>
+            <a:endParaRPr lang="en-US" sz="900" dirty="0"/>
+          </a:p>
+        </p:txBody>
+      </p:sp>
+      <p:sp>
+        <p:nvSpPr>
+          <p:cNvPr id="7" name="Text 5"/>
+          <p:cNvSpPr/>
+          <p:nvPr/>
+        </p:nvSpPr>
+        <p:spPr>
+          <a:xfrm>
+            <a:off x="11338560" y="6528816"/>
+            <a:ext cx="457200" cy="274320"/>
+          </a:xfrm>
+          <a:prstGeom prst="rect">
+            <a:avLst/>
+          </a:prstGeom>
+          <a:noFill/>
+          <a:ln/>
+        </p:spPr>
+        <p:txBody>
+          <a:bodyPr wrap="square" rtlCol="0" anchor="ctr"/>
+          <a:lstStyle/>
+          <a:p>
+            <a:pPr algn="r" indent="0" marL="0">
+              <a:buNone/>
+            </a:pPr>
+            <a:r>
+              <a:rPr lang="en-US" sz="900" dirty="0">
+                <a:solidFill>
+                  <a:srgbClr val="94A3B8"/>
+                </a:solidFill>
+                <a:latin typeface="Segoe UI" pitchFamily="34" charset="0"/>
+                <a:ea typeface="Segoe UI" pitchFamily="34" charset="-122"/>
+                <a:cs typeface="Segoe UI" pitchFamily="34" charset="-120"/>
+              </a:rPr>
+              <a:t>18</a:t>
+            </a:r>
+            <a:endParaRPr lang="en-US" sz="900" dirty="0"/>
+          </a:p>
+        </p:txBody>
+      </p:sp>
+      <p:graphicFrame>
+        <p:nvGraphicFramePr>
+          <p:cNvPr id="23" name="Table 0"/>
+          <p:cNvGraphicFramePr>
+            <a:graphicFrameLocks noGrp="1"/>
+          </p:cNvGraphicFramePr>
+          <p:nvPr>
+            <p:extLst>
+              <p:ext uri="{D42A27DB-BD31-4B8C-83A1-F6EECF244321}">
+                <p14:modId xmlns:p14="http://schemas.microsoft.com/office/powerpoint/2010/main" val="1579011935"/>
+              </p:ext>
+            </p:extLst>
+          </p:nvPr>
+        </p:nvGraphicFramePr>
+        <p:xfrm>
+          <a:off x="640080" y="1783080"/>
+          <a:ext cx="10972800" cy="914400"/>
+        </p:xfrm>
+        <a:graphic>
+          <a:graphicData uri="http://schemas.openxmlformats.org/drawingml/2006/table">
+            <a:tbl>
+              <a:tblPr/>
+              <a:tblGrid>
                 <a:gridCol w="5486400"/>
                 <a:gridCol w="5486400"/>
               </a:tblGrid>
@@ -15129,9 +18746,9 @@
 </p:sld>
 </file>
 
-<file path=ppt/slides/slide21.xml><?xml version="1.0" encoding="utf-8"?>
+<file path=ppt/slides/slide23.xml><?xml version="1.0" encoding="utf-8"?>
 <p:sld xmlns:a="http://schemas.openxmlformats.org/drawingml/2006/main" xmlns:r="http://schemas.openxmlformats.org/officeDocument/2006/relationships" xmlns:p="http://schemas.openxmlformats.org/presentationml/2006/main">
-  <p:cSld name="Slide 21">
+  <p:cSld name="Slide 23">
     <p:bg>
       <p:bgPr>
         <a:solidFill>
@@ -18299,6 +21916,828 @@
 <file path=ppt/slides/slide5.xml><?xml version="1.0" encoding="utf-8"?>
 <p:sld xmlns:a="http://schemas.openxmlformats.org/drawingml/2006/main" xmlns:r="http://schemas.openxmlformats.org/officeDocument/2006/relationships" xmlns:p="http://schemas.openxmlformats.org/presentationml/2006/main">
   <p:cSld name="Slide 5">
+    <p:spTree>
+      <p:nvGrpSpPr>
+        <p:cNvPr id="1" name=""/>
+        <p:cNvGrpSpPr/>
+        <p:nvPr/>
+      </p:nvGrpSpPr>
+      <p:grpSpPr>
+        <a:xfrm>
+          <a:off x="0" y="0"/>
+          <a:ext cx="0" cy="0"/>
+          <a:chOff x="0" y="0"/>
+          <a:chExt cx="0" cy="0"/>
+        </a:xfrm>
+      </p:grpSpPr>
+      <p:sp>
+        <p:nvSpPr>
+          <p:cNvPr id="2" name="Shape 0"/>
+          <p:cNvSpPr/>
+          <p:nvPr/>
+        </p:nvSpPr>
+        <p:spPr>
+          <a:xfrm>
+            <a:off x="0" y="0"/>
+            <a:ext cx="128016" cy="1645920"/>
+          </a:xfrm>
+          <a:prstGeom prst="rect">
+            <a:avLst/>
+          </a:prstGeom>
+          <a:solidFill>
+            <a:srgbClr val="0F766E"/>
+          </a:solidFill>
+          <a:ln/>
+        </p:spPr>
+      </p:sp>
+      <p:sp>
+        <p:nvSpPr>
+          <p:cNvPr id="3" name="Text 1"/>
+          <p:cNvSpPr/>
+          <p:nvPr/>
+        </p:nvSpPr>
+        <p:spPr>
+          <a:xfrm>
+            <a:off x="502920" y="256032"/>
+            <a:ext cx="10972800" cy="274320"/>
+          </a:xfrm>
+          <a:prstGeom prst="rect">
+            <a:avLst/>
+          </a:prstGeom>
+          <a:noFill/>
+          <a:ln/>
+        </p:spPr>
+        <p:txBody>
+          <a:bodyPr wrap="square" rtlCol="0" anchor="ctr"/>
+          <a:lstStyle/>
+          <a:p>
+            <a:pPr indent="0" marL="0">
+              <a:buNone/>
+            </a:pPr>
+            <a:r>
+              <a:rPr lang="en-US" sz="1100" b="1" dirty="0">
+                <a:solidFill>
+                  <a:srgbClr val="0F766E"/>
+                </a:solidFill>
+                <a:latin typeface="Segoe UI" pitchFamily="34" charset="0"/>
+                <a:ea typeface="Segoe UI" pitchFamily="34" charset="-122"/>
+                <a:cs typeface="Segoe UI" pitchFamily="34" charset="-120"/>
+              </a:rPr>
+              <a:t>BẢO MẬT</a:t>
+            </a:r>
+            <a:endParaRPr lang="en-US" sz="1100" dirty="0"/>
+          </a:p>
+        </p:txBody>
+      </p:sp>
+      <p:sp>
+        <p:nvSpPr>
+          <p:cNvPr id="4" name="Text 2"/>
+          <p:cNvSpPr/>
+          <p:nvPr/>
+        </p:nvSpPr>
+        <p:spPr>
+          <a:xfrm>
+            <a:off x="502920" y="502920"/>
+            <a:ext cx="11155680" cy="640080"/>
+          </a:xfrm>
+          <a:prstGeom prst="rect">
+            <a:avLst/>
+          </a:prstGeom>
+          <a:noFill/>
+          <a:ln/>
+        </p:spPr>
+        <p:txBody>
+          <a:bodyPr wrap="square" rtlCol="0" anchor="ctr"/>
+          <a:lstStyle/>
+          <a:p>
+            <a:pPr indent="0" marL="0">
+              <a:buNone/>
+            </a:pPr>
+            <a:r>
+              <a:rPr lang="en-US" sz="2600" b="1" dirty="0">
+                <a:solidFill>
+                  <a:srgbClr val="0F172A"/>
+                </a:solidFill>
+                <a:latin typeface="Segoe UI" pitchFamily="34" charset="0"/>
+                <a:ea typeface="Segoe UI" pitchFamily="34" charset="-122"/>
+                <a:cs typeface="Segoe UI" pitchFamily="34" charset="-120"/>
+              </a:rPr>
+              <a:t>Phân quyền 3 lớp - default-deny</a:t>
+            </a:r>
+            <a:endParaRPr lang="en-US" sz="2600" dirty="0"/>
+          </a:p>
+        </p:txBody>
+      </p:sp>
+      <p:sp>
+        <p:nvSpPr>
+          <p:cNvPr id="5" name="Shape 3"/>
+          <p:cNvSpPr/>
+          <p:nvPr/>
+        </p:nvSpPr>
+        <p:spPr>
+          <a:xfrm>
+            <a:off x="502920" y="1572768"/>
+            <a:ext cx="11155680" cy="0"/>
+          </a:xfrm>
+          <a:prstGeom prst="line">
+            <a:avLst/>
+          </a:prstGeom>
+          <a:noFill/>
+          <a:ln w="12700">
+            <a:solidFill>
+              <a:srgbClr val="E2E8F0"/>
+            </a:solidFill>
+            <a:prstDash val="solid"/>
+          </a:ln>
+        </p:spPr>
+      </p:sp>
+      <p:sp>
+        <p:nvSpPr>
+          <p:cNvPr id="6" name="Text 4"/>
+          <p:cNvSpPr/>
+          <p:nvPr/>
+        </p:nvSpPr>
+        <p:spPr>
+          <a:xfrm>
+            <a:off x="502920" y="6528816"/>
+            <a:ext cx="4572000" cy="274320"/>
+          </a:xfrm>
+          <a:prstGeom prst="rect">
+            <a:avLst/>
+          </a:prstGeom>
+          <a:noFill/>
+          <a:ln/>
+        </p:spPr>
+        <p:txBody>
+          <a:bodyPr wrap="square" rtlCol="0" anchor="ctr"/>
+          <a:lstStyle/>
+          <a:p>
+            <a:pPr indent="0" marL="0">
+              <a:buNone/>
+            </a:pPr>
+            <a:r>
+              <a:rPr lang="en-US" sz="900" dirty="0">
+                <a:solidFill>
+                  <a:srgbClr val="94A3B8"/>
+                </a:solidFill>
+                <a:latin typeface="Segoe UI" pitchFamily="34" charset="0"/>
+                <a:ea typeface="Segoe UI" pitchFamily="34" charset="-122"/>
+                <a:cs typeface="Segoe UI" pitchFamily="34" charset="-120"/>
+              </a:rPr>
+              <a:t>VieSchool - Sổ Chủ Nhiệm Số</a:t>
+            </a:r>
+            <a:endParaRPr lang="en-US" sz="900" dirty="0"/>
+          </a:p>
+        </p:txBody>
+      </p:sp>
+      <p:sp>
+        <p:nvSpPr>
+          <p:cNvPr id="7" name="Text 5"/>
+          <p:cNvSpPr/>
+          <p:nvPr/>
+        </p:nvSpPr>
+        <p:spPr>
+          <a:xfrm>
+            <a:off x="11338560" y="6528816"/>
+            <a:ext cx="457200" cy="274320"/>
+          </a:xfrm>
+          <a:prstGeom prst="rect">
+            <a:avLst/>
+          </a:prstGeom>
+          <a:noFill/>
+          <a:ln/>
+        </p:spPr>
+        <p:txBody>
+          <a:bodyPr wrap="square" rtlCol="0" anchor="ctr"/>
+          <a:lstStyle/>
+          <a:p>
+            <a:pPr algn="r" indent="0" marL="0">
+              <a:buNone/>
+            </a:pPr>
+            <a:r>
+              <a:rPr lang="en-US" sz="900" dirty="0">
+                <a:solidFill>
+                  <a:srgbClr val="94A3B8"/>
+                </a:solidFill>
+                <a:latin typeface="Segoe UI" pitchFamily="34" charset="0"/>
+                <a:ea typeface="Segoe UI" pitchFamily="34" charset="-122"/>
+                <a:cs typeface="Segoe UI" pitchFamily="34" charset="-120"/>
+              </a:rPr>
+              <a:t>4</a:t>
+            </a:r>
+            <a:endParaRPr lang="en-US" sz="900" dirty="0"/>
+          </a:p>
+        </p:txBody>
+      </p:sp>
+      <p:sp>
+        <p:nvSpPr>
+          <p:cNvPr id="8" name="Shape 6"/>
+          <p:cNvSpPr/>
+          <p:nvPr/>
+        </p:nvSpPr>
+        <p:spPr>
+          <a:xfrm>
+            <a:off x="640080" y="1783080"/>
+            <a:ext cx="3383280" cy="1737360"/>
+          </a:xfrm>
+          <a:prstGeom prst="roundRect">
+            <a:avLst>
+              <a:gd name="adj" fmla="val 4211"/>
+            </a:avLst>
+          </a:prstGeom>
+          <a:solidFill>
+            <a:srgbClr val="DBEAFE"/>
+          </a:solidFill>
+          <a:ln w="12700">
+            <a:solidFill>
+              <a:srgbClr val="2563EB"/>
+            </a:solidFill>
+            <a:prstDash val="solid"/>
+          </a:ln>
+        </p:spPr>
+      </p:sp>
+      <p:sp>
+        <p:nvSpPr>
+          <p:cNvPr id="9" name="Text 7"/>
+          <p:cNvSpPr/>
+          <p:nvPr/>
+        </p:nvSpPr>
+        <p:spPr>
+          <a:xfrm>
+            <a:off x="640080" y="1892808"/>
+            <a:ext cx="3383280" cy="365760"/>
+          </a:xfrm>
+          <a:prstGeom prst="rect">
+            <a:avLst/>
+          </a:prstGeom>
+          <a:noFill/>
+          <a:ln/>
+        </p:spPr>
+        <p:txBody>
+          <a:bodyPr wrap="square" rtlCol="0" anchor="ctr"/>
+          <a:lstStyle/>
+          <a:p>
+            <a:pPr algn="ctr" indent="0" marL="0">
+              <a:buNone/>
+            </a:pPr>
+            <a:r>
+              <a:rPr lang="en-US" sz="1300" b="1" dirty="0">
+                <a:solidFill>
+                  <a:srgbClr val="0F172A"/>
+                </a:solidFill>
+                <a:latin typeface="Segoe UI" pitchFamily="34" charset="0"/>
+                <a:ea typeface="Segoe UI" pitchFamily="34" charset="-122"/>
+                <a:cs typeface="Segoe UI" pitchFamily="34" charset="-120"/>
+              </a:rPr>
+              <a:t>Lớp 1 - proxy.ts</a:t>
+            </a:r>
+            <a:endParaRPr lang="en-US" sz="1300" dirty="0"/>
+          </a:p>
+        </p:txBody>
+      </p:sp>
+      <p:sp>
+        <p:nvSpPr>
+          <p:cNvPr id="10" name="Text 8"/>
+          <p:cNvSpPr/>
+          <p:nvPr/>
+        </p:nvSpPr>
+        <p:spPr>
+          <a:xfrm>
+            <a:off x="640080" y="2240280"/>
+            <a:ext cx="3383280" cy="1234440"/>
+          </a:xfrm>
+          <a:prstGeom prst="rect">
+            <a:avLst/>
+          </a:prstGeom>
+          <a:noFill/>
+          <a:ln/>
+        </p:spPr>
+        <p:txBody>
+          <a:bodyPr wrap="square" rtlCol="0" anchor="t"/>
+          <a:lstStyle/>
+          <a:p>
+            <a:pPr algn="ctr" indent="0" marL="0">
+              <a:buNone/>
+            </a:pPr>
+            <a:r>
+              <a:rPr lang="en-US" sz="1000" dirty="0">
+                <a:solidFill>
+                  <a:srgbClr val="475569"/>
+                </a:solidFill>
+                <a:latin typeface="Segoe UI" pitchFamily="34" charset="0"/>
+                <a:ea typeface="Segoe UI" pitchFamily="34" charset="-122"/>
+                <a:cs typeface="Segoe UI" pitchFamily="34" charset="-120"/>
+              </a:rPr>
+              <a:t>Redirect lạc quan:</a:t>
+            </a:r>
+            <a:endParaRPr lang="en-US" sz="1000" dirty="0"/>
+          </a:p>
+          <a:p>
+            <a:pPr algn="ctr" indent="0" marL="0">
+              <a:buNone/>
+            </a:pPr>
+            <a:r>
+              <a:rPr lang="en-US" sz="1000" dirty="0">
+                <a:solidFill>
+                  <a:srgbClr val="475569"/>
+                </a:solidFill>
+                <a:latin typeface="Segoe UI" pitchFamily="34" charset="0"/>
+                <a:ea typeface="Segoe UI" pitchFamily="34" charset="-122"/>
+                <a:cs typeface="Segoe UI" pitchFamily="34" charset="-120"/>
+              </a:rPr>
+              <a:t>chưa login - /login</a:t>
+            </a:r>
+            <a:endParaRPr lang="en-US" sz="1000" dirty="0"/>
+          </a:p>
+          <a:p>
+            <a:pPr algn="ctr" indent="0" marL="0">
+              <a:buNone/>
+            </a:pPr>
+            <a:r>
+              <a:rPr lang="en-US" sz="1000" dirty="0">
+                <a:solidFill>
+                  <a:srgbClr val="475569"/>
+                </a:solidFill>
+                <a:latin typeface="Segoe UI" pitchFamily="34" charset="0"/>
+                <a:ea typeface="Segoe UI" pitchFamily="34" charset="-122"/>
+                <a:cs typeface="Segoe UI" pitchFamily="34" charset="-120"/>
+              </a:rPr>
+              <a:t>đã login - role home</a:t>
+            </a:r>
+            <a:endParaRPr lang="en-US" sz="1000" dirty="0"/>
+          </a:p>
+          <a:p>
+            <a:pPr algn="ctr" indent="0" marL="0">
+              <a:buNone/>
+            </a:pPr>
+            <a:r>
+              <a:rPr lang="en-US" sz="1000" dirty="0">
+                <a:solidFill>
+                  <a:srgbClr val="475569"/>
+                </a:solidFill>
+                <a:latin typeface="Segoe UI" pitchFamily="34" charset="0"/>
+                <a:ea typeface="Segoe UI" pitchFamily="34" charset="-122"/>
+                <a:cs typeface="Segoe UI" pitchFamily="34" charset="-120"/>
+              </a:rPr>
+              <a:t>CHỈ là UX, không phải authz</a:t>
+            </a:r>
+            <a:endParaRPr lang="en-US" sz="1000" dirty="0"/>
+          </a:p>
+        </p:txBody>
+      </p:sp>
+      <p:sp>
+        <p:nvSpPr>
+          <p:cNvPr id="11" name="Shape 9"/>
+          <p:cNvSpPr/>
+          <p:nvPr/>
+        </p:nvSpPr>
+        <p:spPr>
+          <a:xfrm>
+            <a:off x="4389120" y="1783080"/>
+            <a:ext cx="3383280" cy="1737360"/>
+          </a:xfrm>
+          <a:prstGeom prst="roundRect">
+            <a:avLst>
+              <a:gd name="adj" fmla="val 4211"/>
+            </a:avLst>
+          </a:prstGeom>
+          <a:solidFill>
+            <a:srgbClr val="D1FAE5"/>
+          </a:solidFill>
+          <a:ln w="12700">
+            <a:solidFill>
+              <a:srgbClr val="059669"/>
+            </a:solidFill>
+            <a:prstDash val="solid"/>
+          </a:ln>
+        </p:spPr>
+      </p:sp>
+      <p:sp>
+        <p:nvSpPr>
+          <p:cNvPr id="12" name="Text 10"/>
+          <p:cNvSpPr/>
+          <p:nvPr/>
+        </p:nvSpPr>
+        <p:spPr>
+          <a:xfrm>
+            <a:off x="4389120" y="1892808"/>
+            <a:ext cx="3383280" cy="365760"/>
+          </a:xfrm>
+          <a:prstGeom prst="rect">
+            <a:avLst/>
+          </a:prstGeom>
+          <a:noFill/>
+          <a:ln/>
+        </p:spPr>
+        <p:txBody>
+          <a:bodyPr wrap="square" rtlCol="0" anchor="ctr"/>
+          <a:lstStyle/>
+          <a:p>
+            <a:pPr algn="ctr" indent="0" marL="0">
+              <a:buNone/>
+            </a:pPr>
+            <a:r>
+              <a:rPr lang="en-US" sz="1300" b="1" dirty="0">
+                <a:solidFill>
+                  <a:srgbClr val="0F172A"/>
+                </a:solidFill>
+                <a:latin typeface="Segoe UI" pitchFamily="34" charset="0"/>
+                <a:ea typeface="Segoe UI" pitchFamily="34" charset="-122"/>
+                <a:cs typeface="Segoe UI" pitchFamily="34" charset="-120"/>
+              </a:rPr>
+              <a:t>Lớp 2 - Server checks</a:t>
+            </a:r>
+            <a:endParaRPr lang="en-US" sz="1300" dirty="0"/>
+          </a:p>
+        </p:txBody>
+      </p:sp>
+      <p:sp>
+        <p:nvSpPr>
+          <p:cNvPr id="13" name="Text 11"/>
+          <p:cNvSpPr/>
+          <p:nvPr/>
+        </p:nvSpPr>
+        <p:spPr>
+          <a:xfrm>
+            <a:off x="4389120" y="2240280"/>
+            <a:ext cx="3383280" cy="1234440"/>
+          </a:xfrm>
+          <a:prstGeom prst="rect">
+            <a:avLst/>
+          </a:prstGeom>
+          <a:noFill/>
+          <a:ln/>
+        </p:spPr>
+        <p:txBody>
+          <a:bodyPr wrap="square" rtlCol="0" anchor="t"/>
+          <a:lstStyle/>
+          <a:p>
+            <a:pPr algn="ctr" indent="0" marL="0">
+              <a:buNone/>
+            </a:pPr>
+            <a:r>
+              <a:rPr lang="en-US" sz="1000" dirty="0">
+                <a:solidFill>
+                  <a:srgbClr val="475569"/>
+                </a:solidFill>
+                <a:latin typeface="Segoe UI" pitchFamily="34" charset="0"/>
+                <a:ea typeface="Segoe UI" pitchFamily="34" charset="-122"/>
+                <a:cs typeface="Segoe UI" pitchFamily="34" charset="-120"/>
+              </a:rPr>
+              <a:t>requireRole([...]) đầu page</a:t>
+            </a:r>
+            <a:endParaRPr lang="en-US" sz="1000" dirty="0"/>
+          </a:p>
+          <a:p>
+            <a:pPr algn="ctr" indent="0" marL="0">
+              <a:buNone/>
+            </a:pPr>
+            <a:r>
+              <a:rPr lang="en-US" sz="1000" dirty="0">
+                <a:solidFill>
+                  <a:srgbClr val="475569"/>
+                </a:solidFill>
+                <a:latin typeface="Segoe UI" pitchFamily="34" charset="0"/>
+                <a:ea typeface="Segoe UI" pitchFamily="34" charset="-122"/>
+                <a:cs typeface="Segoe UI" pitchFamily="34" charset="-120"/>
+              </a:rPr>
+              <a:t>checkActionRole trong actions</a:t>
+            </a:r>
+            <a:endParaRPr lang="en-US" sz="1000" dirty="0"/>
+          </a:p>
+          <a:p>
+            <a:pPr algn="ctr" indent="0" marL="0">
+              <a:buNone/>
+            </a:pPr>
+            <a:r>
+              <a:rPr lang="en-US" sz="1000" dirty="0">
+                <a:solidFill>
+                  <a:srgbClr val="475569"/>
+                </a:solidFill>
+                <a:latin typeface="Segoe UI" pitchFamily="34" charset="0"/>
+                <a:ea typeface="Segoe UI" pitchFamily="34" charset="-122"/>
+                <a:cs typeface="Segoe UI" pitchFamily="34" charset="-120"/>
+              </a:rPr>
+              <a:t>getProfile() React cache()</a:t>
+            </a:r>
+            <a:endParaRPr lang="en-US" sz="1000" dirty="0"/>
+          </a:p>
+          <a:p>
+            <a:pPr algn="ctr" indent="0" marL="0">
+              <a:buNone/>
+            </a:pPr>
+            <a:r>
+              <a:rPr lang="en-US" sz="1000" dirty="0">
+                <a:solidFill>
+                  <a:srgbClr val="475569"/>
+                </a:solidFill>
+                <a:latin typeface="Segoe UI" pitchFamily="34" charset="0"/>
+                <a:ea typeface="Segoe UI" pitchFamily="34" charset="-122"/>
+                <a:cs typeface="Segoe UI" pitchFamily="34" charset="-120"/>
+              </a:rPr>
+              <a:t>default-deny nếu role lạ</a:t>
+            </a:r>
+            <a:endParaRPr lang="en-US" sz="1000" dirty="0"/>
+          </a:p>
+        </p:txBody>
+      </p:sp>
+      <p:sp>
+        <p:nvSpPr>
+          <p:cNvPr id="14" name="Shape 12"/>
+          <p:cNvSpPr/>
+          <p:nvPr/>
+        </p:nvSpPr>
+        <p:spPr>
+          <a:xfrm>
+            <a:off x="8138160" y="1783080"/>
+            <a:ext cx="3383280" cy="1737360"/>
+          </a:xfrm>
+          <a:prstGeom prst="roundRect">
+            <a:avLst>
+              <a:gd name="adj" fmla="val 4211"/>
+            </a:avLst>
+          </a:prstGeom>
+          <a:solidFill>
+            <a:srgbClr val="FEF3C7"/>
+          </a:solidFill>
+          <a:ln w="12700">
+            <a:solidFill>
+              <a:srgbClr val="B45309"/>
+            </a:solidFill>
+            <a:prstDash val="solid"/>
+          </a:ln>
+        </p:spPr>
+      </p:sp>
+      <p:sp>
+        <p:nvSpPr>
+          <p:cNvPr id="15" name="Text 13"/>
+          <p:cNvSpPr/>
+          <p:nvPr/>
+        </p:nvSpPr>
+        <p:spPr>
+          <a:xfrm>
+            <a:off x="8138160" y="1892808"/>
+            <a:ext cx="3383280" cy="365760"/>
+          </a:xfrm>
+          <a:prstGeom prst="rect">
+            <a:avLst/>
+          </a:prstGeom>
+          <a:noFill/>
+          <a:ln/>
+        </p:spPr>
+        <p:txBody>
+          <a:bodyPr wrap="square" rtlCol="0" anchor="ctr"/>
+          <a:lstStyle/>
+          <a:p>
+            <a:pPr algn="ctr" indent="0" marL="0">
+              <a:buNone/>
+            </a:pPr>
+            <a:r>
+              <a:rPr lang="en-US" sz="1300" b="1" dirty="0">
+                <a:solidFill>
+                  <a:srgbClr val="0F172A"/>
+                </a:solidFill>
+                <a:latin typeface="Segoe UI" pitchFamily="34" charset="0"/>
+                <a:ea typeface="Segoe UI" pitchFamily="34" charset="-122"/>
+                <a:cs typeface="Segoe UI" pitchFamily="34" charset="-120"/>
+              </a:rPr>
+              <a:t>Lớp 3 - Postgres RLS</a:t>
+            </a:r>
+            <a:endParaRPr lang="en-US" sz="1300" dirty="0"/>
+          </a:p>
+        </p:txBody>
+      </p:sp>
+      <p:sp>
+        <p:nvSpPr>
+          <p:cNvPr id="16" name="Text 14"/>
+          <p:cNvSpPr/>
+          <p:nvPr/>
+        </p:nvSpPr>
+        <p:spPr>
+          <a:xfrm>
+            <a:off x="8138160" y="2240280"/>
+            <a:ext cx="3383280" cy="1234440"/>
+          </a:xfrm>
+          <a:prstGeom prst="rect">
+            <a:avLst/>
+          </a:prstGeom>
+          <a:noFill/>
+          <a:ln/>
+        </p:spPr>
+        <p:txBody>
+          <a:bodyPr wrap="square" rtlCol="0" anchor="t"/>
+          <a:lstStyle/>
+          <a:p>
+            <a:pPr algn="ctr" indent="0" marL="0">
+              <a:buNone/>
+            </a:pPr>
+            <a:r>
+              <a:rPr lang="en-US" sz="1000" dirty="0">
+                <a:solidFill>
+                  <a:srgbClr val="475569"/>
+                </a:solidFill>
+                <a:latin typeface="Segoe UI" pitchFamily="34" charset="0"/>
+                <a:ea typeface="Segoe UI" pitchFamily="34" charset="-122"/>
+                <a:cs typeface="Segoe UI" pitchFamily="34" charset="-120"/>
+              </a:rPr>
+              <a:t>Policy theo vai trò mọi bảng</a:t>
+            </a:r>
+            <a:endParaRPr lang="en-US" sz="1000" dirty="0"/>
+          </a:p>
+          <a:p>
+            <a:pPr algn="ctr" indent="0" marL="0">
+              <a:buNone/>
+            </a:pPr>
+            <a:r>
+              <a:rPr lang="en-US" sz="1000" dirty="0">
+                <a:solidFill>
+                  <a:srgbClr val="475569"/>
+                </a:solidFill>
+                <a:latin typeface="Segoe UI" pitchFamily="34" charset="0"/>
+                <a:ea typeface="Segoe UI" pitchFamily="34" charset="-122"/>
+                <a:cs typeface="Segoe UI" pitchFamily="34" charset="-120"/>
+              </a:rPr>
+              <a:t>my_role(), my_school_id(),</a:t>
+            </a:r>
+            <a:endParaRPr lang="en-US" sz="1000" dirty="0"/>
+          </a:p>
+          <a:p>
+            <a:pPr algn="ctr" indent="0" marL="0">
+              <a:buNone/>
+            </a:pPr>
+            <a:r>
+              <a:rPr lang="en-US" sz="1000" dirty="0">
+                <a:solidFill>
+                  <a:srgbClr val="475569"/>
+                </a:solidFill>
+                <a:latin typeface="Segoe UI" pitchFamily="34" charset="0"/>
+                <a:ea typeface="Segoe UI" pitchFamily="34" charset="-122"/>
+                <a:cs typeface="Segoe UI" pitchFamily="34" charset="-120"/>
+              </a:rPr>
+              <a:t>my_class_ids()...</a:t>
+            </a:r>
+            <a:endParaRPr lang="en-US" sz="1000" dirty="0"/>
+          </a:p>
+          <a:p>
+            <a:pPr algn="ctr" indent="0" marL="0">
+              <a:buNone/>
+            </a:pPr>
+            <a:r>
+              <a:rPr lang="en-US" sz="1000" dirty="0">
+                <a:solidFill>
+                  <a:srgbClr val="475569"/>
+                </a:solidFill>
+                <a:latin typeface="Segoe UI" pitchFamily="34" charset="0"/>
+                <a:ea typeface="Segoe UI" pitchFamily="34" charset="-122"/>
+                <a:cs typeface="Segoe UI" pitchFamily="34" charset="-120"/>
+              </a:rPr>
+              <a:t>seed mới dùng service_role</a:t>
+            </a:r>
+            <a:endParaRPr lang="en-US" sz="1000" dirty="0"/>
+          </a:p>
+        </p:txBody>
+      </p:sp>
+      <p:sp>
+        <p:nvSpPr>
+          <p:cNvPr id="17" name="Text 15"/>
+          <p:cNvSpPr/>
+          <p:nvPr/>
+        </p:nvSpPr>
+        <p:spPr>
+          <a:xfrm>
+            <a:off x="640080" y="3749040"/>
+            <a:ext cx="10972800" cy="4572000"/>
+          </a:xfrm>
+          <a:prstGeom prst="rect">
+            <a:avLst/>
+          </a:prstGeom>
+          <a:noFill/>
+          <a:ln/>
+        </p:spPr>
+        <p:txBody>
+          <a:bodyPr wrap="square" rtlCol="0" anchor="t"/>
+          <a:lstStyle/>
+          <a:p>
+            <a:pPr marL="177800" indent="-177800">
+              <a:spcAft>
+                <a:spcPts val="800"/>
+              </a:spcAft>
+              <a:buSzPct val="100000"/>
+              <a:buChar char="•"/>
+            </a:pPr>
+            <a:r>
+              <a:rPr lang="en-US" sz="1150" dirty="0">
+                <a:solidFill>
+                  <a:srgbClr val="0F172A"/>
+                </a:solidFill>
+                <a:latin typeface="Segoe UI" pitchFamily="34" charset="0"/>
+                <a:ea typeface="Segoe UI" pitchFamily="34" charset="-122"/>
+                <a:cs typeface="Segoe UI" pitchFamily="34" charset="-120"/>
+              </a:rPr>
+              <a:t>Vai trò vào route của người khác - redirect về home của chính họ, không bao giờ leak data</a:t>
+            </a:r>
+            <a:endParaRPr lang="en-US" sz="1150" dirty="0"/>
+          </a:p>
+          <a:p>
+            <a:pPr marL="177800" indent="-177800">
+              <a:spcAft>
+                <a:spcPts val="800"/>
+              </a:spcAft>
+              <a:buSzPct val="100000"/>
+              <a:buChar char="•"/>
+            </a:pPr>
+            <a:r>
+              <a:rPr lang="en-US" sz="1150" dirty="0">
+                <a:solidFill>
+                  <a:srgbClr val="0F172A"/>
+                </a:solidFill>
+                <a:latin typeface="Segoe UI" pitchFamily="34" charset="0"/>
+                <a:ea typeface="Segoe UI" pitchFamily="34" charset="-122"/>
+                <a:cs typeface="Segoe UI" pitchFamily="34" charset="-120"/>
+              </a:rPr>
+              <a:t>WAF Vercel: rate limit /api + /login, bypass-health cho uptime monitor; headers CSP/HSTS/nosniff/X-Frame đầy đủ</a:t>
+            </a:r>
+            <a:endParaRPr lang="en-US" sz="1150" dirty="0"/>
+          </a:p>
+          <a:p>
+            <a:pPr marL="177800" indent="-177800">
+              <a:spcAft>
+                <a:spcPts val="800"/>
+              </a:spcAft>
+              <a:buSzPct val="100000"/>
+              <a:buChar char="•"/>
+            </a:pPr>
+            <a:r>
+              <a:rPr lang="en-US" sz="1150" dirty="0">
+                <a:solidFill>
+                  <a:srgbClr val="0F172A"/>
+                </a:solidFill>
+                <a:latin typeface="Segoe UI" pitchFamily="34" charset="0"/>
+                <a:ea typeface="Segoe UI" pitchFamily="34" charset="-122"/>
+                <a:cs typeface="Segoe UI" pitchFamily="34" charset="-120"/>
+              </a:rPr>
+              <a:t>Anti-scraping lớp 1 (CR-054, đã deploy): robots.txt chặn AI crawler, noindex route authed, export cap 20/h/uid, Turnstile login</a:t>
+            </a:r>
+            <a:endParaRPr lang="en-US" sz="1150" dirty="0"/>
+          </a:p>
+          <a:p>
+            <a:pPr marL="177800" indent="-177800">
+              <a:spcAft>
+                <a:spcPts val="800"/>
+              </a:spcAft>
+              <a:buSzPct val="100000"/>
+              <a:buChar char="•"/>
+            </a:pPr>
+            <a:r>
+              <a:rPr lang="en-US" sz="1150" dirty="0">
+                <a:solidFill>
+                  <a:srgbClr val="0F172A"/>
+                </a:solidFill>
+                <a:latin typeface="Segoe UI" pitchFamily="34" charset="0"/>
+                <a:ea typeface="Segoe UI" pitchFamily="34" charset="-122"/>
+                <a:cs typeface="Segoe UI" pitchFamily="34" charset="-120"/>
+              </a:rPr>
+              <a:t>252 RLS policies đã wrap (select auth.uid()) - evaluate 1 lần/statement thay vì per-row (CR-057)</a:t>
+            </a:r>
+            <a:endParaRPr lang="en-US" sz="1150" dirty="0"/>
+          </a:p>
+          <a:p>
+            <a:pPr marL="177800" indent="-177800">
+              <a:spcAft>
+                <a:spcPts val="800"/>
+              </a:spcAft>
+              <a:buSzPct val="100000"/>
+              <a:buChar char="•"/>
+            </a:pPr>
+            <a:r>
+              <a:rPr lang="en-US" sz="1150" dirty="0">
+                <a:solidFill>
+                  <a:srgbClr val="0F172A"/>
+                </a:solidFill>
+                <a:latin typeface="Segoe UI" pitchFamily="34" charset="0"/>
+                <a:ea typeface="Segoe UI" pitchFamily="34" charset="-122"/>
+                <a:cs typeface="Segoe UI" pitchFamily="34" charset="-120"/>
+              </a:rPr>
+              <a:t>Secrets chỉ ở env/dashboard - không commit; audit_logs ghi mọi thao tác nhạy cảm</a:t>
+            </a:r>
+            <a:endParaRPr lang="en-US" sz="1150" dirty="0"/>
+          </a:p>
+        </p:txBody>
+      </p:sp>
+    </p:spTree>
+  </p:cSld>
+  <p:clrMapOvr>
+    <a:masterClrMapping/>
+  </p:clrMapOvr>
+  <p:transition xmlns:p="http://schemas.openxmlformats.org/presentationml/2006/main" spd="fast" advClick="1">
+    <p:fade/>
+  </p:transition>
+</p:sld>
+</file>
+
+<file path=ppt/slides/slide6.xml><?xml version="1.0" encoding="utf-8"?>
+<p:sld xmlns:a="http://schemas.openxmlformats.org/drawingml/2006/main" xmlns:r="http://schemas.openxmlformats.org/officeDocument/2006/relationships" xmlns:p="http://schemas.openxmlformats.org/presentationml/2006/main">
+  <p:cSld name="Slide 6">
     <p:bg>
       <p:bgPr>
         <a:solidFill>
@@ -18488,9 +22927,9 @@
 </p:sld>
 </file>
 
-<file path=ppt/slides/slide6.xml><?xml version="1.0" encoding="utf-8"?>
+<file path=ppt/slides/slide7.xml><?xml version="1.0" encoding="utf-8"?>
 <p:sld xmlns:a="http://schemas.openxmlformats.org/drawingml/2006/main" xmlns:r="http://schemas.openxmlformats.org/officeDocument/2006/relationships" xmlns:p="http://schemas.openxmlformats.org/presentationml/2006/main">
-  <p:cSld name="Slide 6">
+  <p:cSld name="Slide 7">
     <p:spTree>
       <p:nvGrpSpPr>
         <p:cNvPr id="1" name=""/>
@@ -18698,7 +23137,7 @@
                 <a:ea typeface="Segoe UI" pitchFamily="34" charset="-122"/>
                 <a:cs typeface="Segoe UI" pitchFamily="34" charset="-120"/>
               </a:rPr>
-              <a:t>4</a:t>
+              <a:t>5</a:t>
             </a:r>
             <a:endParaRPr lang="en-US" sz="900" dirty="0"/>
           </a:p>
@@ -18706,7 +23145,7 @@
       </p:sp>
       <p:graphicFrame>
         <p:nvGraphicFramePr>
-          <p:cNvPr id="7" name="Table 0"/>
+          <p:cNvPr id="8" name="Table 0"/>
           <p:cNvGraphicFramePr>
             <a:graphicFrameLocks noGrp="1"/>
           </p:cNvGraphicFramePr>
@@ -20639,9 +25078,9 @@
 </p:sld>
 </file>
 
-<file path=ppt/slides/slide7.xml><?xml version="1.0" encoding="utf-8"?>
+<file path=ppt/slides/slide8.xml><?xml version="1.0" encoding="utf-8"?>
 <p:sld xmlns:a="http://schemas.openxmlformats.org/drawingml/2006/main" xmlns:r="http://schemas.openxmlformats.org/officeDocument/2006/relationships" xmlns:p="http://schemas.openxmlformats.org/presentationml/2006/main">
-  <p:cSld name="Slide 7">
+  <p:cSld name="Slide 8">
     <p:spTree>
       <p:nvGrpSpPr>
         <p:cNvPr id="1" name=""/>
@@ -20849,7 +25288,7 @@
                 <a:ea typeface="Segoe UI" pitchFamily="34" charset="-122"/>
                 <a:cs typeface="Segoe UI" pitchFamily="34" charset="-120"/>
               </a:rPr>
-              <a:t>5</a:t>
+              <a:t>6</a:t>
             </a:r>
             <a:endParaRPr lang="en-US" sz="900" dirty="0"/>
           </a:p>
@@ -20857,7 +25296,7 @@
       </p:sp>
       <p:graphicFrame>
         <p:nvGraphicFramePr>
-          <p:cNvPr id="8" name="Table 0"/>
+          <p:cNvPr id="9" name="Table 0"/>
           <p:cNvGraphicFramePr>
             <a:graphicFrameLocks noGrp="1"/>
           </p:cNvGraphicFramePr>
@@ -22339,9 +26778,9 @@
 </p:sld>
 </file>
 
-<file path=ppt/slides/slide8.xml><?xml version="1.0" encoding="utf-8"?>
+<file path=ppt/slides/slide9.xml><?xml version="1.0" encoding="utf-8"?>
 <p:sld xmlns:a="http://schemas.openxmlformats.org/drawingml/2006/main" xmlns:r="http://schemas.openxmlformats.org/officeDocument/2006/relationships" xmlns:p="http://schemas.openxmlformats.org/presentationml/2006/main">
-  <p:cSld name="Slide 8">
+  <p:cSld name="Slide 9">
     <p:spTree>
       <p:nvGrpSpPr>
         <p:cNvPr id="1" name=""/>
@@ -22549,7 +26988,7 @@
                 <a:ea typeface="Segoe UI" pitchFamily="34" charset="-122"/>
                 <a:cs typeface="Segoe UI" pitchFamily="34" charset="-120"/>
               </a:rPr>
-              <a:t>6</a:t>
+              <a:t>7</a:t>
             </a:r>
             <a:endParaRPr lang="en-US" sz="900" dirty="0"/>
           </a:p>
@@ -22805,1745 +27244,6 @@
               <a:t>Microservices ở quy mô này = distributed monolith tệ hơn monolith tốt. Điểm tách hợp lý duy nhất hiện có: AI jobs - đã tách thành async pattern (bảng ai_jobs + callback) mà không cần service riêng.</a:t>
             </a:r>
             <a:endParaRPr lang="en-US" sz="1300" dirty="0"/>
-          </a:p>
-        </p:txBody>
-      </p:sp>
-    </p:spTree>
-  </p:cSld>
-  <p:clrMapOvr>
-    <a:masterClrMapping/>
-  </p:clrMapOvr>
-  <p:transition xmlns:p="http://schemas.openxmlformats.org/presentationml/2006/main" spd="fast" advClick="1">
-    <p:fade/>
-  </p:transition>
-</p:sld>
-</file>
-
-<file path=ppt/slides/slide9.xml><?xml version="1.0" encoding="utf-8"?>
-<p:sld xmlns:a="http://schemas.openxmlformats.org/drawingml/2006/main" xmlns:r="http://schemas.openxmlformats.org/officeDocument/2006/relationships" xmlns:p="http://schemas.openxmlformats.org/presentationml/2006/main">
-  <p:cSld name="Slide 9">
-    <p:spTree>
-      <p:nvGrpSpPr>
-        <p:cNvPr id="1" name=""/>
-        <p:cNvGrpSpPr/>
-        <p:nvPr/>
-      </p:nvGrpSpPr>
-      <p:grpSpPr>
-        <a:xfrm>
-          <a:off x="0" y="0"/>
-          <a:ext cx="0" cy="0"/>
-          <a:chOff x="0" y="0"/>
-          <a:chExt cx="0" cy="0"/>
-        </a:xfrm>
-      </p:grpSpPr>
-      <p:sp>
-        <p:nvSpPr>
-          <p:cNvPr id="2" name="Shape 0"/>
-          <p:cNvSpPr/>
-          <p:nvPr/>
-        </p:nvSpPr>
-        <p:spPr>
-          <a:xfrm>
-            <a:off x="0" y="0"/>
-            <a:ext cx="128016" cy="1645920"/>
-          </a:xfrm>
-          <a:prstGeom prst="rect">
-            <a:avLst/>
-          </a:prstGeom>
-          <a:solidFill>
-            <a:srgbClr val="0F766E"/>
-          </a:solidFill>
-          <a:ln/>
-        </p:spPr>
-      </p:sp>
-      <p:sp>
-        <p:nvSpPr>
-          <p:cNvPr id="3" name="Text 1"/>
-          <p:cNvSpPr/>
-          <p:nvPr/>
-        </p:nvSpPr>
-        <p:spPr>
-          <a:xfrm>
-            <a:off x="502920" y="256032"/>
-            <a:ext cx="10972800" cy="274320"/>
-          </a:xfrm>
-          <a:prstGeom prst="rect">
-            <a:avLst/>
-          </a:prstGeom>
-          <a:noFill/>
-          <a:ln/>
-        </p:spPr>
-        <p:txBody>
-          <a:bodyPr wrap="square" rtlCol="0" anchor="ctr"/>
-          <a:lstStyle/>
-          <a:p>
-            <a:pPr indent="0" marL="0">
-              <a:buNone/>
-            </a:pPr>
-            <a:r>
-              <a:rPr lang="en-US" sz="1100" b="1" dirty="0">
-                <a:solidFill>
-                  <a:srgbClr val="0F766E"/>
-                </a:solidFill>
-                <a:latin typeface="Segoe UI" pitchFamily="34" charset="0"/>
-                <a:ea typeface="Segoe UI" pitchFamily="34" charset="-122"/>
-                <a:cs typeface="Segoe UI" pitchFamily="34" charset="-120"/>
-              </a:rPr>
-              <a:t>PHÂN TÍCH</a:t>
-            </a:r>
-            <a:endParaRPr lang="en-US" sz="1100" dirty="0"/>
-          </a:p>
-        </p:txBody>
-      </p:sp>
-      <p:sp>
-        <p:nvSpPr>
-          <p:cNvPr id="4" name="Text 2"/>
-          <p:cNvSpPr/>
-          <p:nvPr/>
-        </p:nvSpPr>
-        <p:spPr>
-          <a:xfrm>
-            <a:off x="502920" y="502920"/>
-            <a:ext cx="11155680" cy="640080"/>
-          </a:xfrm>
-          <a:prstGeom prst="rect">
-            <a:avLst/>
-          </a:prstGeom>
-          <a:noFill/>
-          <a:ln/>
-        </p:spPr>
-        <p:txBody>
-          <a:bodyPr wrap="square" rtlCol="0" anchor="ctr"/>
-          <a:lstStyle/>
-          <a:p>
-            <a:pPr indent="0" marL="0">
-              <a:buNone/>
-            </a:pPr>
-            <a:r>
-              <a:rPr lang="en-US" sz="2600" b="1" dirty="0">
-                <a:solidFill>
-                  <a:srgbClr val="0F172A"/>
-                </a:solidFill>
-                <a:latin typeface="Segoe UI" pitchFamily="34" charset="0"/>
-                <a:ea typeface="Segoe UI" pitchFamily="34" charset="-122"/>
-                <a:cs typeface="Segoe UI" pitchFamily="34" charset="-120"/>
-              </a:rPr>
-              <a:t>Repo topology: một repo một sản phẩm, không phải monorepo</a:t>
-            </a:r>
-            <a:endParaRPr lang="en-US" sz="2600" dirty="0"/>
-          </a:p>
-        </p:txBody>
-      </p:sp>
-      <p:sp>
-        <p:nvSpPr>
-          <p:cNvPr id="5" name="Shape 3"/>
-          <p:cNvSpPr/>
-          <p:nvPr/>
-        </p:nvSpPr>
-        <p:spPr>
-          <a:xfrm>
-            <a:off x="502920" y="1572768"/>
-            <a:ext cx="11155680" cy="0"/>
-          </a:xfrm>
-          <a:prstGeom prst="line">
-            <a:avLst/>
-          </a:prstGeom>
-          <a:noFill/>
-          <a:ln w="12700">
-            <a:solidFill>
-              <a:srgbClr val="E2E8F0"/>
-            </a:solidFill>
-            <a:prstDash val="solid"/>
-          </a:ln>
-        </p:spPr>
-      </p:sp>
-      <p:sp>
-        <p:nvSpPr>
-          <p:cNvPr id="6" name="Text 4"/>
-          <p:cNvSpPr/>
-          <p:nvPr/>
-        </p:nvSpPr>
-        <p:spPr>
-          <a:xfrm>
-            <a:off x="502920" y="6528816"/>
-            <a:ext cx="4572000" cy="274320"/>
-          </a:xfrm>
-          <a:prstGeom prst="rect">
-            <a:avLst/>
-          </a:prstGeom>
-          <a:noFill/>
-          <a:ln/>
-        </p:spPr>
-        <p:txBody>
-          <a:bodyPr wrap="square" rtlCol="0" anchor="ctr"/>
-          <a:lstStyle/>
-          <a:p>
-            <a:pPr indent="0" marL="0">
-              <a:buNone/>
-            </a:pPr>
-            <a:r>
-              <a:rPr lang="en-US" sz="900" dirty="0">
-                <a:solidFill>
-                  <a:srgbClr val="94A3B8"/>
-                </a:solidFill>
-                <a:latin typeface="Segoe UI" pitchFamily="34" charset="0"/>
-                <a:ea typeface="Segoe UI" pitchFamily="34" charset="-122"/>
-                <a:cs typeface="Segoe UI" pitchFamily="34" charset="-120"/>
-              </a:rPr>
-              <a:t>VieSchool - Sổ Chủ Nhiệm Số</a:t>
-            </a:r>
-            <a:endParaRPr lang="en-US" sz="900" dirty="0"/>
-          </a:p>
-        </p:txBody>
-      </p:sp>
-      <p:sp>
-        <p:nvSpPr>
-          <p:cNvPr id="7" name="Text 5"/>
-          <p:cNvSpPr/>
-          <p:nvPr/>
-        </p:nvSpPr>
-        <p:spPr>
-          <a:xfrm>
-            <a:off x="11338560" y="6528816"/>
-            <a:ext cx="457200" cy="274320"/>
-          </a:xfrm>
-          <a:prstGeom prst="rect">
-            <a:avLst/>
-          </a:prstGeom>
-          <a:noFill/>
-          <a:ln/>
-        </p:spPr>
-        <p:txBody>
-          <a:bodyPr wrap="square" rtlCol="0" anchor="ctr"/>
-          <a:lstStyle/>
-          <a:p>
-            <a:pPr algn="r" indent="0" marL="0">
-              <a:buNone/>
-            </a:pPr>
-            <a:r>
-              <a:rPr lang="en-US" sz="900" dirty="0">
-                <a:solidFill>
-                  <a:srgbClr val="94A3B8"/>
-                </a:solidFill>
-                <a:latin typeface="Segoe UI" pitchFamily="34" charset="0"/>
-                <a:ea typeface="Segoe UI" pitchFamily="34" charset="-122"/>
-                <a:cs typeface="Segoe UI" pitchFamily="34" charset="-120"/>
-              </a:rPr>
-              <a:t>7</a:t>
-            </a:r>
-            <a:endParaRPr lang="en-US" sz="900" dirty="0"/>
-          </a:p>
-        </p:txBody>
-      </p:sp>
-      <p:graphicFrame>
-        <p:nvGraphicFramePr>
-          <p:cNvPr id="10" name="Table 0"/>
-          <p:cNvGraphicFramePr>
-            <a:graphicFrameLocks noGrp="1"/>
-          </p:cNvGraphicFramePr>
-          <p:nvPr>
-            <p:extLst>
-              <p:ext uri="{D42A27DB-BD31-4B8C-83A1-F6EECF244321}">
-                <p14:modId xmlns:p14="http://schemas.microsoft.com/office/powerpoint/2010/main" val="1579011935"/>
-              </p:ext>
-            </p:extLst>
-          </p:nvPr>
-        </p:nvGraphicFramePr>
-        <p:xfrm>
-          <a:off x="640080" y="1783080"/>
-          <a:ext cx="10972800" cy="914400"/>
-        </p:xfrm>
-        <a:graphic>
-          <a:graphicData uri="http://schemas.openxmlformats.org/drawingml/2006/table">
-            <a:tbl>
-              <a:tblPr/>
-              <a:tblGrid>
-                <a:gridCol w="3657600"/>
-                <a:gridCol w="3657600"/>
-                <a:gridCol w="3657600"/>
-              </a:tblGrid>
-              <a:tr h="566928">
-                <a:tc>
-                  <a:txBody>
-                    <a:bodyPr/>
-                    <a:lstStyle/>
-                    <a:p>
-                      <a:pPr indent="0" marL="0">
-                        <a:buNone/>
-                      </a:pPr>
-                      <a:r>
-                        <a:rPr lang="en-US" sz="1100" b="1" dirty="0">
-                          <a:solidFill>
-                            <a:srgbClr val="FFFFFF"/>
-                          </a:solidFill>
-                          <a:latin typeface="Segoe UI" pitchFamily="34" charset="0"/>
-                          <a:ea typeface="Segoe UI" pitchFamily="34" charset="-122"/>
-                          <a:cs typeface="Segoe UI" pitchFamily="34" charset="-120"/>
-                        </a:rPr>
-                        <a:t>Tiêu chí</a:t>
-                      </a:r>
-                      <a:endParaRPr lang="en-US" sz="1100" dirty="0">
-                        <a:latin typeface="Segoe UI" charset="0"/>
-                        <a:ea typeface="Segoe UI" charset="0"/>
-                        <a:cs typeface="Segoe UI" charset="0"/>
-                      </a:endParaRPr>
-                    </a:p>
-                  </a:txBody>
-                  <a:tcPr marL="73152" marR="73152" marT="73152" marB="73152" anchor="ctr">
-                    <a:lnL w="9525" cap="flat" cmpd="sng" algn="ctr">
-                      <a:solidFill>
-                        <a:srgbClr val="E2E8F0"/>
-                      </a:solidFill>
-                      <a:prstDash val="solid"/>
-                      <a:round/>
-                      <a:headEnd type="none" w="med" len="med"/>
-                      <a:tailEnd type="none" w="med" len="med"/>
-                    </a:lnL>
-                    <a:lnR w="9525" cap="flat" cmpd="sng" algn="ctr">
-                      <a:solidFill>
-                        <a:srgbClr val="E2E8F0"/>
-                      </a:solidFill>
-                      <a:prstDash val="solid"/>
-                      <a:round/>
-                      <a:headEnd type="none" w="med" len="med"/>
-                      <a:tailEnd type="none" w="med" len="med"/>
-                    </a:lnR>
-                    <a:lnT w="9525" cap="flat" cmpd="sng" algn="ctr">
-                      <a:solidFill>
-                        <a:srgbClr val="E2E8F0"/>
-                      </a:solidFill>
-                      <a:prstDash val="solid"/>
-                      <a:round/>
-                      <a:headEnd type="none" w="med" len="med"/>
-                      <a:tailEnd type="none" w="med" len="med"/>
-                    </a:lnT>
-                    <a:lnB w="9525" cap="flat" cmpd="sng" algn="ctr">
-                      <a:solidFill>
-                        <a:srgbClr val="E2E8F0"/>
-                      </a:solidFill>
-                      <a:prstDash val="solid"/>
-                      <a:round/>
-                      <a:headEnd type="none" w="med" len="med"/>
-                      <a:tailEnd type="none" w="med" len="med"/>
-                    </a:lnB>
-                    <a:solidFill>
-                      <a:srgbClr val="0F766E"/>
-                    </a:solidFill>
-                  </a:tcPr>
-                </a:tc>
-                <a:tc>
-                  <a:txBody>
-                    <a:bodyPr/>
-                    <a:lstStyle/>
-                    <a:p>
-                      <a:pPr indent="0" marL="0">
-                        <a:buNone/>
-                      </a:pPr>
-                      <a:r>
-                        <a:rPr lang="en-US" sz="1100" b="1" dirty="0">
-                          <a:solidFill>
-                            <a:srgbClr val="FFFFFF"/>
-                          </a:solidFill>
-                          <a:latin typeface="Segoe UI" pitchFamily="34" charset="0"/>
-                          <a:ea typeface="Segoe UI" pitchFamily="34" charset="-122"/>
-                          <a:cs typeface="Segoe UI" pitchFamily="34" charset="-120"/>
-                        </a:rPr>
-                        <a:t>Repo riêng hiện tại (đã chọn)</a:t>
-                      </a:r>
-                      <a:endParaRPr lang="en-US" sz="1100" dirty="0">
-                        <a:latin typeface="Segoe UI" charset="0"/>
-                        <a:ea typeface="Segoe UI" charset="0"/>
-                        <a:cs typeface="Segoe UI" charset="0"/>
-                      </a:endParaRPr>
-                    </a:p>
-                  </a:txBody>
-                  <a:tcPr marL="73152" marR="73152" marT="73152" marB="73152" anchor="ctr">
-                    <a:lnL w="9525" cap="flat" cmpd="sng" algn="ctr">
-                      <a:solidFill>
-                        <a:srgbClr val="E2E8F0"/>
-                      </a:solidFill>
-                      <a:prstDash val="solid"/>
-                      <a:round/>
-                      <a:headEnd type="none" w="med" len="med"/>
-                      <a:tailEnd type="none" w="med" len="med"/>
-                    </a:lnL>
-                    <a:lnR w="9525" cap="flat" cmpd="sng" algn="ctr">
-                      <a:solidFill>
-                        <a:srgbClr val="E2E8F0"/>
-                      </a:solidFill>
-                      <a:prstDash val="solid"/>
-                      <a:round/>
-                      <a:headEnd type="none" w="med" len="med"/>
-                      <a:tailEnd type="none" w="med" len="med"/>
-                    </a:lnR>
-                    <a:lnT w="9525" cap="flat" cmpd="sng" algn="ctr">
-                      <a:solidFill>
-                        <a:srgbClr val="E2E8F0"/>
-                      </a:solidFill>
-                      <a:prstDash val="solid"/>
-                      <a:round/>
-                      <a:headEnd type="none" w="med" len="med"/>
-                      <a:tailEnd type="none" w="med" len="med"/>
-                    </a:lnT>
-                    <a:lnB w="9525" cap="flat" cmpd="sng" algn="ctr">
-                      <a:solidFill>
-                        <a:srgbClr val="E2E8F0"/>
-                      </a:solidFill>
-                      <a:prstDash val="solid"/>
-                      <a:round/>
-                      <a:headEnd type="none" w="med" len="med"/>
-                      <a:tailEnd type="none" w="med" len="med"/>
-                    </a:lnB>
-                    <a:solidFill>
-                      <a:srgbClr val="0F766E"/>
-                    </a:solidFill>
-                  </a:tcPr>
-                </a:tc>
-                <a:tc>
-                  <a:txBody>
-                    <a:bodyPr/>
-                    <a:lstStyle/>
-                    <a:p>
-                      <a:pPr indent="0" marL="0">
-                        <a:buNone/>
-                      </a:pPr>
-                      <a:r>
-                        <a:rPr lang="en-US" sz="1100" b="1" dirty="0">
-                          <a:solidFill>
-                            <a:srgbClr val="FFFFFF"/>
-                          </a:solidFill>
-                          <a:latin typeface="Segoe UI" pitchFamily="34" charset="0"/>
-                          <a:ea typeface="Segoe UI" pitchFamily="34" charset="-122"/>
-                          <a:cs typeface="Segoe UI" pitchFamily="34" charset="-120"/>
-                        </a:rPr>
-                        <a:t>Monorepo (turborepo/Nx)</a:t>
-                      </a:r>
-                      <a:endParaRPr lang="en-US" sz="1100" dirty="0">
-                        <a:latin typeface="Segoe UI" charset="0"/>
-                        <a:ea typeface="Segoe UI" charset="0"/>
-                        <a:cs typeface="Segoe UI" charset="0"/>
-                      </a:endParaRPr>
-                    </a:p>
-                  </a:txBody>
-                  <a:tcPr marL="73152" marR="73152" marT="73152" marB="73152" anchor="ctr">
-                    <a:lnL w="9525" cap="flat" cmpd="sng" algn="ctr">
-                      <a:solidFill>
-                        <a:srgbClr val="E2E8F0"/>
-                      </a:solidFill>
-                      <a:prstDash val="solid"/>
-                      <a:round/>
-                      <a:headEnd type="none" w="med" len="med"/>
-                      <a:tailEnd type="none" w="med" len="med"/>
-                    </a:lnL>
-                    <a:lnR w="9525" cap="flat" cmpd="sng" algn="ctr">
-                      <a:solidFill>
-                        <a:srgbClr val="E2E8F0"/>
-                      </a:solidFill>
-                      <a:prstDash val="solid"/>
-                      <a:round/>
-                      <a:headEnd type="none" w="med" len="med"/>
-                      <a:tailEnd type="none" w="med" len="med"/>
-                    </a:lnR>
-                    <a:lnT w="9525" cap="flat" cmpd="sng" algn="ctr">
-                      <a:solidFill>
-                        <a:srgbClr val="E2E8F0"/>
-                      </a:solidFill>
-                      <a:prstDash val="solid"/>
-                      <a:round/>
-                      <a:headEnd type="none" w="med" len="med"/>
-                      <a:tailEnd type="none" w="med" len="med"/>
-                    </a:lnT>
-                    <a:lnB w="9525" cap="flat" cmpd="sng" algn="ctr">
-                      <a:solidFill>
-                        <a:srgbClr val="E2E8F0"/>
-                      </a:solidFill>
-                      <a:prstDash val="solid"/>
-                      <a:round/>
-                      <a:headEnd type="none" w="med" len="med"/>
-                      <a:tailEnd type="none" w="med" len="med"/>
-                    </a:lnB>
-                    <a:solidFill>
-                      <a:srgbClr val="0F766E"/>
-                    </a:solidFill>
-                  </a:tcPr>
-                </a:tc>
-              </a:tr>
-              <a:tr h="566928">
-                <a:tc>
-                  <a:txBody>
-                    <a:bodyPr/>
-                    <a:lstStyle/>
-                    <a:p>
-                      <a:pPr indent="0" marL="0">
-                        <a:buNone/>
-                      </a:pPr>
-                      <a:r>
-                        <a:rPr lang="en-US" sz="1050" dirty="0">
-                          <a:solidFill>
-                            <a:srgbClr val="0F172A"/>
-                          </a:solidFill>
-                          <a:latin typeface="Segoe UI" pitchFamily="34" charset="0"/>
-                          <a:ea typeface="Segoe UI" pitchFamily="34" charset="-122"/>
-                          <a:cs typeface="Segoe UI" pitchFamily="34" charset="-120"/>
-                        </a:rPr>
-                        <a:t>Thực tế</a:t>
-                      </a:r>
-                      <a:endParaRPr lang="en-US" sz="1050" dirty="0">
-                        <a:latin typeface="Segoe UI" charset="0"/>
-                        <a:ea typeface="Segoe UI" charset="0"/>
-                        <a:cs typeface="Segoe UI" charset="0"/>
-                      </a:endParaRPr>
-                    </a:p>
-                  </a:txBody>
-                  <a:tcPr marL="73152" marR="73152" marT="73152" marB="73152" anchor="ctr">
-                    <a:lnL w="9525" cap="flat" cmpd="sng" algn="ctr">
-                      <a:solidFill>
-                        <a:srgbClr val="E2E8F0"/>
-                      </a:solidFill>
-                      <a:prstDash val="solid"/>
-                      <a:round/>
-                      <a:headEnd type="none" w="med" len="med"/>
-                      <a:tailEnd type="none" w="med" len="med"/>
-                    </a:lnL>
-                    <a:lnR w="9525" cap="flat" cmpd="sng" algn="ctr">
-                      <a:solidFill>
-                        <a:srgbClr val="E2E8F0"/>
-                      </a:solidFill>
-                      <a:prstDash val="solid"/>
-                      <a:round/>
-                      <a:headEnd type="none" w="med" len="med"/>
-                      <a:tailEnd type="none" w="med" len="med"/>
-                    </a:lnR>
-                    <a:lnT w="9525" cap="flat" cmpd="sng" algn="ctr">
-                      <a:solidFill>
-                        <a:srgbClr val="E2E8F0"/>
-                      </a:solidFill>
-                      <a:prstDash val="solid"/>
-                      <a:round/>
-                      <a:headEnd type="none" w="med" len="med"/>
-                      <a:tailEnd type="none" w="med" len="med"/>
-                    </a:lnT>
-                    <a:lnB w="9525" cap="flat" cmpd="sng" algn="ctr">
-                      <a:solidFill>
-                        <a:srgbClr val="E2E8F0"/>
-                      </a:solidFill>
-                      <a:prstDash val="solid"/>
-                      <a:round/>
-                      <a:headEnd type="none" w="med" len="med"/>
-                      <a:tailEnd type="none" w="med" len="med"/>
-                    </a:lnB>
-                    <a:solidFill>
-                      <a:srgbClr val="FFFFFF"/>
-                    </a:solidFill>
-                  </a:tcPr>
-                </a:tc>
-                <a:tc>
-                  <a:txBody>
-                    <a:bodyPr/>
-                    <a:lstStyle/>
-                    <a:p>
-                      <a:pPr indent="0" marL="0">
-                        <a:buNone/>
-                      </a:pPr>
-                      <a:r>
-                        <a:rPr lang="en-US" sz="1050" dirty="0">
-                          <a:solidFill>
-                            <a:srgbClr val="0F172A"/>
-                          </a:solidFill>
-                          <a:latin typeface="Segoe UI" pitchFamily="34" charset="0"/>
-                          <a:ea typeface="Segoe UI" pitchFamily="34" charset="-122"/>
-                          <a:cs typeface="Segoe UI" pitchFamily="34" charset="-120"/>
-                        </a:rPr>
-                        <a:t>SCN là 1 repo độc lập, single-package (không workspaces), push master - deploy đúng project</a:t>
-                      </a:r>
-                      <a:endParaRPr lang="en-US" sz="1050" dirty="0">
-                        <a:latin typeface="Segoe UI" charset="0"/>
-                        <a:ea typeface="Segoe UI" charset="0"/>
-                        <a:cs typeface="Segoe UI" charset="0"/>
-                      </a:endParaRPr>
-                    </a:p>
-                  </a:txBody>
-                  <a:tcPr marL="73152" marR="73152" marT="73152" marB="73152" anchor="ctr">
-                    <a:lnL w="9525" cap="flat" cmpd="sng" algn="ctr">
-                      <a:solidFill>
-                        <a:srgbClr val="E2E8F0"/>
-                      </a:solidFill>
-                      <a:prstDash val="solid"/>
-                      <a:round/>
-                      <a:headEnd type="none" w="med" len="med"/>
-                      <a:tailEnd type="none" w="med" len="med"/>
-                    </a:lnL>
-                    <a:lnR w="9525" cap="flat" cmpd="sng" algn="ctr">
-                      <a:solidFill>
-                        <a:srgbClr val="E2E8F0"/>
-                      </a:solidFill>
-                      <a:prstDash val="solid"/>
-                      <a:round/>
-                      <a:headEnd type="none" w="med" len="med"/>
-                      <a:tailEnd type="none" w="med" len="med"/>
-                    </a:lnR>
-                    <a:lnT w="9525" cap="flat" cmpd="sng" algn="ctr">
-                      <a:solidFill>
-                        <a:srgbClr val="E2E8F0"/>
-                      </a:solidFill>
-                      <a:prstDash val="solid"/>
-                      <a:round/>
-                      <a:headEnd type="none" w="med" len="med"/>
-                      <a:tailEnd type="none" w="med" len="med"/>
-                    </a:lnT>
-                    <a:lnB w="9525" cap="flat" cmpd="sng" algn="ctr">
-                      <a:solidFill>
-                        <a:srgbClr val="E2E8F0"/>
-                      </a:solidFill>
-                      <a:prstDash val="solid"/>
-                      <a:round/>
-                      <a:headEnd type="none" w="med" len="med"/>
-                      <a:tailEnd type="none" w="med" len="med"/>
-                    </a:lnB>
-                    <a:solidFill>
-                      <a:srgbClr val="FFFFFF"/>
-                    </a:solidFill>
-                  </a:tcPr>
-                </a:tc>
-                <a:tc>
-                  <a:txBody>
-                    <a:bodyPr/>
-                    <a:lstStyle/>
-                    <a:p>
-                      <a:pPr indent="0" marL="0">
-                        <a:buNone/>
-                      </a:pPr>
-                      <a:r>
-                        <a:rPr lang="en-US" sz="1050" dirty="0">
-                          <a:solidFill>
-                            <a:srgbClr val="0F172A"/>
-                          </a:solidFill>
-                          <a:latin typeface="Segoe UI" pitchFamily="34" charset="0"/>
-                          <a:ea typeface="Segoe UI" pitchFamily="34" charset="-122"/>
-                          <a:cs typeface="Segoe UI" pitchFamily="34" charset="-120"/>
-                        </a:rPr>
-                        <a:t>Một repo chứa nhiều apps + packages chung</a:t>
-                      </a:r>
-                      <a:endParaRPr lang="en-US" sz="1050" dirty="0">
-                        <a:latin typeface="Segoe UI" charset="0"/>
-                        <a:ea typeface="Segoe UI" charset="0"/>
-                        <a:cs typeface="Segoe UI" charset="0"/>
-                      </a:endParaRPr>
-                    </a:p>
-                  </a:txBody>
-                  <a:tcPr marL="73152" marR="73152" marT="73152" marB="73152" anchor="ctr">
-                    <a:lnL w="9525" cap="flat" cmpd="sng" algn="ctr">
-                      <a:solidFill>
-                        <a:srgbClr val="E2E8F0"/>
-                      </a:solidFill>
-                      <a:prstDash val="solid"/>
-                      <a:round/>
-                      <a:headEnd type="none" w="med" len="med"/>
-                      <a:tailEnd type="none" w="med" len="med"/>
-                    </a:lnL>
-                    <a:lnR w="9525" cap="flat" cmpd="sng" algn="ctr">
-                      <a:solidFill>
-                        <a:srgbClr val="E2E8F0"/>
-                      </a:solidFill>
-                      <a:prstDash val="solid"/>
-                      <a:round/>
-                      <a:headEnd type="none" w="med" len="med"/>
-                      <a:tailEnd type="none" w="med" len="med"/>
-                    </a:lnR>
-                    <a:lnT w="9525" cap="flat" cmpd="sng" algn="ctr">
-                      <a:solidFill>
-                        <a:srgbClr val="E2E8F0"/>
-                      </a:solidFill>
-                      <a:prstDash val="solid"/>
-                      <a:round/>
-                      <a:headEnd type="none" w="med" len="med"/>
-                      <a:tailEnd type="none" w="med" len="med"/>
-                    </a:lnT>
-                    <a:lnB w="9525" cap="flat" cmpd="sng" algn="ctr">
-                      <a:solidFill>
-                        <a:srgbClr val="E2E8F0"/>
-                      </a:solidFill>
-                      <a:prstDash val="solid"/>
-                      <a:round/>
-                      <a:headEnd type="none" w="med" len="med"/>
-                      <a:tailEnd type="none" w="med" len="med"/>
-                    </a:lnB>
-                    <a:solidFill>
-                      <a:srgbClr val="FFFFFF"/>
-                    </a:solidFill>
-                  </a:tcPr>
-                </a:tc>
-              </a:tr>
-              <a:tr h="566928">
-                <a:tc>
-                  <a:txBody>
-                    <a:bodyPr/>
-                    <a:lstStyle/>
-                    <a:p>
-                      <a:pPr indent="0" marL="0">
-                        <a:buNone/>
-                      </a:pPr>
-                      <a:r>
-                        <a:rPr lang="en-US" sz="1050" dirty="0">
-                          <a:solidFill>
-                            <a:srgbClr val="0F172A"/>
-                          </a:solidFill>
-                          <a:latin typeface="Segoe UI" pitchFamily="34" charset="0"/>
-                          <a:ea typeface="Segoe UI" pitchFamily="34" charset="-122"/>
-                          <a:cs typeface="Segoe UI" pitchFamily="34" charset="-120"/>
-                        </a:rPr>
-                        <a:t>Deploy boundary</a:t>
-                      </a:r>
-                      <a:endParaRPr lang="en-US" sz="1050" dirty="0">
-                        <a:latin typeface="Segoe UI" charset="0"/>
-                        <a:ea typeface="Segoe UI" charset="0"/>
-                        <a:cs typeface="Segoe UI" charset="0"/>
-                      </a:endParaRPr>
-                    </a:p>
-                  </a:txBody>
-                  <a:tcPr marL="73152" marR="73152" marT="73152" marB="73152" anchor="ctr">
-                    <a:lnL w="9525" cap="flat" cmpd="sng" algn="ctr">
-                      <a:solidFill>
-                        <a:srgbClr val="E2E8F0"/>
-                      </a:solidFill>
-                      <a:prstDash val="solid"/>
-                      <a:round/>
-                      <a:headEnd type="none" w="med" len="med"/>
-                      <a:tailEnd type="none" w="med" len="med"/>
-                    </a:lnL>
-                    <a:lnR w="9525" cap="flat" cmpd="sng" algn="ctr">
-                      <a:solidFill>
-                        <a:srgbClr val="E2E8F0"/>
-                      </a:solidFill>
-                      <a:prstDash val="solid"/>
-                      <a:round/>
-                      <a:headEnd type="none" w="med" len="med"/>
-                      <a:tailEnd type="none" w="med" len="med"/>
-                    </a:lnR>
-                    <a:lnT w="9525" cap="flat" cmpd="sng" algn="ctr">
-                      <a:solidFill>
-                        <a:srgbClr val="E2E8F0"/>
-                      </a:solidFill>
-                      <a:prstDash val="solid"/>
-                      <a:round/>
-                      <a:headEnd type="none" w="med" len="med"/>
-                      <a:tailEnd type="none" w="med" len="med"/>
-                    </a:lnT>
-                    <a:lnB w="9525" cap="flat" cmpd="sng" algn="ctr">
-                      <a:solidFill>
-                        <a:srgbClr val="E2E8F0"/>
-                      </a:solidFill>
-                      <a:prstDash val="solid"/>
-                      <a:round/>
-                      <a:headEnd type="none" w="med" len="med"/>
-                      <a:tailEnd type="none" w="med" len="med"/>
-                    </a:lnB>
-                    <a:solidFill>
-                      <a:srgbClr val="F8FAFC"/>
-                    </a:solidFill>
-                  </a:tcPr>
-                </a:tc>
-                <a:tc>
-                  <a:txBody>
-                    <a:bodyPr/>
-                    <a:lstStyle/>
-                    <a:p>
-                      <a:pPr indent="0" marL="0">
-                        <a:buNone/>
-                      </a:pPr>
-                      <a:r>
-                        <a:rPr lang="en-US" sz="1050" dirty="0">
-                          <a:solidFill>
-                            <a:srgbClr val="0F172A"/>
-                          </a:solidFill>
-                          <a:latin typeface="Segoe UI" pitchFamily="34" charset="0"/>
-                          <a:ea typeface="Segoe UI" pitchFamily="34" charset="-122"/>
-                          <a:cs typeface="Segoe UI" pitchFamily="34" charset="-120"/>
-                        </a:rPr>
-                        <a:t>Push master repo nào - deploy đúng project đó, đơn giản tuyệt đối</a:t>
-                      </a:r>
-                      <a:endParaRPr lang="en-US" sz="1050" dirty="0">
-                        <a:latin typeface="Segoe UI" charset="0"/>
-                        <a:ea typeface="Segoe UI" charset="0"/>
-                        <a:cs typeface="Segoe UI" charset="0"/>
-                      </a:endParaRPr>
-                    </a:p>
-                  </a:txBody>
-                  <a:tcPr marL="73152" marR="73152" marT="73152" marB="73152" anchor="ctr">
-                    <a:lnL w="9525" cap="flat" cmpd="sng" algn="ctr">
-                      <a:solidFill>
-                        <a:srgbClr val="E2E8F0"/>
-                      </a:solidFill>
-                      <a:prstDash val="solid"/>
-                      <a:round/>
-                      <a:headEnd type="none" w="med" len="med"/>
-                      <a:tailEnd type="none" w="med" len="med"/>
-                    </a:lnL>
-                    <a:lnR w="9525" cap="flat" cmpd="sng" algn="ctr">
-                      <a:solidFill>
-                        <a:srgbClr val="E2E8F0"/>
-                      </a:solidFill>
-                      <a:prstDash val="solid"/>
-                      <a:round/>
-                      <a:headEnd type="none" w="med" len="med"/>
-                      <a:tailEnd type="none" w="med" len="med"/>
-                    </a:lnR>
-                    <a:lnT w="9525" cap="flat" cmpd="sng" algn="ctr">
-                      <a:solidFill>
-                        <a:srgbClr val="E2E8F0"/>
-                      </a:solidFill>
-                      <a:prstDash val="solid"/>
-                      <a:round/>
-                      <a:headEnd type="none" w="med" len="med"/>
-                      <a:tailEnd type="none" w="med" len="med"/>
-                    </a:lnT>
-                    <a:lnB w="9525" cap="flat" cmpd="sng" algn="ctr">
-                      <a:solidFill>
-                        <a:srgbClr val="E2E8F0"/>
-                      </a:solidFill>
-                      <a:prstDash val="solid"/>
-                      <a:round/>
-                      <a:headEnd type="none" w="med" len="med"/>
-                      <a:tailEnd type="none" w="med" len="med"/>
-                    </a:lnB>
-                    <a:solidFill>
-                      <a:srgbClr val="F8FAFC"/>
-                    </a:solidFill>
-                  </a:tcPr>
-                </a:tc>
-                <a:tc>
-                  <a:txBody>
-                    <a:bodyPr/>
-                    <a:lstStyle/>
-                    <a:p>
-                      <a:pPr indent="0" marL="0">
-                        <a:buNone/>
-                      </a:pPr>
-                      <a:r>
-                        <a:rPr lang="en-US" sz="1050" dirty="0">
-                          <a:solidFill>
-                            <a:srgbClr val="0F172A"/>
-                          </a:solidFill>
-                          <a:latin typeface="Segoe UI" pitchFamily="34" charset="0"/>
-                          <a:ea typeface="Segoe UI" pitchFamily="34" charset="-122"/>
-                          <a:cs typeface="Segoe UI" pitchFamily="34" charset="-120"/>
-                        </a:rPr>
-                        <a:t>Cần affected-graph để không deploy lại cả ứng dụng khi sửa shared lib</a:t>
-                      </a:r>
-                      <a:endParaRPr lang="en-US" sz="1050" dirty="0">
-                        <a:latin typeface="Segoe UI" charset="0"/>
-                        <a:ea typeface="Segoe UI" charset="0"/>
-                        <a:cs typeface="Segoe UI" charset="0"/>
-                      </a:endParaRPr>
-                    </a:p>
-                  </a:txBody>
-                  <a:tcPr marL="73152" marR="73152" marT="73152" marB="73152" anchor="ctr">
-                    <a:lnL w="9525" cap="flat" cmpd="sng" algn="ctr">
-                      <a:solidFill>
-                        <a:srgbClr val="E2E8F0"/>
-                      </a:solidFill>
-                      <a:prstDash val="solid"/>
-                      <a:round/>
-                      <a:headEnd type="none" w="med" len="med"/>
-                      <a:tailEnd type="none" w="med" len="med"/>
-                    </a:lnL>
-                    <a:lnR w="9525" cap="flat" cmpd="sng" algn="ctr">
-                      <a:solidFill>
-                        <a:srgbClr val="E2E8F0"/>
-                      </a:solidFill>
-                      <a:prstDash val="solid"/>
-                      <a:round/>
-                      <a:headEnd type="none" w="med" len="med"/>
-                      <a:tailEnd type="none" w="med" len="med"/>
-                    </a:lnR>
-                    <a:lnT w="9525" cap="flat" cmpd="sng" algn="ctr">
-                      <a:solidFill>
-                        <a:srgbClr val="E2E8F0"/>
-                      </a:solidFill>
-                      <a:prstDash val="solid"/>
-                      <a:round/>
-                      <a:headEnd type="none" w="med" len="med"/>
-                      <a:tailEnd type="none" w="med" len="med"/>
-                    </a:lnT>
-                    <a:lnB w="9525" cap="flat" cmpd="sng" algn="ctr">
-                      <a:solidFill>
-                        <a:srgbClr val="E2E8F0"/>
-                      </a:solidFill>
-                      <a:prstDash val="solid"/>
-                      <a:round/>
-                      <a:headEnd type="none" w="med" len="med"/>
-                      <a:tailEnd type="none" w="med" len="med"/>
-                    </a:lnB>
-                    <a:solidFill>
-                      <a:srgbClr val="F8FAFC"/>
-                    </a:solidFill>
-                  </a:tcPr>
-                </a:tc>
-              </a:tr>
-              <a:tr h="566928">
-                <a:tc>
-                  <a:txBody>
-                    <a:bodyPr/>
-                    <a:lstStyle/>
-                    <a:p>
-                      <a:pPr indent="0" marL="0">
-                        <a:buNone/>
-                      </a:pPr>
-                      <a:r>
-                        <a:rPr lang="en-US" sz="1050" dirty="0">
-                          <a:solidFill>
-                            <a:srgbClr val="0F172A"/>
-                          </a:solidFill>
-                          <a:latin typeface="Segoe UI" pitchFamily="34" charset="0"/>
-                          <a:ea typeface="Segoe UI" pitchFamily="34" charset="-122"/>
-                          <a:cs typeface="Segoe UI" pitchFamily="34" charset="-120"/>
-                        </a:rPr>
-                        <a:t>Code chia sẻ</a:t>
-                      </a:r>
-                      <a:endParaRPr lang="en-US" sz="1050" dirty="0">
-                        <a:latin typeface="Segoe UI" charset="0"/>
-                        <a:ea typeface="Segoe UI" charset="0"/>
-                        <a:cs typeface="Segoe UI" charset="0"/>
-                      </a:endParaRPr>
-                    </a:p>
-                  </a:txBody>
-                  <a:tcPr marL="73152" marR="73152" marT="73152" marB="73152" anchor="ctr">
-                    <a:lnL w="9525" cap="flat" cmpd="sng" algn="ctr">
-                      <a:solidFill>
-                        <a:srgbClr val="E2E8F0"/>
-                      </a:solidFill>
-                      <a:prstDash val="solid"/>
-                      <a:round/>
-                      <a:headEnd type="none" w="med" len="med"/>
-                      <a:tailEnd type="none" w="med" len="med"/>
-                    </a:lnL>
-                    <a:lnR w="9525" cap="flat" cmpd="sng" algn="ctr">
-                      <a:solidFill>
-                        <a:srgbClr val="E2E8F0"/>
-                      </a:solidFill>
-                      <a:prstDash val="solid"/>
-                      <a:round/>
-                      <a:headEnd type="none" w="med" len="med"/>
-                      <a:tailEnd type="none" w="med" len="med"/>
-                    </a:lnR>
-                    <a:lnT w="9525" cap="flat" cmpd="sng" algn="ctr">
-                      <a:solidFill>
-                        <a:srgbClr val="E2E8F0"/>
-                      </a:solidFill>
-                      <a:prstDash val="solid"/>
-                      <a:round/>
-                      <a:headEnd type="none" w="med" len="med"/>
-                      <a:tailEnd type="none" w="med" len="med"/>
-                    </a:lnT>
-                    <a:lnB w="9525" cap="flat" cmpd="sng" algn="ctr">
-                      <a:solidFill>
-                        <a:srgbClr val="E2E8F0"/>
-                      </a:solidFill>
-                      <a:prstDash val="solid"/>
-                      <a:round/>
-                      <a:headEnd type="none" w="med" len="med"/>
-                      <a:tailEnd type="none" w="med" len="med"/>
-                    </a:lnB>
-                    <a:solidFill>
-                      <a:srgbClr val="FFFFFF"/>
-                    </a:solidFill>
-                  </a:tcPr>
-                </a:tc>
-                <a:tc>
-                  <a:txBody>
-                    <a:bodyPr/>
-                    <a:lstStyle/>
-                    <a:p>
-                      <a:pPr indent="0" marL="0">
-                        <a:buNone/>
-                      </a:pPr>
-                      <a:r>
-                        <a:rPr lang="en-US" sz="1050" dirty="0">
-                          <a:solidFill>
-                            <a:srgbClr val="0F172A"/>
-                          </a:solidFill>
-                          <a:latin typeface="Segoe UI" pitchFamily="34" charset="0"/>
-                          <a:ea typeface="Segoe UI" pitchFamily="34" charset="-122"/>
-                          <a:cs typeface="Segoe UI" pitchFamily="34" charset="-120"/>
-                        </a:rPr>
-                        <a:t>Chia sẻ qua harness scripts/skills vendored vào repo - không phải packages</a:t>
-                      </a:r>
-                      <a:endParaRPr lang="en-US" sz="1050" dirty="0">
-                        <a:latin typeface="Segoe UI" charset="0"/>
-                        <a:ea typeface="Segoe UI" charset="0"/>
-                        <a:cs typeface="Segoe UI" charset="0"/>
-                      </a:endParaRPr>
-                    </a:p>
-                  </a:txBody>
-                  <a:tcPr marL="73152" marR="73152" marT="73152" marB="73152" anchor="ctr">
-                    <a:lnL w="9525" cap="flat" cmpd="sng" algn="ctr">
-                      <a:solidFill>
-                        <a:srgbClr val="E2E8F0"/>
-                      </a:solidFill>
-                      <a:prstDash val="solid"/>
-                      <a:round/>
-                      <a:headEnd type="none" w="med" len="med"/>
-                      <a:tailEnd type="none" w="med" len="med"/>
-                    </a:lnL>
-                    <a:lnR w="9525" cap="flat" cmpd="sng" algn="ctr">
-                      <a:solidFill>
-                        <a:srgbClr val="E2E8F0"/>
-                      </a:solidFill>
-                      <a:prstDash val="solid"/>
-                      <a:round/>
-                      <a:headEnd type="none" w="med" len="med"/>
-                      <a:tailEnd type="none" w="med" len="med"/>
-                    </a:lnR>
-                    <a:lnT w="9525" cap="flat" cmpd="sng" algn="ctr">
-                      <a:solidFill>
-                        <a:srgbClr val="E2E8F0"/>
-                      </a:solidFill>
-                      <a:prstDash val="solid"/>
-                      <a:round/>
-                      <a:headEnd type="none" w="med" len="med"/>
-                      <a:tailEnd type="none" w="med" len="med"/>
-                    </a:lnT>
-                    <a:lnB w="9525" cap="flat" cmpd="sng" algn="ctr">
-                      <a:solidFill>
-                        <a:srgbClr val="E2E8F0"/>
-                      </a:solidFill>
-                      <a:prstDash val="solid"/>
-                      <a:round/>
-                      <a:headEnd type="none" w="med" len="med"/>
-                      <a:tailEnd type="none" w="med" len="med"/>
-                    </a:lnB>
-                    <a:solidFill>
-                      <a:srgbClr val="FFFFFF"/>
-                    </a:solidFill>
-                  </a:tcPr>
-                </a:tc>
-                <a:tc>
-                  <a:txBody>
-                    <a:bodyPr/>
-                    <a:lstStyle/>
-                    <a:p>
-                      <a:pPr indent="0" marL="0">
-                        <a:buNone/>
-                      </a:pPr>
-                      <a:r>
-                        <a:rPr lang="en-US" sz="1050" dirty="0">
-                          <a:solidFill>
-                            <a:srgbClr val="0F172A"/>
-                          </a:solidFill>
-                          <a:latin typeface="Segoe UI" pitchFamily="34" charset="0"/>
-                          <a:ea typeface="Segoe UI" pitchFamily="34" charset="-122"/>
-                          <a:cs typeface="Segoe UI" pitchFamily="34" charset="-120"/>
-                        </a:rPr>
-                        <a:t>Shared packages import trực tiếp - tiện nhưng couple phiên bản</a:t>
-                      </a:r>
-                      <a:endParaRPr lang="en-US" sz="1050" dirty="0">
-                        <a:latin typeface="Segoe UI" charset="0"/>
-                        <a:ea typeface="Segoe UI" charset="0"/>
-                        <a:cs typeface="Segoe UI" charset="0"/>
-                      </a:endParaRPr>
-                    </a:p>
-                  </a:txBody>
-                  <a:tcPr marL="73152" marR="73152" marT="73152" marB="73152" anchor="ctr">
-                    <a:lnL w="9525" cap="flat" cmpd="sng" algn="ctr">
-                      <a:solidFill>
-                        <a:srgbClr val="E2E8F0"/>
-                      </a:solidFill>
-                      <a:prstDash val="solid"/>
-                      <a:round/>
-                      <a:headEnd type="none" w="med" len="med"/>
-                      <a:tailEnd type="none" w="med" len="med"/>
-                    </a:lnL>
-                    <a:lnR w="9525" cap="flat" cmpd="sng" algn="ctr">
-                      <a:solidFill>
-                        <a:srgbClr val="E2E8F0"/>
-                      </a:solidFill>
-                      <a:prstDash val="solid"/>
-                      <a:round/>
-                      <a:headEnd type="none" w="med" len="med"/>
-                      <a:tailEnd type="none" w="med" len="med"/>
-                    </a:lnR>
-                    <a:lnT w="9525" cap="flat" cmpd="sng" algn="ctr">
-                      <a:solidFill>
-                        <a:srgbClr val="E2E8F0"/>
-                      </a:solidFill>
-                      <a:prstDash val="solid"/>
-                      <a:round/>
-                      <a:headEnd type="none" w="med" len="med"/>
-                      <a:tailEnd type="none" w="med" len="med"/>
-                    </a:lnT>
-                    <a:lnB w="9525" cap="flat" cmpd="sng" algn="ctr">
-                      <a:solidFill>
-                        <a:srgbClr val="E2E8F0"/>
-                      </a:solidFill>
-                      <a:prstDash val="solid"/>
-                      <a:round/>
-                      <a:headEnd type="none" w="med" len="med"/>
-                      <a:tailEnd type="none" w="med" len="med"/>
-                    </a:lnB>
-                    <a:solidFill>
-                      <a:srgbClr val="FFFFFF"/>
-                    </a:solidFill>
-                  </a:tcPr>
-                </a:tc>
-              </a:tr>
-              <a:tr h="566928">
-                <a:tc>
-                  <a:txBody>
-                    <a:bodyPr/>
-                    <a:lstStyle/>
-                    <a:p>
-                      <a:pPr indent="0" marL="0">
-                        <a:buNone/>
-                      </a:pPr>
-                      <a:r>
-                        <a:rPr lang="en-US" sz="1050" dirty="0">
-                          <a:solidFill>
-                            <a:srgbClr val="0F172A"/>
-                          </a:solidFill>
-                          <a:latin typeface="Segoe UI" pitchFamily="34" charset="0"/>
-                          <a:ea typeface="Segoe UI" pitchFamily="34" charset="-122"/>
-                          <a:cs typeface="Segoe UI" pitchFamily="34" charset="-120"/>
-                        </a:rPr>
-                        <a:t>Blast radius</a:t>
-                      </a:r>
-                      <a:endParaRPr lang="en-US" sz="1050" dirty="0">
-                        <a:latin typeface="Segoe UI" charset="0"/>
-                        <a:ea typeface="Segoe UI" charset="0"/>
-                        <a:cs typeface="Segoe UI" charset="0"/>
-                      </a:endParaRPr>
-                    </a:p>
-                  </a:txBody>
-                  <a:tcPr marL="73152" marR="73152" marT="73152" marB="73152" anchor="ctr">
-                    <a:lnL w="9525" cap="flat" cmpd="sng" algn="ctr">
-                      <a:solidFill>
-                        <a:srgbClr val="E2E8F0"/>
-                      </a:solidFill>
-                      <a:prstDash val="solid"/>
-                      <a:round/>
-                      <a:headEnd type="none" w="med" len="med"/>
-                      <a:tailEnd type="none" w="med" len="med"/>
-                    </a:lnL>
-                    <a:lnR w="9525" cap="flat" cmpd="sng" algn="ctr">
-                      <a:solidFill>
-                        <a:srgbClr val="E2E8F0"/>
-                      </a:solidFill>
-                      <a:prstDash val="solid"/>
-                      <a:round/>
-                      <a:headEnd type="none" w="med" len="med"/>
-                      <a:tailEnd type="none" w="med" len="med"/>
-                    </a:lnR>
-                    <a:lnT w="9525" cap="flat" cmpd="sng" algn="ctr">
-                      <a:solidFill>
-                        <a:srgbClr val="E2E8F0"/>
-                      </a:solidFill>
-                      <a:prstDash val="solid"/>
-                      <a:round/>
-                      <a:headEnd type="none" w="med" len="med"/>
-                      <a:tailEnd type="none" w="med" len="med"/>
-                    </a:lnT>
-                    <a:lnB w="9525" cap="flat" cmpd="sng" algn="ctr">
-                      <a:solidFill>
-                        <a:srgbClr val="E2E8F0"/>
-                      </a:solidFill>
-                      <a:prstDash val="solid"/>
-                      <a:round/>
-                      <a:headEnd type="none" w="med" len="med"/>
-                      <a:tailEnd type="none" w="med" len="med"/>
-                    </a:lnB>
-                    <a:solidFill>
-                      <a:srgbClr val="F8FAFC"/>
-                    </a:solidFill>
-                  </a:tcPr>
-                </a:tc>
-                <a:tc>
-                  <a:txBody>
-                    <a:bodyPr/>
-                    <a:lstStyle/>
-                    <a:p>
-                      <a:pPr indent="0" marL="0">
-                        <a:buNone/>
-                      </a:pPr>
-                      <a:r>
-                        <a:rPr lang="en-US" sz="1050" dirty="0">
-                          <a:solidFill>
-                            <a:srgbClr val="0F172A"/>
-                          </a:solidFill>
-                          <a:latin typeface="Segoe UI" pitchFamily="34" charset="0"/>
-                          <a:ea typeface="Segoe UI" pitchFamily="34" charset="-122"/>
-                          <a:cs typeface="Segoe UI" pitchFamily="34" charset="-120"/>
-                        </a:rPr>
-                        <a:t>Lỗi/secret/bug giới hạn trong 1 repo</a:t>
-                      </a:r>
-                      <a:endParaRPr lang="en-US" sz="1050" dirty="0">
-                        <a:latin typeface="Segoe UI" charset="0"/>
-                        <a:ea typeface="Segoe UI" charset="0"/>
-                        <a:cs typeface="Segoe UI" charset="0"/>
-                      </a:endParaRPr>
-                    </a:p>
-                  </a:txBody>
-                  <a:tcPr marL="73152" marR="73152" marT="73152" marB="73152" anchor="ctr">
-                    <a:lnL w="9525" cap="flat" cmpd="sng" algn="ctr">
-                      <a:solidFill>
-                        <a:srgbClr val="E2E8F0"/>
-                      </a:solidFill>
-                      <a:prstDash val="solid"/>
-                      <a:round/>
-                      <a:headEnd type="none" w="med" len="med"/>
-                      <a:tailEnd type="none" w="med" len="med"/>
-                    </a:lnL>
-                    <a:lnR w="9525" cap="flat" cmpd="sng" algn="ctr">
-                      <a:solidFill>
-                        <a:srgbClr val="E2E8F0"/>
-                      </a:solidFill>
-                      <a:prstDash val="solid"/>
-                      <a:round/>
-                      <a:headEnd type="none" w="med" len="med"/>
-                      <a:tailEnd type="none" w="med" len="med"/>
-                    </a:lnR>
-                    <a:lnT w="9525" cap="flat" cmpd="sng" algn="ctr">
-                      <a:solidFill>
-                        <a:srgbClr val="E2E8F0"/>
-                      </a:solidFill>
-                      <a:prstDash val="solid"/>
-                      <a:round/>
-                      <a:headEnd type="none" w="med" len="med"/>
-                      <a:tailEnd type="none" w="med" len="med"/>
-                    </a:lnT>
-                    <a:lnB w="9525" cap="flat" cmpd="sng" algn="ctr">
-                      <a:solidFill>
-                        <a:srgbClr val="E2E8F0"/>
-                      </a:solidFill>
-                      <a:prstDash val="solid"/>
-                      <a:round/>
-                      <a:headEnd type="none" w="med" len="med"/>
-                      <a:tailEnd type="none" w="med" len="med"/>
-                    </a:lnB>
-                    <a:solidFill>
-                      <a:srgbClr val="F8FAFC"/>
-                    </a:solidFill>
-                  </a:tcPr>
-                </a:tc>
-                <a:tc>
-                  <a:txBody>
-                    <a:bodyPr/>
-                    <a:lstStyle/>
-                    <a:p>
-                      <a:pPr indent="0" marL="0">
-                        <a:buNone/>
-                      </a:pPr>
-                      <a:r>
-                        <a:rPr lang="en-US" sz="1050" dirty="0">
-                          <a:solidFill>
-                            <a:srgbClr val="0F172A"/>
-                          </a:solidFill>
-                          <a:latin typeface="Segoe UI" pitchFamily="34" charset="0"/>
-                          <a:ea typeface="Segoe UI" pitchFamily="34" charset="-122"/>
-                          <a:cs typeface="Segoe UI" pitchFamily="34" charset="-120"/>
-                        </a:rPr>
-                        <a:t>Một commit xấu có thể phá nhiều app cùng lúc</a:t>
-                      </a:r>
-                      <a:endParaRPr lang="en-US" sz="1050" dirty="0">
-                        <a:latin typeface="Segoe UI" charset="0"/>
-                        <a:ea typeface="Segoe UI" charset="0"/>
-                        <a:cs typeface="Segoe UI" charset="0"/>
-                      </a:endParaRPr>
-                    </a:p>
-                  </a:txBody>
-                  <a:tcPr marL="73152" marR="73152" marT="73152" marB="73152" anchor="ctr">
-                    <a:lnL w="9525" cap="flat" cmpd="sng" algn="ctr">
-                      <a:solidFill>
-                        <a:srgbClr val="E2E8F0"/>
-                      </a:solidFill>
-                      <a:prstDash val="solid"/>
-                      <a:round/>
-                      <a:headEnd type="none" w="med" len="med"/>
-                      <a:tailEnd type="none" w="med" len="med"/>
-                    </a:lnL>
-                    <a:lnR w="9525" cap="flat" cmpd="sng" algn="ctr">
-                      <a:solidFill>
-                        <a:srgbClr val="E2E8F0"/>
-                      </a:solidFill>
-                      <a:prstDash val="solid"/>
-                      <a:round/>
-                      <a:headEnd type="none" w="med" len="med"/>
-                      <a:tailEnd type="none" w="med" len="med"/>
-                    </a:lnR>
-                    <a:lnT w="9525" cap="flat" cmpd="sng" algn="ctr">
-                      <a:solidFill>
-                        <a:srgbClr val="E2E8F0"/>
-                      </a:solidFill>
-                      <a:prstDash val="solid"/>
-                      <a:round/>
-                      <a:headEnd type="none" w="med" len="med"/>
-                      <a:tailEnd type="none" w="med" len="med"/>
-                    </a:lnT>
-                    <a:lnB w="9525" cap="flat" cmpd="sng" algn="ctr">
-                      <a:solidFill>
-                        <a:srgbClr val="E2E8F0"/>
-                      </a:solidFill>
-                      <a:prstDash val="solid"/>
-                      <a:round/>
-                      <a:headEnd type="none" w="med" len="med"/>
-                      <a:tailEnd type="none" w="med" len="med"/>
-                    </a:lnB>
-                    <a:solidFill>
-                      <a:srgbClr val="F8FAFC"/>
-                    </a:solidFill>
-                  </a:tcPr>
-                </a:tc>
-              </a:tr>
-              <a:tr h="566928">
-                <a:tc>
-                  <a:txBody>
-                    <a:bodyPr/>
-                    <a:lstStyle/>
-                    <a:p>
-                      <a:pPr indent="0" marL="0">
-                        <a:buNone/>
-                      </a:pPr>
-                      <a:r>
-                        <a:rPr lang="en-US" sz="1050" dirty="0">
-                          <a:solidFill>
-                            <a:srgbClr val="0F172A"/>
-                          </a:solidFill>
-                          <a:latin typeface="Segoe UI" pitchFamily="34" charset="0"/>
-                          <a:ea typeface="Segoe UI" pitchFamily="34" charset="-122"/>
-                          <a:cs typeface="Segoe UI" pitchFamily="34" charset="-120"/>
-                        </a:rPr>
-                        <a:t>Quyền truy cập</a:t>
-                      </a:r>
-                      <a:endParaRPr lang="en-US" sz="1050" dirty="0">
-                        <a:latin typeface="Segoe UI" charset="0"/>
-                        <a:ea typeface="Segoe UI" charset="0"/>
-                        <a:cs typeface="Segoe UI" charset="0"/>
-                      </a:endParaRPr>
-                    </a:p>
-                  </a:txBody>
-                  <a:tcPr marL="73152" marR="73152" marT="73152" marB="73152" anchor="ctr">
-                    <a:lnL w="9525" cap="flat" cmpd="sng" algn="ctr">
-                      <a:solidFill>
-                        <a:srgbClr val="E2E8F0"/>
-                      </a:solidFill>
-                      <a:prstDash val="solid"/>
-                      <a:round/>
-                      <a:headEnd type="none" w="med" len="med"/>
-                      <a:tailEnd type="none" w="med" len="med"/>
-                    </a:lnL>
-                    <a:lnR w="9525" cap="flat" cmpd="sng" algn="ctr">
-                      <a:solidFill>
-                        <a:srgbClr val="E2E8F0"/>
-                      </a:solidFill>
-                      <a:prstDash val="solid"/>
-                      <a:round/>
-                      <a:headEnd type="none" w="med" len="med"/>
-                      <a:tailEnd type="none" w="med" len="med"/>
-                    </a:lnR>
-                    <a:lnT w="9525" cap="flat" cmpd="sng" algn="ctr">
-                      <a:solidFill>
-                        <a:srgbClr val="E2E8F0"/>
-                      </a:solidFill>
-                      <a:prstDash val="solid"/>
-                      <a:round/>
-                      <a:headEnd type="none" w="med" len="med"/>
-                      <a:tailEnd type="none" w="med" len="med"/>
-                    </a:lnT>
-                    <a:lnB w="9525" cap="flat" cmpd="sng" algn="ctr">
-                      <a:solidFill>
-                        <a:srgbClr val="E2E8F0"/>
-                      </a:solidFill>
-                      <a:prstDash val="solid"/>
-                      <a:round/>
-                      <a:headEnd type="none" w="med" len="med"/>
-                      <a:tailEnd type="none" w="med" len="med"/>
-                    </a:lnB>
-                    <a:solidFill>
-                      <a:srgbClr val="FFFFFF"/>
-                    </a:solidFill>
-                  </a:tcPr>
-                </a:tc>
-                <a:tc>
-                  <a:txBody>
-                    <a:bodyPr/>
-                    <a:lstStyle/>
-                    <a:p>
-                      <a:pPr indent="0" marL="0">
-                        <a:buNone/>
-                      </a:pPr>
-                      <a:r>
-                        <a:rPr lang="en-US" sz="1050" dirty="0">
-                          <a:solidFill>
-                            <a:srgbClr val="0F172A"/>
-                          </a:solidFill>
-                          <a:latin typeface="Segoe UI" pitchFamily="34" charset="0"/>
-                          <a:ea typeface="Segoe UI" pitchFamily="34" charset="-122"/>
-                          <a:cs typeface="Segoe UI" pitchFamily="34" charset="-120"/>
-                        </a:rPr>
-                        <a:t>Repo-level - dễ cấp quyền từng sản phẩm</a:t>
-                      </a:r>
-                      <a:endParaRPr lang="en-US" sz="1050" dirty="0">
-                        <a:latin typeface="Segoe UI" charset="0"/>
-                        <a:ea typeface="Segoe UI" charset="0"/>
-                        <a:cs typeface="Segoe UI" charset="0"/>
-                      </a:endParaRPr>
-                    </a:p>
-                  </a:txBody>
-                  <a:tcPr marL="73152" marR="73152" marT="73152" marB="73152" anchor="ctr">
-                    <a:lnL w="9525" cap="flat" cmpd="sng" algn="ctr">
-                      <a:solidFill>
-                        <a:srgbClr val="E2E8F0"/>
-                      </a:solidFill>
-                      <a:prstDash val="solid"/>
-                      <a:round/>
-                      <a:headEnd type="none" w="med" len="med"/>
-                      <a:tailEnd type="none" w="med" len="med"/>
-                    </a:lnL>
-                    <a:lnR w="9525" cap="flat" cmpd="sng" algn="ctr">
-                      <a:solidFill>
-                        <a:srgbClr val="E2E8F0"/>
-                      </a:solidFill>
-                      <a:prstDash val="solid"/>
-                      <a:round/>
-                      <a:headEnd type="none" w="med" len="med"/>
-                      <a:tailEnd type="none" w="med" len="med"/>
-                    </a:lnR>
-                    <a:lnT w="9525" cap="flat" cmpd="sng" algn="ctr">
-                      <a:solidFill>
-                        <a:srgbClr val="E2E8F0"/>
-                      </a:solidFill>
-                      <a:prstDash val="solid"/>
-                      <a:round/>
-                      <a:headEnd type="none" w="med" len="med"/>
-                      <a:tailEnd type="none" w="med" len="med"/>
-                    </a:lnT>
-                    <a:lnB w="9525" cap="flat" cmpd="sng" algn="ctr">
-                      <a:solidFill>
-                        <a:srgbClr val="E2E8F0"/>
-                      </a:solidFill>
-                      <a:prstDash val="solid"/>
-                      <a:round/>
-                      <a:headEnd type="none" w="med" len="med"/>
-                      <a:tailEnd type="none" w="med" len="med"/>
-                    </a:lnB>
-                    <a:solidFill>
-                      <a:srgbClr val="FFFFFF"/>
-                    </a:solidFill>
-                  </a:tcPr>
-                </a:tc>
-                <a:tc>
-                  <a:txBody>
-                    <a:bodyPr/>
-                    <a:lstStyle/>
-                    <a:p>
-                      <a:pPr indent="0" marL="0">
-                        <a:buNone/>
-                      </a:pPr>
-                      <a:r>
-                        <a:rPr lang="en-US" sz="1050" dirty="0">
-                          <a:solidFill>
-                            <a:srgbClr val="0F172A"/>
-                          </a:solidFill>
-                          <a:latin typeface="Segoe UI" pitchFamily="34" charset="0"/>
-                          <a:ea typeface="Segoe UI" pitchFamily="34" charset="-122"/>
-                          <a:cs typeface="Segoe UI" pitchFamily="34" charset="-120"/>
-                        </a:rPr>
-                        <a:t>Cần CODEOWNERS phức tạp để chặn chéo</a:t>
-                      </a:r>
-                      <a:endParaRPr lang="en-US" sz="1050" dirty="0">
-                        <a:latin typeface="Segoe UI" charset="0"/>
-                        <a:ea typeface="Segoe UI" charset="0"/>
-                        <a:cs typeface="Segoe UI" charset="0"/>
-                      </a:endParaRPr>
-                    </a:p>
-                  </a:txBody>
-                  <a:tcPr marL="73152" marR="73152" marT="73152" marB="73152" anchor="ctr">
-                    <a:lnL w="9525" cap="flat" cmpd="sng" algn="ctr">
-                      <a:solidFill>
-                        <a:srgbClr val="E2E8F0"/>
-                      </a:solidFill>
-                      <a:prstDash val="solid"/>
-                      <a:round/>
-                      <a:headEnd type="none" w="med" len="med"/>
-                      <a:tailEnd type="none" w="med" len="med"/>
-                    </a:lnL>
-                    <a:lnR w="9525" cap="flat" cmpd="sng" algn="ctr">
-                      <a:solidFill>
-                        <a:srgbClr val="E2E8F0"/>
-                      </a:solidFill>
-                      <a:prstDash val="solid"/>
-                      <a:round/>
-                      <a:headEnd type="none" w="med" len="med"/>
-                      <a:tailEnd type="none" w="med" len="med"/>
-                    </a:lnR>
-                    <a:lnT w="9525" cap="flat" cmpd="sng" algn="ctr">
-                      <a:solidFill>
-                        <a:srgbClr val="E2E8F0"/>
-                      </a:solidFill>
-                      <a:prstDash val="solid"/>
-                      <a:round/>
-                      <a:headEnd type="none" w="med" len="med"/>
-                      <a:tailEnd type="none" w="med" len="med"/>
-                    </a:lnT>
-                    <a:lnB w="9525" cap="flat" cmpd="sng" algn="ctr">
-                      <a:solidFill>
-                        <a:srgbClr val="E2E8F0"/>
-                      </a:solidFill>
-                      <a:prstDash val="solid"/>
-                      <a:round/>
-                      <a:headEnd type="none" w="med" len="med"/>
-                      <a:tailEnd type="none" w="med" len="med"/>
-                    </a:lnB>
-                    <a:solidFill>
-                      <a:srgbClr val="FFFFFF"/>
-                    </a:solidFill>
-                  </a:tcPr>
-                </a:tc>
-              </a:tr>
-              <a:tr h="566928">
-                <a:tc>
-                  <a:txBody>
-                    <a:bodyPr/>
-                    <a:lstStyle/>
-                    <a:p>
-                      <a:pPr indent="0" marL="0">
-                        <a:buNone/>
-                      </a:pPr>
-                      <a:r>
-                        <a:rPr lang="en-US" sz="1050" dirty="0">
-                          <a:solidFill>
-                            <a:srgbClr val="0F172A"/>
-                          </a:solidFill>
-                          <a:latin typeface="Segoe UI" pitchFamily="34" charset="0"/>
-                          <a:ea typeface="Segoe UI" pitchFamily="34" charset="-122"/>
-                          <a:cs typeface="Segoe UI" pitchFamily="34" charset="-120"/>
-                        </a:rPr>
-                        <a:t>Phù hợp bài toán</a:t>
-                      </a:r>
-                      <a:endParaRPr lang="en-US" sz="1050" dirty="0">
-                        <a:latin typeface="Segoe UI" charset="0"/>
-                        <a:ea typeface="Segoe UI" charset="0"/>
-                        <a:cs typeface="Segoe UI" charset="0"/>
-                      </a:endParaRPr>
-                    </a:p>
-                  </a:txBody>
-                  <a:tcPr marL="73152" marR="73152" marT="73152" marB="73152" anchor="ctr">
-                    <a:lnL w="9525" cap="flat" cmpd="sng" algn="ctr">
-                      <a:solidFill>
-                        <a:srgbClr val="E2E8F0"/>
-                      </a:solidFill>
-                      <a:prstDash val="solid"/>
-                      <a:round/>
-                      <a:headEnd type="none" w="med" len="med"/>
-                      <a:tailEnd type="none" w="med" len="med"/>
-                    </a:lnL>
-                    <a:lnR w="9525" cap="flat" cmpd="sng" algn="ctr">
-                      <a:solidFill>
-                        <a:srgbClr val="E2E8F0"/>
-                      </a:solidFill>
-                      <a:prstDash val="solid"/>
-                      <a:round/>
-                      <a:headEnd type="none" w="med" len="med"/>
-                      <a:tailEnd type="none" w="med" len="med"/>
-                    </a:lnR>
-                    <a:lnT w="9525" cap="flat" cmpd="sng" algn="ctr">
-                      <a:solidFill>
-                        <a:srgbClr val="E2E8F0"/>
-                      </a:solidFill>
-                      <a:prstDash val="solid"/>
-                      <a:round/>
-                      <a:headEnd type="none" w="med" len="med"/>
-                      <a:tailEnd type="none" w="med" len="med"/>
-                    </a:lnT>
-                    <a:lnB w="9525" cap="flat" cmpd="sng" algn="ctr">
-                      <a:solidFill>
-                        <a:srgbClr val="E2E8F0"/>
-                      </a:solidFill>
-                      <a:prstDash val="solid"/>
-                      <a:round/>
-                      <a:headEnd type="none" w="med" len="med"/>
-                      <a:tailEnd type="none" w="med" len="med"/>
-                    </a:lnB>
-                    <a:solidFill>
-                      <a:srgbClr val="F8FAFC"/>
-                    </a:solidFill>
-                  </a:tcPr>
-                </a:tc>
-                <a:tc>
-                  <a:txBody>
-                    <a:bodyPr/>
-                    <a:lstStyle/>
-                    <a:p>
-                      <a:pPr indent="0" marL="0">
-                        <a:buNone/>
-                      </a:pPr>
-                      <a:r>
-                        <a:rPr lang="en-US" sz="1050" dirty="0">
-                          <a:solidFill>
-                            <a:srgbClr val="0F172A"/>
-                          </a:solidFill>
-                          <a:latin typeface="Segoe UI" pitchFamily="34" charset="0"/>
-                          <a:ea typeface="Segoe UI" pitchFamily="34" charset="-122"/>
-                          <a:cs typeface="Segoe UI" pitchFamily="34" charset="-120"/>
-                        </a:rPr>
-                        <a:t>SCN độc lập lifecycle/khách hàng - không share domain model với ai</a:t>
-                      </a:r>
-                      <a:endParaRPr lang="en-US" sz="1050" dirty="0">
-                        <a:latin typeface="Segoe UI" charset="0"/>
-                        <a:ea typeface="Segoe UI" charset="0"/>
-                        <a:cs typeface="Segoe UI" charset="0"/>
-                      </a:endParaRPr>
-                    </a:p>
-                  </a:txBody>
-                  <a:tcPr marL="73152" marR="73152" marT="73152" marB="73152" anchor="ctr">
-                    <a:lnL w="9525" cap="flat" cmpd="sng" algn="ctr">
-                      <a:solidFill>
-                        <a:srgbClr val="E2E8F0"/>
-                      </a:solidFill>
-                      <a:prstDash val="solid"/>
-                      <a:round/>
-                      <a:headEnd type="none" w="med" len="med"/>
-                      <a:tailEnd type="none" w="med" len="med"/>
-                    </a:lnL>
-                    <a:lnR w="9525" cap="flat" cmpd="sng" algn="ctr">
-                      <a:solidFill>
-                        <a:srgbClr val="E2E8F0"/>
-                      </a:solidFill>
-                      <a:prstDash val="solid"/>
-                      <a:round/>
-                      <a:headEnd type="none" w="med" len="med"/>
-                      <a:tailEnd type="none" w="med" len="med"/>
-                    </a:lnR>
-                    <a:lnT w="9525" cap="flat" cmpd="sng" algn="ctr">
-                      <a:solidFill>
-                        <a:srgbClr val="E2E8F0"/>
-                      </a:solidFill>
-                      <a:prstDash val="solid"/>
-                      <a:round/>
-                      <a:headEnd type="none" w="med" len="med"/>
-                      <a:tailEnd type="none" w="med" len="med"/>
-                    </a:lnT>
-                    <a:lnB w="9525" cap="flat" cmpd="sng" algn="ctr">
-                      <a:solidFill>
-                        <a:srgbClr val="E2E8F0"/>
-                      </a:solidFill>
-                      <a:prstDash val="solid"/>
-                      <a:round/>
-                      <a:headEnd type="none" w="med" len="med"/>
-                      <a:tailEnd type="none" w="med" len="med"/>
-                    </a:lnB>
-                    <a:solidFill>
-                      <a:srgbClr val="F8FAFC"/>
-                    </a:solidFill>
-                  </a:tcPr>
-                </a:tc>
-                <a:tc>
-                  <a:txBody>
-                    <a:bodyPr/>
-                    <a:lstStyle/>
-                    <a:p>
-                      <a:pPr indent="0" marL="0">
-                        <a:buNone/>
-                      </a:pPr>
-                      <a:r>
-                        <a:rPr lang="en-US" sz="1050" dirty="0">
-                          <a:solidFill>
-                            <a:srgbClr val="0F172A"/>
-                          </a:solidFill>
-                          <a:latin typeface="Segoe UI" pitchFamily="34" charset="0"/>
-                          <a:ea typeface="Segoe UI" pitchFamily="34" charset="-122"/>
-                          <a:cs typeface="Segoe UI" pitchFamily="34" charset="-120"/>
-                        </a:rPr>
-                        <a:t>Chỉ đúng nếu nhiều app chia sẻ domain model chung - SCN không có nhu cầu đó</a:t>
-                      </a:r>
-                      <a:endParaRPr lang="en-US" sz="1050" dirty="0">
-                        <a:latin typeface="Segoe UI" charset="0"/>
-                        <a:ea typeface="Segoe UI" charset="0"/>
-                        <a:cs typeface="Segoe UI" charset="0"/>
-                      </a:endParaRPr>
-                    </a:p>
-                  </a:txBody>
-                  <a:tcPr marL="73152" marR="73152" marT="73152" marB="73152" anchor="ctr">
-                    <a:lnL w="9525" cap="flat" cmpd="sng" algn="ctr">
-                      <a:solidFill>
-                        <a:srgbClr val="E2E8F0"/>
-                      </a:solidFill>
-                      <a:prstDash val="solid"/>
-                      <a:round/>
-                      <a:headEnd type="none" w="med" len="med"/>
-                      <a:tailEnd type="none" w="med" len="med"/>
-                    </a:lnL>
-                    <a:lnR w="9525" cap="flat" cmpd="sng" algn="ctr">
-                      <a:solidFill>
-                        <a:srgbClr val="E2E8F0"/>
-                      </a:solidFill>
-                      <a:prstDash val="solid"/>
-                      <a:round/>
-                      <a:headEnd type="none" w="med" len="med"/>
-                      <a:tailEnd type="none" w="med" len="med"/>
-                    </a:lnR>
-                    <a:lnT w="9525" cap="flat" cmpd="sng" algn="ctr">
-                      <a:solidFill>
-                        <a:srgbClr val="E2E8F0"/>
-                      </a:solidFill>
-                      <a:prstDash val="solid"/>
-                      <a:round/>
-                      <a:headEnd type="none" w="med" len="med"/>
-                      <a:tailEnd type="none" w="med" len="med"/>
-                    </a:lnT>
-                    <a:lnB w="9525" cap="flat" cmpd="sng" algn="ctr">
-                      <a:solidFill>
-                        <a:srgbClr val="E2E8F0"/>
-                      </a:solidFill>
-                      <a:prstDash val="solid"/>
-                      <a:round/>
-                      <a:headEnd type="none" w="med" len="med"/>
-                      <a:tailEnd type="none" w="med" len="med"/>
-                    </a:lnB>
-                    <a:solidFill>
-                      <a:srgbClr val="F8FAFC"/>
-                    </a:solidFill>
-                  </a:tcPr>
-                </a:tc>
-              </a:tr>
-            </a:tbl>
-          </a:graphicData>
-        </a:graphic>
-      </p:graphicFrame>
-      <p:sp>
-        <p:nvSpPr>
-          <p:cNvPr id="9" name="Text 6"/>
-          <p:cNvSpPr/>
-          <p:nvPr/>
-        </p:nvSpPr>
-        <p:spPr>
-          <a:xfrm>
-            <a:off x="640080" y="6263640"/>
-            <a:ext cx="10972800" cy="457200"/>
-          </a:xfrm>
-          <a:prstGeom prst="rect">
-            <a:avLst/>
-          </a:prstGeom>
-          <a:noFill/>
-          <a:ln/>
-        </p:spPr>
-        <p:txBody>
-          <a:bodyPr wrap="square" rtlCol="0" anchor="ctr"/>
-          <a:lstStyle/>
-          <a:p>
-            <a:pPr indent="0" marL="0">
-              <a:buNone/>
-            </a:pPr>
-            <a:r>
-              <a:rPr lang="en-US" sz="1050" i="1" dirty="0">
-                <a:solidFill>
-                  <a:srgbClr val="0F766E"/>
-                </a:solidFill>
-                <a:latin typeface="Segoe UI" pitchFamily="34" charset="0"/>
-                <a:ea typeface="Segoe UI" pitchFamily="34" charset="-122"/>
-                <a:cs typeface="Segoe UI" pitchFamily="34" charset="-120"/>
-              </a:rPr>
-              <a:t>SCN là bounded context hoàn chỉnh - repo riêng phản ánh đúng ranh giới deploy và ranh giới domain.</a:t>
-            </a:r>
-            <a:endParaRPr lang="en-US" sz="1050" dirty="0"/>
           </a:p>
         </p:txBody>
       </p:sp>

--- a/docs/handover/KIEN-TRUC-HE-THONG.pptx
+++ b/docs/handover/KIEN-TRUC-HE-THONG.pptx
@@ -6142,7 +6142,7 @@
                           <a:ea typeface="Segoe UI" pitchFamily="34" charset="-122"/>
                           <a:cs typeface="Segoe UI" pitchFamily="34" charset="-120"/>
                         </a:rPr>
-                        <a:t>~30 bảng quan hệ chặt + views + RPC</a:t>
+                        <a:t>86 bảng public quan hệ chặt + views + RPC (SCN dùng schema public; app khác ở schema riêng)</a:t>
                       </a:r>
                       <a:endParaRPr lang="en-US" sz="1050" dirty="0">
                         <a:latin typeface="Segoe UI" charset="0"/>
@@ -6278,7 +6278,7 @@
                           <a:ea typeface="Segoe UI" pitchFamily="34" charset="-122"/>
                           <a:cs typeface="Segoe UI" pitchFamily="34" charset="-120"/>
                         </a:rPr>
-                        <a:t>Join chéo là yêu cầu cốt lõi (attendance_daily gộp 2 nguồn) - 1 DB là điều kiện cần</a:t>
+                        <a:t>Join chéo là yêu cầu cốt lõi (attendance_daily gộp 2 nguồn, học bạ kéo điểm + HK + chuyên cần) - 1 DB là điều kiện cần</a:t>
                       </a:r>
                       <a:endParaRPr lang="en-US" sz="1050" dirty="0">
                         <a:latin typeface="Segoe UI" charset="0"/>
@@ -6367,7 +6367,7 @@
                 <a:ea typeface="Segoe UI" pitchFamily="34" charset="-122"/>
                 <a:cs typeface="Segoe UI" pitchFamily="34" charset="-120"/>
               </a:rPr>
-              <a:t>Ưu tiên đơn giản vận hành: 1 project, 1 schema, RLS làm việc nặng phân tách ở mọi cấp.</a:t>
+              <a:t>Ưu tiên đơn giản vận hành: 1 project, RLS làm việc nặng phân tách ở mọi cấp. Schema-per-app đã có sẵn như seam tách project sau này.</a:t>
             </a:r>
             <a:endParaRPr lang="en-US" sz="1050" dirty="0"/>
           </a:p>
@@ -6764,6 +6764,90 @@
                 <a:cs typeface="Segoe UI" pitchFamily="34" charset="-120"/>
               </a:rPr>
               <a:t>check constraints cho enum mở rộng được, triggers sinh notifications - quy tắc nghiệp vụ sống ở tầng không thể bypass</a:t>
+            </a:r>
+            <a:endParaRPr lang="en-US" sz="1250" dirty="0"/>
+          </a:p>
+          <a:p>
+            <a:pPr marL="177800" indent="-177800">
+              <a:spcAft>
+                <a:spcPts val="800"/>
+              </a:spcAft>
+              <a:buSzPct val="100000"/>
+              <a:buChar char="•"/>
+            </a:pPr>
+            <a:r>
+              <a:rPr lang="en-US" sz="1250" dirty="0">
+                <a:solidFill>
+                  <a:srgbClr val="0F172A"/>
+                </a:solidFill>
+                <a:latin typeface="Segoe UI" pitchFamily="34" charset="0"/>
+                <a:ea typeface="Segoe UI" pitchFamily="34" charset="-122"/>
+                <a:cs typeface="Segoe UI" pitchFamily="34" charset="-120"/>
+              </a:rPr>
+              <a:t>Atomic ở nghiệp vụ nhạy cảm</a:t>
+            </a:r>
+            <a:endParaRPr lang="en-US" sz="1250" dirty="0"/>
+          </a:p>
+          <a:p>
+            <a:pPr marL="381000" indent="-381000">
+              <a:spcAft>
+                <a:spcPts val="800"/>
+              </a:spcAft>
+              <a:buSzPct val="100000"/>
+              <a:buChar char="–"/>
+            </a:pPr>
+            <a:r>
+              <a:rPr lang="en-US" sz="1100" dirty="0">
+                <a:solidFill>
+                  <a:srgbClr val="475569"/>
+                </a:solidFill>
+                <a:latin typeface="Segoe UI" pitchFamily="34" charset="0"/>
+                <a:ea typeface="Segoe UI" pitchFamily="34" charset="-122"/>
+                <a:cs typeface="Segoe UI" pitchFamily="34" charset="-120"/>
+              </a:rPr>
+              <a:t>Số biên lai + số ĐKCB đánh atomic theo trường trong RPC (không race khi 2 kế toán thu cùng lúc); mượn/trả sách check tồn trong 1 transaction</a:t>
+            </a:r>
+            <a:endParaRPr lang="en-US" sz="1250" dirty="0"/>
+          </a:p>
+          <a:p>
+            <a:pPr marL="177800" indent="-177800">
+              <a:spcAft>
+                <a:spcPts val="800"/>
+              </a:spcAft>
+              <a:buSzPct val="100000"/>
+              <a:buChar char="•"/>
+            </a:pPr>
+            <a:r>
+              <a:rPr lang="en-US" sz="1250" dirty="0">
+                <a:solidFill>
+                  <a:srgbClr val="0F172A"/>
+                </a:solidFill>
+                <a:latin typeface="Segoe UI" pitchFamily="34" charset="0"/>
+                <a:ea typeface="Segoe UI" pitchFamily="34" charset="-122"/>
+                <a:cs typeface="Segoe UI" pitchFamily="34" charset="-120"/>
+              </a:rPr>
+              <a:t>Movement qua security-definer RPC</a:t>
+            </a:r>
+            <a:endParaRPr lang="en-US" sz="1250" dirty="0"/>
+          </a:p>
+          <a:p>
+            <a:pPr marL="381000" indent="-381000">
+              <a:spcAft>
+                <a:spcPts val="800"/>
+              </a:spcAft>
+              <a:buSzPct val="100000"/>
+              <a:buChar char="–"/>
+            </a:pPr>
+            <a:r>
+              <a:rPr lang="en-US" sz="1100" dirty="0">
+                <a:solidFill>
+                  <a:srgbClr val="475569"/>
+                </a:solidFill>
+                <a:latin typeface="Segoe UI" pitchFamily="34" charset="0"/>
+                <a:ea typeface="Segoe UI" pitchFamily="34" charset="-122"/>
+                <a:cs typeface="Segoe UI" pitchFamily="34" charset="-120"/>
+              </a:rPr>
+              <a:t>Biến động HS: direct table write bị revoke - duyệt chuyển/bảo lưu chỉ qua RPC, snapshot tên+lớp tại thời điểm yêu cầu (audit-sound)</a:t>
             </a:r>
             <a:endParaRPr lang="en-US" sz="1250" dirty="0"/>
           </a:p>
@@ -10109,7 +10193,7 @@
                           <a:ea typeface="Segoe UI" pitchFamily="34" charset="-122"/>
                           <a:cs typeface="Segoe UI" pitchFamily="34" charset="-120"/>
                         </a:rPr>
-                        <a:t>Nhất quán 10 vai trò x 30 bảng</a:t>
+                        <a:t>Nhất quán 10 vai trò x 86 bảng</a:t>
                       </a:r>
                       <a:endParaRPr lang="en-US" sz="1050" dirty="0">
                         <a:latin typeface="Segoe UI" charset="0"/>
@@ -14012,7 +14096,49 @@
                 <a:ea typeface="Segoe UI" pitchFamily="34" charset="-122"/>
                 <a:cs typeface="Segoe UI" pitchFamily="34" charset="-120"/>
               </a:rPr>
-              <a:t>~30 bảng: điểm danh chéo giữa sổ đầu bài và điểm danh ngày, điểm số liên kết hạnh kiểm, KPI chủ nhiệm tổng hợp nhiều nguồn</a:t>
+              <a:t>86 bảng trong schema public: điểm danh chéo sổ đầu bài, điểm số liên kết hạnh kiểm, học bạ, tuyển sinh -&gt; nhập học -&gt; học phí - cùng một học sinh xuyên suốt</a:t>
+            </a:r>
+            <a:endParaRPr lang="en-US" sz="1350" dirty="0"/>
+          </a:p>
+          <a:p>
+            <a:pPr marL="177800" indent="-177800">
+              <a:spcAft>
+                <a:spcPts val="800"/>
+              </a:spcAft>
+              <a:buSzPct val="100000"/>
+              <a:buChar char="•"/>
+            </a:pPr>
+            <a:r>
+              <a:rPr lang="en-US" sz="1350" dirty="0">
+                <a:solidFill>
+                  <a:srgbClr val="0F172A"/>
+                </a:solidFill>
+                <a:latin typeface="Segoe UI" pitchFamily="34" charset="0"/>
+                <a:ea typeface="Segoe UI" pitchFamily="34" charset="-122"/>
+                <a:cs typeface="Segoe UI" pitchFamily="34" charset="-120"/>
+              </a:rPr>
+              <a:t>Bán theo gói tính năng</a:t>
+            </a:r>
+            <a:endParaRPr lang="en-US" sz="1350" dirty="0"/>
+          </a:p>
+          <a:p>
+            <a:pPr marL="381000" indent="-381000">
+              <a:spcAft>
+                <a:spcPts val="800"/>
+              </a:spcAft>
+              <a:buSzPct val="100000"/>
+              <a:buChar char="–"/>
+            </a:pPr>
+            <a:r>
+              <a:rPr lang="en-US" sz="1200" dirty="0">
+                <a:solidFill>
+                  <a:srgbClr val="475569"/>
+                </a:solidFill>
+                <a:latin typeface="Segoe UI" pitchFamily="34" charset="0"/>
+                <a:ea typeface="Segoe UI" pitchFamily="34" charset="-122"/>
+                <a:cs typeface="Segoe UI" pitchFamily="34" charset="-120"/>
+              </a:rPr>
+              <a:t>Trường mua module nào dùng module đó - yêu cầu kiến trúc: gating ở nav + route + RPC + RLS, không chỉ ẩn menu</a:t>
             </a:r>
             <a:endParaRPr lang="en-US" sz="1350" dirty="0"/>
           </a:p>
@@ -16358,7 +16484,7 @@
                           <a:ea typeface="Segoe UI" pitchFamily="34" charset="-122"/>
                           <a:cs typeface="Segoe UI" pitchFamily="34" charset="-120"/>
                         </a:rPr>
-                        <a:t>Chung Supabase project với app nội bộ - noisy neighbor đụng IO budget</a:t>
+                        <a:t>Chung Supabase project: 3 schema app khác cùng project - noisy neighbor đụng IO budget</a:t>
                       </a:r>
                       <a:endParaRPr lang="en-US" sz="1050" dirty="0">
                         <a:latin typeface="Segoe UI" charset="0"/>
@@ -16426,7 +16552,7 @@
                           <a:ea typeface="Segoe UI" pitchFamily="34" charset="-122"/>
                           <a:cs typeface="Segoe UI" pitchFamily="34" charset="-120"/>
                         </a:rPr>
-                        <a:t>CR-058: tách schema app kia sang project riêng; phase 0 inventory xong, không downtime</a:t>
+                        <a:t>CR-058: cô lập theo schema đã có; tách hẳn sang project riêng vẫn pending cutover</a:t>
                       </a:r>
                       <a:endParaRPr lang="en-US" sz="1050" dirty="0">
                         <a:latin typeface="Segoe UI" charset="0"/>
@@ -16494,7 +16620,7 @@
                           <a:ea typeface="Segoe UI" pitchFamily="34" charset="-122"/>
                           <a:cs typeface="Segoe UI" pitchFamily="34" charset="-120"/>
                         </a:rPr>
-                        <a:t>Trung bình - cần Pro project mới + cutover; không phải viết lại code</a:t>
+                        <a:t>Trung bình - cần Pro project mới + cutover có downtime nhỏ; không phải viết lại code</a:t>
                       </a:r>
                       <a:endParaRPr lang="en-US" sz="1050" dirty="0">
                         <a:latin typeface="Segoe UI" charset="0"/>
@@ -16542,6 +16668,212 @@
                     </a:lnB>
                     <a:solidFill>
                       <a:srgbClr val="F8FAFC"/>
+                    </a:solidFill>
+                  </a:tcPr>
+                </a:tc>
+              </a:tr>
+              <a:tr h="658368">
+                <a:tc>
+                  <a:txBody>
+                    <a:bodyPr/>
+                    <a:lstStyle/>
+                    <a:p>
+                      <a:pPr indent="0" marL="0">
+                        <a:buNone/>
+                      </a:pPr>
+                      <a:r>
+                        <a:rPr lang="en-US" sz="1050" dirty="0">
+                          <a:solidFill>
+                            <a:srgbClr val="0F172A"/>
+                          </a:solidFill>
+                          <a:latin typeface="Segoe UI" pitchFamily="34" charset="0"/>
+                          <a:ea typeface="Segoe UI" pitchFamily="34" charset="-122"/>
+                          <a:cs typeface="Segoe UI" pitchFamily="34" charset="-120"/>
+                        </a:rPr>
+                        <a:t>Cổng public /apply - surface đầu tiên không cần login</a:t>
+                      </a:r>
+                      <a:endParaRPr lang="en-US" sz="1050" dirty="0">
+                        <a:latin typeface="Segoe UI" charset="0"/>
+                        <a:ea typeface="Segoe UI" charset="0"/>
+                        <a:cs typeface="Segoe UI" charset="0"/>
+                      </a:endParaRPr>
+                    </a:p>
+                  </a:txBody>
+                  <a:tcPr marL="73152" marR="73152" marT="73152" marB="73152" anchor="ctr">
+                    <a:lnL w="9525" cap="flat" cmpd="sng" algn="ctr">
+                      <a:solidFill>
+                        <a:srgbClr val="E2E8F0"/>
+                      </a:solidFill>
+                      <a:prstDash val="solid"/>
+                      <a:round/>
+                      <a:headEnd type="none" w="med" len="med"/>
+                      <a:tailEnd type="none" w="med" len="med"/>
+                    </a:lnL>
+                    <a:lnR w="9525" cap="flat" cmpd="sng" algn="ctr">
+                      <a:solidFill>
+                        <a:srgbClr val="E2E8F0"/>
+                      </a:solidFill>
+                      <a:prstDash val="solid"/>
+                      <a:round/>
+                      <a:headEnd type="none" w="med" len="med"/>
+                      <a:tailEnd type="none" w="med" len="med"/>
+                    </a:lnR>
+                    <a:lnT w="9525" cap="flat" cmpd="sng" algn="ctr">
+                      <a:solidFill>
+                        <a:srgbClr val="E2E8F0"/>
+                      </a:solidFill>
+                      <a:prstDash val="solid"/>
+                      <a:round/>
+                      <a:headEnd type="none" w="med" len="med"/>
+                      <a:tailEnd type="none" w="med" len="med"/>
+                    </a:lnT>
+                    <a:lnB w="9525" cap="flat" cmpd="sng" algn="ctr">
+                      <a:solidFill>
+                        <a:srgbClr val="E2E8F0"/>
+                      </a:solidFill>
+                      <a:prstDash val="solid"/>
+                      <a:round/>
+                      <a:headEnd type="none" w="med" len="med"/>
+                      <a:tailEnd type="none" w="med" len="med"/>
+                    </a:lnB>
+                    <a:solidFill>
+                      <a:srgbClr val="FFFFFF"/>
+                    </a:solidFill>
+                  </a:tcPr>
+                </a:tc>
+                <a:tc>
+                  <a:txBody>
+                    <a:bodyPr/>
+                    <a:lstStyle/>
+                    <a:p>
+                      <a:pPr indent="0" marL="0">
+                        <a:buNone/>
+                      </a:pPr>
+                      <a:r>
+                        <a:rPr lang="en-US" sz="1050" dirty="0">
+                          <a:solidFill>
+                            <a:srgbClr val="0F172A"/>
+                          </a:solidFill>
+                          <a:latin typeface="Segoe UI" pitchFamily="34" charset="0"/>
+                          <a:ea typeface="Segoe UI" pitchFamily="34" charset="-122"/>
+                          <a:cs typeface="Segoe UI" pitchFamily="34" charset="-120"/>
+                        </a:rPr>
+                        <a:t>CR-063 hardening: Turnstile + revoke anon + chỉ RPC security-definer ghi được</a:t>
+                      </a:r>
+                      <a:endParaRPr lang="en-US" sz="1050" dirty="0">
+                        <a:latin typeface="Segoe UI" charset="0"/>
+                        <a:ea typeface="Segoe UI" charset="0"/>
+                        <a:cs typeface="Segoe UI" charset="0"/>
+                      </a:endParaRPr>
+                    </a:p>
+                  </a:txBody>
+                  <a:tcPr marL="73152" marR="73152" marT="73152" marB="73152" anchor="ctr">
+                    <a:lnL w="9525" cap="flat" cmpd="sng" algn="ctr">
+                      <a:solidFill>
+                        <a:srgbClr val="E2E8F0"/>
+                      </a:solidFill>
+                      <a:prstDash val="solid"/>
+                      <a:round/>
+                      <a:headEnd type="none" w="med" len="med"/>
+                      <a:tailEnd type="none" w="med" len="med"/>
+                    </a:lnL>
+                    <a:lnR w="9525" cap="flat" cmpd="sng" algn="ctr">
+                      <a:solidFill>
+                        <a:srgbClr val="E2E8F0"/>
+                      </a:solidFill>
+                      <a:prstDash val="solid"/>
+                      <a:round/>
+                      <a:headEnd type="none" w="med" len="med"/>
+                      <a:tailEnd type="none" w="med" len="med"/>
+                    </a:lnR>
+                    <a:lnT w="9525" cap="flat" cmpd="sng" algn="ctr">
+                      <a:solidFill>
+                        <a:srgbClr val="E2E8F0"/>
+                      </a:solidFill>
+                      <a:prstDash val="solid"/>
+                      <a:round/>
+                      <a:headEnd type="none" w="med" len="med"/>
+                      <a:tailEnd type="none" w="med" len="med"/>
+                    </a:lnT>
+                    <a:lnB w="9525" cap="flat" cmpd="sng" algn="ctr">
+                      <a:solidFill>
+                        <a:srgbClr val="E2E8F0"/>
+                      </a:solidFill>
+                      <a:prstDash val="solid"/>
+                      <a:round/>
+                      <a:headEnd type="none" w="med" len="med"/>
+                      <a:tailEnd type="none" w="med" len="med"/>
+                    </a:lnB>
+                    <a:solidFill>
+                      <a:srgbClr val="FFFFFF"/>
+                    </a:solidFill>
+                  </a:tcPr>
+                </a:tc>
+                <a:tc>
+                  <a:txBody>
+                    <a:bodyPr/>
+                    <a:lstStyle/>
+                    <a:p>
+                      <a:pPr indent="0" marL="0">
+                        <a:buNone/>
+                      </a:pPr>
+                      <a:r>
+                        <a:rPr lang="en-US" sz="1050" dirty="0">
+                          <a:solidFill>
+                            <a:srgbClr val="0F172A"/>
+                          </a:solidFill>
+                          <a:latin typeface="Segoe UI" pitchFamily="34" charset="0"/>
+                          <a:ea typeface="Segoe UI" pitchFamily="34" charset="-122"/>
+                          <a:cs typeface="Segoe UI" pitchFamily="34" charset="-120"/>
+                        </a:rPr>
+                        <a:t>Xong - đã deploy kèm tính năng</a:t>
+                      </a:r>
+                      <a:endParaRPr lang="en-US" sz="1050" dirty="0">
+                        <a:latin typeface="Segoe UI" charset="0"/>
+                        <a:ea typeface="Segoe UI" charset="0"/>
+                        <a:cs typeface="Segoe UI" charset="0"/>
+                      </a:endParaRPr>
+                    </a:p>
+                  </a:txBody>
+                  <a:tcPr marL="73152" marR="73152" marT="73152" marB="73152" anchor="ctr">
+                    <a:lnL w="9525" cap="flat" cmpd="sng" algn="ctr">
+                      <a:solidFill>
+                        <a:srgbClr val="E2E8F0"/>
+                      </a:solidFill>
+                      <a:prstDash val="solid"/>
+                      <a:round/>
+                      <a:headEnd type="none" w="med" len="med"/>
+                      <a:tailEnd type="none" w="med" len="med"/>
+                    </a:lnL>
+                    <a:lnR w="9525" cap="flat" cmpd="sng" algn="ctr">
+                      <a:solidFill>
+                        <a:srgbClr val="E2E8F0"/>
+                      </a:solidFill>
+                      <a:prstDash val="solid"/>
+                      <a:round/>
+                      <a:headEnd type="none" w="med" len="med"/>
+                      <a:tailEnd type="none" w="med" len="med"/>
+                    </a:lnR>
+                    <a:lnT w="9525" cap="flat" cmpd="sng" algn="ctr">
+                      <a:solidFill>
+                        <a:srgbClr val="E2E8F0"/>
+                      </a:solidFill>
+                      <a:prstDash val="solid"/>
+                      <a:round/>
+                      <a:headEnd type="none" w="med" len="med"/>
+                      <a:tailEnd type="none" w="med" len="med"/>
+                    </a:lnT>
+                    <a:lnB w="9525" cap="flat" cmpd="sng" algn="ctr">
+                      <a:solidFill>
+                        <a:srgbClr val="E2E8F0"/>
+                      </a:solidFill>
+                      <a:prstDash val="solid"/>
+                      <a:round/>
+                      <a:headEnd type="none" w="med" len="med"/>
+                      <a:tailEnd type="none" w="med" len="med"/>
+                    </a:lnB>
+                    <a:solidFill>
+                      <a:srgbClr val="FFFFFF"/>
                     </a:solidFill>
                   </a:tcPr>
                 </a:tc>
@@ -16611,7 +16943,7 @@
                       <a:tailEnd type="none" w="med" len="med"/>
                     </a:lnB>
                     <a:solidFill>
-                      <a:srgbClr val="FFFFFF"/>
+                      <a:srgbClr val="F8FAFC"/>
                     </a:solidFill>
                   </a:tcPr>
                 </a:tc>
@@ -16679,7 +17011,7 @@
                       <a:tailEnd type="none" w="med" len="med"/>
                     </a:lnB>
                     <a:solidFill>
-                      <a:srgbClr val="FFFFFF"/>
+                      <a:srgbClr val="F8FAFC"/>
                     </a:solidFill>
                   </a:tcPr>
                 </a:tc>
@@ -16747,7 +17079,7 @@
                       <a:tailEnd type="none" w="med" len="med"/>
                     </a:lnB>
                     <a:solidFill>
-                      <a:srgbClr val="FFFFFF"/>
+                      <a:srgbClr val="F8FAFC"/>
                     </a:solidFill>
                   </a:tcPr>
                 </a:tc>
@@ -16817,7 +17149,7 @@
                       <a:tailEnd type="none" w="med" len="med"/>
                     </a:lnB>
                     <a:solidFill>
-                      <a:srgbClr val="F8FAFC"/>
+                      <a:srgbClr val="FFFFFF"/>
                     </a:solidFill>
                   </a:tcPr>
                 </a:tc>
@@ -16885,7 +17217,7 @@
                       <a:tailEnd type="none" w="med" len="med"/>
                     </a:lnB>
                     <a:solidFill>
-                      <a:srgbClr val="F8FAFC"/>
+                      <a:srgbClr val="FFFFFF"/>
                     </a:solidFill>
                   </a:tcPr>
                 </a:tc>
@@ -16953,7 +17285,7 @@
                       <a:tailEnd type="none" w="med" len="med"/>
                     </a:lnB>
                     <a:solidFill>
-                      <a:srgbClr val="F8FAFC"/>
+                      <a:srgbClr val="FFFFFF"/>
                     </a:solidFill>
                   </a:tcPr>
                 </a:tc>
@@ -17023,7 +17355,7 @@
                       <a:tailEnd type="none" w="med" len="med"/>
                     </a:lnB>
                     <a:solidFill>
-                      <a:srgbClr val="FFFFFF"/>
+                      <a:srgbClr val="F8FAFC"/>
                     </a:solidFill>
                   </a:tcPr>
                 </a:tc>
@@ -17091,6 +17423,144 @@
                       <a:tailEnd type="none" w="med" len="med"/>
                     </a:lnB>
                     <a:solidFill>
+                      <a:srgbClr val="F8FAFC"/>
+                    </a:solidFill>
+                  </a:tcPr>
+                </a:tc>
+                <a:tc>
+                  <a:txBody>
+                    <a:bodyPr/>
+                    <a:lstStyle/>
+                    <a:p>
+                      <a:pPr indent="0" marL="0">
+                        <a:buNone/>
+                      </a:pPr>
+                      <a:r>
+                        <a:rPr lang="en-US" sz="1050" dirty="0">
+                          <a:solidFill>
+                            <a:srgbClr val="0F172A"/>
+                          </a:solidFill>
+                          <a:latin typeface="Segoe UI" pitchFamily="34" charset="0"/>
+                          <a:ea typeface="Segoe UI" pitchFamily="34" charset="-122"/>
+                          <a:cs typeface="Segoe UI" pitchFamily="34" charset="-120"/>
+                        </a:rPr>
+                        <a:t>Trung bình - đổi bên trong seam, giữ API</a:t>
+                      </a:r>
+                      <a:endParaRPr lang="en-US" sz="1050" dirty="0">
+                        <a:latin typeface="Segoe UI" charset="0"/>
+                        <a:ea typeface="Segoe UI" charset="0"/>
+                        <a:cs typeface="Segoe UI" charset="0"/>
+                      </a:endParaRPr>
+                    </a:p>
+                  </a:txBody>
+                  <a:tcPr marL="73152" marR="73152" marT="73152" marB="73152" anchor="ctr">
+                    <a:lnL w="9525" cap="flat" cmpd="sng" algn="ctr">
+                      <a:solidFill>
+                        <a:srgbClr val="E2E8F0"/>
+                      </a:solidFill>
+                      <a:prstDash val="solid"/>
+                      <a:round/>
+                      <a:headEnd type="none" w="med" len="med"/>
+                      <a:tailEnd type="none" w="med" len="med"/>
+                    </a:lnL>
+                    <a:lnR w="9525" cap="flat" cmpd="sng" algn="ctr">
+                      <a:solidFill>
+                        <a:srgbClr val="E2E8F0"/>
+                      </a:solidFill>
+                      <a:prstDash val="solid"/>
+                      <a:round/>
+                      <a:headEnd type="none" w="med" len="med"/>
+                      <a:tailEnd type="none" w="med" len="med"/>
+                    </a:lnR>
+                    <a:lnT w="9525" cap="flat" cmpd="sng" algn="ctr">
+                      <a:solidFill>
+                        <a:srgbClr val="E2E8F0"/>
+                      </a:solidFill>
+                      <a:prstDash val="solid"/>
+                      <a:round/>
+                      <a:headEnd type="none" w="med" len="med"/>
+                      <a:tailEnd type="none" w="med" len="med"/>
+                    </a:lnT>
+                    <a:lnB w="9525" cap="flat" cmpd="sng" algn="ctr">
+                      <a:solidFill>
+                        <a:srgbClr val="E2E8F0"/>
+                      </a:solidFill>
+                      <a:prstDash val="solid"/>
+                      <a:round/>
+                      <a:headEnd type="none" w="med" len="med"/>
+                      <a:tailEnd type="none" w="med" len="med"/>
+                    </a:lnB>
+                    <a:solidFill>
+                      <a:srgbClr val="F8FAFC"/>
+                    </a:solidFill>
+                  </a:tcPr>
+                </a:tc>
+              </a:tr>
+              <a:tr h="658368">
+                <a:tc>
+                  <a:txBody>
+                    <a:bodyPr/>
+                    <a:lstStyle/>
+                    <a:p>
+                      <a:pPr indent="0" marL="0">
+                        <a:buNone/>
+                      </a:pPr>
+                      <a:r>
+                        <a:rPr lang="en-US" sz="1050" dirty="0">
+                          <a:solidFill>
+                            <a:srgbClr val="0F172A"/>
+                          </a:solidFill>
+                          <a:latin typeface="Segoe UI" pitchFamily="34" charset="0"/>
+                          <a:ea typeface="Segoe UI" pitchFamily="34" charset="-122"/>
+                          <a:cs typeface="Segoe UI" pitchFamily="34" charset="-120"/>
+                        </a:rPr>
+                        <a:t>LMS chấm tự động: essay_pending vẫn cần GV chấm tay; gian lận thi cử online chưa có chống chéo nâng cao</a:t>
+                      </a:r>
+                      <a:endParaRPr lang="en-US" sz="1050" dirty="0">
+                        <a:latin typeface="Segoe UI" charset="0"/>
+                        <a:ea typeface="Segoe UI" charset="0"/>
+                        <a:cs typeface="Segoe UI" charset="0"/>
+                      </a:endParaRPr>
+                    </a:p>
+                  </a:txBody>
+                  <a:tcPr marL="73152" marR="73152" marT="73152" marB="73152" anchor="ctr">
+                    <a:lnL w="9525" cap="flat" cmpd="sng" algn="ctr">
+                      <a:solidFill>
+                        <a:srgbClr val="E2E8F0"/>
+                      </a:solidFill>
+                      <a:prstDash val="solid"/>
+                      <a:round/>
+                      <a:headEnd type="none" w="med" len="med"/>
+                      <a:tailEnd type="none" w="med" len="med"/>
+                    </a:lnL>
+                    <a:lnR w="9525" cap="flat" cmpd="sng" algn="ctr">
+                      <a:solidFill>
+                        <a:srgbClr val="E2E8F0"/>
+                      </a:solidFill>
+                      <a:prstDash val="solid"/>
+                      <a:round/>
+                      <a:headEnd type="none" w="med" len="med"/>
+                      <a:tailEnd type="none" w="med" len="med"/>
+                    </a:lnR>
+                    <a:lnT w="9525" cap="flat" cmpd="sng" algn="ctr">
+                      <a:solidFill>
+                        <a:srgbClr val="E2E8F0"/>
+                      </a:solidFill>
+                      <a:prstDash val="solid"/>
+                      <a:round/>
+                      <a:headEnd type="none" w="med" len="med"/>
+                      <a:tailEnd type="none" w="med" len="med"/>
+                    </a:lnT>
+                    <a:lnB w="9525" cap="flat" cmpd="sng" algn="ctr">
+                      <a:solidFill>
+                        <a:srgbClr val="E2E8F0"/>
+                      </a:solidFill>
+                      <a:prstDash val="solid"/>
+                      <a:round/>
+                      <a:headEnd type="none" w="med" len="med"/>
+                      <a:tailEnd type="none" w="med" len="med"/>
+                    </a:lnB>
+                    <a:solidFill>
                       <a:srgbClr val="FFFFFF"/>
                     </a:solidFill>
                   </a:tcPr>
@@ -17112,7 +17582,75 @@
                           <a:ea typeface="Segoe UI" pitchFamily="34" charset="-122"/>
                           <a:cs typeface="Segoe UI" pitchFamily="34" charset="-120"/>
                         </a:rPr>
-                        <a:t>Trung bình - đổi bên trong seam, giữ API</a:t>
+                        <a:t>Chấp nhận ở mức bài tập lớp học; nâng cấp: chống tab-switch, giám sát webcam nếu làm thi thật</a:t>
+                      </a:r>
+                      <a:endParaRPr lang="en-US" sz="1050" dirty="0">
+                        <a:latin typeface="Segoe UI" charset="0"/>
+                        <a:ea typeface="Segoe UI" charset="0"/>
+                        <a:cs typeface="Segoe UI" charset="0"/>
+                      </a:endParaRPr>
+                    </a:p>
+                  </a:txBody>
+                  <a:tcPr marL="73152" marR="73152" marT="73152" marB="73152" anchor="ctr">
+                    <a:lnL w="9525" cap="flat" cmpd="sng" algn="ctr">
+                      <a:solidFill>
+                        <a:srgbClr val="E2E8F0"/>
+                      </a:solidFill>
+                      <a:prstDash val="solid"/>
+                      <a:round/>
+                      <a:headEnd type="none" w="med" len="med"/>
+                      <a:tailEnd type="none" w="med" len="med"/>
+                    </a:lnL>
+                    <a:lnR w="9525" cap="flat" cmpd="sng" algn="ctr">
+                      <a:solidFill>
+                        <a:srgbClr val="E2E8F0"/>
+                      </a:solidFill>
+                      <a:prstDash val="solid"/>
+                      <a:round/>
+                      <a:headEnd type="none" w="med" len="med"/>
+                      <a:tailEnd type="none" w="med" len="med"/>
+                    </a:lnR>
+                    <a:lnT w="9525" cap="flat" cmpd="sng" algn="ctr">
+                      <a:solidFill>
+                        <a:srgbClr val="E2E8F0"/>
+                      </a:solidFill>
+                      <a:prstDash val="solid"/>
+                      <a:round/>
+                      <a:headEnd type="none" w="med" len="med"/>
+                      <a:tailEnd type="none" w="med" len="med"/>
+                    </a:lnT>
+                    <a:lnB w="9525" cap="flat" cmpd="sng" algn="ctr">
+                      <a:solidFill>
+                        <a:srgbClr val="E2E8F0"/>
+                      </a:solidFill>
+                      <a:prstDash val="solid"/>
+                      <a:round/>
+                      <a:headEnd type="none" w="med" len="med"/>
+                      <a:tailEnd type="none" w="med" len="med"/>
+                    </a:lnB>
+                    <a:solidFill>
+                      <a:srgbClr val="FFFFFF"/>
+                    </a:solidFill>
+                  </a:tcPr>
+                </a:tc>
+                <a:tc>
+                  <a:txBody>
+                    <a:bodyPr/>
+                    <a:lstStyle/>
+                    <a:p>
+                      <a:pPr indent="0" marL="0">
+                        <a:buNone/>
+                      </a:pPr>
+                      <a:r>
+                        <a:rPr lang="en-US" sz="1050" dirty="0">
+                          <a:solidFill>
+                            <a:srgbClr val="0F172A"/>
+                          </a:solidFill>
+                          <a:latin typeface="Segoe UI" pitchFamily="34" charset="0"/>
+                          <a:ea typeface="Segoe UI" pitchFamily="34" charset="-122"/>
+                          <a:cs typeface="Segoe UI" pitchFamily="34" charset="-120"/>
+                        </a:rPr>
+                        <a:t>Trung bình - tính năng mới, chưa phải lỗi</a:t>
                       </a:r>
                       <a:endParaRPr lang="en-US" sz="1050" dirty="0">
                         <a:latin typeface="Segoe UI" charset="0"/>
@@ -18611,6 +19149,282 @@
                           <a:ea typeface="Segoe UI" pitchFamily="34" charset="-122"/>
                           <a:cs typeface="Segoe UI" pitchFamily="34" charset="-120"/>
                         </a:rPr>
+                        <a:t>Bán theo gói cho trường</a:t>
+                      </a:r>
+                      <a:endParaRPr lang="en-US" sz="1050" dirty="0">
+                        <a:latin typeface="Segoe UI" charset="0"/>
+                        <a:ea typeface="Segoe UI" charset="0"/>
+                        <a:cs typeface="Segoe UI" charset="0"/>
+                      </a:endParaRPr>
+                    </a:p>
+                  </a:txBody>
+                  <a:tcPr marL="73152" marR="73152" marT="73152" marB="73152" anchor="ctr">
+                    <a:lnL w="9525" cap="flat" cmpd="sng" algn="ctr">
+                      <a:solidFill>
+                        <a:srgbClr val="E2E8F0"/>
+                      </a:solidFill>
+                      <a:prstDash val="solid"/>
+                      <a:round/>
+                      <a:headEnd type="none" w="med" len="med"/>
+                      <a:tailEnd type="none" w="med" len="med"/>
+                    </a:lnL>
+                    <a:lnR w="9525" cap="flat" cmpd="sng" algn="ctr">
+                      <a:solidFill>
+                        <a:srgbClr val="E2E8F0"/>
+                      </a:solidFill>
+                      <a:prstDash val="solid"/>
+                      <a:round/>
+                      <a:headEnd type="none" w="med" len="med"/>
+                      <a:tailEnd type="none" w="med" len="med"/>
+                    </a:lnR>
+                    <a:lnT w="9525" cap="flat" cmpd="sng" algn="ctr">
+                      <a:solidFill>
+                        <a:srgbClr val="E2E8F0"/>
+                      </a:solidFill>
+                      <a:prstDash val="solid"/>
+                      <a:round/>
+                      <a:headEnd type="none" w="med" len="med"/>
+                      <a:tailEnd type="none" w="med" len="med"/>
+                    </a:lnT>
+                    <a:lnB w="9525" cap="flat" cmpd="sng" algn="ctr">
+                      <a:solidFill>
+                        <a:srgbClr val="E2E8F0"/>
+                      </a:solidFill>
+                      <a:prstDash val="solid"/>
+                      <a:round/>
+                      <a:headEnd type="none" w="med" len="med"/>
+                      <a:tailEnd type="none" w="med" len="med"/>
+                    </a:lnB>
+                    <a:solidFill>
+                      <a:srgbClr val="FFFFFF"/>
+                    </a:solidFill>
+                  </a:tcPr>
+                </a:tc>
+                <a:tc>
+                  <a:txBody>
+                    <a:bodyPr/>
+                    <a:lstStyle/>
+                    <a:p>
+                      <a:pPr indent="0" marL="0">
+                        <a:buNone/>
+                      </a:pPr>
+                      <a:r>
+                        <a:rPr lang="en-US" sz="1050" dirty="0">
+                          <a:solidFill>
+                            <a:srgbClr val="0F172A"/>
+                          </a:solidFill>
+                          <a:latin typeface="Segoe UI" pitchFamily="34" charset="0"/>
+                          <a:ea typeface="Segoe UI" pitchFamily="34" charset="-122"/>
+                          <a:cs typeface="Segoe UI" pitchFamily="34" charset="-120"/>
+                        </a:rPr>
+                        <a:t>school_features + gating 4 lớp - feature flags ở tầng kiến trúc, không phải if-else UI</a:t>
+                      </a:r>
+                      <a:endParaRPr lang="en-US" sz="1050" dirty="0">
+                        <a:latin typeface="Segoe UI" charset="0"/>
+                        <a:ea typeface="Segoe UI" charset="0"/>
+                        <a:cs typeface="Segoe UI" charset="0"/>
+                      </a:endParaRPr>
+                    </a:p>
+                  </a:txBody>
+                  <a:tcPr marL="73152" marR="73152" marT="73152" marB="73152" anchor="ctr">
+                    <a:lnL w="9525" cap="flat" cmpd="sng" algn="ctr">
+                      <a:solidFill>
+                        <a:srgbClr val="E2E8F0"/>
+                      </a:solidFill>
+                      <a:prstDash val="solid"/>
+                      <a:round/>
+                      <a:headEnd type="none" w="med" len="med"/>
+                      <a:tailEnd type="none" w="med" len="med"/>
+                    </a:lnL>
+                    <a:lnR w="9525" cap="flat" cmpd="sng" algn="ctr">
+                      <a:solidFill>
+                        <a:srgbClr val="E2E8F0"/>
+                      </a:solidFill>
+                      <a:prstDash val="solid"/>
+                      <a:round/>
+                      <a:headEnd type="none" w="med" len="med"/>
+                      <a:tailEnd type="none" w="med" len="med"/>
+                    </a:lnR>
+                    <a:lnT w="9525" cap="flat" cmpd="sng" algn="ctr">
+                      <a:solidFill>
+                        <a:srgbClr val="E2E8F0"/>
+                      </a:solidFill>
+                      <a:prstDash val="solid"/>
+                      <a:round/>
+                      <a:headEnd type="none" w="med" len="med"/>
+                      <a:tailEnd type="none" w="med" len="med"/>
+                    </a:lnT>
+                    <a:lnB w="9525" cap="flat" cmpd="sng" algn="ctr">
+                      <a:solidFill>
+                        <a:srgbClr val="E2E8F0"/>
+                      </a:solidFill>
+                      <a:prstDash val="solid"/>
+                      <a:round/>
+                      <a:headEnd type="none" w="med" len="med"/>
+                      <a:tailEnd type="none" w="med" len="med"/>
+                    </a:lnB>
+                    <a:solidFill>
+                      <a:srgbClr val="FFFFFF"/>
+                    </a:solidFill>
+                  </a:tcPr>
+                </a:tc>
+              </a:tr>
+              <a:tr h="512064">
+                <a:tc>
+                  <a:txBody>
+                    <a:bodyPr/>
+                    <a:lstStyle/>
+                    <a:p>
+                      <a:pPr indent="0" marL="0">
+                        <a:buNone/>
+                      </a:pPr>
+                      <a:r>
+                        <a:rPr lang="en-US" sz="1050" dirty="0">
+                          <a:solidFill>
+                            <a:srgbClr val="0F172A"/>
+                          </a:solidFill>
+                          <a:latin typeface="Segoe UI" pitchFamily="34" charset="0"/>
+                          <a:ea typeface="Segoe UI" pitchFamily="34" charset="-122"/>
+                          <a:cs typeface="Segoe UI" pitchFamily="34" charset="-120"/>
+                        </a:rPr>
+                        <a:t>Cổng public cho phụ huynh tuyển sinh</a:t>
+                      </a:r>
+                      <a:endParaRPr lang="en-US" sz="1050" dirty="0">
+                        <a:latin typeface="Segoe UI" charset="0"/>
+                        <a:ea typeface="Segoe UI" charset="0"/>
+                        <a:cs typeface="Segoe UI" charset="0"/>
+                      </a:endParaRPr>
+                    </a:p>
+                  </a:txBody>
+                  <a:tcPr marL="73152" marR="73152" marT="73152" marB="73152" anchor="ctr">
+                    <a:lnL w="9525" cap="flat" cmpd="sng" algn="ctr">
+                      <a:solidFill>
+                        <a:srgbClr val="E2E8F0"/>
+                      </a:solidFill>
+                      <a:prstDash val="solid"/>
+                      <a:round/>
+                      <a:headEnd type="none" w="med" len="med"/>
+                      <a:tailEnd type="none" w="med" len="med"/>
+                    </a:lnL>
+                    <a:lnR w="9525" cap="flat" cmpd="sng" algn="ctr">
+                      <a:solidFill>
+                        <a:srgbClr val="E2E8F0"/>
+                      </a:solidFill>
+                      <a:prstDash val="solid"/>
+                      <a:round/>
+                      <a:headEnd type="none" w="med" len="med"/>
+                      <a:tailEnd type="none" w="med" len="med"/>
+                    </a:lnR>
+                    <a:lnT w="9525" cap="flat" cmpd="sng" algn="ctr">
+                      <a:solidFill>
+                        <a:srgbClr val="E2E8F0"/>
+                      </a:solidFill>
+                      <a:prstDash val="solid"/>
+                      <a:round/>
+                      <a:headEnd type="none" w="med" len="med"/>
+                      <a:tailEnd type="none" w="med" len="med"/>
+                    </a:lnT>
+                    <a:lnB w="9525" cap="flat" cmpd="sng" algn="ctr">
+                      <a:solidFill>
+                        <a:srgbClr val="E2E8F0"/>
+                      </a:solidFill>
+                      <a:prstDash val="solid"/>
+                      <a:round/>
+                      <a:headEnd type="none" w="med" len="med"/>
+                      <a:tailEnd type="none" w="med" len="med"/>
+                    </a:lnB>
+                    <a:solidFill>
+                      <a:srgbClr val="F8FAFC"/>
+                    </a:solidFill>
+                  </a:tcPr>
+                </a:tc>
+                <a:tc>
+                  <a:txBody>
+                    <a:bodyPr/>
+                    <a:lstStyle/>
+                    <a:p>
+                      <a:pPr indent="0" marL="0">
+                        <a:buNone/>
+                      </a:pPr>
+                      <a:r>
+                        <a:rPr lang="en-US" sz="1050" dirty="0">
+                          <a:solidFill>
+                            <a:srgbClr val="0F172A"/>
+                          </a:solidFill>
+                          <a:latin typeface="Segoe UI" pitchFamily="34" charset="0"/>
+                          <a:ea typeface="Segoe UI" pitchFamily="34" charset="-122"/>
+                          <a:cs typeface="Segoe UI" pitchFamily="34" charset="-120"/>
+                        </a:rPr>
+                        <a:t>Route /apply ngoài auth + Turnstile + RPC-only writes - public không đồng nghĩa mở toang</a:t>
+                      </a:r>
+                      <a:endParaRPr lang="en-US" sz="1050" dirty="0">
+                        <a:latin typeface="Segoe UI" charset="0"/>
+                        <a:ea typeface="Segoe UI" charset="0"/>
+                        <a:cs typeface="Segoe UI" charset="0"/>
+                      </a:endParaRPr>
+                    </a:p>
+                  </a:txBody>
+                  <a:tcPr marL="73152" marR="73152" marT="73152" marB="73152" anchor="ctr">
+                    <a:lnL w="9525" cap="flat" cmpd="sng" algn="ctr">
+                      <a:solidFill>
+                        <a:srgbClr val="E2E8F0"/>
+                      </a:solidFill>
+                      <a:prstDash val="solid"/>
+                      <a:round/>
+                      <a:headEnd type="none" w="med" len="med"/>
+                      <a:tailEnd type="none" w="med" len="med"/>
+                    </a:lnL>
+                    <a:lnR w="9525" cap="flat" cmpd="sng" algn="ctr">
+                      <a:solidFill>
+                        <a:srgbClr val="E2E8F0"/>
+                      </a:solidFill>
+                      <a:prstDash val="solid"/>
+                      <a:round/>
+                      <a:headEnd type="none" w="med" len="med"/>
+                      <a:tailEnd type="none" w="med" len="med"/>
+                    </a:lnR>
+                    <a:lnT w="9525" cap="flat" cmpd="sng" algn="ctr">
+                      <a:solidFill>
+                        <a:srgbClr val="E2E8F0"/>
+                      </a:solidFill>
+                      <a:prstDash val="solid"/>
+                      <a:round/>
+                      <a:headEnd type="none" w="med" len="med"/>
+                      <a:tailEnd type="none" w="med" len="med"/>
+                    </a:lnT>
+                    <a:lnB w="9525" cap="flat" cmpd="sng" algn="ctr">
+                      <a:solidFill>
+                        <a:srgbClr val="E2E8F0"/>
+                      </a:solidFill>
+                      <a:prstDash val="solid"/>
+                      <a:round/>
+                      <a:headEnd type="none" w="med" len="med"/>
+                      <a:tailEnd type="none" w="med" len="med"/>
+                    </a:lnB>
+                    <a:solidFill>
+                      <a:srgbClr val="F8FAFC"/>
+                    </a:solidFill>
+                  </a:tcPr>
+                </a:tc>
+              </a:tr>
+              <a:tr h="512064">
+                <a:tc>
+                  <a:txBody>
+                    <a:bodyPr/>
+                    <a:lstStyle/>
+                    <a:p>
+                      <a:pPr indent="0" marL="0">
+                        <a:buNone/>
+                      </a:pPr>
+                      <a:r>
+                        <a:rPr lang="en-US" sz="1050" dirty="0">
+                          <a:solidFill>
+                            <a:srgbClr val="0F172A"/>
+                          </a:solidFill>
+                          <a:latin typeface="Segoe UI" pitchFamily="34" charset="0"/>
+                          <a:ea typeface="Segoe UI" pitchFamily="34" charset="-122"/>
+                          <a:cs typeface="Segoe UI" pitchFamily="34" charset="-120"/>
+                        </a:rPr>
                         <a:t>Xuất tài liệu hành chính</a:t>
                       </a:r>
                       <a:endParaRPr lang="en-US" sz="1050" dirty="0">
@@ -18947,7 +19761,7 @@
                 <a:ea typeface="Segoe UI" pitchFamily="34" charset="-122"/>
                 <a:cs typeface="Segoe UI" pitchFamily="34" charset="-120"/>
               </a:rPr>
-              <a:t>RLS biến yêu cầu khó nhất (phân quyền đa vai trò) thành thế mạnh; 1 Postgres giữ nhất quán mà không cần saga</a:t>
+              <a:t>RLS biến yêu cầu khó nhất (phân quyền đa vai trò) thành thế mạnh; 1 Postgres giữ nhất quán mà không cần saga - kể cả chuỗi tuyển sinh -&gt; nhập học -&gt; thu phí -&gt; học bạ</a:t>
             </a:r>
             <a:endParaRPr lang="en-US" sz="1350" dirty="0"/>
           </a:p>
@@ -18968,7 +19782,28 @@
                 <a:ea typeface="Segoe UI" pitchFamily="34" charset="-122"/>
                 <a:cs typeface="Segoe UI" pitchFamily="34" charset="-120"/>
               </a:rPr>
-              <a:t>Không broker/Redis vì chưa có số đo đòi hỏi - seams (ai_jobs, cron, route groups) đã đặt sẵn để thêm khi scale chứng minh cần</a:t>
+              <a:t>Module flags (school_features) đưa 'bán theo gói' xuống tầng kiến trúc: tắt flag = nav + route + RPC + RLS cùng tắt</a:t>
+            </a:r>
+            <a:endParaRPr lang="en-US" sz="1350" dirty="0"/>
+          </a:p>
+          <a:p>
+            <a:pPr marL="177800" indent="-177800">
+              <a:spcAft>
+                <a:spcPts val="800"/>
+              </a:spcAft>
+              <a:buSzPct val="100000"/>
+              <a:buChar char="•"/>
+            </a:pPr>
+            <a:r>
+              <a:rPr lang="en-US" sz="1350" dirty="0">
+                <a:solidFill>
+                  <a:srgbClr val="FFFFFF"/>
+                </a:solidFill>
+                <a:latin typeface="Segoe UI" pitchFamily="34" charset="0"/>
+                <a:ea typeface="Segoe UI" pitchFamily="34" charset="-122"/>
+                <a:cs typeface="Segoe UI" pitchFamily="34" charset="-120"/>
+              </a:rPr>
+              <a:t>Không broker/Redis vì chưa có số đo đòi hỏi - seams (ai_jobs, cron, route groups, schema-per-app) đã đặt sẵn để thêm khi scale chứng minh cần</a:t>
             </a:r>
             <a:endParaRPr lang="en-US" sz="1350" dirty="0"/>
           </a:p>
@@ -19028,7 +19863,7 @@
                 <a:ea typeface="Segoe UI" pitchFamily="34" charset="-122"/>
                 <a:cs typeface="Segoe UI" pitchFamily="34" charset="-120"/>
               </a:rPr>
-              <a:t>Tài liệu kèm: USER-GUIDE-vieschool.pptx (38 slides, 10 vai trò) - docs/project/ARCHITECTURE.md (chi tiết kỹ thuật)</a:t>
+              <a:t>Tài liệu kèm: USER-GUIDE-vieschool.pptx (43 slides, 10 vai trò + module mở rộng) - docs/project/ARCHITECTURE.md (chi tiết kỹ thuật)</a:t>
             </a:r>
             <a:endParaRPr lang="en-US" sz="1100" dirty="0"/>
           </a:p>
@@ -19695,7 +20530,24 @@
                 <a:ea typeface="Segoe UI" pitchFamily="34" charset="-122"/>
                 <a:cs typeface="Segoe UI" pitchFamily="34" charset="-120"/>
               </a:rPr>
-              <a:t>Postgres ~30+ bảng</a:t>
+              <a:t>public: 86 bảng SCN</a:t>
+            </a:r>
+            <a:endParaRPr lang="en-US" sz="1000" dirty="0"/>
+          </a:p>
+          <a:p>
+            <a:pPr algn="ctr" indent="0" marL="0">
+              <a:buNone/>
+            </a:pPr>
+            <a:r>
+              <a:rPr lang="en-US" sz="1000" dirty="0">
+                <a:solidFill>
+                  <a:srgbClr val="475569"/>
+                </a:solidFill>
+                <a:latin typeface="Segoe UI" pitchFamily="34" charset="0"/>
+                <a:ea typeface="Segoe UI" pitchFamily="34" charset="-122"/>
+                <a:cs typeface="Segoe UI" pitchFamily="34" charset="-120"/>
+              </a:rPr>
+              <a:t>+ 3 schema app khác</a:t>
             </a:r>
             <a:endParaRPr lang="en-US" sz="1000" dirty="0"/>
           </a:p>
@@ -19713,23 +20565,6 @@
                 <a:cs typeface="Segoe UI" pitchFamily="34" charset="-120"/>
               </a:rPr>
               <a:t>RLS mọi bảng tenant</a:t>
-            </a:r>
-            <a:endParaRPr lang="en-US" sz="1000" dirty="0"/>
-          </a:p>
-          <a:p>
-            <a:pPr algn="ctr" indent="0" marL="0">
-              <a:buNone/>
-            </a:pPr>
-            <a:r>
-              <a:rPr lang="en-US" sz="1000" dirty="0">
-                <a:solidFill>
-                  <a:srgbClr val="475569"/>
-                </a:solidFill>
-                <a:latin typeface="Segoe UI" pitchFamily="34" charset="0"/>
-                <a:ea typeface="Segoe UI" pitchFamily="34" charset="-122"/>
-                <a:cs typeface="Segoe UI" pitchFamily="34" charset="-120"/>
-              </a:rPr>
-              <a:t>Auth email/password</a:t>
             </a:r>
             <a:endParaRPr lang="en-US" sz="1000" dirty="0"/>
           </a:p>
@@ -19990,7 +20825,28 @@
                 <a:ea typeface="Segoe UI" pitchFamily="34" charset="-122"/>
                 <a:cs typeface="Segoe UI" pitchFamily="34" charset="-120"/>
               </a:rPr>
-              <a:t>Supabase project chung với một sản phẩm nội bộ khác - tách biệt bằng RLS, không phải DB riêng</a:t>
+              <a:t>Cùng Supabase project có 3 schema của các app nội bộ khác - cô lập bằng schema + RLS; SCN chiếm schema public (86 bảng)</a:t>
+            </a:r>
+            <a:endParaRPr lang="en-US" sz="1250" dirty="0"/>
+          </a:p>
+          <a:p>
+            <a:pPr marL="177800" indent="-177800">
+              <a:spcAft>
+                <a:spcPts val="800"/>
+              </a:spcAft>
+              <a:buSzPct val="100000"/>
+              <a:buChar char="•"/>
+            </a:pPr>
+            <a:r>
+              <a:rPr lang="en-US" sz="1250" dirty="0">
+                <a:solidFill>
+                  <a:srgbClr val="0F172A"/>
+                </a:solidFill>
+                <a:latin typeface="Segoe UI" pitchFamily="34" charset="0"/>
+                <a:ea typeface="Segoe UI" pitchFamily="34" charset="-122"/>
+                <a:cs typeface="Segoe UI" pitchFamily="34" charset="-120"/>
+              </a:rPr>
+              <a:t>Surface public duy nhất: /apply (tuyển sinh, không cần login) - Turnstile + revoke anon + RPC security-definer</a:t>
             </a:r>
             <a:endParaRPr lang="en-US" sz="1250" dirty="0"/>
           </a:p>
@@ -22655,6 +23511,27 @@
                 <a:ea typeface="Segoe UI" pitchFamily="34" charset="-122"/>
                 <a:cs typeface="Segoe UI" pitchFamily="34" charset="-120"/>
               </a:rPr>
+              <a:t>Lớp 2.5 - schoolFeature(module): trường tắt module thì nav mất + route redirect + RPC trả module_disabled + RLS chặn (CR-060)</a:t>
+            </a:r>
+            <a:endParaRPr lang="en-US" sz="1150" dirty="0"/>
+          </a:p>
+          <a:p>
+            <a:pPr marL="177800" indent="-177800">
+              <a:spcAft>
+                <a:spcPts val="800"/>
+              </a:spcAft>
+              <a:buSzPct val="100000"/>
+              <a:buChar char="•"/>
+            </a:pPr>
+            <a:r>
+              <a:rPr lang="en-US" sz="1150" dirty="0">
+                <a:solidFill>
+                  <a:srgbClr val="0F172A"/>
+                </a:solidFill>
+                <a:latin typeface="Segoe UI" pitchFamily="34" charset="0"/>
+                <a:ea typeface="Segoe UI" pitchFamily="34" charset="-122"/>
+                <a:cs typeface="Segoe UI" pitchFamily="34" charset="-120"/>
+              </a:rPr>
               <a:t>WAF Vercel: rate limit /api + /login, bypass-health cho uptime monitor; headers CSP/HSTS/nosniff/X-Frame đầy đủ</a:t>
             </a:r>
             <a:endParaRPr lang="en-US" sz="1150" dirty="0"/>
@@ -22676,7 +23553,7 @@
                 <a:ea typeface="Segoe UI" pitchFamily="34" charset="-122"/>
                 <a:cs typeface="Segoe UI" pitchFamily="34" charset="-120"/>
               </a:rPr>
-              <a:t>Anti-scraping lớp 1 (CR-054, đã deploy): robots.txt chặn AI crawler, noindex route authed, export cap 20/h/uid, Turnstile login</a:t>
+              <a:t>Anti-scraping (CR-054): robots.txt chặn AI crawler, noindex route authed, export cap 20/h/uid; Turnstile login + /apply public</a:t>
             </a:r>
             <a:endParaRPr lang="en-US" sz="1150" dirty="0"/>
           </a:p>
@@ -23170,7 +24047,7 @@
                 <a:gridCol w="3657600"/>
                 <a:gridCol w="3657600"/>
               </a:tblGrid>
-              <a:tr h="420624">
+              <a:tr h="384048">
                 <a:tc>
                   <a:txBody>
                     <a:bodyPr/>
@@ -23376,7 +24253,7 @@
                   </a:tcPr>
                 </a:tc>
               </a:tr>
-              <a:tr h="420624">
+              <a:tr h="384048">
                 <a:tc>
                   <a:txBody>
                     <a:bodyPr/>
@@ -23582,7 +24459,7 @@
                   </a:tcPr>
                 </a:tc>
               </a:tr>
-              <a:tr h="420624">
+              <a:tr h="384048">
                 <a:tc>
                   <a:txBody>
                     <a:bodyPr/>
@@ -23788,7 +24665,7 @@
                   </a:tcPr>
                 </a:tc>
               </a:tr>
-              <a:tr h="420624">
+              <a:tr h="384048">
                 <a:tc>
                   <a:txBody>
                     <a:bodyPr/>
@@ -23994,7 +24871,7 @@
                   </a:tcPr>
                 </a:tc>
               </a:tr>
-              <a:tr h="420624">
+              <a:tr h="384048">
                 <a:tc>
                   <a:txBody>
                     <a:bodyPr/>
@@ -24200,7 +25077,7 @@
                   </a:tcPr>
                 </a:tc>
               </a:tr>
-              <a:tr h="420624">
+              <a:tr h="384048">
                 <a:tc>
                   <a:txBody>
                     <a:bodyPr/>
@@ -24406,7 +25283,7 @@
                   </a:tcPr>
                 </a:tc>
               </a:tr>
-              <a:tr h="420624">
+              <a:tr h="384048">
                 <a:tc>
                   <a:txBody>
                     <a:bodyPr/>
@@ -24612,7 +25489,1037 @@
                   </a:tcPr>
                 </a:tc>
               </a:tr>
-              <a:tr h="420624">
+              <a:tr h="384048">
+                <a:tc>
+                  <a:txBody>
+                    <a:bodyPr/>
+                    <a:lstStyle/>
+                    <a:p>
+                      <a:pPr indent="0" marL="0">
+                        <a:buNone/>
+                      </a:pPr>
+                      <a:r>
+                        <a:rPr lang="en-US" sz="1050" dirty="0">
+                          <a:solidFill>
+                            <a:srgbClr val="0F172A"/>
+                          </a:solidFill>
+                          <a:latin typeface="Segoe UI" pitchFamily="34" charset="0"/>
+                          <a:ea typeface="Segoe UI" pitchFamily="34" charset="-122"/>
+                          <a:cs typeface="Segoe UI" pitchFamily="34" charset="-120"/>
+                        </a:rPr>
+                        <a:t>Tuyển sinh</a:t>
+                      </a:r>
+                      <a:endParaRPr lang="en-US" sz="1050" dirty="0">
+                        <a:latin typeface="Segoe UI" charset="0"/>
+                        <a:ea typeface="Segoe UI" charset="0"/>
+                        <a:cs typeface="Segoe UI" charset="0"/>
+                      </a:endParaRPr>
+                    </a:p>
+                  </a:txBody>
+                  <a:tcPr marL="73152" marR="73152" marT="73152" marB="73152" anchor="ctr">
+                    <a:lnL w="9525" cap="flat" cmpd="sng" algn="ctr">
+                      <a:solidFill>
+                        <a:srgbClr val="E2E8F0"/>
+                      </a:solidFill>
+                      <a:prstDash val="solid"/>
+                      <a:round/>
+                      <a:headEnd type="none" w="med" len="med"/>
+                      <a:tailEnd type="none" w="med" len="med"/>
+                    </a:lnL>
+                    <a:lnR w="9525" cap="flat" cmpd="sng" algn="ctr">
+                      <a:solidFill>
+                        <a:srgbClr val="E2E8F0"/>
+                      </a:solidFill>
+                      <a:prstDash val="solid"/>
+                      <a:round/>
+                      <a:headEnd type="none" w="med" len="med"/>
+                      <a:tailEnd type="none" w="med" len="med"/>
+                    </a:lnR>
+                    <a:lnT w="9525" cap="flat" cmpd="sng" algn="ctr">
+                      <a:solidFill>
+                        <a:srgbClr val="E2E8F0"/>
+                      </a:solidFill>
+                      <a:prstDash val="solid"/>
+                      <a:round/>
+                      <a:headEnd type="none" w="med" len="med"/>
+                      <a:tailEnd type="none" w="med" len="med"/>
+                    </a:lnT>
+                    <a:lnB w="9525" cap="flat" cmpd="sng" algn="ctr">
+                      <a:solidFill>
+                        <a:srgbClr val="E2E8F0"/>
+                      </a:solidFill>
+                      <a:prstDash val="solid"/>
+                      <a:round/>
+                      <a:headEnd type="none" w="med" len="med"/>
+                      <a:tailEnd type="none" w="med" len="med"/>
+                    </a:lnB>
+                    <a:solidFill>
+                      <a:srgbClr val="FFFFFF"/>
+                    </a:solidFill>
+                  </a:tcPr>
+                </a:tc>
+                <a:tc>
+                  <a:txBody>
+                    <a:bodyPr/>
+                    <a:lstStyle/>
+                    <a:p>
+                      <a:pPr indent="0" marL="0">
+                        <a:buNone/>
+                      </a:pPr>
+                      <a:r>
+                        <a:rPr lang="en-US" sz="1050" dirty="0">
+                          <a:solidFill>
+                            <a:srgbClr val="0F172A"/>
+                          </a:solidFill>
+                          <a:latin typeface="Segoe UI" pitchFamily="34" charset="0"/>
+                          <a:ea typeface="Segoe UI" pitchFamily="34" charset="-122"/>
+                          <a:cs typeface="Segoe UI" pitchFamily="34" charset="-120"/>
+                        </a:rPr>
+                        <a:t>school/admissions/, apply/ (public)</a:t>
+                      </a:r>
+                      <a:endParaRPr lang="en-US" sz="1050" dirty="0">
+                        <a:latin typeface="Segoe UI" charset="0"/>
+                        <a:ea typeface="Segoe UI" charset="0"/>
+                        <a:cs typeface="Segoe UI" charset="0"/>
+                      </a:endParaRPr>
+                    </a:p>
+                  </a:txBody>
+                  <a:tcPr marL="73152" marR="73152" marT="73152" marB="73152" anchor="ctr">
+                    <a:lnL w="9525" cap="flat" cmpd="sng" algn="ctr">
+                      <a:solidFill>
+                        <a:srgbClr val="E2E8F0"/>
+                      </a:solidFill>
+                      <a:prstDash val="solid"/>
+                      <a:round/>
+                      <a:headEnd type="none" w="med" len="med"/>
+                      <a:tailEnd type="none" w="med" len="med"/>
+                    </a:lnL>
+                    <a:lnR w="9525" cap="flat" cmpd="sng" algn="ctr">
+                      <a:solidFill>
+                        <a:srgbClr val="E2E8F0"/>
+                      </a:solidFill>
+                      <a:prstDash val="solid"/>
+                      <a:round/>
+                      <a:headEnd type="none" w="med" len="med"/>
+                      <a:tailEnd type="none" w="med" len="med"/>
+                    </a:lnR>
+                    <a:lnT w="9525" cap="flat" cmpd="sng" algn="ctr">
+                      <a:solidFill>
+                        <a:srgbClr val="E2E8F0"/>
+                      </a:solidFill>
+                      <a:prstDash val="solid"/>
+                      <a:round/>
+                      <a:headEnd type="none" w="med" len="med"/>
+                      <a:tailEnd type="none" w="med" len="med"/>
+                    </a:lnT>
+                    <a:lnB w="9525" cap="flat" cmpd="sng" algn="ctr">
+                      <a:solidFill>
+                        <a:srgbClr val="E2E8F0"/>
+                      </a:solidFill>
+                      <a:prstDash val="solid"/>
+                      <a:round/>
+                      <a:headEnd type="none" w="med" len="med"/>
+                      <a:tailEnd type="none" w="med" len="med"/>
+                    </a:lnB>
+                    <a:solidFill>
+                      <a:srgbClr val="FFFFFF"/>
+                    </a:solidFill>
+                  </a:tcPr>
+                </a:tc>
+                <a:tc>
+                  <a:txBody>
+                    <a:bodyPr/>
+                    <a:lstStyle/>
+                    <a:p>
+                      <a:pPr indent="0" marL="0">
+                        <a:buNone/>
+                      </a:pPr>
+                      <a:r>
+                        <a:rPr lang="en-US" sz="1050" dirty="0">
+                          <a:solidFill>
+                            <a:srgbClr val="0F172A"/>
+                          </a:solidFill>
+                          <a:latin typeface="Segoe UI" pitchFamily="34" charset="0"/>
+                          <a:ea typeface="Segoe UI" pitchFamily="34" charset="-122"/>
+                          <a:cs typeface="Segoe UI" pitchFamily="34" charset="-120"/>
+                        </a:rPr>
+                        <a:t>admission_campaigns, applications</a:t>
+                      </a:r>
+                      <a:endParaRPr lang="en-US" sz="1050" dirty="0">
+                        <a:latin typeface="Segoe UI" charset="0"/>
+                        <a:ea typeface="Segoe UI" charset="0"/>
+                        <a:cs typeface="Segoe UI" charset="0"/>
+                      </a:endParaRPr>
+                    </a:p>
+                  </a:txBody>
+                  <a:tcPr marL="73152" marR="73152" marT="73152" marB="73152" anchor="ctr">
+                    <a:lnL w="9525" cap="flat" cmpd="sng" algn="ctr">
+                      <a:solidFill>
+                        <a:srgbClr val="E2E8F0"/>
+                      </a:solidFill>
+                      <a:prstDash val="solid"/>
+                      <a:round/>
+                      <a:headEnd type="none" w="med" len="med"/>
+                      <a:tailEnd type="none" w="med" len="med"/>
+                    </a:lnL>
+                    <a:lnR w="9525" cap="flat" cmpd="sng" algn="ctr">
+                      <a:solidFill>
+                        <a:srgbClr val="E2E8F0"/>
+                      </a:solidFill>
+                      <a:prstDash val="solid"/>
+                      <a:round/>
+                      <a:headEnd type="none" w="med" len="med"/>
+                      <a:tailEnd type="none" w="med" len="med"/>
+                    </a:lnR>
+                    <a:lnT w="9525" cap="flat" cmpd="sng" algn="ctr">
+                      <a:solidFill>
+                        <a:srgbClr val="E2E8F0"/>
+                      </a:solidFill>
+                      <a:prstDash val="solid"/>
+                      <a:round/>
+                      <a:headEnd type="none" w="med" len="med"/>
+                      <a:tailEnd type="none" w="med" len="med"/>
+                    </a:lnT>
+                    <a:lnB w="9525" cap="flat" cmpd="sng" algn="ctr">
+                      <a:solidFill>
+                        <a:srgbClr val="E2E8F0"/>
+                      </a:solidFill>
+                      <a:prstDash val="solid"/>
+                      <a:round/>
+                      <a:headEnd type="none" w="med" len="med"/>
+                      <a:tailEnd type="none" w="med" len="med"/>
+                    </a:lnB>
+                    <a:solidFill>
+                      <a:srgbClr val="FFFFFF"/>
+                    </a:solidFill>
+                  </a:tcPr>
+                </a:tc>
+              </a:tr>
+              <a:tr h="384048">
+                <a:tc>
+                  <a:txBody>
+                    <a:bodyPr/>
+                    <a:lstStyle/>
+                    <a:p>
+                      <a:pPr indent="0" marL="0">
+                        <a:buNone/>
+                      </a:pPr>
+                      <a:r>
+                        <a:rPr lang="en-US" sz="1050" dirty="0">
+                          <a:solidFill>
+                            <a:srgbClr val="0F172A"/>
+                          </a:solidFill>
+                          <a:latin typeface="Segoe UI" pitchFamily="34" charset="0"/>
+                          <a:ea typeface="Segoe UI" pitchFamily="34" charset="-122"/>
+                          <a:cs typeface="Segoe UI" pitchFamily="34" charset="-120"/>
+                        </a:rPr>
+                        <a:t>Khoản thu</a:t>
+                      </a:r>
+                      <a:endParaRPr lang="en-US" sz="1050" dirty="0">
+                        <a:latin typeface="Segoe UI" charset="0"/>
+                        <a:ea typeface="Segoe UI" charset="0"/>
+                        <a:cs typeface="Segoe UI" charset="0"/>
+                      </a:endParaRPr>
+                    </a:p>
+                  </a:txBody>
+                  <a:tcPr marL="73152" marR="73152" marT="73152" marB="73152" anchor="ctr">
+                    <a:lnL w="9525" cap="flat" cmpd="sng" algn="ctr">
+                      <a:solidFill>
+                        <a:srgbClr val="E2E8F0"/>
+                      </a:solidFill>
+                      <a:prstDash val="solid"/>
+                      <a:round/>
+                      <a:headEnd type="none" w="med" len="med"/>
+                      <a:tailEnd type="none" w="med" len="med"/>
+                    </a:lnL>
+                    <a:lnR w="9525" cap="flat" cmpd="sng" algn="ctr">
+                      <a:solidFill>
+                        <a:srgbClr val="E2E8F0"/>
+                      </a:solidFill>
+                      <a:prstDash val="solid"/>
+                      <a:round/>
+                      <a:headEnd type="none" w="med" len="med"/>
+                      <a:tailEnd type="none" w="med" len="med"/>
+                    </a:lnR>
+                    <a:lnT w="9525" cap="flat" cmpd="sng" algn="ctr">
+                      <a:solidFill>
+                        <a:srgbClr val="E2E8F0"/>
+                      </a:solidFill>
+                      <a:prstDash val="solid"/>
+                      <a:round/>
+                      <a:headEnd type="none" w="med" len="med"/>
+                      <a:tailEnd type="none" w="med" len="med"/>
+                    </a:lnT>
+                    <a:lnB w="9525" cap="flat" cmpd="sng" algn="ctr">
+                      <a:solidFill>
+                        <a:srgbClr val="E2E8F0"/>
+                      </a:solidFill>
+                      <a:prstDash val="solid"/>
+                      <a:round/>
+                      <a:headEnd type="none" w="med" len="med"/>
+                      <a:tailEnd type="none" w="med" len="med"/>
+                    </a:lnB>
+                    <a:solidFill>
+                      <a:srgbClr val="F8FAFC"/>
+                    </a:solidFill>
+                  </a:tcPr>
+                </a:tc>
+                <a:tc>
+                  <a:txBody>
+                    <a:bodyPr/>
+                    <a:lstStyle/>
+                    <a:p>
+                      <a:pPr indent="0" marL="0">
+                        <a:buNone/>
+                      </a:pPr>
+                      <a:r>
+                        <a:rPr lang="en-US" sz="1050" dirty="0">
+                          <a:solidFill>
+                            <a:srgbClr val="0F172A"/>
+                          </a:solidFill>
+                          <a:latin typeface="Segoe UI" pitchFamily="34" charset="0"/>
+                          <a:ea typeface="Segoe UI" pitchFamily="34" charset="-122"/>
+                          <a:cs typeface="Segoe UI" pitchFamily="34" charset="-120"/>
+                        </a:rPr>
+                        <a:t>finance/</a:t>
+                      </a:r>
+                      <a:endParaRPr lang="en-US" sz="1050" dirty="0">
+                        <a:latin typeface="Segoe UI" charset="0"/>
+                        <a:ea typeface="Segoe UI" charset="0"/>
+                        <a:cs typeface="Segoe UI" charset="0"/>
+                      </a:endParaRPr>
+                    </a:p>
+                  </a:txBody>
+                  <a:tcPr marL="73152" marR="73152" marT="73152" marB="73152" anchor="ctr">
+                    <a:lnL w="9525" cap="flat" cmpd="sng" algn="ctr">
+                      <a:solidFill>
+                        <a:srgbClr val="E2E8F0"/>
+                      </a:solidFill>
+                      <a:prstDash val="solid"/>
+                      <a:round/>
+                      <a:headEnd type="none" w="med" len="med"/>
+                      <a:tailEnd type="none" w="med" len="med"/>
+                    </a:lnL>
+                    <a:lnR w="9525" cap="flat" cmpd="sng" algn="ctr">
+                      <a:solidFill>
+                        <a:srgbClr val="E2E8F0"/>
+                      </a:solidFill>
+                      <a:prstDash val="solid"/>
+                      <a:round/>
+                      <a:headEnd type="none" w="med" len="med"/>
+                      <a:tailEnd type="none" w="med" len="med"/>
+                    </a:lnR>
+                    <a:lnT w="9525" cap="flat" cmpd="sng" algn="ctr">
+                      <a:solidFill>
+                        <a:srgbClr val="E2E8F0"/>
+                      </a:solidFill>
+                      <a:prstDash val="solid"/>
+                      <a:round/>
+                      <a:headEnd type="none" w="med" len="med"/>
+                      <a:tailEnd type="none" w="med" len="med"/>
+                    </a:lnT>
+                    <a:lnB w="9525" cap="flat" cmpd="sng" algn="ctr">
+                      <a:solidFill>
+                        <a:srgbClr val="E2E8F0"/>
+                      </a:solidFill>
+                      <a:prstDash val="solid"/>
+                      <a:round/>
+                      <a:headEnd type="none" w="med" len="med"/>
+                      <a:tailEnd type="none" w="med" len="med"/>
+                    </a:lnB>
+                    <a:solidFill>
+                      <a:srgbClr val="F8FAFC"/>
+                    </a:solidFill>
+                  </a:tcPr>
+                </a:tc>
+                <a:tc>
+                  <a:txBody>
+                    <a:bodyPr/>
+                    <a:lstStyle/>
+                    <a:p>
+                      <a:pPr indent="0" marL="0">
+                        <a:buNone/>
+                      </a:pPr>
+                      <a:r>
+                        <a:rPr lang="en-US" sz="1050" dirty="0">
+                          <a:solidFill>
+                            <a:srgbClr val="0F172A"/>
+                          </a:solidFill>
+                          <a:latin typeface="Segoe UI" pitchFamily="34" charset="0"/>
+                          <a:ea typeface="Segoe UI" pitchFamily="34" charset="-122"/>
+                          <a:cs typeface="Segoe UI" pitchFamily="34" charset="-120"/>
+                        </a:rPr>
+                        <a:t>fee_items, periods, receipts</a:t>
+                      </a:r>
+                      <a:endParaRPr lang="en-US" sz="1050" dirty="0">
+                        <a:latin typeface="Segoe UI" charset="0"/>
+                        <a:ea typeface="Segoe UI" charset="0"/>
+                        <a:cs typeface="Segoe UI" charset="0"/>
+                      </a:endParaRPr>
+                    </a:p>
+                  </a:txBody>
+                  <a:tcPr marL="73152" marR="73152" marT="73152" marB="73152" anchor="ctr">
+                    <a:lnL w="9525" cap="flat" cmpd="sng" algn="ctr">
+                      <a:solidFill>
+                        <a:srgbClr val="E2E8F0"/>
+                      </a:solidFill>
+                      <a:prstDash val="solid"/>
+                      <a:round/>
+                      <a:headEnd type="none" w="med" len="med"/>
+                      <a:tailEnd type="none" w="med" len="med"/>
+                    </a:lnL>
+                    <a:lnR w="9525" cap="flat" cmpd="sng" algn="ctr">
+                      <a:solidFill>
+                        <a:srgbClr val="E2E8F0"/>
+                      </a:solidFill>
+                      <a:prstDash val="solid"/>
+                      <a:round/>
+                      <a:headEnd type="none" w="med" len="med"/>
+                      <a:tailEnd type="none" w="med" len="med"/>
+                    </a:lnR>
+                    <a:lnT w="9525" cap="flat" cmpd="sng" algn="ctr">
+                      <a:solidFill>
+                        <a:srgbClr val="E2E8F0"/>
+                      </a:solidFill>
+                      <a:prstDash val="solid"/>
+                      <a:round/>
+                      <a:headEnd type="none" w="med" len="med"/>
+                      <a:tailEnd type="none" w="med" len="med"/>
+                    </a:lnT>
+                    <a:lnB w="9525" cap="flat" cmpd="sng" algn="ctr">
+                      <a:solidFill>
+                        <a:srgbClr val="E2E8F0"/>
+                      </a:solidFill>
+                      <a:prstDash val="solid"/>
+                      <a:round/>
+                      <a:headEnd type="none" w="med" len="med"/>
+                      <a:tailEnd type="none" w="med" len="med"/>
+                    </a:lnB>
+                    <a:solidFill>
+                      <a:srgbClr val="F8FAFC"/>
+                    </a:solidFill>
+                  </a:tcPr>
+                </a:tc>
+              </a:tr>
+              <a:tr h="384048">
+                <a:tc>
+                  <a:txBody>
+                    <a:bodyPr/>
+                    <a:lstStyle/>
+                    <a:p>
+                      <a:pPr indent="0" marL="0">
+                        <a:buNone/>
+                      </a:pPr>
+                      <a:r>
+                        <a:rPr lang="en-US" sz="1050" dirty="0">
+                          <a:solidFill>
+                            <a:srgbClr val="0F172A"/>
+                          </a:solidFill>
+                          <a:latin typeface="Segoe UI" pitchFamily="34" charset="0"/>
+                          <a:ea typeface="Segoe UI" pitchFamily="34" charset="-122"/>
+                          <a:cs typeface="Segoe UI" pitchFamily="34" charset="-120"/>
+                        </a:rPr>
+                        <a:t>LMS-lite</a:t>
+                      </a:r>
+                      <a:endParaRPr lang="en-US" sz="1050" dirty="0">
+                        <a:latin typeface="Segoe UI" charset="0"/>
+                        <a:ea typeface="Segoe UI" charset="0"/>
+                        <a:cs typeface="Segoe UI" charset="0"/>
+                      </a:endParaRPr>
+                    </a:p>
+                  </a:txBody>
+                  <a:tcPr marL="73152" marR="73152" marT="73152" marB="73152" anchor="ctr">
+                    <a:lnL w="9525" cap="flat" cmpd="sng" algn="ctr">
+                      <a:solidFill>
+                        <a:srgbClr val="E2E8F0"/>
+                      </a:solidFill>
+                      <a:prstDash val="solid"/>
+                      <a:round/>
+                      <a:headEnd type="none" w="med" len="med"/>
+                      <a:tailEnd type="none" w="med" len="med"/>
+                    </a:lnL>
+                    <a:lnR w="9525" cap="flat" cmpd="sng" algn="ctr">
+                      <a:solidFill>
+                        <a:srgbClr val="E2E8F0"/>
+                      </a:solidFill>
+                      <a:prstDash val="solid"/>
+                      <a:round/>
+                      <a:headEnd type="none" w="med" len="med"/>
+                      <a:tailEnd type="none" w="med" len="med"/>
+                    </a:lnR>
+                    <a:lnT w="9525" cap="flat" cmpd="sng" algn="ctr">
+                      <a:solidFill>
+                        <a:srgbClr val="E2E8F0"/>
+                      </a:solidFill>
+                      <a:prstDash val="solid"/>
+                      <a:round/>
+                      <a:headEnd type="none" w="med" len="med"/>
+                      <a:tailEnd type="none" w="med" len="med"/>
+                    </a:lnT>
+                    <a:lnB w="9525" cap="flat" cmpd="sng" algn="ctr">
+                      <a:solidFill>
+                        <a:srgbClr val="E2E8F0"/>
+                      </a:solidFill>
+                      <a:prstDash val="solid"/>
+                      <a:round/>
+                      <a:headEnd type="none" w="med" len="med"/>
+                      <a:tailEnd type="none" w="med" len="med"/>
+                    </a:lnB>
+                    <a:solidFill>
+                      <a:srgbClr val="FFFFFF"/>
+                    </a:solidFill>
+                  </a:tcPr>
+                </a:tc>
+                <a:tc>
+                  <a:txBody>
+                    <a:bodyPr/>
+                    <a:lstStyle/>
+                    <a:p>
+                      <a:pPr indent="0" marL="0">
+                        <a:buNone/>
+                      </a:pPr>
+                      <a:r>
+                        <a:rPr lang="en-US" sz="1050" dirty="0">
+                          <a:solidFill>
+                            <a:srgbClr val="0F172A"/>
+                          </a:solidFill>
+                          <a:latin typeface="Segoe UI" pitchFamily="34" charset="0"/>
+                          <a:ea typeface="Segoe UI" pitchFamily="34" charset="-122"/>
+                          <a:cs typeface="Segoe UI" pitchFamily="34" charset="-120"/>
+                        </a:rPr>
+                        <a:t>lms/ + portal/student/bai-thi</a:t>
+                      </a:r>
+                      <a:endParaRPr lang="en-US" sz="1050" dirty="0">
+                        <a:latin typeface="Segoe UI" charset="0"/>
+                        <a:ea typeface="Segoe UI" charset="0"/>
+                        <a:cs typeface="Segoe UI" charset="0"/>
+                      </a:endParaRPr>
+                    </a:p>
+                  </a:txBody>
+                  <a:tcPr marL="73152" marR="73152" marT="73152" marB="73152" anchor="ctr">
+                    <a:lnL w="9525" cap="flat" cmpd="sng" algn="ctr">
+                      <a:solidFill>
+                        <a:srgbClr val="E2E8F0"/>
+                      </a:solidFill>
+                      <a:prstDash val="solid"/>
+                      <a:round/>
+                      <a:headEnd type="none" w="med" len="med"/>
+                      <a:tailEnd type="none" w="med" len="med"/>
+                    </a:lnL>
+                    <a:lnR w="9525" cap="flat" cmpd="sng" algn="ctr">
+                      <a:solidFill>
+                        <a:srgbClr val="E2E8F0"/>
+                      </a:solidFill>
+                      <a:prstDash val="solid"/>
+                      <a:round/>
+                      <a:headEnd type="none" w="med" len="med"/>
+                      <a:tailEnd type="none" w="med" len="med"/>
+                    </a:lnR>
+                    <a:lnT w="9525" cap="flat" cmpd="sng" algn="ctr">
+                      <a:solidFill>
+                        <a:srgbClr val="E2E8F0"/>
+                      </a:solidFill>
+                      <a:prstDash val="solid"/>
+                      <a:round/>
+                      <a:headEnd type="none" w="med" len="med"/>
+                      <a:tailEnd type="none" w="med" len="med"/>
+                    </a:lnT>
+                    <a:lnB w="9525" cap="flat" cmpd="sng" algn="ctr">
+                      <a:solidFill>
+                        <a:srgbClr val="E2E8F0"/>
+                      </a:solidFill>
+                      <a:prstDash val="solid"/>
+                      <a:round/>
+                      <a:headEnd type="none" w="med" len="med"/>
+                      <a:tailEnd type="none" w="med" len="med"/>
+                    </a:lnB>
+                    <a:solidFill>
+                      <a:srgbClr val="FFFFFF"/>
+                    </a:solidFill>
+                  </a:tcPr>
+                </a:tc>
+                <a:tc>
+                  <a:txBody>
+                    <a:bodyPr/>
+                    <a:lstStyle/>
+                    <a:p>
+                      <a:pPr indent="0" marL="0">
+                        <a:buNone/>
+                      </a:pPr>
+                      <a:r>
+                        <a:rPr lang="en-US" sz="1050" dirty="0">
+                          <a:solidFill>
+                            <a:srgbClr val="0F172A"/>
+                          </a:solidFill>
+                          <a:latin typeface="Segoe UI" pitchFamily="34" charset="0"/>
+                          <a:ea typeface="Segoe UI" pitchFamily="34" charset="-122"/>
+                          <a:cs typeface="Segoe UI" pitchFamily="34" charset="-120"/>
+                        </a:rPr>
+                        <a:t>exam_sessions, submissions</a:t>
+                      </a:r>
+                      <a:endParaRPr lang="en-US" sz="1050" dirty="0">
+                        <a:latin typeface="Segoe UI" charset="0"/>
+                        <a:ea typeface="Segoe UI" charset="0"/>
+                        <a:cs typeface="Segoe UI" charset="0"/>
+                      </a:endParaRPr>
+                    </a:p>
+                  </a:txBody>
+                  <a:tcPr marL="73152" marR="73152" marT="73152" marB="73152" anchor="ctr">
+                    <a:lnL w="9525" cap="flat" cmpd="sng" algn="ctr">
+                      <a:solidFill>
+                        <a:srgbClr val="E2E8F0"/>
+                      </a:solidFill>
+                      <a:prstDash val="solid"/>
+                      <a:round/>
+                      <a:headEnd type="none" w="med" len="med"/>
+                      <a:tailEnd type="none" w="med" len="med"/>
+                    </a:lnL>
+                    <a:lnR w="9525" cap="flat" cmpd="sng" algn="ctr">
+                      <a:solidFill>
+                        <a:srgbClr val="E2E8F0"/>
+                      </a:solidFill>
+                      <a:prstDash val="solid"/>
+                      <a:round/>
+                      <a:headEnd type="none" w="med" len="med"/>
+                      <a:tailEnd type="none" w="med" len="med"/>
+                    </a:lnR>
+                    <a:lnT w="9525" cap="flat" cmpd="sng" algn="ctr">
+                      <a:solidFill>
+                        <a:srgbClr val="E2E8F0"/>
+                      </a:solidFill>
+                      <a:prstDash val="solid"/>
+                      <a:round/>
+                      <a:headEnd type="none" w="med" len="med"/>
+                      <a:tailEnd type="none" w="med" len="med"/>
+                    </a:lnT>
+                    <a:lnB w="9525" cap="flat" cmpd="sng" algn="ctr">
+                      <a:solidFill>
+                        <a:srgbClr val="E2E8F0"/>
+                      </a:solidFill>
+                      <a:prstDash val="solid"/>
+                      <a:round/>
+                      <a:headEnd type="none" w="med" len="med"/>
+                      <a:tailEnd type="none" w="med" len="med"/>
+                    </a:lnB>
+                    <a:solidFill>
+                      <a:srgbClr val="FFFFFF"/>
+                    </a:solidFill>
+                  </a:tcPr>
+                </a:tc>
+              </a:tr>
+              <a:tr h="384048">
+                <a:tc>
+                  <a:txBody>
+                    <a:bodyPr/>
+                    <a:lstStyle/>
+                    <a:p>
+                      <a:pPr indent="0" marL="0">
+                        <a:buNone/>
+                      </a:pPr>
+                      <a:r>
+                        <a:rPr lang="en-US" sz="1050" dirty="0">
+                          <a:solidFill>
+                            <a:srgbClr val="0F172A"/>
+                          </a:solidFill>
+                          <a:latin typeface="Segoe UI" pitchFamily="34" charset="0"/>
+                          <a:ea typeface="Segoe UI" pitchFamily="34" charset="-122"/>
+                          <a:cs typeface="Segoe UI" pitchFamily="34" charset="-120"/>
+                        </a:rPr>
+                        <a:t>Thư viện</a:t>
+                      </a:r>
+                      <a:endParaRPr lang="en-US" sz="1050" dirty="0">
+                        <a:latin typeface="Segoe UI" charset="0"/>
+                        <a:ea typeface="Segoe UI" charset="0"/>
+                        <a:cs typeface="Segoe UI" charset="0"/>
+                      </a:endParaRPr>
+                    </a:p>
+                  </a:txBody>
+                  <a:tcPr marL="73152" marR="73152" marT="73152" marB="73152" anchor="ctr">
+                    <a:lnL w="9525" cap="flat" cmpd="sng" algn="ctr">
+                      <a:solidFill>
+                        <a:srgbClr val="E2E8F0"/>
+                      </a:solidFill>
+                      <a:prstDash val="solid"/>
+                      <a:round/>
+                      <a:headEnd type="none" w="med" len="med"/>
+                      <a:tailEnd type="none" w="med" len="med"/>
+                    </a:lnL>
+                    <a:lnR w="9525" cap="flat" cmpd="sng" algn="ctr">
+                      <a:solidFill>
+                        <a:srgbClr val="E2E8F0"/>
+                      </a:solidFill>
+                      <a:prstDash val="solid"/>
+                      <a:round/>
+                      <a:headEnd type="none" w="med" len="med"/>
+                      <a:tailEnd type="none" w="med" len="med"/>
+                    </a:lnR>
+                    <a:lnT w="9525" cap="flat" cmpd="sng" algn="ctr">
+                      <a:solidFill>
+                        <a:srgbClr val="E2E8F0"/>
+                      </a:solidFill>
+                      <a:prstDash val="solid"/>
+                      <a:round/>
+                      <a:headEnd type="none" w="med" len="med"/>
+                      <a:tailEnd type="none" w="med" len="med"/>
+                    </a:lnT>
+                    <a:lnB w="9525" cap="flat" cmpd="sng" algn="ctr">
+                      <a:solidFill>
+                        <a:srgbClr val="E2E8F0"/>
+                      </a:solidFill>
+                      <a:prstDash val="solid"/>
+                      <a:round/>
+                      <a:headEnd type="none" w="med" len="med"/>
+                      <a:tailEnd type="none" w="med" len="med"/>
+                    </a:lnB>
+                    <a:solidFill>
+                      <a:srgbClr val="F8FAFC"/>
+                    </a:solidFill>
+                  </a:tcPr>
+                </a:tc>
+                <a:tc>
+                  <a:txBody>
+                    <a:bodyPr/>
+                    <a:lstStyle/>
+                    <a:p>
+                      <a:pPr indent="0" marL="0">
+                        <a:buNone/>
+                      </a:pPr>
+                      <a:r>
+                        <a:rPr lang="en-US" sz="1050" dirty="0">
+                          <a:solidFill>
+                            <a:srgbClr val="0F172A"/>
+                          </a:solidFill>
+                          <a:latin typeface="Segoe UI" pitchFamily="34" charset="0"/>
+                          <a:ea typeface="Segoe UI" pitchFamily="34" charset="-122"/>
+                          <a:cs typeface="Segoe UI" pitchFamily="34" charset="-120"/>
+                        </a:rPr>
+                        <a:t>library/</a:t>
+                      </a:r>
+                      <a:endParaRPr lang="en-US" sz="1050" dirty="0">
+                        <a:latin typeface="Segoe UI" charset="0"/>
+                        <a:ea typeface="Segoe UI" charset="0"/>
+                        <a:cs typeface="Segoe UI" charset="0"/>
+                      </a:endParaRPr>
+                    </a:p>
+                  </a:txBody>
+                  <a:tcPr marL="73152" marR="73152" marT="73152" marB="73152" anchor="ctr">
+                    <a:lnL w="9525" cap="flat" cmpd="sng" algn="ctr">
+                      <a:solidFill>
+                        <a:srgbClr val="E2E8F0"/>
+                      </a:solidFill>
+                      <a:prstDash val="solid"/>
+                      <a:round/>
+                      <a:headEnd type="none" w="med" len="med"/>
+                      <a:tailEnd type="none" w="med" len="med"/>
+                    </a:lnL>
+                    <a:lnR w="9525" cap="flat" cmpd="sng" algn="ctr">
+                      <a:solidFill>
+                        <a:srgbClr val="E2E8F0"/>
+                      </a:solidFill>
+                      <a:prstDash val="solid"/>
+                      <a:round/>
+                      <a:headEnd type="none" w="med" len="med"/>
+                      <a:tailEnd type="none" w="med" len="med"/>
+                    </a:lnR>
+                    <a:lnT w="9525" cap="flat" cmpd="sng" algn="ctr">
+                      <a:solidFill>
+                        <a:srgbClr val="E2E8F0"/>
+                      </a:solidFill>
+                      <a:prstDash val="solid"/>
+                      <a:round/>
+                      <a:headEnd type="none" w="med" len="med"/>
+                      <a:tailEnd type="none" w="med" len="med"/>
+                    </a:lnT>
+                    <a:lnB w="9525" cap="flat" cmpd="sng" algn="ctr">
+                      <a:solidFill>
+                        <a:srgbClr val="E2E8F0"/>
+                      </a:solidFill>
+                      <a:prstDash val="solid"/>
+                      <a:round/>
+                      <a:headEnd type="none" w="med" len="med"/>
+                      <a:tailEnd type="none" w="med" len="med"/>
+                    </a:lnB>
+                    <a:solidFill>
+                      <a:srgbClr val="F8FAFC"/>
+                    </a:solidFill>
+                  </a:tcPr>
+                </a:tc>
+                <a:tc>
+                  <a:txBody>
+                    <a:bodyPr/>
+                    <a:lstStyle/>
+                    <a:p>
+                      <a:pPr indent="0" marL="0">
+                        <a:buNone/>
+                      </a:pPr>
+                      <a:r>
+                        <a:rPr lang="en-US" sz="1050" dirty="0">
+                          <a:solidFill>
+                            <a:srgbClr val="0F172A"/>
+                          </a:solidFill>
+                          <a:latin typeface="Segoe UI" pitchFamily="34" charset="0"/>
+                          <a:ea typeface="Segoe UI" pitchFamily="34" charset="-122"/>
+                          <a:cs typeface="Segoe UI" pitchFamily="34" charset="-120"/>
+                        </a:rPr>
+                        <a:t>catalog, dang_ky_ca_biet, loans</a:t>
+                      </a:r>
+                      <a:endParaRPr lang="en-US" sz="1050" dirty="0">
+                        <a:latin typeface="Segoe UI" charset="0"/>
+                        <a:ea typeface="Segoe UI" charset="0"/>
+                        <a:cs typeface="Segoe UI" charset="0"/>
+                      </a:endParaRPr>
+                    </a:p>
+                  </a:txBody>
+                  <a:tcPr marL="73152" marR="73152" marT="73152" marB="73152" anchor="ctr">
+                    <a:lnL w="9525" cap="flat" cmpd="sng" algn="ctr">
+                      <a:solidFill>
+                        <a:srgbClr val="E2E8F0"/>
+                      </a:solidFill>
+                      <a:prstDash val="solid"/>
+                      <a:round/>
+                      <a:headEnd type="none" w="med" len="med"/>
+                      <a:tailEnd type="none" w="med" len="med"/>
+                    </a:lnL>
+                    <a:lnR w="9525" cap="flat" cmpd="sng" algn="ctr">
+                      <a:solidFill>
+                        <a:srgbClr val="E2E8F0"/>
+                      </a:solidFill>
+                      <a:prstDash val="solid"/>
+                      <a:round/>
+                      <a:headEnd type="none" w="med" len="med"/>
+                      <a:tailEnd type="none" w="med" len="med"/>
+                    </a:lnR>
+                    <a:lnT w="9525" cap="flat" cmpd="sng" algn="ctr">
+                      <a:solidFill>
+                        <a:srgbClr val="E2E8F0"/>
+                      </a:solidFill>
+                      <a:prstDash val="solid"/>
+                      <a:round/>
+                      <a:headEnd type="none" w="med" len="med"/>
+                      <a:tailEnd type="none" w="med" len="med"/>
+                    </a:lnT>
+                    <a:lnB w="9525" cap="flat" cmpd="sng" algn="ctr">
+                      <a:solidFill>
+                        <a:srgbClr val="E2E8F0"/>
+                      </a:solidFill>
+                      <a:prstDash val="solid"/>
+                      <a:round/>
+                      <a:headEnd type="none" w="med" len="med"/>
+                      <a:tailEnd type="none" w="med" len="med"/>
+                    </a:lnB>
+                    <a:solidFill>
+                      <a:srgbClr val="F8FAFC"/>
+                    </a:solidFill>
+                  </a:tcPr>
+                </a:tc>
+              </a:tr>
+              <a:tr h="384048">
+                <a:tc>
+                  <a:txBody>
+                    <a:bodyPr/>
+                    <a:lstStyle/>
+                    <a:p>
+                      <a:pPr indent="0" marL="0">
+                        <a:buNone/>
+                      </a:pPr>
+                      <a:r>
+                        <a:rPr lang="en-US" sz="1050" dirty="0">
+                          <a:solidFill>
+                            <a:srgbClr val="0F172A"/>
+                          </a:solidFill>
+                          <a:latin typeface="Segoe UI" pitchFamily="34" charset="0"/>
+                          <a:ea typeface="Segoe UI" pitchFamily="34" charset="-122"/>
+                          <a:cs typeface="Segoe UI" pitchFamily="34" charset="-120"/>
+                        </a:rPr>
+                        <a:t>Biến động HS</a:t>
+                      </a:r>
+                      <a:endParaRPr lang="en-US" sz="1050" dirty="0">
+                        <a:latin typeface="Segoe UI" charset="0"/>
+                        <a:ea typeface="Segoe UI" charset="0"/>
+                        <a:cs typeface="Segoe UI" charset="0"/>
+                      </a:endParaRPr>
+                    </a:p>
+                  </a:txBody>
+                  <a:tcPr marL="73152" marR="73152" marT="73152" marB="73152" anchor="ctr">
+                    <a:lnL w="9525" cap="flat" cmpd="sng" algn="ctr">
+                      <a:solidFill>
+                        <a:srgbClr val="E2E8F0"/>
+                      </a:solidFill>
+                      <a:prstDash val="solid"/>
+                      <a:round/>
+                      <a:headEnd type="none" w="med" len="med"/>
+                      <a:tailEnd type="none" w="med" len="med"/>
+                    </a:lnL>
+                    <a:lnR w="9525" cap="flat" cmpd="sng" algn="ctr">
+                      <a:solidFill>
+                        <a:srgbClr val="E2E8F0"/>
+                      </a:solidFill>
+                      <a:prstDash val="solid"/>
+                      <a:round/>
+                      <a:headEnd type="none" w="med" len="med"/>
+                      <a:tailEnd type="none" w="med" len="med"/>
+                    </a:lnR>
+                    <a:lnT w="9525" cap="flat" cmpd="sng" algn="ctr">
+                      <a:solidFill>
+                        <a:srgbClr val="E2E8F0"/>
+                      </a:solidFill>
+                      <a:prstDash val="solid"/>
+                      <a:round/>
+                      <a:headEnd type="none" w="med" len="med"/>
+                      <a:tailEnd type="none" w="med" len="med"/>
+                    </a:lnT>
+                    <a:lnB w="9525" cap="flat" cmpd="sng" algn="ctr">
+                      <a:solidFill>
+                        <a:srgbClr val="E2E8F0"/>
+                      </a:solidFill>
+                      <a:prstDash val="solid"/>
+                      <a:round/>
+                      <a:headEnd type="none" w="med" len="med"/>
+                      <a:tailEnd type="none" w="med" len="med"/>
+                    </a:lnB>
+                    <a:solidFill>
+                      <a:srgbClr val="FFFFFF"/>
+                    </a:solidFill>
+                  </a:tcPr>
+                </a:tc>
+                <a:tc>
+                  <a:txBody>
+                    <a:bodyPr/>
+                    <a:lstStyle/>
+                    <a:p>
+                      <a:pPr indent="0" marL="0">
+                        <a:buNone/>
+                      </a:pPr>
+                      <a:r>
+                        <a:rPr lang="en-US" sz="1050" dirty="0">
+                          <a:solidFill>
+                            <a:srgbClr val="0F172A"/>
+                          </a:solidFill>
+                          <a:latin typeface="Segoe UI" pitchFamily="34" charset="0"/>
+                          <a:ea typeface="Segoe UI" pitchFamily="34" charset="-122"/>
+                          <a:cs typeface="Segoe UI" pitchFamily="34" charset="-120"/>
+                        </a:rPr>
+                        <a:t>movements/</a:t>
+                      </a:r>
+                      <a:endParaRPr lang="en-US" sz="1050" dirty="0">
+                        <a:latin typeface="Segoe UI" charset="0"/>
+                        <a:ea typeface="Segoe UI" charset="0"/>
+                        <a:cs typeface="Segoe UI" charset="0"/>
+                      </a:endParaRPr>
+                    </a:p>
+                  </a:txBody>
+                  <a:tcPr marL="73152" marR="73152" marT="73152" marB="73152" anchor="ctr">
+                    <a:lnL w="9525" cap="flat" cmpd="sng" algn="ctr">
+                      <a:solidFill>
+                        <a:srgbClr val="E2E8F0"/>
+                      </a:solidFill>
+                      <a:prstDash val="solid"/>
+                      <a:round/>
+                      <a:headEnd type="none" w="med" len="med"/>
+                      <a:tailEnd type="none" w="med" len="med"/>
+                    </a:lnL>
+                    <a:lnR w="9525" cap="flat" cmpd="sng" algn="ctr">
+                      <a:solidFill>
+                        <a:srgbClr val="E2E8F0"/>
+                      </a:solidFill>
+                      <a:prstDash val="solid"/>
+                      <a:round/>
+                      <a:headEnd type="none" w="med" len="med"/>
+                      <a:tailEnd type="none" w="med" len="med"/>
+                    </a:lnR>
+                    <a:lnT w="9525" cap="flat" cmpd="sng" algn="ctr">
+                      <a:solidFill>
+                        <a:srgbClr val="E2E8F0"/>
+                      </a:solidFill>
+                      <a:prstDash val="solid"/>
+                      <a:round/>
+                      <a:headEnd type="none" w="med" len="med"/>
+                      <a:tailEnd type="none" w="med" len="med"/>
+                    </a:lnT>
+                    <a:lnB w="9525" cap="flat" cmpd="sng" algn="ctr">
+                      <a:solidFill>
+                        <a:srgbClr val="E2E8F0"/>
+                      </a:solidFill>
+                      <a:prstDash val="solid"/>
+                      <a:round/>
+                      <a:headEnd type="none" w="med" len="med"/>
+                      <a:tailEnd type="none" w="med" len="med"/>
+                    </a:lnB>
+                    <a:solidFill>
+                      <a:srgbClr val="FFFFFF"/>
+                    </a:solidFill>
+                  </a:tcPr>
+                </a:tc>
+                <a:tc>
+                  <a:txBody>
+                    <a:bodyPr/>
+                    <a:lstStyle/>
+                    <a:p>
+                      <a:pPr indent="0" marL="0">
+                        <a:buNone/>
+                      </a:pPr>
+                      <a:r>
+                        <a:rPr lang="en-US" sz="1050" dirty="0">
+                          <a:solidFill>
+                            <a:srgbClr val="0F172A"/>
+                          </a:solidFill>
+                          <a:latin typeface="Segoe UI" pitchFamily="34" charset="0"/>
+                          <a:ea typeface="Segoe UI" pitchFamily="34" charset="-122"/>
+                          <a:cs typeface="Segoe UI" pitchFamily="34" charset="-120"/>
+                        </a:rPr>
+                        <a:t>movement_requests (RPC-only writes)</a:t>
+                      </a:r>
+                      <a:endParaRPr lang="en-US" sz="1050" dirty="0">
+                        <a:latin typeface="Segoe UI" charset="0"/>
+                        <a:ea typeface="Segoe UI" charset="0"/>
+                        <a:cs typeface="Segoe UI" charset="0"/>
+                      </a:endParaRPr>
+                    </a:p>
+                  </a:txBody>
+                  <a:tcPr marL="73152" marR="73152" marT="73152" marB="73152" anchor="ctr">
+                    <a:lnL w="9525" cap="flat" cmpd="sng" algn="ctr">
+                      <a:solidFill>
+                        <a:srgbClr val="E2E8F0"/>
+                      </a:solidFill>
+                      <a:prstDash val="solid"/>
+                      <a:round/>
+                      <a:headEnd type="none" w="med" len="med"/>
+                      <a:tailEnd type="none" w="med" len="med"/>
+                    </a:lnL>
+                    <a:lnR w="9525" cap="flat" cmpd="sng" algn="ctr">
+                      <a:solidFill>
+                        <a:srgbClr val="E2E8F0"/>
+                      </a:solidFill>
+                      <a:prstDash val="solid"/>
+                      <a:round/>
+                      <a:headEnd type="none" w="med" len="med"/>
+                      <a:tailEnd type="none" w="med" len="med"/>
+                    </a:lnR>
+                    <a:lnT w="9525" cap="flat" cmpd="sng" algn="ctr">
+                      <a:solidFill>
+                        <a:srgbClr val="E2E8F0"/>
+                      </a:solidFill>
+                      <a:prstDash val="solid"/>
+                      <a:round/>
+                      <a:headEnd type="none" w="med" len="med"/>
+                      <a:tailEnd type="none" w="med" len="med"/>
+                    </a:lnT>
+                    <a:lnB w="9525" cap="flat" cmpd="sng" algn="ctr">
+                      <a:solidFill>
+                        <a:srgbClr val="E2E8F0"/>
+                      </a:solidFill>
+                      <a:prstDash val="solid"/>
+                      <a:round/>
+                      <a:headEnd type="none" w="med" len="med"/>
+                      <a:tailEnd type="none" w="med" len="med"/>
+                    </a:lnB>
+                    <a:solidFill>
+                      <a:srgbClr val="FFFFFF"/>
+                    </a:solidFill>
+                  </a:tcPr>
+                </a:tc>
+              </a:tr>
+              <a:tr h="384048">
                 <a:tc>
                   <a:txBody>
                     <a:bodyPr/>
@@ -24677,7 +26584,7 @@
                       <a:tailEnd type="none" w="med" len="med"/>
                     </a:lnB>
                     <a:solidFill>
-                      <a:srgbClr val="FFFFFF"/>
+                      <a:srgbClr val="F8FAFC"/>
                     </a:solidFill>
                   </a:tcPr>
                 </a:tc>
@@ -24745,7 +26652,7 @@
                       <a:tailEnd type="none" w="med" len="med"/>
                     </a:lnB>
                     <a:solidFill>
-                      <a:srgbClr val="FFFFFF"/>
+                      <a:srgbClr val="F8FAFC"/>
                     </a:solidFill>
                   </a:tcPr>
                 </a:tc>
@@ -24766,7 +26673,7 @@
                           <a:ea typeface="Segoe UI" pitchFamily="34" charset="-122"/>
                           <a:cs typeface="Segoe UI" pitchFamily="34" charset="-120"/>
                         </a:rPr>
-                        <a:t>views aggregate</a:t>
+                        <a:t>views aggregate, school_features</a:t>
                       </a:r>
                       <a:endParaRPr lang="en-US" sz="1050" dirty="0">
                         <a:latin typeface="Segoe UI" charset="0"/>
@@ -24813,12 +26720,12 @@
                       <a:tailEnd type="none" w="med" len="med"/>
                     </a:lnB>
                     <a:solidFill>
-                      <a:srgbClr val="FFFFFF"/>
+                      <a:srgbClr val="F8FAFC"/>
                     </a:solidFill>
                   </a:tcPr>
                 </a:tc>
               </a:tr>
-              <a:tr h="420624">
+              <a:tr h="384048">
                 <a:tc>
                   <a:txBody>
                     <a:bodyPr/>
@@ -24883,7 +26790,7 @@
                       <a:tailEnd type="none" w="med" len="med"/>
                     </a:lnB>
                     <a:solidFill>
-                      <a:srgbClr val="F8FAFC"/>
+                      <a:srgbClr val="FFFFFF"/>
                     </a:solidFill>
                   </a:tcPr>
                 </a:tc>
@@ -24951,7 +26858,7 @@
                       <a:tailEnd type="none" w="med" len="med"/>
                     </a:lnB>
                     <a:solidFill>
-                      <a:srgbClr val="F8FAFC"/>
+                      <a:srgbClr val="FFFFFF"/>
                     </a:solidFill>
                   </a:tcPr>
                 </a:tc>
@@ -25019,7 +26926,7 @@
                       <a:tailEnd type="none" w="med" len="med"/>
                     </a:lnB>
                     <a:solidFill>
-                      <a:srgbClr val="F8FAFC"/>
+                      <a:srgbClr val="FFFFFF"/>
                     </a:solidFill>
                   </a:tcPr>
                 </a:tc>
@@ -25061,7 +26968,7 @@
                 <a:ea typeface="Segoe UI" pitchFamily="34" charset="-122"/>
                 <a:cs typeface="Segoe UI" pitchFamily="34" charset="-120"/>
               </a:rPr>
-              <a:t>Module = route group + bảng riêng + policy riêng. Ranh giới module được enforce bởi RLS, không phải network boundary.</a:t>
+              <a:t>15 bounded contexts. Module = route group + bảng riêng + policy riêng + module flag - tắt flag là tắt cả 4 lớp (nav/route/RPC/RLS), không chỉ ẩn menu.</a:t>
             </a:r>
             <a:endParaRPr lang="en-US" sz="1050" dirty="0"/>
           </a:p>
@@ -26025,7 +27932,7 @@
                           <a:ea typeface="Segoe UI" pitchFamily="34" charset="-122"/>
                           <a:cs typeface="Segoe UI" pitchFamily="34" charset="-120"/>
                         </a:rPr>
-                        <a:t>Function call trong process - join trực tiếp ~30 bảng</a:t>
+                        <a:t>Function call trong process - join trực tiếp 86 bảng</a:t>
                       </a:r>
                       <a:endParaRPr lang="en-US" sz="1050" dirty="0">
                         <a:latin typeface="Segoe UI" charset="0"/>
@@ -27241,7 +29148,7 @@
                 <a:ea typeface="Segoe UI" pitchFamily="34" charset="-122"/>
                 <a:cs typeface="Segoe UI" pitchFamily="34" charset="-120"/>
               </a:rPr>
-              <a:t>Microservices ở quy mô này = distributed monolith tệ hơn monolith tốt. Điểm tách hợp lý duy nhất hiện có: AI jobs - đã tách thành async pattern (bảng ai_jobs + callback) mà không cần service riêng.</a:t>
+              <a:t>Microservices ở quy mô này = distributed monolith tệ hơn monolith tốt. Sau wave CR-060..067 (5 module mới) kết luận càng đúng: tuyển sinh -&gt; nhập học -&gt; khoản thu -&gt; học bạ là 1 chuỗi transaction - chống tách tuyệt đối. Điểm tách hợp lý duy nhất: AI jobs - đã tách thành async pattern (ai_jobs + callback).</a:t>
             </a:r>
             <a:endParaRPr lang="en-US" sz="1300" dirty="0"/>
           </a:p>
